--- a/assets/ppt-templates/Template_CDR_analysis.pptx
+++ b/assets/ppt-templates/Template_CDR_analysis.pptx
@@ -6,9 +6,8 @@
     <p:sldMasterId id="2147483707" r:id="rId21"/>
   </p:sldMasterIdLst>
   <p:notesMasterIdLst>
-    <p:notesMasterId r:id="rId44"/>
+    <p:notesMasterId r:id="rId22"/>
   </p:notesMasterIdLst>
-  <p:sldIdLst/>
   <p:sldSz cx="12192000" cy="6858000"/>
   <p:notesSz cx="6858000" cy="9144000"/>
   <p:defaultTextStyle>
@@ -196,7 +195,7 @@
           <a:p>
             <a:fld id="{56B6DF60-6159-4558-8D07-00E18A77A544}" type="datetimeFigureOut">
               <a:rPr lang="en-US" smtClean="0"/>
-              <a:t>8/27/2026</a:t>
+              <a:t>9/15/2026</a:t>
             </a:fld>
             <a:endParaRPr lang="en-US"/>
           </a:p>
@@ -466,6 +465,36 @@
 <file path=ppt/slideLayouts/slideLayout1.xml><?xml version="1.0" encoding="utf-8"?>
 <p:sldLayout xmlns:a="http://schemas.openxmlformats.org/drawingml/2006/main" xmlns:r="http://schemas.openxmlformats.org/officeDocument/2006/relationships" xmlns:p="http://schemas.openxmlformats.org/presentationml/2006/main" preserve="1" userDrawn="1">
   <p:cSld name="Title Page">
+    <p:bg>
+      <p:bgPr>
+        <a:gradFill flip="none" rotWithShape="1">
+          <a:gsLst>
+            <a:gs pos="79000">
+              <a:srgbClr val="9579BC">
+                <a:lumMod val="79000"/>
+              </a:srgbClr>
+            </a:gs>
+            <a:gs pos="35000">
+              <a:srgbClr val="A37ACE">
+                <a:lumMod val="52000"/>
+              </a:srgbClr>
+            </a:gs>
+            <a:gs pos="0">
+              <a:srgbClr val="7030A0"/>
+            </a:gs>
+            <a:gs pos="100000">
+              <a:schemeClr val="accent3">
+                <a:lumMod val="40000"/>
+                <a:lumOff val="60000"/>
+              </a:schemeClr>
+            </a:gs>
+          </a:gsLst>
+          <a:lin ang="2700000" scaled="1"/>
+          <a:tileRect/>
+        </a:gradFill>
+        <a:effectLst/>
+      </p:bgPr>
+    </p:bg>
     <p:spTree>
       <p:nvGrpSpPr>
         <p:cNvPr id="1" name=""/>
@@ -493,7 +522,7 @@
         <p:spPr>
           <a:xfrm>
             <a:off x="479425" y="476250"/>
-            <a:ext cx="8353426" cy="3457576"/>
+            <a:ext cx="9866842" cy="3457576"/>
           </a:xfrm>
         </p:spPr>
         <p:txBody>
@@ -505,7 +534,7 @@
               </a:lnSpc>
               <a:defRPr sz="8000" b="0" kern="1400" spc="-160" baseline="0">
                 <a:solidFill>
-                  <a:schemeClr val="tx1"/>
+                  <a:schemeClr val="bg1"/>
                 </a:solidFill>
                 <a:latin typeface="+mj-lt"/>
               </a:defRPr>
@@ -513,7 +542,7 @@
           </a:lstStyle>
           <a:p>
             <a:r>
-              <a:rPr lang="en-US"/>
+              <a:rPr lang="en-US" dirty="0"/>
               <a:t>Title/cover page,   Ericsson Hilda Light 80pt, max 3-lines</a:t>
             </a:r>
           </a:p>
@@ -552,7 +581,7 @@
               <a:buNone/>
               <a:defRPr sz="2000" baseline="0">
                 <a:solidFill>
-                  <a:schemeClr val="tx1"/>
+                  <a:srgbClr val="FFFF00"/>
                 </a:solidFill>
                 <a:latin typeface="+mn-lt"/>
               </a:defRPr>
@@ -560,14 +589,14 @@
           </a:lstStyle>
           <a:p>
             <a:r>
-              <a:rPr lang="en-US"/>
+              <a:rPr lang="en-US" dirty="0"/>
               <a:t>Description/subtitle/speaker…</a:t>
             </a:r>
             <a:br>
-              <a:rPr lang="en-US"/>
+              <a:rPr lang="en-US" dirty="0"/>
             </a:br>
             <a:r>
-              <a:rPr lang="en-US"/>
+              <a:rPr lang="en-US" dirty="0"/>
               <a:t>Ericsson Hilda Black 20pt</a:t>
             </a:r>
           </a:p>
@@ -749,6 +778,43 @@
           </a:p>
         </p:txBody>
       </p:sp>
+      <p:cxnSp>
+        <p:nvCxnSpPr>
+          <p:cNvPr id="4" name="Straight Connector 3">
+            <a:extLst>
+              <a:ext uri="{FF2B5EF4-FFF2-40B4-BE49-F238E27FC236}">
+                <a16:creationId xmlns:a16="http://schemas.microsoft.com/office/drawing/2014/main" id="{A2137CF1-DACA-3883-36F0-4953E52B1A2A}"/>
+              </a:ext>
+            </a:extLst>
+          </p:cNvPr>
+          <p:cNvCxnSpPr>
+            <a:cxnSpLocks/>
+          </p:cNvCxnSpPr>
+          <p:nvPr userDrawn="1"/>
+        </p:nvCxnSpPr>
+        <p:spPr bwMode="auto">
+          <a:xfrm>
+            <a:off x="479425" y="6345767"/>
+            <a:ext cx="2259542" cy="0"/>
+          </a:xfrm>
+          <a:prstGeom prst="line">
+            <a:avLst/>
+          </a:prstGeom>
+          <a:solidFill>
+            <a:schemeClr val="accent1"/>
+          </a:solidFill>
+          <a:ln w="38100" cap="rnd" cmpd="sng" algn="ctr">
+            <a:solidFill>
+              <a:srgbClr val="EFD4D3"/>
+            </a:solidFill>
+            <a:prstDash val="solid"/>
+            <a:round/>
+            <a:headEnd type="none" w="med" len="med"/>
+            <a:tailEnd type="none"/>
+          </a:ln>
+          <a:effectLst/>
+        </p:spPr>
+      </p:cxnSp>
     </p:spTree>
     <p:extLst>
       <p:ext uri="{BB962C8B-B14F-4D97-AF65-F5344CB8AC3E}">
@@ -793,7 +859,7 @@
         <p:spPr bwMode="auto">
           <a:xfrm>
             <a:off x="479425" y="476250"/>
-            <a:ext cx="10521950" cy="1081088"/>
+            <a:ext cx="10006542" cy="1081088"/>
           </a:xfrm>
           <a:prstGeom prst="rect">
             <a:avLst/>
@@ -1233,6 +1299,35 @@
 <file path=ppt/slideLayouts/slideLayout11.xml><?xml version="1.0" encoding="utf-8"?>
 <p:sldLayout xmlns:a="http://schemas.openxmlformats.org/drawingml/2006/main" xmlns:r="http://schemas.openxmlformats.org/officeDocument/2006/relationships" xmlns:p="http://schemas.openxmlformats.org/presentationml/2006/main" type="blank" preserve="1">
   <p:cSld name="Blank">
+    <p:bg>
+      <p:bgPr>
+        <a:gradFill>
+          <a:gsLst>
+            <a:gs pos="79000">
+              <a:srgbClr val="9579BC">
+                <a:lumMod val="79000"/>
+              </a:srgbClr>
+            </a:gs>
+            <a:gs pos="35000">
+              <a:srgbClr val="A37ACE">
+                <a:lumMod val="52000"/>
+              </a:srgbClr>
+            </a:gs>
+            <a:gs pos="0">
+              <a:srgbClr val="7030A0"/>
+            </a:gs>
+            <a:gs pos="100000">
+              <a:schemeClr val="accent3">
+                <a:lumMod val="40000"/>
+                <a:lumOff val="60000"/>
+              </a:schemeClr>
+            </a:gs>
+          </a:gsLst>
+          <a:lin ang="2700000" scaled="1"/>
+        </a:gradFill>
+        <a:effectLst/>
+      </p:bgPr>
+    </p:bg>
     <p:spTree>
       <p:nvGrpSpPr>
         <p:cNvPr id="1" name=""/>
@@ -1475,6 +1570,35 @@
 <file path=ppt/slideLayouts/slideLayout13.xml><?xml version="1.0" encoding="utf-8"?>
 <p:sldLayout xmlns:a="http://schemas.openxmlformats.org/drawingml/2006/main" xmlns:r="http://schemas.openxmlformats.org/officeDocument/2006/relationships" xmlns:p="http://schemas.openxmlformats.org/presentationml/2006/main" preserve="1" userDrawn="1">
   <p:cSld name="Title Only">
+    <p:bg>
+      <p:bgPr>
+        <a:gradFill>
+          <a:gsLst>
+            <a:gs pos="79000">
+              <a:srgbClr val="9579BC">
+                <a:lumMod val="79000"/>
+              </a:srgbClr>
+            </a:gs>
+            <a:gs pos="35000">
+              <a:srgbClr val="A37ACE">
+                <a:lumMod val="52000"/>
+              </a:srgbClr>
+            </a:gs>
+            <a:gs pos="0">
+              <a:srgbClr val="7030A0"/>
+            </a:gs>
+            <a:gs pos="100000">
+              <a:schemeClr val="accent3">
+                <a:lumMod val="40000"/>
+                <a:lumOff val="60000"/>
+              </a:schemeClr>
+            </a:gs>
+          </a:gsLst>
+          <a:lin ang="2700000" scaled="1"/>
+        </a:gradFill>
+        <a:effectLst/>
+      </p:bgPr>
+    </p:bg>
     <p:spTree>
       <p:nvGrpSpPr>
         <p:cNvPr id="1" name=""/>
@@ -1526,7 +1650,7 @@
             <a:lvl1pPr>
               <a:defRPr>
                 <a:solidFill>
-                  <a:schemeClr val="tx1"/>
+                  <a:schemeClr val="bg1"/>
                 </a:solidFill>
               </a:defRPr>
             </a:lvl1pPr>
@@ -1534,7 +1658,7 @@
           <a:p>
             <a:pPr lvl="0"/>
             <a:r>
-              <a:rPr lang="en-US"/>
+              <a:rPr lang="en-US" dirty="0"/>
               <a:t>Slide title, Ericsson Hilda Light 40pt, Ericsson Black, max 2-lines</a:t>
             </a:r>
           </a:p>
@@ -8770,7 +8894,7 @@
         <p:spPr bwMode="auto">
           <a:xfrm>
             <a:off x="479425" y="476250"/>
-            <a:ext cx="10521950" cy="1081088"/>
+            <a:ext cx="10019242" cy="1081088"/>
           </a:xfrm>
           <a:prstGeom prst="rect">
             <a:avLst/>
@@ -8802,7 +8926,7 @@
           <a:p>
             <a:pPr lvl="0"/>
             <a:r>
-              <a:rPr lang="en-US"/>
+              <a:rPr lang="en-US" dirty="0"/>
               <a:t>Use this layout for document slides when you need space for a long heading and big content area</a:t>
             </a:r>
           </a:p>
@@ -11435,7 +11559,7 @@
         <p:spPr bwMode="auto">
           <a:xfrm>
             <a:off x="479425" y="476250"/>
-            <a:ext cx="10521950" cy="1081088"/>
+            <a:ext cx="10019242" cy="1081088"/>
           </a:xfrm>
           <a:prstGeom prst="rect">
             <a:avLst/>
@@ -16661,7 +16785,7 @@
         <p:spPr bwMode="auto">
           <a:xfrm>
             <a:off x="479425" y="476250"/>
-            <a:ext cx="10521950" cy="1081088"/>
+            <a:ext cx="9985375" cy="1081088"/>
           </a:xfrm>
           <a:prstGeom prst="rect">
             <a:avLst/>
@@ -19301,7 +19425,7 @@
         <p:spPr bwMode="auto">
           <a:xfrm>
             <a:off x="479425" y="476250"/>
-            <a:ext cx="10521950" cy="1081088"/>
+            <a:ext cx="10019242" cy="1081088"/>
           </a:xfrm>
           <a:prstGeom prst="rect">
             <a:avLst/>
@@ -23412,7 +23536,7 @@
         <p:spPr bwMode="auto">
           <a:xfrm>
             <a:off x="479425" y="476250"/>
-            <a:ext cx="10521950" cy="1081088"/>
+            <a:ext cx="10006542" cy="1081088"/>
           </a:xfrm>
           <a:prstGeom prst="rect">
             <a:avLst/>
@@ -23912,7 +24036,7 @@
           <a:p>
             <a:fld id="{EAB07A04-4D14-4FB4-ABC3-4FF79A2401A4}" type="datetimeFigureOut">
               <a:rPr lang="en-US" smtClean="0"/>
-              <a:t>8/27/2026</a:t>
+              <a:t>9/15/2026</a:t>
             </a:fld>
             <a:endParaRPr lang="en-US"/>
           </a:p>
@@ -24132,7 +24256,7 @@
           <a:p>
             <a:fld id="{E79BC93B-D740-4A24-9033-971140705A34}" type="datetimeFigureOut">
               <a:rPr lang="en-US" smtClean="0"/>
-              <a:t>8/27/2026</a:t>
+              <a:t>9/15/2026</a:t>
             </a:fld>
             <a:endParaRPr lang="en-US"/>
           </a:p>
@@ -24235,7 +24359,7 @@
         <p:spPr bwMode="auto">
           <a:xfrm>
             <a:off x="479425" y="476250"/>
-            <a:ext cx="10521950" cy="1081088"/>
+            <a:ext cx="9989608" cy="1081088"/>
           </a:xfrm>
           <a:prstGeom prst="rect">
             <a:avLst/>
@@ -24578,7 +24702,7 @@
         <p:spPr bwMode="auto">
           <a:xfrm>
             <a:off x="479425" y="476250"/>
-            <a:ext cx="10521950" cy="1081088"/>
+            <a:ext cx="9989608" cy="1081088"/>
           </a:xfrm>
           <a:prstGeom prst="rect">
             <a:avLst/>
@@ -24990,8 +25114,8 @@
         </p:nvSpPr>
         <p:spPr bwMode="auto">
           <a:xfrm>
-            <a:off x="479424" y="476250"/>
-            <a:ext cx="10501293" cy="1081088"/>
+            <a:off x="479425" y="476250"/>
+            <a:ext cx="9938288" cy="1081088"/>
           </a:xfrm>
           <a:prstGeom prst="rect">
             <a:avLst/>
@@ -25180,7 +25304,7 @@
         </p:blipFill>
         <p:spPr>
           <a:xfrm>
-            <a:off x="11236431" y="1165702"/>
+            <a:off x="10512036" y="474822"/>
             <a:ext cx="773481" cy="391636"/>
           </a:xfrm>
           <a:prstGeom prst="rect">
@@ -27678,6 +27802,10 @@
 </file>
 
 <file path=customXml/item10.xml><?xml version="1.0" encoding="utf-8"?>
+<TemplafySlideFormConfiguration><![CDATA[{"formFields":[],"formDataEntries":[]}]]></TemplafySlideFormConfiguration>
+</file>
+
+<file path=customXml/item11.xml><?xml version="1.0" encoding="utf-8"?>
 <ct:contentTypeSchema xmlns:ct="http://schemas.microsoft.com/office/2006/metadata/contentType" xmlns:ma="http://schemas.microsoft.com/office/2006/metadata/properties/metaAttributes" ct:_="" ma:_="" ma:contentTypeName="Documento" ma:contentTypeID="0x01010093E8D57ECA48EA49A8079FF7BA4D8434" ma:contentTypeVersion="14" ma:contentTypeDescription="Crear nuevo documento." ma:contentTypeScope="" ma:versionID="63c20a81180abc05dcc77631795f2f6d">
   <xsd:schema xmlns:xsd="http://www.w3.org/2001/XMLSchema" xmlns:xs="http://www.w3.org/2001/XMLSchema" xmlns:p="http://schemas.microsoft.com/office/2006/metadata/properties" xmlns:ns2="77fde15d-2397-485e-b73a-86b486d76ed9" xmlns:ns3="bcef248d-09fe-4034-af42-7800fb0b4c07" targetNamespace="http://schemas.microsoft.com/office/2006/metadata/properties" ma:root="true" ma:fieldsID="c568fcd95f5d4d3e7cd3fb2956348a08" ns2:_="" ns3:_="">
     <xsd:import namespace="77fde15d-2397-485e-b73a-86b486d76ed9"/>
@@ -27890,39 +28018,7 @@
 </ct:contentTypeSchema>
 </file>
 
-<file path=customXml/item11.xml><?xml version="1.0" encoding="utf-8"?>
-<TemplafySlideFormConfiguration><![CDATA[{"formFields":[],"formDataEntries":[]}]]></TemplafySlideFormConfiguration>
-</file>
-
 <file path=customXml/item12.xml><?xml version="1.0" encoding="utf-8"?>
-<TemplafySlideFormConfiguration><![CDATA[{"formFields":[],"formDataEntries":[]}]]></TemplafySlideFormConfiguration>
-</file>
-
-<file path=customXml/item13.xml><?xml version="1.0" encoding="utf-8"?>
-<TemplafySlideFormConfiguration><![CDATA[{"formFields":[],"formDataEntries":[]}]]></TemplafySlideFormConfiguration>
-</file>
-
-<file path=customXml/item14.xml><?xml version="1.0" encoding="utf-8"?>
-<TemplafySlideFormConfiguration><![CDATA[{"formFields":[],"formDataEntries":[]}]]></TemplafySlideFormConfiguration>
-</file>
-
-<file path=customXml/item15.xml><?xml version="1.0" encoding="utf-8"?>
-<TemplafySlideFormConfiguration><![CDATA[{"formFields":[],"formDataEntries":[]}]]></TemplafySlideFormConfiguration>
-</file>
-
-<file path=customXml/item16.xml><?xml version="1.0" encoding="utf-8"?>
-<TemplafySlideTemplateConfiguration><![CDATA[{"documentContentValidatorConfiguration":{"enableDocumentContentValidator":false,"documentContentValidatorVersion":0},"elementsMetadata":[],"slideId":"637661701761217959","enableDocumentContentUpdater":true,"version":"1.9"}]]></TemplafySlideTemplateConfiguration>
-</file>
-
-<file path=customXml/item17.xml><?xml version="1.0" encoding="utf-8"?>
-<TemplafySlideTemplateConfiguration><![CDATA[{"documentContentValidatorConfiguration":{"enableDocumentContentValidator":false,"documentContentValidatorVersion":0},"elementsMetadata":[],"slideId":"637661701761217959","enableDocumentContentUpdater":true,"version":"1.9"}]]></TemplafySlideTemplateConfiguration>
-</file>
-
-<file path=customXml/item18.xml><?xml version="1.0" encoding="utf-8"?>
-<TemplafySlideFormConfiguration><![CDATA[{"formFields":[],"formDataEntries":[]}]]></TemplafySlideFormConfiguration>
-</file>
-
-<file path=customXml/item19.xml><?xml version="1.0" encoding="utf-8"?>
 <p:properties xmlns:p="http://schemas.microsoft.com/office/2006/metadata/properties" xmlns:xsi="http://www.w3.org/2001/XMLSchema-instance" xmlns:pc="http://schemas.microsoft.com/office/infopath/2007/PartnerControls">
   <documentManagement>
     <TaxCatchAll xmlns="bcef248d-09fe-4034-af42-7800fb0b4c07" xsi:nil="true"/>
@@ -27934,8 +28030,36 @@
 </p:properties>
 </file>
 
+<file path=customXml/item13.xml><?xml version="1.0" encoding="utf-8"?>
+<TemplafySlideFormConfiguration><![CDATA[{"formFields":[],"formDataEntries":[]}]]></TemplafySlideFormConfiguration>
+</file>
+
+<file path=customXml/item14.xml><?xml version="1.0" encoding="utf-8"?>
+<TemplafySlideTemplateConfiguration><![CDATA[{"documentContentValidatorConfiguration":{"enableDocumentContentValidator":false,"documentContentValidatorVersion":0},"elementsMetadata":[],"slideId":"637661701761217959","enableDocumentContentUpdater":true,"version":"1.9"}]]></TemplafySlideTemplateConfiguration>
+</file>
+
+<file path=customXml/item15.xml><?xml version="1.0" encoding="utf-8"?>
+<TemplafySlideFormConfiguration><![CDATA[{"formFields":[],"formDataEntries":[]}]]></TemplafySlideFormConfiguration>
+</file>
+
+<file path=customXml/item16.xml><?xml version="1.0" encoding="utf-8"?>
+<TemplafySlideFormConfiguration><![CDATA[{"formFields":[],"formDataEntries":[]}]]></TemplafySlideFormConfiguration>
+</file>
+
+<file path=customXml/item17.xml><?xml version="1.0" encoding="utf-8"?>
+<TemplafySlideFormConfiguration><![CDATA[{"formFields":[],"formDataEntries":[]}]]></TemplafySlideFormConfiguration>
+</file>
+
+<file path=customXml/item18.xml><?xml version="1.0" encoding="utf-8"?>
+<TemplafySlideFormConfiguration><![CDATA[{"formFields":[],"formDataEntries":[]}]]></TemplafySlideFormConfiguration>
+</file>
+
+<file path=customXml/item19.xml><?xml version="1.0" encoding="utf-8"?>
+<TemplafySlideTemplateConfiguration><![CDATA[{"documentContentValidatorConfiguration":{"enableDocumentContentValidator":false,"documentContentValidatorVersion":0},"elementsMetadata":[],"slideId":"637661701761217959","enableDocumentContentUpdater":true,"version":"1.9"}]]></TemplafySlideTemplateConfiguration>
+</file>
+
 <file path=customXml/item2.xml><?xml version="1.0" encoding="utf-8"?>
-<TemplafySlideTemplateConfiguration><![CDATA[{"documentContentValidatorConfiguration":{"enableDocumentContentValidator":false,"documentContentValidatorVersion":0},"elementsMetadata":[],"slideId":"637661701761217959","enableDocumentContentUpdater":true,"version":"1.9"}]]></TemplafySlideTemplateConfiguration>
+<TemplafySlideFormConfiguration><![CDATA[{"formFields":[],"formDataEntries":[]}]]></TemplafySlideFormConfiguration>
 </file>
 
 <file path=customXml/item3.xml><?xml version="1.0" encoding="utf-8"?>
@@ -27943,16 +28067,11 @@
 </file>
 
 <file path=customXml/item4.xml><?xml version="1.0" encoding="utf-8"?>
-<TemplafySlideFormConfiguration><![CDATA[{"formFields":[],"formDataEntries":[]}]]></TemplafySlideFormConfiguration>
+<TemplafySlideTemplateConfiguration><![CDATA[{"documentContentValidatorConfiguration":{"enableDocumentContentValidator":false,"documentContentValidatorVersion":0},"elementsMetadata":[],"slideId":"637661701761217959","enableDocumentContentUpdater":true,"version":"1.9"}]]></TemplafySlideTemplateConfiguration>
 </file>
 
 <file path=customXml/item5.xml><?xml version="1.0" encoding="utf-8"?>
-<?mso-contentType ?>
-<FormTemplates xmlns="http://schemas.microsoft.com/sharepoint/v3/contenttype/forms">
-  <Display>DocumentLibraryForm</Display>
-  <Edit>DocumentLibraryForm</Edit>
-  <New>DocumentLibraryForm</New>
-</FormTemplates>
+<TemplafySlideTemplateConfiguration><![CDATA[{"documentContentValidatorConfiguration":{"enableDocumentContentValidator":false,"documentContentValidatorVersion":0},"elementsMetadata":[],"slideId":"637661701761217959","enableDocumentContentUpdater":true,"version":"1.9"}]]></TemplafySlideTemplateConfiguration>
 </file>
 
 <file path=customXml/item6.xml><?xml version="1.0" encoding="utf-8"?>
@@ -27968,16 +28087,27 @@
 </file>
 
 <file path=customXml/item9.xml><?xml version="1.0" encoding="utf-8"?>
-<TemplafySlideTemplateConfiguration><![CDATA[{"documentContentValidatorConfiguration":{"enableDocumentContentValidator":false,"documentContentValidatorVersion":0},"elementsMetadata":[],"slideId":"637661701761217959","enableDocumentContentUpdater":true,"version":"1.9"}]]></TemplafySlideTemplateConfiguration>
+<?mso-contentType ?>
+<FormTemplates xmlns="http://schemas.microsoft.com/sharepoint/v3/contenttype/forms">
+  <Display>DocumentLibraryForm</Display>
+  <Edit>DocumentLibraryForm</Edit>
+  <New>DocumentLibraryForm</New>
+</FormTemplates>
 </file>
 
 <file path=customXml/itemProps1.xml><?xml version="1.0" encoding="utf-8"?>
-<ds:datastoreItem xmlns:ds="http://schemas.openxmlformats.org/officeDocument/2006/customXml" ds:itemID="{F6CC31F5-13F1-4893-A918-27994DEE1E73}">
+<ds:datastoreItem xmlns:ds="http://schemas.openxmlformats.org/officeDocument/2006/customXml" ds:itemID="{7FC3D2F9-C978-4F6C-9B95-BEE6303453CA}">
   <ds:schemaRefs/>
 </ds:datastoreItem>
 </file>
 
 <file path=customXml/itemProps10.xml><?xml version="1.0" encoding="utf-8"?>
+<ds:datastoreItem xmlns:ds="http://schemas.openxmlformats.org/officeDocument/2006/customXml" ds:itemID="{D81E0773-B1DF-4187-B86B-A4CC89F4FFA3}">
+  <ds:schemaRefs/>
+</ds:datastoreItem>
+</file>
+
+<file path=customXml/itemProps11.xml><?xml version="1.0" encoding="utf-8"?>
 <ds:datastoreItem xmlns:ds="http://schemas.openxmlformats.org/officeDocument/2006/customXml" ds:itemID="{7DEDA2BC-8275-4FBB-A28A-68D801E06E75}">
   <ds:schemaRefs>
     <ds:schemaRef ds:uri="http://schemas.microsoft.com/office/2006/metadata/contentType"/>
@@ -27996,55 +28126,7 @@
 </ds:datastoreItem>
 </file>
 
-<file path=customXml/itemProps11.xml><?xml version="1.0" encoding="utf-8"?>
-<ds:datastoreItem xmlns:ds="http://schemas.openxmlformats.org/officeDocument/2006/customXml" ds:itemID="{A87FB1B0-D223-4CF6-8EC4-E3E816F1CDBE}">
-  <ds:schemaRefs/>
-</ds:datastoreItem>
-</file>
-
 <file path=customXml/itemProps12.xml><?xml version="1.0" encoding="utf-8"?>
-<ds:datastoreItem xmlns:ds="http://schemas.openxmlformats.org/officeDocument/2006/customXml" ds:itemID="{6AE2E849-5528-4C05-B1E8-DB80DA8BD7F1}">
-  <ds:schemaRefs/>
-</ds:datastoreItem>
-</file>
-
-<file path=customXml/itemProps13.xml><?xml version="1.0" encoding="utf-8"?>
-<ds:datastoreItem xmlns:ds="http://schemas.openxmlformats.org/officeDocument/2006/customXml" ds:itemID="{0B924887-3FAA-4B8E-815F-481860E4E6AF}">
-  <ds:schemaRefs/>
-</ds:datastoreItem>
-</file>
-
-<file path=customXml/itemProps14.xml><?xml version="1.0" encoding="utf-8"?>
-<ds:datastoreItem xmlns:ds="http://schemas.openxmlformats.org/officeDocument/2006/customXml" ds:itemID="{2A25ECD3-EA6C-4727-8DF2-5BDC9911D24C}">
-  <ds:schemaRefs/>
-</ds:datastoreItem>
-</file>
-
-<file path=customXml/itemProps15.xml><?xml version="1.0" encoding="utf-8"?>
-<ds:datastoreItem xmlns:ds="http://schemas.openxmlformats.org/officeDocument/2006/customXml" ds:itemID="{D81E0773-B1DF-4187-B86B-A4CC89F4FFA3}">
-  <ds:schemaRefs/>
-</ds:datastoreItem>
-</file>
-
-<file path=customXml/itemProps16.xml><?xml version="1.0" encoding="utf-8"?>
-<ds:datastoreItem xmlns:ds="http://schemas.openxmlformats.org/officeDocument/2006/customXml" ds:itemID="{D6A0B861-D97F-43C8-B3DF-13EB4CD7C21A}">
-  <ds:schemaRefs/>
-</ds:datastoreItem>
-</file>
-
-<file path=customXml/itemProps17.xml><?xml version="1.0" encoding="utf-8"?>
-<ds:datastoreItem xmlns:ds="http://schemas.openxmlformats.org/officeDocument/2006/customXml" ds:itemID="{2E5DC17B-7CA5-47FA-BB10-51D0544A8F91}">
-  <ds:schemaRefs/>
-</ds:datastoreItem>
-</file>
-
-<file path=customXml/itemProps18.xml><?xml version="1.0" encoding="utf-8"?>
-<ds:datastoreItem xmlns:ds="http://schemas.openxmlformats.org/officeDocument/2006/customXml" ds:itemID="{4F6381B7-CB4D-4A8E-AE8C-AD066D7465AA}">
-  <ds:schemaRefs/>
-</ds:datastoreItem>
-</file>
-
-<file path=customXml/itemProps19.xml><?xml version="1.0" encoding="utf-8"?>
 <ds:datastoreItem xmlns:ds="http://schemas.openxmlformats.org/officeDocument/2006/customXml" ds:itemID="{11300D8C-1DE0-4C9A-86BB-17269E5D3C65}">
   <ds:schemaRefs>
     <ds:schemaRef ds:uri="http://www.w3.org/XML/1998/namespace"/>
@@ -28061,53 +28143,95 @@
 </ds:datastoreItem>
 </file>
 
+<file path=customXml/itemProps13.xml><?xml version="1.0" encoding="utf-8"?>
+<ds:datastoreItem xmlns:ds="http://schemas.openxmlformats.org/officeDocument/2006/customXml" ds:itemID="{BA1C3E13-54CF-4EC8-BFFC-847950BB2BA6}">
+  <ds:schemaRefs/>
+</ds:datastoreItem>
+</file>
+
+<file path=customXml/itemProps14.xml><?xml version="1.0" encoding="utf-8"?>
+<ds:datastoreItem xmlns:ds="http://schemas.openxmlformats.org/officeDocument/2006/customXml" ds:itemID="{ADCE6D4E-881A-4F21-8F46-6A112A7EEBE1}">
+  <ds:schemaRefs/>
+</ds:datastoreItem>
+</file>
+
+<file path=customXml/itemProps15.xml><?xml version="1.0" encoding="utf-8"?>
+<ds:datastoreItem xmlns:ds="http://schemas.openxmlformats.org/officeDocument/2006/customXml" ds:itemID="{2A25ECD3-EA6C-4727-8DF2-5BDC9911D24C}">
+  <ds:schemaRefs/>
+</ds:datastoreItem>
+</file>
+
+<file path=customXml/itemProps16.xml><?xml version="1.0" encoding="utf-8"?>
+<ds:datastoreItem xmlns:ds="http://schemas.openxmlformats.org/officeDocument/2006/customXml" ds:itemID="{F1A1DCA2-547F-4B90-BE36-91B9AB619C93}">
+  <ds:schemaRefs/>
+</ds:datastoreItem>
+</file>
+
+<file path=customXml/itemProps17.xml><?xml version="1.0" encoding="utf-8"?>
+<ds:datastoreItem xmlns:ds="http://schemas.openxmlformats.org/officeDocument/2006/customXml" ds:itemID="{0B924887-3FAA-4B8E-815F-481860E4E6AF}">
+  <ds:schemaRefs/>
+</ds:datastoreItem>
+</file>
+
+<file path=customXml/itemProps18.xml><?xml version="1.0" encoding="utf-8"?>
+<ds:datastoreItem xmlns:ds="http://schemas.openxmlformats.org/officeDocument/2006/customXml" ds:itemID="{4F6381B7-CB4D-4A8E-AE8C-AD066D7465AA}">
+  <ds:schemaRefs/>
+</ds:datastoreItem>
+</file>
+
+<file path=customXml/itemProps19.xml><?xml version="1.0" encoding="utf-8"?>
+<ds:datastoreItem xmlns:ds="http://schemas.openxmlformats.org/officeDocument/2006/customXml" ds:itemID="{62D5B54B-6902-4F98-B23A-0118DB9EEDF4}">
+  <ds:schemaRefs/>
+</ds:datastoreItem>
+</file>
+
 <file path=customXml/itemProps2.xml><?xml version="1.0" encoding="utf-8"?>
+<ds:datastoreItem xmlns:ds="http://schemas.openxmlformats.org/officeDocument/2006/customXml" ds:itemID="{6AE2E849-5528-4C05-B1E8-DB80DA8BD7F1}">
+  <ds:schemaRefs/>
+</ds:datastoreItem>
+</file>
+
+<file path=customXml/itemProps3.xml><?xml version="1.0" encoding="utf-8"?>
+<ds:datastoreItem xmlns:ds="http://schemas.openxmlformats.org/officeDocument/2006/customXml" ds:itemID="{2E5DC17B-7CA5-47FA-BB10-51D0544A8F91}">
+  <ds:schemaRefs/>
+</ds:datastoreItem>
+</file>
+
+<file path=customXml/itemProps4.xml><?xml version="1.0" encoding="utf-8"?>
 <ds:datastoreItem xmlns:ds="http://schemas.openxmlformats.org/officeDocument/2006/customXml" ds:itemID="{3E86842F-01DA-4AAB-AA56-9F0B2F496397}">
   <ds:schemaRefs/>
 </ds:datastoreItem>
 </file>
 
-<file path=customXml/itemProps3.xml><?xml version="1.0" encoding="utf-8"?>
-<ds:datastoreItem xmlns:ds="http://schemas.openxmlformats.org/officeDocument/2006/customXml" ds:itemID="{62D5B54B-6902-4F98-B23A-0118DB9EEDF4}">
+<file path=customXml/itemProps5.xml><?xml version="1.0" encoding="utf-8"?>
+<ds:datastoreItem xmlns:ds="http://schemas.openxmlformats.org/officeDocument/2006/customXml" ds:itemID="{D6A0B861-D97F-43C8-B3DF-13EB4CD7C21A}">
   <ds:schemaRefs/>
 </ds:datastoreItem>
 </file>
 
-<file path=customXml/itemProps4.xml><?xml version="1.0" encoding="utf-8"?>
-<ds:datastoreItem xmlns:ds="http://schemas.openxmlformats.org/officeDocument/2006/customXml" ds:itemID="{BA1C3E13-54CF-4EC8-BFFC-847950BB2BA6}">
+<file path=customXml/itemProps6.xml><?xml version="1.0" encoding="utf-8"?>
+<ds:datastoreItem xmlns:ds="http://schemas.openxmlformats.org/officeDocument/2006/customXml" ds:itemID="{F6CC31F5-13F1-4893-A918-27994DEE1E73}">
   <ds:schemaRefs/>
 </ds:datastoreItem>
 </file>
 
-<file path=customXml/itemProps5.xml><?xml version="1.0" encoding="utf-8"?>
-<ds:datastoreItem xmlns:ds="http://schemas.openxmlformats.org/officeDocument/2006/customXml" ds:itemID="{852C017A-4C71-4057-8850-0D69BC43C2C6}">
-  <ds:schemaRefs>
-    <ds:schemaRef ds:uri="http://schemas.microsoft.com/sharepoint/v3/contenttype/forms"/>
-  </ds:schemaRefs>
-</ds:datastoreItem>
-</file>
-
-<file path=customXml/itemProps6.xml><?xml version="1.0" encoding="utf-8"?>
+<file path=customXml/itemProps7.xml><?xml version="1.0" encoding="utf-8"?>
 <ds:datastoreItem xmlns:ds="http://schemas.openxmlformats.org/officeDocument/2006/customXml" ds:itemID="{772ABA4E-1FA2-4FC1-9A8A-C2C33BEC7DBE}">
   <ds:schemaRefs/>
 </ds:datastoreItem>
 </file>
 
-<file path=customXml/itemProps7.xml><?xml version="1.0" encoding="utf-8"?>
-<ds:datastoreItem xmlns:ds="http://schemas.openxmlformats.org/officeDocument/2006/customXml" ds:itemID="{7FC3D2F9-C978-4F6C-9B95-BEE6303453CA}">
-  <ds:schemaRefs/>
-</ds:datastoreItem>
-</file>
-
 <file path=customXml/itemProps8.xml><?xml version="1.0" encoding="utf-8"?>
-<ds:datastoreItem xmlns:ds="http://schemas.openxmlformats.org/officeDocument/2006/customXml" ds:itemID="{F1A1DCA2-547F-4B90-BE36-91B9AB619C93}">
+<ds:datastoreItem xmlns:ds="http://schemas.openxmlformats.org/officeDocument/2006/customXml" ds:itemID="{A87FB1B0-D223-4CF6-8EC4-E3E816F1CDBE}">
   <ds:schemaRefs/>
 </ds:datastoreItem>
 </file>
 
 <file path=customXml/itemProps9.xml><?xml version="1.0" encoding="utf-8"?>
-<ds:datastoreItem xmlns:ds="http://schemas.openxmlformats.org/officeDocument/2006/customXml" ds:itemID="{ADCE6D4E-881A-4F21-8F46-6A112A7EEBE1}">
-  <ds:schemaRefs/>
+<ds:datastoreItem xmlns:ds="http://schemas.openxmlformats.org/officeDocument/2006/customXml" ds:itemID="{852C017A-4C71-4057-8850-0D69BC43C2C6}">
+  <ds:schemaRefs>
+    <ds:schemaRef ds:uri="http://schemas.microsoft.com/sharepoint/v3/contenttype/forms"/>
+  </ds:schemaRefs>
 </ds:datastoreItem>
 </file>
 

--- a/assets/ppt-templates/Template_CDR_analysis.pptx
+++ b/assets/ppt-templates/Template_CDR_analysis.pptx
@@ -195,7 +195,7 @@
           <a:p>
             <a:fld id="{56B6DF60-6159-4558-8D07-00E18A77A544}" type="datetimeFigureOut">
               <a:rPr lang="en-US" smtClean="0"/>
-              <a:t>9/15/2026</a:t>
+              <a:t>9/15/26</a:t>
             </a:fld>
             <a:endParaRPr lang="en-US"/>
           </a:p>
@@ -353,7 +353,7 @@
           <a:p>
             <a:fld id="{DFB0E5E0-7946-4FB1-A297-6AB0FA3AA7F3}" type="slidenum">
               <a:rPr lang="en-US" smtClean="0"/>
-              <a:t>‹#›</a:t>
+              <a:t>‹Nº›</a:t>
             </a:fld>
             <a:endParaRPr lang="en-US"/>
           </a:p>
@@ -521,8 +521,8 @@
         </p:nvSpPr>
         <p:spPr>
           <a:xfrm>
-            <a:off x="479425" y="476250"/>
-            <a:ext cx="9866842" cy="3457576"/>
+            <a:off x="479425" y="1858617"/>
+            <a:ext cx="9866842" cy="3146589"/>
           </a:xfrm>
         </p:spPr>
         <p:txBody>
@@ -560,8 +560,8 @@
         </p:nvSpPr>
         <p:spPr>
           <a:xfrm>
-            <a:off x="479425" y="4149725"/>
-            <a:ext cx="5472114" cy="2087563"/>
+            <a:off x="479425" y="5113685"/>
+            <a:ext cx="5472114" cy="1123603"/>
           </a:xfrm>
           <a:prstGeom prst="rect">
             <a:avLst/>
@@ -1569,6 +1569,266 @@
 
 <file path=ppt/slideLayouts/slideLayout13.xml><?xml version="1.0" encoding="utf-8"?>
 <p:sldLayout xmlns:a="http://schemas.openxmlformats.org/drawingml/2006/main" xmlns:r="http://schemas.openxmlformats.org/officeDocument/2006/relationships" xmlns:p="http://schemas.openxmlformats.org/presentationml/2006/main" preserve="1" userDrawn="1">
+  <p:cSld name="Transiction">
+    <p:bg>
+      <p:bgPr>
+        <a:solidFill>
+          <a:schemeClr val="tx1"/>
+        </a:solidFill>
+        <a:effectLst/>
+      </p:bgPr>
+    </p:bg>
+    <p:spTree>
+      <p:nvGrpSpPr>
+        <p:cNvPr id="1" name=""/>
+        <p:cNvGrpSpPr/>
+        <p:nvPr/>
+      </p:nvGrpSpPr>
+      <p:grpSpPr>
+        <a:xfrm>
+          <a:off x="0" y="0"/>
+          <a:ext cx="0" cy="0"/>
+          <a:chOff x="0" y="0"/>
+          <a:chExt cx="0" cy="0"/>
+        </a:xfrm>
+      </p:grpSpPr>
+      <p:sp>
+        <p:nvSpPr>
+          <p:cNvPr id="4" name="Title_SM"/>
+          <p:cNvSpPr>
+            <a:spLocks noGrp="1" noChangeArrowheads="1"/>
+          </p:cNvSpPr>
+          <p:nvPr>
+            <p:ph type="title" hasCustomPrompt="1"/>
+          </p:nvPr>
+        </p:nvSpPr>
+        <p:spPr bwMode="auto">
+          <a:xfrm>
+            <a:off x="479424" y="2986709"/>
+            <a:ext cx="8353425" cy="1177788"/>
+          </a:xfrm>
+          <a:prstGeom prst="rect">
+            <a:avLst/>
+          </a:prstGeom>
+          <a:noFill/>
+          <a:ln w="9525">
+            <a:noFill/>
+            <a:miter lim="800000"/>
+            <a:headEnd/>
+            <a:tailEnd/>
+          </a:ln>
+        </p:spPr>
+        <p:txBody>
+          <a:bodyPr vert="horz" wrap="square" lIns="72000" tIns="36000" rIns="0" bIns="0" numCol="1" anchor="t" anchorCtr="0" compatLnSpc="1">
+            <a:prstTxWarp prst="textNoShape">
+              <a:avLst/>
+            </a:prstTxWarp>
+            <a:noAutofit/>
+          </a:bodyPr>
+          <a:lstStyle>
+            <a:lvl1pPr>
+              <a:defRPr>
+                <a:solidFill>
+                  <a:schemeClr val="bg1"/>
+                </a:solidFill>
+              </a:defRPr>
+            </a:lvl1pPr>
+          </a:lstStyle>
+          <a:p>
+            <a:pPr lvl="0"/>
+            <a:r>
+              <a:rPr lang="en-US" dirty="0"/>
+              <a:t>Slide title, Ericsson Hilda Light 40pt, Ericsson Black, max 2-lines</a:t>
+            </a:r>
+          </a:p>
+        </p:txBody>
+      </p:sp>
+      <p:sp>
+        <p:nvSpPr>
+          <p:cNvPr id="3" name="txtfooterCopy" descr="{&#10; &quot;SkabelonDesign&quot;: {&#10; &quot;textualValue&quot;: &quot;&lt;key1/&gt;&quot;,&#10; &quot;bindingCollection&quot;: {&#10; &quot;key1&quot;: {&quot;SkabelonDesign&quot;:{&quot;type&quot;:&quot;Text&quot;,&quot;binding&quot;:&quot;Module.FooterText&quot;}}&#10; }&#10; }&#10;}">
+            <a:extLst>
+              <a:ext uri="{FF2B5EF4-FFF2-40B4-BE49-F238E27FC236}">
+                <a16:creationId xmlns:a16="http://schemas.microsoft.com/office/drawing/2014/main" id="{C44ECCE6-4D94-443E-8C20-CA233A5C0572}"/>
+              </a:ext>
+            </a:extLst>
+          </p:cNvPr>
+          <p:cNvSpPr txBox="1"/>
+          <p:nvPr userDrawn="1"/>
+        </p:nvSpPr>
+        <p:spPr>
+          <a:xfrm>
+            <a:off x="421638" y="6524625"/>
+            <a:ext cx="65" cy="123111"/>
+          </a:xfrm>
+          <a:prstGeom prst="rect">
+            <a:avLst/>
+          </a:prstGeom>
+          <a:noFill/>
+        </p:spPr>
+        <p:txBody>
+          <a:bodyPr vert="horz" wrap="none" lIns="0" tIns="0" rIns="0" bIns="0" rtlCol="0">
+            <a:spAutoFit/>
+          </a:bodyPr>
+          <a:lstStyle/>
+          <a:p>
+            <a:pPr marL="0" indent="0" algn="l">
+              <a:buFontTx/>
+              <a:buNone/>
+            </a:pPr>
+            <a:endParaRPr lang="en-US" sz="800" b="0" i="0" u="none">
+              <a:solidFill>
+                <a:schemeClr val="tx1"/>
+              </a:solidFill>
+              <a:latin typeface="+mn-lt"/>
+            </a:endParaRPr>
+          </a:p>
+        </p:txBody>
+      </p:sp>
+    </p:spTree>
+    <p:extLst>
+      <p:ext uri="{BB962C8B-B14F-4D97-AF65-F5344CB8AC3E}">
+        <p14:creationId xmlns:p14="http://schemas.microsoft.com/office/powerpoint/2010/main" val="2274281730"/>
+      </p:ext>
+    </p:extLst>
+  </p:cSld>
+  <p:clrMapOvr>
+    <a:masterClrMapping/>
+  </p:clrMapOvr>
+</p:sldLayout>
+</file>
+
+<file path=ppt/slideLayouts/slideLayout14.xml><?xml version="1.0" encoding="utf-8"?>
+<p:sldLayout xmlns:a="http://schemas.openxmlformats.org/drawingml/2006/main" xmlns:r="http://schemas.openxmlformats.org/officeDocument/2006/relationships" xmlns:p="http://schemas.openxmlformats.org/presentationml/2006/main" preserve="1" userDrawn="1">
+  <p:cSld name="Black Transiction">
+    <p:bg>
+      <p:bgPr>
+        <a:solidFill>
+          <a:schemeClr val="tx1"/>
+        </a:solidFill>
+        <a:effectLst/>
+      </p:bgPr>
+    </p:bg>
+    <p:spTree>
+      <p:nvGrpSpPr>
+        <p:cNvPr id="1" name=""/>
+        <p:cNvGrpSpPr/>
+        <p:nvPr/>
+      </p:nvGrpSpPr>
+      <p:grpSpPr>
+        <a:xfrm>
+          <a:off x="0" y="0"/>
+          <a:ext cx="0" cy="0"/>
+          <a:chOff x="0" y="0"/>
+          <a:chExt cx="0" cy="0"/>
+        </a:xfrm>
+      </p:grpSpPr>
+      <p:sp>
+        <p:nvSpPr>
+          <p:cNvPr id="4" name="Title_SM"/>
+          <p:cNvSpPr>
+            <a:spLocks noGrp="1" noChangeArrowheads="1"/>
+          </p:cNvSpPr>
+          <p:nvPr>
+            <p:ph type="title" hasCustomPrompt="1"/>
+          </p:nvPr>
+        </p:nvSpPr>
+        <p:spPr bwMode="auto">
+          <a:xfrm>
+            <a:off x="479424" y="2986709"/>
+            <a:ext cx="8353425" cy="1177788"/>
+          </a:xfrm>
+          <a:prstGeom prst="rect">
+            <a:avLst/>
+          </a:prstGeom>
+          <a:noFill/>
+          <a:ln w="9525">
+            <a:noFill/>
+            <a:miter lim="800000"/>
+            <a:headEnd/>
+            <a:tailEnd/>
+          </a:ln>
+        </p:spPr>
+        <p:txBody>
+          <a:bodyPr vert="horz" wrap="square" lIns="72000" tIns="36000" rIns="0" bIns="0" numCol="1" anchor="t" anchorCtr="0" compatLnSpc="1">
+            <a:prstTxWarp prst="textNoShape">
+              <a:avLst/>
+            </a:prstTxWarp>
+            <a:noAutofit/>
+          </a:bodyPr>
+          <a:lstStyle>
+            <a:lvl1pPr>
+              <a:defRPr>
+                <a:solidFill>
+                  <a:schemeClr val="bg1"/>
+                </a:solidFill>
+              </a:defRPr>
+            </a:lvl1pPr>
+          </a:lstStyle>
+          <a:p>
+            <a:pPr lvl="0"/>
+            <a:r>
+              <a:rPr lang="en-US" dirty="0"/>
+              <a:t>Slide title, Ericsson Hilda Light 40pt, Ericsson Black, max 2-lines</a:t>
+            </a:r>
+          </a:p>
+        </p:txBody>
+      </p:sp>
+      <p:sp>
+        <p:nvSpPr>
+          <p:cNvPr id="3" name="txtfooterCopy" descr="{&#10; &quot;SkabelonDesign&quot;: {&#10; &quot;textualValue&quot;: &quot;&lt;key1/&gt;&quot;,&#10; &quot;bindingCollection&quot;: {&#10; &quot;key1&quot;: {&quot;SkabelonDesign&quot;:{&quot;type&quot;:&quot;Text&quot;,&quot;binding&quot;:&quot;Module.FooterText&quot;}}&#10; }&#10; }&#10;}">
+            <a:extLst>
+              <a:ext uri="{FF2B5EF4-FFF2-40B4-BE49-F238E27FC236}">
+                <a16:creationId xmlns:a16="http://schemas.microsoft.com/office/drawing/2014/main" id="{C44ECCE6-4D94-443E-8C20-CA233A5C0572}"/>
+              </a:ext>
+            </a:extLst>
+          </p:cNvPr>
+          <p:cNvSpPr txBox="1"/>
+          <p:nvPr userDrawn="1"/>
+        </p:nvSpPr>
+        <p:spPr>
+          <a:xfrm>
+            <a:off x="421638" y="6524625"/>
+            <a:ext cx="65" cy="123111"/>
+          </a:xfrm>
+          <a:prstGeom prst="rect">
+            <a:avLst/>
+          </a:prstGeom>
+          <a:noFill/>
+        </p:spPr>
+        <p:txBody>
+          <a:bodyPr vert="horz" wrap="none" lIns="0" tIns="0" rIns="0" bIns="0" rtlCol="0">
+            <a:spAutoFit/>
+          </a:bodyPr>
+          <a:lstStyle/>
+          <a:p>
+            <a:pPr marL="0" indent="0" algn="l">
+              <a:buFontTx/>
+              <a:buNone/>
+            </a:pPr>
+            <a:endParaRPr lang="en-US" sz="800" b="0" i="0" u="none">
+              <a:solidFill>
+                <a:schemeClr val="tx1"/>
+              </a:solidFill>
+              <a:latin typeface="+mn-lt"/>
+            </a:endParaRPr>
+          </a:p>
+        </p:txBody>
+      </p:sp>
+    </p:spTree>
+    <p:extLst>
+      <p:ext uri="{BB962C8B-B14F-4D97-AF65-F5344CB8AC3E}">
+        <p14:creationId xmlns:p14="http://schemas.microsoft.com/office/powerpoint/2010/main" val="762661381"/>
+      </p:ext>
+    </p:extLst>
+  </p:cSld>
+  <p:clrMapOvr>
+    <a:masterClrMapping/>
+  </p:clrMapOvr>
+</p:sldLayout>
+</file>
+
+<file path=ppt/slideLayouts/slideLayout15.xml><?xml version="1.0" encoding="utf-8"?>
+<p:sldLayout xmlns:a="http://schemas.openxmlformats.org/drawingml/2006/main" xmlns:r="http://schemas.openxmlformats.org/officeDocument/2006/relationships" xmlns:p="http://schemas.openxmlformats.org/presentationml/2006/main" preserve="1" userDrawn="1">
   <p:cSld name="Title Only">
     <p:bg>
       <p:bgPr>
@@ -1718,7 +1978,7 @@
 </p:sldLayout>
 </file>
 
-<file path=ppt/slideLayouts/slideLayout14.xml><?xml version="1.0" encoding="utf-8"?>
+<file path=ppt/slideLayouts/slideLayout16.xml><?xml version="1.0" encoding="utf-8"?>
 <p:sldLayout xmlns:a="http://schemas.openxmlformats.org/drawingml/2006/main" xmlns:r="http://schemas.openxmlformats.org/officeDocument/2006/relationships" xmlns:p="http://schemas.openxmlformats.org/presentationml/2006/main" showMasterSp="0" preserve="1" userDrawn="1">
   <p:cSld name="Black Title Only">
     <p:bg>
@@ -1940,7 +2200,7 @@
 </p:sldLayout>
 </file>
 
-<file path=ppt/slideLayouts/slideLayout15.xml><?xml version="1.0" encoding="utf-8"?>
+<file path=ppt/slideLayouts/slideLayout17.xml><?xml version="1.0" encoding="utf-8"?>
 <p:sldLayout xmlns:a="http://schemas.openxmlformats.org/drawingml/2006/main" xmlns:r="http://schemas.openxmlformats.org/officeDocument/2006/relationships" xmlns:p="http://schemas.openxmlformats.org/presentationml/2006/main" preserve="1" userDrawn="1">
   <p:cSld name="Title and 1 column">
     <p:spTree>
@@ -2159,7 +2419,7 @@
 </p:sldLayout>
 </file>
 
-<file path=ppt/slideLayouts/slideLayout16.xml><?xml version="1.0" encoding="utf-8"?>
+<file path=ppt/slideLayouts/slideLayout18.xml><?xml version="1.0" encoding="utf-8"?>
 <p:sldLayout xmlns:a="http://schemas.openxmlformats.org/drawingml/2006/main" xmlns:r="http://schemas.openxmlformats.org/officeDocument/2006/relationships" xmlns:p="http://schemas.openxmlformats.org/presentationml/2006/main" showMasterSp="0" preserve="1" userDrawn="1">
   <p:cSld name="Black Title and 1 column">
     <p:bg>
@@ -2478,7 +2738,7 @@
 </p:sldLayout>
 </file>
 
-<file path=ppt/slideLayouts/slideLayout17.xml><?xml version="1.0" encoding="utf-8"?>
+<file path=ppt/slideLayouts/slideLayout19.xml><?xml version="1.0" encoding="utf-8"?>
 <p:sldLayout xmlns:a="http://schemas.openxmlformats.org/drawingml/2006/main" xmlns:r="http://schemas.openxmlformats.org/officeDocument/2006/relationships" xmlns:p="http://schemas.openxmlformats.org/presentationml/2006/main" preserve="1" userDrawn="1">
   <p:cSld name="Title and 1 smaller column">
     <p:spTree>
@@ -2694,641 +2954,6 @@
     <p:extLst>
       <p:ext uri="{BB962C8B-B14F-4D97-AF65-F5344CB8AC3E}">
         <p14:creationId xmlns:p14="http://schemas.microsoft.com/office/powerpoint/2010/main" val="2636312352"/>
-      </p:ext>
-    </p:extLst>
-  </p:cSld>
-  <p:clrMapOvr>
-    <a:masterClrMapping/>
-  </p:clrMapOvr>
-</p:sldLayout>
-</file>
-
-<file path=ppt/slideLayouts/slideLayout18.xml><?xml version="1.0" encoding="utf-8"?>
-<p:sldLayout xmlns:a="http://schemas.openxmlformats.org/drawingml/2006/main" xmlns:r="http://schemas.openxmlformats.org/officeDocument/2006/relationships" xmlns:p="http://schemas.openxmlformats.org/presentationml/2006/main" showMasterSp="0" preserve="1" userDrawn="1">
-  <p:cSld name="Black Title and 1 smaller column">
-    <p:bg>
-      <p:bgRef idx="1001">
-        <a:schemeClr val="bg2"/>
-      </p:bgRef>
-    </p:bg>
-    <p:spTree>
-      <p:nvGrpSpPr>
-        <p:cNvPr id="1" name=""/>
-        <p:cNvGrpSpPr/>
-        <p:nvPr/>
-      </p:nvGrpSpPr>
-      <p:grpSpPr>
-        <a:xfrm>
-          <a:off x="0" y="0"/>
-          <a:ext cx="0" cy="0"/>
-          <a:chOff x="0" y="0"/>
-          <a:chExt cx="0" cy="0"/>
-        </a:xfrm>
-      </p:grpSpPr>
-      <p:sp>
-        <p:nvSpPr>
-          <p:cNvPr id="2" name="Background">
-            <a:extLst>
-              <a:ext uri="{FF2B5EF4-FFF2-40B4-BE49-F238E27FC236}">
-                <a16:creationId xmlns:a16="http://schemas.microsoft.com/office/drawing/2014/main" id="{C8FC9BDE-AACF-FAD9-0569-2308D75B1812}"/>
-              </a:ext>
-            </a:extLst>
-          </p:cNvPr>
-          <p:cNvSpPr/>
-          <p:nvPr userDrawn="1"/>
-        </p:nvSpPr>
-        <p:spPr bwMode="auto">
-          <a:xfrm>
-            <a:off x="0" y="0"/>
-            <a:ext cx="12192000" cy="6858000"/>
-          </a:xfrm>
-          <a:prstGeom prst="rect">
-            <a:avLst/>
-          </a:prstGeom>
-          <a:solidFill>
-            <a:schemeClr val="bg2">
-              <a:alpha val="0"/>
-            </a:schemeClr>
-          </a:solidFill>
-          <a:ln w="12700" cap="flat" cmpd="sng" algn="ctr">
-            <a:noFill/>
-            <a:prstDash val="solid"/>
-            <a:round/>
-            <a:headEnd type="none" w="med" len="med"/>
-            <a:tailEnd type="none" w="med" len="med"/>
-          </a:ln>
-          <a:effectLst/>
-        </p:spPr>
-        <p:txBody>
-          <a:bodyPr rot="0" spcFirstLastPara="0" vertOverflow="overflow" horzOverflow="overflow" vert="horz" wrap="square" lIns="72000" tIns="36000" rIns="73152" bIns="36576" numCol="1" spcCol="0" rtlCol="0" fromWordArt="0" anchor="t" anchorCtr="0" forceAA="0" compatLnSpc="1">
-            <a:prstTxWarp prst="textNoShape">
-              <a:avLst/>
-            </a:prstTxWarp>
-            <a:noAutofit/>
-          </a:bodyPr>
-          <a:lstStyle/>
-          <a:p>
-            <a:pPr marL="180000" indent="-180000" algn="l">
-              <a:spcBef>
-                <a:spcPts val="800"/>
-              </a:spcBef>
-              <a:buFont typeface="Ericsson Hilda" panose="00000500000000000000" pitchFamily="2" charset="0"/>
-              <a:buChar char="●"/>
-            </a:pPr>
-            <a:endParaRPr lang="en-US">
-              <a:solidFill>
-                <a:schemeClr val="bg1"/>
-              </a:solidFill>
-              <a:latin typeface="+mn-lt"/>
-            </a:endParaRPr>
-          </a:p>
-        </p:txBody>
-      </p:sp>
-      <p:pic>
-        <p:nvPicPr>
-          <p:cNvPr id="3" name="Logo">
-            <a:extLst>
-              <a:ext uri="{FF2B5EF4-FFF2-40B4-BE49-F238E27FC236}">
-                <a16:creationId xmlns:a16="http://schemas.microsoft.com/office/drawing/2014/main" id="{3989B81D-94DE-1159-ADB9-A5A03B074BB4}"/>
-              </a:ext>
-            </a:extLst>
-          </p:cNvPr>
-          <p:cNvPicPr>
-            <a:picLocks noChangeAspect="1"/>
-          </p:cNvPicPr>
-          <p:nvPr userDrawn="1"/>
-        </p:nvPicPr>
-        <p:blipFill>
-          <a:blip r:embed="rId2">
-            <a:extLst>
-              <a:ext uri="{28A0092B-C50C-407E-A947-70E740481C1C}">
-                <a14:useLocalDpi xmlns:a14="http://schemas.microsoft.com/office/drawing/2010/main" val="0"/>
-              </a:ext>
-            </a:extLst>
-          </a:blip>
-          <a:stretch>
-            <a:fillRect/>
-          </a:stretch>
-        </p:blipFill>
-        <p:spPr>
-          <a:xfrm>
-            <a:off x="11379841" y="429421"/>
-            <a:ext cx="482228" cy="482439"/>
-          </a:xfrm>
-          <a:prstGeom prst="rect">
-            <a:avLst/>
-          </a:prstGeom>
-        </p:spPr>
-      </p:pic>
-      <p:sp>
-        <p:nvSpPr>
-          <p:cNvPr id="6" name="Title_SM">
-            <a:extLst>
-              <a:ext uri="{FF2B5EF4-FFF2-40B4-BE49-F238E27FC236}">
-                <a16:creationId xmlns:a16="http://schemas.microsoft.com/office/drawing/2014/main" id="{3F4EF873-DC0F-4698-BEC2-502DB043AA5C}"/>
-              </a:ext>
-            </a:extLst>
-          </p:cNvPr>
-          <p:cNvSpPr>
-            <a:spLocks noGrp="1" noChangeArrowheads="1"/>
-          </p:cNvSpPr>
-          <p:nvPr>
-            <p:ph type="title" hasCustomPrompt="1"/>
-          </p:nvPr>
-        </p:nvSpPr>
-        <p:spPr bwMode="auto">
-          <a:xfrm>
-            <a:off x="479425" y="476250"/>
-            <a:ext cx="8353426" cy="1081088"/>
-          </a:xfrm>
-          <a:prstGeom prst="rect">
-            <a:avLst/>
-          </a:prstGeom>
-          <a:noFill/>
-          <a:ln w="9525">
-            <a:noFill/>
-            <a:miter lim="800000"/>
-            <a:headEnd/>
-            <a:tailEnd/>
-          </a:ln>
-        </p:spPr>
-        <p:txBody>
-          <a:bodyPr vert="horz" wrap="square" lIns="72000" tIns="36000" rIns="73152" bIns="36576" numCol="1" anchor="t" anchorCtr="0" compatLnSpc="1">
-            <a:prstTxWarp prst="textNoShape">
-              <a:avLst/>
-            </a:prstTxWarp>
-            <a:noAutofit/>
-          </a:bodyPr>
-          <a:lstStyle>
-            <a:lvl1pPr>
-              <a:defRPr>
-                <a:solidFill>
-                  <a:schemeClr val="tx1"/>
-                </a:solidFill>
-              </a:defRPr>
-            </a:lvl1pPr>
-          </a:lstStyle>
-          <a:p>
-            <a:pPr lvl="0"/>
-            <a:r>
-              <a:rPr lang="en-US"/>
-              <a:t>Use this layout for presentations using short and crisp headings</a:t>
-            </a:r>
-          </a:p>
-        </p:txBody>
-      </p:sp>
-      <p:sp>
-        <p:nvSpPr>
-          <p:cNvPr id="4" name="Content Placeholder 2">
-            <a:extLst>
-              <a:ext uri="{FF2B5EF4-FFF2-40B4-BE49-F238E27FC236}">
-                <a16:creationId xmlns:a16="http://schemas.microsoft.com/office/drawing/2014/main" id="{784F54AF-EED6-486A-9ACA-42061F4AAE9A}"/>
-              </a:ext>
-            </a:extLst>
-          </p:cNvPr>
-          <p:cNvSpPr>
-            <a:spLocks noGrp="1"/>
-          </p:cNvSpPr>
-          <p:nvPr>
-            <p:ph sz="quarter" idx="11" hasCustomPrompt="1"/>
-          </p:nvPr>
-        </p:nvSpPr>
-        <p:spPr>
-          <a:xfrm>
-            <a:off x="479425" y="1844675"/>
-            <a:ext cx="8353426" cy="4392612"/>
-          </a:xfrm>
-          <a:prstGeom prst="rect">
-            <a:avLst/>
-          </a:prstGeom>
-        </p:spPr>
-        <p:txBody>
-          <a:bodyPr/>
-          <a:lstStyle>
-            <a:lvl1pPr>
-              <a:defRPr>
-                <a:solidFill>
-                  <a:schemeClr val="tx1"/>
-                </a:solidFill>
-              </a:defRPr>
-            </a:lvl1pPr>
-            <a:lvl2pPr>
-              <a:defRPr>
-                <a:solidFill>
-                  <a:schemeClr val="tx1"/>
-                </a:solidFill>
-              </a:defRPr>
-            </a:lvl2pPr>
-            <a:lvl3pPr>
-              <a:defRPr>
-                <a:solidFill>
-                  <a:schemeClr val="tx1"/>
-                </a:solidFill>
-              </a:defRPr>
-            </a:lvl3pPr>
-            <a:lvl4pPr>
-              <a:defRPr>
-                <a:solidFill>
-                  <a:schemeClr val="tx1"/>
-                </a:solidFill>
-              </a:defRPr>
-            </a:lvl4pPr>
-            <a:lvl5pPr>
-              <a:defRPr/>
-            </a:lvl5pPr>
-          </a:lstStyle>
-          <a:p>
-            <a:pPr lvl="0"/>
-            <a:r>
-              <a:rPr lang="en-US"/>
-              <a:t>For heading, use Ericsson Hilda in bold. For copy and bullets, use Ericsson Hilda.</a:t>
-            </a:r>
-          </a:p>
-          <a:p>
-            <a:pPr lvl="0"/>
-            <a:r>
-              <a:rPr lang="en-US"/>
-              <a:t>First level</a:t>
-            </a:r>
-          </a:p>
-          <a:p>
-            <a:pPr lvl="1"/>
-            <a:r>
-              <a:rPr lang="en-US"/>
-              <a:t>Second level</a:t>
-            </a:r>
-          </a:p>
-          <a:p>
-            <a:pPr lvl="2"/>
-            <a:r>
-              <a:rPr lang="en-US"/>
-              <a:t>Third level</a:t>
-            </a:r>
-          </a:p>
-          <a:p>
-            <a:pPr lvl="3"/>
-            <a:r>
-              <a:rPr lang="en-US"/>
-              <a:t>Fourth level</a:t>
-            </a:r>
-          </a:p>
-        </p:txBody>
-      </p:sp>
-      <p:sp>
-        <p:nvSpPr>
-          <p:cNvPr id="7" name="txtfooterCopy" descr="{&#10; &quot;SkabelonDesign&quot;: {&#10; &quot;textualValue&quot;: &quot;&lt;key1/&gt;&quot;,&#10; &quot;bindingCollection&quot;: {&#10; &quot;key1&quot;: {&quot;SkabelonDesign&quot;:{&quot;type&quot;:&quot;Text&quot;,&quot;binding&quot;:&quot;Module.FooterText&quot;}}&#10; }&#10; }&#10;}">
-            <a:extLst>
-              <a:ext uri="{FF2B5EF4-FFF2-40B4-BE49-F238E27FC236}">
-                <a16:creationId xmlns:a16="http://schemas.microsoft.com/office/drawing/2014/main" id="{DB8BC610-C1B0-4C6A-B5C2-80DA487CE5DE}"/>
-              </a:ext>
-            </a:extLst>
-          </p:cNvPr>
-          <p:cNvSpPr txBox="1"/>
-          <p:nvPr userDrawn="1"/>
-        </p:nvSpPr>
-        <p:spPr>
-          <a:xfrm>
-            <a:off x="421638" y="6524625"/>
-            <a:ext cx="65" cy="123111"/>
-          </a:xfrm>
-          <a:prstGeom prst="rect">
-            <a:avLst/>
-          </a:prstGeom>
-          <a:noFill/>
-        </p:spPr>
-        <p:txBody>
-          <a:bodyPr vert="horz" wrap="none" lIns="0" tIns="0" rIns="0" bIns="0" rtlCol="0">
-            <a:spAutoFit/>
-          </a:bodyPr>
-          <a:lstStyle/>
-          <a:p>
-            <a:pPr marL="0" indent="0" algn="l">
-              <a:buFontTx/>
-              <a:buNone/>
-            </a:pPr>
-            <a:endParaRPr lang="en-US" sz="800" b="0" i="0" u="none">
-              <a:solidFill>
-                <a:schemeClr val="tx1"/>
-              </a:solidFill>
-              <a:latin typeface="+mn-lt"/>
-            </a:endParaRPr>
-          </a:p>
-        </p:txBody>
-      </p:sp>
-    </p:spTree>
-    <p:extLst>
-      <p:ext uri="{BB962C8B-B14F-4D97-AF65-F5344CB8AC3E}">
-        <p14:creationId xmlns:p14="http://schemas.microsoft.com/office/powerpoint/2010/main" val="2532969809"/>
-      </p:ext>
-    </p:extLst>
-  </p:cSld>
-  <p:clrMapOvr>
-    <a:overrideClrMapping bg1="dk1" tx1="lt1" bg2="dk2" tx2="lt2" accent1="accent1" accent2="accent2" accent3="accent3" accent4="accent4" accent5="accent5" accent6="accent6" hlink="hlink" folHlink="folHlink"/>
-  </p:clrMapOvr>
-</p:sldLayout>
-</file>
-
-<file path=ppt/slideLayouts/slideLayout19.xml><?xml version="1.0" encoding="utf-8"?>
-<p:sldLayout xmlns:a="http://schemas.openxmlformats.org/drawingml/2006/main" xmlns:r="http://schemas.openxmlformats.org/officeDocument/2006/relationships" xmlns:p="http://schemas.openxmlformats.org/presentationml/2006/main" preserve="1" userDrawn="1">
-  <p:cSld name="Title and 2 columns">
-    <p:spTree>
-      <p:nvGrpSpPr>
-        <p:cNvPr id="1" name=""/>
-        <p:cNvGrpSpPr/>
-        <p:nvPr/>
-      </p:nvGrpSpPr>
-      <p:grpSpPr>
-        <a:xfrm>
-          <a:off x="0" y="0"/>
-          <a:ext cx="0" cy="0"/>
-          <a:chOff x="0" y="0"/>
-          <a:chExt cx="0" cy="0"/>
-        </a:xfrm>
-      </p:grpSpPr>
-      <p:sp>
-        <p:nvSpPr>
-          <p:cNvPr id="6" name="Title_SM">
-            <a:extLst>
-              <a:ext uri="{FF2B5EF4-FFF2-40B4-BE49-F238E27FC236}">
-                <a16:creationId xmlns:a16="http://schemas.microsoft.com/office/drawing/2014/main" id="{891BF4C4-9DF9-4D9F-A738-37FBCD45AA68}"/>
-              </a:ext>
-            </a:extLst>
-          </p:cNvPr>
-          <p:cNvSpPr>
-            <a:spLocks noGrp="1" noChangeArrowheads="1"/>
-          </p:cNvSpPr>
-          <p:nvPr>
-            <p:ph type="title" hasCustomPrompt="1"/>
-          </p:nvPr>
-        </p:nvSpPr>
-        <p:spPr bwMode="auto">
-          <a:xfrm>
-            <a:off x="479425" y="476250"/>
-            <a:ext cx="8353426" cy="1081088"/>
-          </a:xfrm>
-          <a:prstGeom prst="rect">
-            <a:avLst/>
-          </a:prstGeom>
-          <a:noFill/>
-          <a:ln w="9525">
-            <a:noFill/>
-            <a:miter lim="800000"/>
-            <a:headEnd/>
-            <a:tailEnd/>
-          </a:ln>
-        </p:spPr>
-        <p:txBody>
-          <a:bodyPr vert="horz" wrap="square" lIns="72000" tIns="36000" rIns="73152" bIns="36576" numCol="1" anchor="t" anchorCtr="0" compatLnSpc="1">
-            <a:prstTxWarp prst="textNoShape">
-              <a:avLst/>
-            </a:prstTxWarp>
-            <a:noAutofit/>
-          </a:bodyPr>
-          <a:lstStyle>
-            <a:lvl1pPr>
-              <a:defRPr>
-                <a:solidFill>
-                  <a:schemeClr val="tx1"/>
-                </a:solidFill>
-              </a:defRPr>
-            </a:lvl1pPr>
-          </a:lstStyle>
-          <a:p>
-            <a:pPr lvl="0"/>
-            <a:r>
-              <a:rPr lang="en-US"/>
-              <a:t>Slide title, Ericsson Hilda Light 40pt, Ericsson Black, max 2-lines</a:t>
-            </a:r>
-          </a:p>
-        </p:txBody>
-      </p:sp>
-      <p:sp>
-        <p:nvSpPr>
-          <p:cNvPr id="3" name="Content Placeholder 1"/>
-          <p:cNvSpPr>
-            <a:spLocks noGrp="1"/>
-          </p:cNvSpPr>
-          <p:nvPr>
-            <p:ph sz="half" idx="1" hasCustomPrompt="1"/>
-          </p:nvPr>
-        </p:nvSpPr>
-        <p:spPr>
-          <a:xfrm>
-            <a:off x="479425" y="1844675"/>
-            <a:ext cx="5472113" cy="4392612"/>
-          </a:xfrm>
-          <a:prstGeom prst="rect">
-            <a:avLst/>
-          </a:prstGeom>
-        </p:spPr>
-        <p:txBody>
-          <a:bodyPr/>
-          <a:lstStyle>
-            <a:lvl1pPr>
-              <a:defRPr>
-                <a:solidFill>
-                  <a:schemeClr val="tx1"/>
-                </a:solidFill>
-              </a:defRPr>
-            </a:lvl1pPr>
-            <a:lvl2pPr>
-              <a:defRPr>
-                <a:solidFill>
-                  <a:schemeClr val="tx1"/>
-                </a:solidFill>
-              </a:defRPr>
-            </a:lvl2pPr>
-            <a:lvl3pPr>
-              <a:defRPr>
-                <a:solidFill>
-                  <a:schemeClr val="tx1"/>
-                </a:solidFill>
-              </a:defRPr>
-            </a:lvl3pPr>
-            <a:lvl4pPr>
-              <a:defRPr>
-                <a:solidFill>
-                  <a:schemeClr val="tx1"/>
-                </a:solidFill>
-              </a:defRPr>
-            </a:lvl4pPr>
-            <a:lvl5pPr>
-              <a:defRPr/>
-            </a:lvl5pPr>
-          </a:lstStyle>
-          <a:p>
-            <a:pPr lvl="0"/>
-            <a:r>
-              <a:rPr lang="en-US"/>
-              <a:t>For heading, use Ericsson Hilda in bold. For copy and bullets, use Ericsson Hilda.</a:t>
-            </a:r>
-          </a:p>
-          <a:p>
-            <a:pPr lvl="0"/>
-            <a:r>
-              <a:rPr lang="en-US"/>
-              <a:t>First level</a:t>
-            </a:r>
-          </a:p>
-          <a:p>
-            <a:pPr lvl="1"/>
-            <a:r>
-              <a:rPr lang="en-US"/>
-              <a:t>Second level</a:t>
-            </a:r>
-          </a:p>
-          <a:p>
-            <a:pPr lvl="2"/>
-            <a:r>
-              <a:rPr lang="en-US"/>
-              <a:t>Third level</a:t>
-            </a:r>
-          </a:p>
-          <a:p>
-            <a:pPr lvl="3"/>
-            <a:r>
-              <a:rPr lang="en-US"/>
-              <a:t>Fourth level</a:t>
-            </a:r>
-          </a:p>
-        </p:txBody>
-      </p:sp>
-      <p:sp>
-        <p:nvSpPr>
-          <p:cNvPr id="5" name="Content Placeholder 3"/>
-          <p:cNvSpPr>
-            <a:spLocks noGrp="1"/>
-          </p:cNvSpPr>
-          <p:nvPr>
-            <p:ph sz="quarter" idx="3" hasCustomPrompt="1"/>
-          </p:nvPr>
-        </p:nvSpPr>
-        <p:spPr>
-          <a:xfrm>
-            <a:off x="6240463" y="1844674"/>
-            <a:ext cx="5472112" cy="4392613"/>
-          </a:xfrm>
-          <a:prstGeom prst="rect">
-            <a:avLst/>
-          </a:prstGeom>
-        </p:spPr>
-        <p:txBody>
-          <a:bodyPr/>
-          <a:lstStyle>
-            <a:lvl1pPr>
-              <a:defRPr>
-                <a:solidFill>
-                  <a:schemeClr val="tx1"/>
-                </a:solidFill>
-              </a:defRPr>
-            </a:lvl1pPr>
-            <a:lvl2pPr>
-              <a:defRPr>
-                <a:solidFill>
-                  <a:schemeClr val="tx1"/>
-                </a:solidFill>
-              </a:defRPr>
-            </a:lvl2pPr>
-            <a:lvl3pPr>
-              <a:defRPr>
-                <a:solidFill>
-                  <a:schemeClr val="tx1"/>
-                </a:solidFill>
-              </a:defRPr>
-            </a:lvl3pPr>
-            <a:lvl4pPr>
-              <a:defRPr>
-                <a:solidFill>
-                  <a:schemeClr val="tx1"/>
-                </a:solidFill>
-              </a:defRPr>
-            </a:lvl4pPr>
-            <a:lvl5pPr>
-              <a:defRPr/>
-            </a:lvl5pPr>
-          </a:lstStyle>
-          <a:p>
-            <a:pPr lvl="0"/>
-            <a:r>
-              <a:rPr lang="en-US"/>
-              <a:t>For heading, use Ericsson Hilda in bold. For copy and bullets, use Ericsson Hilda.</a:t>
-            </a:r>
-          </a:p>
-          <a:p>
-            <a:pPr lvl="0"/>
-            <a:r>
-              <a:rPr lang="en-US"/>
-              <a:t>First level</a:t>
-            </a:r>
-          </a:p>
-          <a:p>
-            <a:pPr lvl="1"/>
-            <a:r>
-              <a:rPr lang="en-US"/>
-              <a:t>Second level</a:t>
-            </a:r>
-          </a:p>
-          <a:p>
-            <a:pPr lvl="2"/>
-            <a:r>
-              <a:rPr lang="en-US"/>
-              <a:t>Third level</a:t>
-            </a:r>
-          </a:p>
-          <a:p>
-            <a:pPr lvl="3"/>
-            <a:r>
-              <a:rPr lang="en-US"/>
-              <a:t>Fourth level</a:t>
-            </a:r>
-          </a:p>
-        </p:txBody>
-      </p:sp>
-      <p:sp>
-        <p:nvSpPr>
-          <p:cNvPr id="8" name="txtfooterCopy" descr="{&#10; &quot;SkabelonDesign&quot;: {&#10; &quot;textualValue&quot;: &quot;&lt;key1/&gt;&quot;,&#10; &quot;bindingCollection&quot;: {&#10; &quot;key1&quot;: {&quot;SkabelonDesign&quot;:{&quot;type&quot;:&quot;Text&quot;,&quot;binding&quot;:&quot;Module.FooterText&quot;}}&#10; }&#10; }&#10;}">
-            <a:extLst>
-              <a:ext uri="{FF2B5EF4-FFF2-40B4-BE49-F238E27FC236}">
-                <a16:creationId xmlns:a16="http://schemas.microsoft.com/office/drawing/2014/main" id="{53797230-5A6C-4718-8C90-CB9F2709B382}"/>
-              </a:ext>
-            </a:extLst>
-          </p:cNvPr>
-          <p:cNvSpPr txBox="1"/>
-          <p:nvPr userDrawn="1"/>
-        </p:nvSpPr>
-        <p:spPr>
-          <a:xfrm>
-            <a:off x="421638" y="6524625"/>
-            <a:ext cx="65" cy="123111"/>
-          </a:xfrm>
-          <a:prstGeom prst="rect">
-            <a:avLst/>
-          </a:prstGeom>
-          <a:noFill/>
-        </p:spPr>
-        <p:txBody>
-          <a:bodyPr vert="horz" wrap="none" lIns="0" tIns="0" rIns="0" bIns="0" rtlCol="0">
-            <a:spAutoFit/>
-          </a:bodyPr>
-          <a:lstStyle/>
-          <a:p>
-            <a:pPr marL="0" indent="0" algn="l">
-              <a:buFontTx/>
-              <a:buNone/>
-            </a:pPr>
-            <a:endParaRPr lang="en-US" sz="800" b="0" i="0" u="none">
-              <a:solidFill>
-                <a:schemeClr val="tx1"/>
-              </a:solidFill>
-              <a:latin typeface="+mn-lt"/>
-            </a:endParaRPr>
-          </a:p>
-        </p:txBody>
-      </p:sp>
-    </p:spTree>
-    <p:extLst>
-      <p:ext uri="{BB962C8B-B14F-4D97-AF65-F5344CB8AC3E}">
-        <p14:creationId xmlns:p14="http://schemas.microsoft.com/office/powerpoint/2010/main" val="3374944777"/>
       </p:ext>
     </p:extLst>
   </p:cSld>
@@ -3740,6 +3365,641 @@
 
 <file path=ppt/slideLayouts/slideLayout20.xml><?xml version="1.0" encoding="utf-8"?>
 <p:sldLayout xmlns:a="http://schemas.openxmlformats.org/drawingml/2006/main" xmlns:r="http://schemas.openxmlformats.org/officeDocument/2006/relationships" xmlns:p="http://schemas.openxmlformats.org/presentationml/2006/main" showMasterSp="0" preserve="1" userDrawn="1">
+  <p:cSld name="Black Title and 1 smaller column">
+    <p:bg>
+      <p:bgRef idx="1001">
+        <a:schemeClr val="bg2"/>
+      </p:bgRef>
+    </p:bg>
+    <p:spTree>
+      <p:nvGrpSpPr>
+        <p:cNvPr id="1" name=""/>
+        <p:cNvGrpSpPr/>
+        <p:nvPr/>
+      </p:nvGrpSpPr>
+      <p:grpSpPr>
+        <a:xfrm>
+          <a:off x="0" y="0"/>
+          <a:ext cx="0" cy="0"/>
+          <a:chOff x="0" y="0"/>
+          <a:chExt cx="0" cy="0"/>
+        </a:xfrm>
+      </p:grpSpPr>
+      <p:sp>
+        <p:nvSpPr>
+          <p:cNvPr id="2" name="Background">
+            <a:extLst>
+              <a:ext uri="{FF2B5EF4-FFF2-40B4-BE49-F238E27FC236}">
+                <a16:creationId xmlns:a16="http://schemas.microsoft.com/office/drawing/2014/main" id="{C8FC9BDE-AACF-FAD9-0569-2308D75B1812}"/>
+              </a:ext>
+            </a:extLst>
+          </p:cNvPr>
+          <p:cNvSpPr/>
+          <p:nvPr userDrawn="1"/>
+        </p:nvSpPr>
+        <p:spPr bwMode="auto">
+          <a:xfrm>
+            <a:off x="0" y="0"/>
+            <a:ext cx="12192000" cy="6858000"/>
+          </a:xfrm>
+          <a:prstGeom prst="rect">
+            <a:avLst/>
+          </a:prstGeom>
+          <a:solidFill>
+            <a:schemeClr val="bg2">
+              <a:alpha val="0"/>
+            </a:schemeClr>
+          </a:solidFill>
+          <a:ln w="12700" cap="flat" cmpd="sng" algn="ctr">
+            <a:noFill/>
+            <a:prstDash val="solid"/>
+            <a:round/>
+            <a:headEnd type="none" w="med" len="med"/>
+            <a:tailEnd type="none" w="med" len="med"/>
+          </a:ln>
+          <a:effectLst/>
+        </p:spPr>
+        <p:txBody>
+          <a:bodyPr rot="0" spcFirstLastPara="0" vertOverflow="overflow" horzOverflow="overflow" vert="horz" wrap="square" lIns="72000" tIns="36000" rIns="73152" bIns="36576" numCol="1" spcCol="0" rtlCol="0" fromWordArt="0" anchor="t" anchorCtr="0" forceAA="0" compatLnSpc="1">
+            <a:prstTxWarp prst="textNoShape">
+              <a:avLst/>
+            </a:prstTxWarp>
+            <a:noAutofit/>
+          </a:bodyPr>
+          <a:lstStyle/>
+          <a:p>
+            <a:pPr marL="180000" indent="-180000" algn="l">
+              <a:spcBef>
+                <a:spcPts val="800"/>
+              </a:spcBef>
+              <a:buFont typeface="Ericsson Hilda" panose="00000500000000000000" pitchFamily="2" charset="0"/>
+              <a:buChar char="●"/>
+            </a:pPr>
+            <a:endParaRPr lang="en-US">
+              <a:solidFill>
+                <a:schemeClr val="bg1"/>
+              </a:solidFill>
+              <a:latin typeface="+mn-lt"/>
+            </a:endParaRPr>
+          </a:p>
+        </p:txBody>
+      </p:sp>
+      <p:pic>
+        <p:nvPicPr>
+          <p:cNvPr id="3" name="Logo">
+            <a:extLst>
+              <a:ext uri="{FF2B5EF4-FFF2-40B4-BE49-F238E27FC236}">
+                <a16:creationId xmlns:a16="http://schemas.microsoft.com/office/drawing/2014/main" id="{3989B81D-94DE-1159-ADB9-A5A03B074BB4}"/>
+              </a:ext>
+            </a:extLst>
+          </p:cNvPr>
+          <p:cNvPicPr>
+            <a:picLocks noChangeAspect="1"/>
+          </p:cNvPicPr>
+          <p:nvPr userDrawn="1"/>
+        </p:nvPicPr>
+        <p:blipFill>
+          <a:blip r:embed="rId2">
+            <a:extLst>
+              <a:ext uri="{28A0092B-C50C-407E-A947-70E740481C1C}">
+                <a14:useLocalDpi xmlns:a14="http://schemas.microsoft.com/office/drawing/2010/main" val="0"/>
+              </a:ext>
+            </a:extLst>
+          </a:blip>
+          <a:stretch>
+            <a:fillRect/>
+          </a:stretch>
+        </p:blipFill>
+        <p:spPr>
+          <a:xfrm>
+            <a:off x="11379841" y="429421"/>
+            <a:ext cx="482228" cy="482439"/>
+          </a:xfrm>
+          <a:prstGeom prst="rect">
+            <a:avLst/>
+          </a:prstGeom>
+        </p:spPr>
+      </p:pic>
+      <p:sp>
+        <p:nvSpPr>
+          <p:cNvPr id="6" name="Title_SM">
+            <a:extLst>
+              <a:ext uri="{FF2B5EF4-FFF2-40B4-BE49-F238E27FC236}">
+                <a16:creationId xmlns:a16="http://schemas.microsoft.com/office/drawing/2014/main" id="{3F4EF873-DC0F-4698-BEC2-502DB043AA5C}"/>
+              </a:ext>
+            </a:extLst>
+          </p:cNvPr>
+          <p:cNvSpPr>
+            <a:spLocks noGrp="1" noChangeArrowheads="1"/>
+          </p:cNvSpPr>
+          <p:nvPr>
+            <p:ph type="title" hasCustomPrompt="1"/>
+          </p:nvPr>
+        </p:nvSpPr>
+        <p:spPr bwMode="auto">
+          <a:xfrm>
+            <a:off x="479425" y="476250"/>
+            <a:ext cx="8353426" cy="1081088"/>
+          </a:xfrm>
+          <a:prstGeom prst="rect">
+            <a:avLst/>
+          </a:prstGeom>
+          <a:noFill/>
+          <a:ln w="9525">
+            <a:noFill/>
+            <a:miter lim="800000"/>
+            <a:headEnd/>
+            <a:tailEnd/>
+          </a:ln>
+        </p:spPr>
+        <p:txBody>
+          <a:bodyPr vert="horz" wrap="square" lIns="72000" tIns="36000" rIns="73152" bIns="36576" numCol="1" anchor="t" anchorCtr="0" compatLnSpc="1">
+            <a:prstTxWarp prst="textNoShape">
+              <a:avLst/>
+            </a:prstTxWarp>
+            <a:noAutofit/>
+          </a:bodyPr>
+          <a:lstStyle>
+            <a:lvl1pPr>
+              <a:defRPr>
+                <a:solidFill>
+                  <a:schemeClr val="tx1"/>
+                </a:solidFill>
+              </a:defRPr>
+            </a:lvl1pPr>
+          </a:lstStyle>
+          <a:p>
+            <a:pPr lvl="0"/>
+            <a:r>
+              <a:rPr lang="en-US"/>
+              <a:t>Use this layout for presentations using short and crisp headings</a:t>
+            </a:r>
+          </a:p>
+        </p:txBody>
+      </p:sp>
+      <p:sp>
+        <p:nvSpPr>
+          <p:cNvPr id="4" name="Content Placeholder 2">
+            <a:extLst>
+              <a:ext uri="{FF2B5EF4-FFF2-40B4-BE49-F238E27FC236}">
+                <a16:creationId xmlns:a16="http://schemas.microsoft.com/office/drawing/2014/main" id="{784F54AF-EED6-486A-9ACA-42061F4AAE9A}"/>
+              </a:ext>
+            </a:extLst>
+          </p:cNvPr>
+          <p:cNvSpPr>
+            <a:spLocks noGrp="1"/>
+          </p:cNvSpPr>
+          <p:nvPr>
+            <p:ph sz="quarter" idx="11" hasCustomPrompt="1"/>
+          </p:nvPr>
+        </p:nvSpPr>
+        <p:spPr>
+          <a:xfrm>
+            <a:off x="479425" y="1844675"/>
+            <a:ext cx="8353426" cy="4392612"/>
+          </a:xfrm>
+          <a:prstGeom prst="rect">
+            <a:avLst/>
+          </a:prstGeom>
+        </p:spPr>
+        <p:txBody>
+          <a:bodyPr/>
+          <a:lstStyle>
+            <a:lvl1pPr>
+              <a:defRPr>
+                <a:solidFill>
+                  <a:schemeClr val="tx1"/>
+                </a:solidFill>
+              </a:defRPr>
+            </a:lvl1pPr>
+            <a:lvl2pPr>
+              <a:defRPr>
+                <a:solidFill>
+                  <a:schemeClr val="tx1"/>
+                </a:solidFill>
+              </a:defRPr>
+            </a:lvl2pPr>
+            <a:lvl3pPr>
+              <a:defRPr>
+                <a:solidFill>
+                  <a:schemeClr val="tx1"/>
+                </a:solidFill>
+              </a:defRPr>
+            </a:lvl3pPr>
+            <a:lvl4pPr>
+              <a:defRPr>
+                <a:solidFill>
+                  <a:schemeClr val="tx1"/>
+                </a:solidFill>
+              </a:defRPr>
+            </a:lvl4pPr>
+            <a:lvl5pPr>
+              <a:defRPr/>
+            </a:lvl5pPr>
+          </a:lstStyle>
+          <a:p>
+            <a:pPr lvl="0"/>
+            <a:r>
+              <a:rPr lang="en-US"/>
+              <a:t>For heading, use Ericsson Hilda in bold. For copy and bullets, use Ericsson Hilda.</a:t>
+            </a:r>
+          </a:p>
+          <a:p>
+            <a:pPr lvl="0"/>
+            <a:r>
+              <a:rPr lang="en-US"/>
+              <a:t>First level</a:t>
+            </a:r>
+          </a:p>
+          <a:p>
+            <a:pPr lvl="1"/>
+            <a:r>
+              <a:rPr lang="en-US"/>
+              <a:t>Second level</a:t>
+            </a:r>
+          </a:p>
+          <a:p>
+            <a:pPr lvl="2"/>
+            <a:r>
+              <a:rPr lang="en-US"/>
+              <a:t>Third level</a:t>
+            </a:r>
+          </a:p>
+          <a:p>
+            <a:pPr lvl="3"/>
+            <a:r>
+              <a:rPr lang="en-US"/>
+              <a:t>Fourth level</a:t>
+            </a:r>
+          </a:p>
+        </p:txBody>
+      </p:sp>
+      <p:sp>
+        <p:nvSpPr>
+          <p:cNvPr id="7" name="txtfooterCopy" descr="{&#10; &quot;SkabelonDesign&quot;: {&#10; &quot;textualValue&quot;: &quot;&lt;key1/&gt;&quot;,&#10; &quot;bindingCollection&quot;: {&#10; &quot;key1&quot;: {&quot;SkabelonDesign&quot;:{&quot;type&quot;:&quot;Text&quot;,&quot;binding&quot;:&quot;Module.FooterText&quot;}}&#10; }&#10; }&#10;}">
+            <a:extLst>
+              <a:ext uri="{FF2B5EF4-FFF2-40B4-BE49-F238E27FC236}">
+                <a16:creationId xmlns:a16="http://schemas.microsoft.com/office/drawing/2014/main" id="{DB8BC610-C1B0-4C6A-B5C2-80DA487CE5DE}"/>
+              </a:ext>
+            </a:extLst>
+          </p:cNvPr>
+          <p:cNvSpPr txBox="1"/>
+          <p:nvPr userDrawn="1"/>
+        </p:nvSpPr>
+        <p:spPr>
+          <a:xfrm>
+            <a:off x="421638" y="6524625"/>
+            <a:ext cx="65" cy="123111"/>
+          </a:xfrm>
+          <a:prstGeom prst="rect">
+            <a:avLst/>
+          </a:prstGeom>
+          <a:noFill/>
+        </p:spPr>
+        <p:txBody>
+          <a:bodyPr vert="horz" wrap="none" lIns="0" tIns="0" rIns="0" bIns="0" rtlCol="0">
+            <a:spAutoFit/>
+          </a:bodyPr>
+          <a:lstStyle/>
+          <a:p>
+            <a:pPr marL="0" indent="0" algn="l">
+              <a:buFontTx/>
+              <a:buNone/>
+            </a:pPr>
+            <a:endParaRPr lang="en-US" sz="800" b="0" i="0" u="none">
+              <a:solidFill>
+                <a:schemeClr val="tx1"/>
+              </a:solidFill>
+              <a:latin typeface="+mn-lt"/>
+            </a:endParaRPr>
+          </a:p>
+        </p:txBody>
+      </p:sp>
+    </p:spTree>
+    <p:extLst>
+      <p:ext uri="{BB962C8B-B14F-4D97-AF65-F5344CB8AC3E}">
+        <p14:creationId xmlns:p14="http://schemas.microsoft.com/office/powerpoint/2010/main" val="2532969809"/>
+      </p:ext>
+    </p:extLst>
+  </p:cSld>
+  <p:clrMapOvr>
+    <a:overrideClrMapping bg1="dk1" tx1="lt1" bg2="dk2" tx2="lt2" accent1="accent1" accent2="accent2" accent3="accent3" accent4="accent4" accent5="accent5" accent6="accent6" hlink="hlink" folHlink="folHlink"/>
+  </p:clrMapOvr>
+</p:sldLayout>
+</file>
+
+<file path=ppt/slideLayouts/slideLayout21.xml><?xml version="1.0" encoding="utf-8"?>
+<p:sldLayout xmlns:a="http://schemas.openxmlformats.org/drawingml/2006/main" xmlns:r="http://schemas.openxmlformats.org/officeDocument/2006/relationships" xmlns:p="http://schemas.openxmlformats.org/presentationml/2006/main" preserve="1" userDrawn="1">
+  <p:cSld name="Title and 2 columns">
+    <p:spTree>
+      <p:nvGrpSpPr>
+        <p:cNvPr id="1" name=""/>
+        <p:cNvGrpSpPr/>
+        <p:nvPr/>
+      </p:nvGrpSpPr>
+      <p:grpSpPr>
+        <a:xfrm>
+          <a:off x="0" y="0"/>
+          <a:ext cx="0" cy="0"/>
+          <a:chOff x="0" y="0"/>
+          <a:chExt cx="0" cy="0"/>
+        </a:xfrm>
+      </p:grpSpPr>
+      <p:sp>
+        <p:nvSpPr>
+          <p:cNvPr id="6" name="Title_SM">
+            <a:extLst>
+              <a:ext uri="{FF2B5EF4-FFF2-40B4-BE49-F238E27FC236}">
+                <a16:creationId xmlns:a16="http://schemas.microsoft.com/office/drawing/2014/main" id="{891BF4C4-9DF9-4D9F-A738-37FBCD45AA68}"/>
+              </a:ext>
+            </a:extLst>
+          </p:cNvPr>
+          <p:cNvSpPr>
+            <a:spLocks noGrp="1" noChangeArrowheads="1"/>
+          </p:cNvSpPr>
+          <p:nvPr>
+            <p:ph type="title" hasCustomPrompt="1"/>
+          </p:nvPr>
+        </p:nvSpPr>
+        <p:spPr bwMode="auto">
+          <a:xfrm>
+            <a:off x="479425" y="476250"/>
+            <a:ext cx="8353426" cy="1081088"/>
+          </a:xfrm>
+          <a:prstGeom prst="rect">
+            <a:avLst/>
+          </a:prstGeom>
+          <a:noFill/>
+          <a:ln w="9525">
+            <a:noFill/>
+            <a:miter lim="800000"/>
+            <a:headEnd/>
+            <a:tailEnd/>
+          </a:ln>
+        </p:spPr>
+        <p:txBody>
+          <a:bodyPr vert="horz" wrap="square" lIns="72000" tIns="36000" rIns="73152" bIns="36576" numCol="1" anchor="t" anchorCtr="0" compatLnSpc="1">
+            <a:prstTxWarp prst="textNoShape">
+              <a:avLst/>
+            </a:prstTxWarp>
+            <a:noAutofit/>
+          </a:bodyPr>
+          <a:lstStyle>
+            <a:lvl1pPr>
+              <a:defRPr>
+                <a:solidFill>
+                  <a:schemeClr val="tx1"/>
+                </a:solidFill>
+              </a:defRPr>
+            </a:lvl1pPr>
+          </a:lstStyle>
+          <a:p>
+            <a:pPr lvl="0"/>
+            <a:r>
+              <a:rPr lang="en-US"/>
+              <a:t>Slide title, Ericsson Hilda Light 40pt, Ericsson Black, max 2-lines</a:t>
+            </a:r>
+          </a:p>
+        </p:txBody>
+      </p:sp>
+      <p:sp>
+        <p:nvSpPr>
+          <p:cNvPr id="3" name="Content Placeholder 1"/>
+          <p:cNvSpPr>
+            <a:spLocks noGrp="1"/>
+          </p:cNvSpPr>
+          <p:nvPr>
+            <p:ph sz="half" idx="1" hasCustomPrompt="1"/>
+          </p:nvPr>
+        </p:nvSpPr>
+        <p:spPr>
+          <a:xfrm>
+            <a:off x="479425" y="1844675"/>
+            <a:ext cx="5472113" cy="4392612"/>
+          </a:xfrm>
+          <a:prstGeom prst="rect">
+            <a:avLst/>
+          </a:prstGeom>
+        </p:spPr>
+        <p:txBody>
+          <a:bodyPr/>
+          <a:lstStyle>
+            <a:lvl1pPr>
+              <a:defRPr>
+                <a:solidFill>
+                  <a:schemeClr val="tx1"/>
+                </a:solidFill>
+              </a:defRPr>
+            </a:lvl1pPr>
+            <a:lvl2pPr>
+              <a:defRPr>
+                <a:solidFill>
+                  <a:schemeClr val="tx1"/>
+                </a:solidFill>
+              </a:defRPr>
+            </a:lvl2pPr>
+            <a:lvl3pPr>
+              <a:defRPr>
+                <a:solidFill>
+                  <a:schemeClr val="tx1"/>
+                </a:solidFill>
+              </a:defRPr>
+            </a:lvl3pPr>
+            <a:lvl4pPr>
+              <a:defRPr>
+                <a:solidFill>
+                  <a:schemeClr val="tx1"/>
+                </a:solidFill>
+              </a:defRPr>
+            </a:lvl4pPr>
+            <a:lvl5pPr>
+              <a:defRPr/>
+            </a:lvl5pPr>
+          </a:lstStyle>
+          <a:p>
+            <a:pPr lvl="0"/>
+            <a:r>
+              <a:rPr lang="en-US"/>
+              <a:t>For heading, use Ericsson Hilda in bold. For copy and bullets, use Ericsson Hilda.</a:t>
+            </a:r>
+          </a:p>
+          <a:p>
+            <a:pPr lvl="0"/>
+            <a:r>
+              <a:rPr lang="en-US"/>
+              <a:t>First level</a:t>
+            </a:r>
+          </a:p>
+          <a:p>
+            <a:pPr lvl="1"/>
+            <a:r>
+              <a:rPr lang="en-US"/>
+              <a:t>Second level</a:t>
+            </a:r>
+          </a:p>
+          <a:p>
+            <a:pPr lvl="2"/>
+            <a:r>
+              <a:rPr lang="en-US"/>
+              <a:t>Third level</a:t>
+            </a:r>
+          </a:p>
+          <a:p>
+            <a:pPr lvl="3"/>
+            <a:r>
+              <a:rPr lang="en-US"/>
+              <a:t>Fourth level</a:t>
+            </a:r>
+          </a:p>
+        </p:txBody>
+      </p:sp>
+      <p:sp>
+        <p:nvSpPr>
+          <p:cNvPr id="5" name="Content Placeholder 3"/>
+          <p:cNvSpPr>
+            <a:spLocks noGrp="1"/>
+          </p:cNvSpPr>
+          <p:nvPr>
+            <p:ph sz="quarter" idx="3" hasCustomPrompt="1"/>
+          </p:nvPr>
+        </p:nvSpPr>
+        <p:spPr>
+          <a:xfrm>
+            <a:off x="6240463" y="1844674"/>
+            <a:ext cx="5472112" cy="4392613"/>
+          </a:xfrm>
+          <a:prstGeom prst="rect">
+            <a:avLst/>
+          </a:prstGeom>
+        </p:spPr>
+        <p:txBody>
+          <a:bodyPr/>
+          <a:lstStyle>
+            <a:lvl1pPr>
+              <a:defRPr>
+                <a:solidFill>
+                  <a:schemeClr val="tx1"/>
+                </a:solidFill>
+              </a:defRPr>
+            </a:lvl1pPr>
+            <a:lvl2pPr>
+              <a:defRPr>
+                <a:solidFill>
+                  <a:schemeClr val="tx1"/>
+                </a:solidFill>
+              </a:defRPr>
+            </a:lvl2pPr>
+            <a:lvl3pPr>
+              <a:defRPr>
+                <a:solidFill>
+                  <a:schemeClr val="tx1"/>
+                </a:solidFill>
+              </a:defRPr>
+            </a:lvl3pPr>
+            <a:lvl4pPr>
+              <a:defRPr>
+                <a:solidFill>
+                  <a:schemeClr val="tx1"/>
+                </a:solidFill>
+              </a:defRPr>
+            </a:lvl4pPr>
+            <a:lvl5pPr>
+              <a:defRPr/>
+            </a:lvl5pPr>
+          </a:lstStyle>
+          <a:p>
+            <a:pPr lvl="0"/>
+            <a:r>
+              <a:rPr lang="en-US"/>
+              <a:t>For heading, use Ericsson Hilda in bold. For copy and bullets, use Ericsson Hilda.</a:t>
+            </a:r>
+          </a:p>
+          <a:p>
+            <a:pPr lvl="0"/>
+            <a:r>
+              <a:rPr lang="en-US"/>
+              <a:t>First level</a:t>
+            </a:r>
+          </a:p>
+          <a:p>
+            <a:pPr lvl="1"/>
+            <a:r>
+              <a:rPr lang="en-US"/>
+              <a:t>Second level</a:t>
+            </a:r>
+          </a:p>
+          <a:p>
+            <a:pPr lvl="2"/>
+            <a:r>
+              <a:rPr lang="en-US"/>
+              <a:t>Third level</a:t>
+            </a:r>
+          </a:p>
+          <a:p>
+            <a:pPr lvl="3"/>
+            <a:r>
+              <a:rPr lang="en-US"/>
+              <a:t>Fourth level</a:t>
+            </a:r>
+          </a:p>
+        </p:txBody>
+      </p:sp>
+      <p:sp>
+        <p:nvSpPr>
+          <p:cNvPr id="8" name="txtfooterCopy" descr="{&#10; &quot;SkabelonDesign&quot;: {&#10; &quot;textualValue&quot;: &quot;&lt;key1/&gt;&quot;,&#10; &quot;bindingCollection&quot;: {&#10; &quot;key1&quot;: {&quot;SkabelonDesign&quot;:{&quot;type&quot;:&quot;Text&quot;,&quot;binding&quot;:&quot;Module.FooterText&quot;}}&#10; }&#10; }&#10;}">
+            <a:extLst>
+              <a:ext uri="{FF2B5EF4-FFF2-40B4-BE49-F238E27FC236}">
+                <a16:creationId xmlns:a16="http://schemas.microsoft.com/office/drawing/2014/main" id="{53797230-5A6C-4718-8C90-CB9F2709B382}"/>
+              </a:ext>
+            </a:extLst>
+          </p:cNvPr>
+          <p:cNvSpPr txBox="1"/>
+          <p:nvPr userDrawn="1"/>
+        </p:nvSpPr>
+        <p:spPr>
+          <a:xfrm>
+            <a:off x="421638" y="6524625"/>
+            <a:ext cx="65" cy="123111"/>
+          </a:xfrm>
+          <a:prstGeom prst="rect">
+            <a:avLst/>
+          </a:prstGeom>
+          <a:noFill/>
+        </p:spPr>
+        <p:txBody>
+          <a:bodyPr vert="horz" wrap="none" lIns="0" tIns="0" rIns="0" bIns="0" rtlCol="0">
+            <a:spAutoFit/>
+          </a:bodyPr>
+          <a:lstStyle/>
+          <a:p>
+            <a:pPr marL="0" indent="0" algn="l">
+              <a:buFontTx/>
+              <a:buNone/>
+            </a:pPr>
+            <a:endParaRPr lang="en-US" sz="800" b="0" i="0" u="none">
+              <a:solidFill>
+                <a:schemeClr val="tx1"/>
+              </a:solidFill>
+              <a:latin typeface="+mn-lt"/>
+            </a:endParaRPr>
+          </a:p>
+        </p:txBody>
+      </p:sp>
+    </p:spTree>
+    <p:extLst>
+      <p:ext uri="{BB962C8B-B14F-4D97-AF65-F5344CB8AC3E}">
+        <p14:creationId xmlns:p14="http://schemas.microsoft.com/office/powerpoint/2010/main" val="3374944777"/>
+      </p:ext>
+    </p:extLst>
+  </p:cSld>
+  <p:clrMapOvr>
+    <a:masterClrMapping/>
+  </p:clrMapOvr>
+</p:sldLayout>
+</file>
+
+<file path=ppt/slideLayouts/slideLayout22.xml><?xml version="1.0" encoding="utf-8"?>
+<p:sldLayout xmlns:a="http://schemas.openxmlformats.org/drawingml/2006/main" xmlns:r="http://schemas.openxmlformats.org/officeDocument/2006/relationships" xmlns:p="http://schemas.openxmlformats.org/presentationml/2006/main" showMasterSp="0" preserve="1" userDrawn="1">
   <p:cSld name="Black Title and 2 columns">
     <p:bg>
       <p:bgRef idx="1001">
@@ -4148,7 +4408,7 @@
 </p:sldLayout>
 </file>
 
-<file path=ppt/slideLayouts/slideLayout21.xml><?xml version="1.0" encoding="utf-8"?>
+<file path=ppt/slideLayouts/slideLayout23.xml><?xml version="1.0" encoding="utf-8"?>
 <p:sldLayout xmlns:a="http://schemas.openxmlformats.org/drawingml/2006/main" xmlns:r="http://schemas.openxmlformats.org/officeDocument/2006/relationships" xmlns:p="http://schemas.openxmlformats.org/presentationml/2006/main" preserve="1" userDrawn="1">
   <p:cSld name="Title and 3 columns">
     <p:spTree>
@@ -4522,7 +4782,7 @@
 </p:sldLayout>
 </file>
 
-<file path=ppt/slideLayouts/slideLayout22.xml><?xml version="1.0" encoding="utf-8"?>
+<file path=ppt/slideLayouts/slideLayout24.xml><?xml version="1.0" encoding="utf-8"?>
 <p:sldLayout xmlns:a="http://schemas.openxmlformats.org/drawingml/2006/main" xmlns:r="http://schemas.openxmlformats.org/officeDocument/2006/relationships" xmlns:p="http://schemas.openxmlformats.org/presentationml/2006/main" preserve="1" userDrawn="1">
   <p:cSld name="Black Title and 3 columns">
     <p:bg>
@@ -4996,7 +5256,7 @@
 </p:sldLayout>
 </file>
 
-<file path=ppt/slideLayouts/slideLayout23.xml><?xml version="1.0" encoding="utf-8"?>
+<file path=ppt/slideLayouts/slideLayout25.xml><?xml version="1.0" encoding="utf-8"?>
 <p:sldLayout xmlns:a="http://schemas.openxmlformats.org/drawingml/2006/main" xmlns:r="http://schemas.openxmlformats.org/officeDocument/2006/relationships" xmlns:p="http://schemas.openxmlformats.org/presentationml/2006/main" preserve="1" userDrawn="1">
   <p:cSld name="Title and 4 columns">
     <p:spTree>
@@ -5435,7 +5695,7 @@
 </p:sldLayout>
 </file>
 
-<file path=ppt/slideLayouts/slideLayout24.xml><?xml version="1.0" encoding="utf-8"?>
+<file path=ppt/slideLayouts/slideLayout26.xml><?xml version="1.0" encoding="utf-8"?>
 <p:sldLayout xmlns:a="http://schemas.openxmlformats.org/drawingml/2006/main" xmlns:r="http://schemas.openxmlformats.org/officeDocument/2006/relationships" xmlns:p="http://schemas.openxmlformats.org/presentationml/2006/main" showMasterSp="0" preserve="1" userDrawn="1">
   <p:cSld name="Black Title and 4 columns">
     <p:bg>
@@ -5974,7 +6234,7 @@
 </p:sldLayout>
 </file>
 
-<file path=ppt/slideLayouts/slideLayout25.xml><?xml version="1.0" encoding="utf-8"?>
+<file path=ppt/slideLayouts/slideLayout27.xml><?xml version="1.0" encoding="utf-8"?>
 <p:sldLayout xmlns:a="http://schemas.openxmlformats.org/drawingml/2006/main" xmlns:r="http://schemas.openxmlformats.org/officeDocument/2006/relationships" xmlns:p="http://schemas.openxmlformats.org/presentationml/2006/main" preserve="1" userDrawn="1">
   <p:cSld name="Title and 4 Content">
     <p:spTree>
@@ -6472,7 +6732,7 @@
 </p:sldLayout>
 </file>
 
-<file path=ppt/slideLayouts/slideLayout26.xml><?xml version="1.0" encoding="utf-8"?>
+<file path=ppt/slideLayouts/slideLayout28.xml><?xml version="1.0" encoding="utf-8"?>
 <p:sldLayout xmlns:a="http://schemas.openxmlformats.org/drawingml/2006/main" xmlns:r="http://schemas.openxmlformats.org/officeDocument/2006/relationships" xmlns:p="http://schemas.openxmlformats.org/presentationml/2006/main" showMasterSp="0" preserve="1" userDrawn="1">
   <p:cSld name="Black Title and 4 Content">
     <p:bg>
@@ -7070,7 +7330,7 @@
 </p:sldLayout>
 </file>
 
-<file path=ppt/slideLayouts/slideLayout27.xml><?xml version="1.0" encoding="utf-8"?>
+<file path=ppt/slideLayouts/slideLayout29.xml><?xml version="1.0" encoding="utf-8"?>
 <p:sldLayout xmlns:a="http://schemas.openxmlformats.org/drawingml/2006/main" xmlns:r="http://schemas.openxmlformats.org/officeDocument/2006/relationships" xmlns:p="http://schemas.openxmlformats.org/presentationml/2006/main" preserve="1" userDrawn="1">
   <p:cSld name="Title and 8 Content">
     <p:spTree>
@@ -7767,7 +8027,288 @@
 </p:sldLayout>
 </file>
 
-<file path=ppt/slideLayouts/slideLayout28.xml><?xml version="1.0" encoding="utf-8"?>
+<file path=ppt/slideLayouts/slideLayout3.xml><?xml version="1.0" encoding="utf-8"?>
+<p:sldLayout xmlns:a="http://schemas.openxmlformats.org/drawingml/2006/main" xmlns:r="http://schemas.openxmlformats.org/officeDocument/2006/relationships" xmlns:p="http://schemas.openxmlformats.org/presentationml/2006/main" preserve="1" userDrawn="1">
+  <p:cSld name="Title and 1 column + Comments">
+    <p:spTree>
+      <p:nvGrpSpPr>
+        <p:cNvPr id="1" name=""/>
+        <p:cNvGrpSpPr/>
+        <p:nvPr/>
+      </p:nvGrpSpPr>
+      <p:grpSpPr>
+        <a:xfrm>
+          <a:off x="0" y="0"/>
+          <a:ext cx="0" cy="0"/>
+          <a:chOff x="0" y="0"/>
+          <a:chExt cx="0" cy="0"/>
+        </a:xfrm>
+      </p:grpSpPr>
+      <p:sp>
+        <p:nvSpPr>
+          <p:cNvPr id="5" name="Title_SM"/>
+          <p:cNvSpPr>
+            <a:spLocks noGrp="1" noChangeArrowheads="1"/>
+          </p:cNvSpPr>
+          <p:nvPr>
+            <p:ph type="title" hasCustomPrompt="1"/>
+          </p:nvPr>
+        </p:nvSpPr>
+        <p:spPr bwMode="auto">
+          <a:xfrm>
+            <a:off x="479425" y="476250"/>
+            <a:ext cx="10019242" cy="1081088"/>
+          </a:xfrm>
+          <a:prstGeom prst="rect">
+            <a:avLst/>
+          </a:prstGeom>
+          <a:noFill/>
+          <a:ln w="9525">
+            <a:noFill/>
+            <a:miter lim="800000"/>
+            <a:headEnd/>
+            <a:tailEnd/>
+          </a:ln>
+        </p:spPr>
+        <p:txBody>
+          <a:bodyPr vert="horz" wrap="square" lIns="72000" tIns="36000" rIns="73152" bIns="36576" numCol="1" anchor="t" anchorCtr="0" compatLnSpc="1">
+            <a:prstTxWarp prst="textNoShape">
+              <a:avLst/>
+            </a:prstTxWarp>
+            <a:noAutofit/>
+          </a:bodyPr>
+          <a:lstStyle>
+            <a:lvl1pPr>
+              <a:defRPr>
+                <a:solidFill>
+                  <a:schemeClr val="tx1"/>
+                </a:solidFill>
+              </a:defRPr>
+            </a:lvl1pPr>
+          </a:lstStyle>
+          <a:p>
+            <a:pPr lvl="0"/>
+            <a:r>
+              <a:rPr lang="en-US" dirty="0"/>
+              <a:t>Use this layout for document slides when you need space for a long heading and big content area</a:t>
+            </a:r>
+          </a:p>
+        </p:txBody>
+      </p:sp>
+      <p:sp>
+        <p:nvSpPr>
+          <p:cNvPr id="3" name="Content Placeholder 2">
+            <a:extLst>
+              <a:ext uri="{FF2B5EF4-FFF2-40B4-BE49-F238E27FC236}">
+                <a16:creationId xmlns:a16="http://schemas.microsoft.com/office/drawing/2014/main" id="{810CFEFC-6AC8-4817-A0D3-6029D48BD293}"/>
+              </a:ext>
+            </a:extLst>
+          </p:cNvPr>
+          <p:cNvSpPr>
+            <a:spLocks noGrp="1"/>
+          </p:cNvSpPr>
+          <p:nvPr>
+            <p:ph sz="quarter" idx="10" hasCustomPrompt="1"/>
+          </p:nvPr>
+        </p:nvSpPr>
+        <p:spPr>
+          <a:xfrm>
+            <a:off x="479425" y="5525984"/>
+            <a:ext cx="11233150" cy="1183573"/>
+          </a:xfrm>
+          <a:prstGeom prst="rect">
+            <a:avLst/>
+          </a:prstGeom>
+        </p:spPr>
+        <p:txBody>
+          <a:bodyPr/>
+          <a:lstStyle>
+            <a:lvl1pPr>
+              <a:defRPr sz="1200">
+                <a:solidFill>
+                  <a:schemeClr val="tx1"/>
+                </a:solidFill>
+              </a:defRPr>
+            </a:lvl1pPr>
+            <a:lvl2pPr>
+              <a:defRPr sz="1200">
+                <a:solidFill>
+                  <a:schemeClr val="tx1"/>
+                </a:solidFill>
+              </a:defRPr>
+            </a:lvl2pPr>
+            <a:lvl3pPr>
+              <a:defRPr sz="1200">
+                <a:solidFill>
+                  <a:schemeClr val="tx1"/>
+                </a:solidFill>
+              </a:defRPr>
+            </a:lvl3pPr>
+            <a:lvl4pPr>
+              <a:defRPr sz="1200">
+                <a:solidFill>
+                  <a:schemeClr val="tx1"/>
+                </a:solidFill>
+              </a:defRPr>
+            </a:lvl4pPr>
+            <a:lvl5pPr>
+              <a:defRPr/>
+            </a:lvl5pPr>
+          </a:lstStyle>
+          <a:p>
+            <a:pPr lvl="0"/>
+            <a:r>
+              <a:rPr lang="en-US"/>
+              <a:t>For heading, use Ericsson Hilda in bold. For copy and bullets, use Ericsson Hilda.</a:t>
+            </a:r>
+          </a:p>
+          <a:p>
+            <a:pPr lvl="0"/>
+            <a:r>
+              <a:rPr lang="en-US"/>
+              <a:t>First level</a:t>
+            </a:r>
+          </a:p>
+          <a:p>
+            <a:pPr lvl="1"/>
+            <a:r>
+              <a:rPr lang="en-US"/>
+              <a:t>Second level</a:t>
+            </a:r>
+          </a:p>
+          <a:p>
+            <a:pPr lvl="2"/>
+            <a:r>
+              <a:rPr lang="en-US"/>
+              <a:t>Third level</a:t>
+            </a:r>
+          </a:p>
+          <a:p>
+            <a:pPr lvl="3"/>
+            <a:r>
+              <a:rPr lang="en-US"/>
+              <a:t>Fourth level</a:t>
+            </a:r>
+          </a:p>
+        </p:txBody>
+      </p:sp>
+      <p:sp>
+        <p:nvSpPr>
+          <p:cNvPr id="8" name="txtfooterCopy" descr="{&#10; &quot;SkabelonDesign&quot;: {&#10; &quot;textualValue&quot;: &quot;&lt;key1/&gt;&quot;,&#10; &quot;bindingCollection&quot;: {&#10; &quot;key1&quot;: {&quot;SkabelonDesign&quot;:{&quot;type&quot;:&quot;Text&quot;,&quot;binding&quot;:&quot;Module.FooterText&quot;}}&#10; }&#10; }&#10;}">
+            <a:extLst>
+              <a:ext uri="{FF2B5EF4-FFF2-40B4-BE49-F238E27FC236}">
+                <a16:creationId xmlns:a16="http://schemas.microsoft.com/office/drawing/2014/main" id="{C2AD0284-E6BA-49D8-AB3F-D94DBB1D54F0}"/>
+              </a:ext>
+            </a:extLst>
+          </p:cNvPr>
+          <p:cNvSpPr txBox="1"/>
+          <p:nvPr userDrawn="1"/>
+        </p:nvSpPr>
+        <p:spPr>
+          <a:xfrm>
+            <a:off x="421638" y="6524625"/>
+            <a:ext cx="65" cy="123111"/>
+          </a:xfrm>
+          <a:prstGeom prst="rect">
+            <a:avLst/>
+          </a:prstGeom>
+          <a:noFill/>
+        </p:spPr>
+        <p:txBody>
+          <a:bodyPr vert="horz" wrap="none" lIns="0" tIns="0" rIns="0" bIns="0" rtlCol="0">
+            <a:spAutoFit/>
+          </a:bodyPr>
+          <a:lstStyle/>
+          <a:p>
+            <a:pPr marL="0" indent="0" algn="l">
+              <a:buFontTx/>
+              <a:buNone/>
+            </a:pPr>
+            <a:endParaRPr lang="en-US" sz="800" b="0" i="0" u="none">
+              <a:solidFill>
+                <a:schemeClr val="tx1"/>
+              </a:solidFill>
+              <a:latin typeface="+mn-lt"/>
+            </a:endParaRPr>
+          </a:p>
+        </p:txBody>
+      </p:sp>
+      <p:sp>
+        <p:nvSpPr>
+          <p:cNvPr id="7" name="Content Placeholder 6">
+            <a:extLst>
+              <a:ext uri="{FF2B5EF4-FFF2-40B4-BE49-F238E27FC236}">
+                <a16:creationId xmlns:a16="http://schemas.microsoft.com/office/drawing/2014/main" id="{E30A0378-E981-36E6-504F-ED11379B4335}"/>
+              </a:ext>
+            </a:extLst>
+          </p:cNvPr>
+          <p:cNvSpPr>
+            <a:spLocks noGrp="1"/>
+          </p:cNvSpPr>
+          <p:nvPr>
+            <p:ph sz="quarter" idx="12"/>
+          </p:nvPr>
+        </p:nvSpPr>
+        <p:spPr>
+          <a:xfrm>
+            <a:off x="479425" y="1706563"/>
+            <a:ext cx="11233150" cy="3661867"/>
+          </a:xfrm>
+        </p:spPr>
+        <p:txBody>
+          <a:bodyPr/>
+          <a:lstStyle/>
+          <a:p>
+            <a:pPr lvl="0"/>
+            <a:r>
+              <a:rPr lang="en-US"/>
+              <a:t>Click to edit Master text styles</a:t>
+            </a:r>
+          </a:p>
+          <a:p>
+            <a:pPr lvl="1"/>
+            <a:r>
+              <a:rPr lang="en-US"/>
+              <a:t>Second level</a:t>
+            </a:r>
+          </a:p>
+          <a:p>
+            <a:pPr lvl="2"/>
+            <a:r>
+              <a:rPr lang="en-US"/>
+              <a:t>Third level</a:t>
+            </a:r>
+          </a:p>
+          <a:p>
+            <a:pPr lvl="3"/>
+            <a:r>
+              <a:rPr lang="en-US"/>
+              <a:t>Fourth level</a:t>
+            </a:r>
+          </a:p>
+          <a:p>
+            <a:pPr lvl="4"/>
+            <a:r>
+              <a:rPr lang="en-US"/>
+              <a:t>Fifth level</a:t>
+            </a:r>
+          </a:p>
+        </p:txBody>
+      </p:sp>
+    </p:spTree>
+    <p:extLst>
+      <p:ext uri="{BB962C8B-B14F-4D97-AF65-F5344CB8AC3E}">
+        <p14:creationId xmlns:p14="http://schemas.microsoft.com/office/powerpoint/2010/main" val="2637348183"/>
+      </p:ext>
+    </p:extLst>
+  </p:cSld>
+  <p:clrMapOvr>
+    <a:masterClrMapping/>
+  </p:clrMapOvr>
+</p:sldLayout>
+</file>
+
+<file path=ppt/slideLayouts/slideLayout30.xml><?xml version="1.0" encoding="utf-8"?>
 <p:sldLayout xmlns:a="http://schemas.openxmlformats.org/drawingml/2006/main" xmlns:r="http://schemas.openxmlformats.org/officeDocument/2006/relationships" xmlns:p="http://schemas.openxmlformats.org/presentationml/2006/main" showMasterSp="0" preserve="1" userDrawn="1">
   <p:cSld name="Black Title and 8 Content">
     <p:bg>
@@ -8564,7 +9105,7 @@
 </p:sldLayout>
 </file>
 
-<file path=ppt/slideLayouts/slideLayout29.xml><?xml version="1.0" encoding="utf-8"?>
+<file path=ppt/slideLayouts/slideLayout31.xml><?xml version="1.0" encoding="utf-8"?>
 <p:sldLayout xmlns:a="http://schemas.openxmlformats.org/drawingml/2006/main" xmlns:r="http://schemas.openxmlformats.org/officeDocument/2006/relationships" xmlns:p="http://schemas.openxmlformats.org/presentationml/2006/main" preserve="1" userDrawn="1">
   <p:cSld name="1_Title Page">
     <p:spTree>
@@ -8864,288 +9405,7 @@
 </p:sldLayout>
 </file>
 
-<file path=ppt/slideLayouts/slideLayout3.xml><?xml version="1.0" encoding="utf-8"?>
-<p:sldLayout xmlns:a="http://schemas.openxmlformats.org/drawingml/2006/main" xmlns:r="http://schemas.openxmlformats.org/officeDocument/2006/relationships" xmlns:p="http://schemas.openxmlformats.org/presentationml/2006/main" preserve="1" userDrawn="1">
-  <p:cSld name="Title and 1 column + Comments">
-    <p:spTree>
-      <p:nvGrpSpPr>
-        <p:cNvPr id="1" name=""/>
-        <p:cNvGrpSpPr/>
-        <p:nvPr/>
-      </p:nvGrpSpPr>
-      <p:grpSpPr>
-        <a:xfrm>
-          <a:off x="0" y="0"/>
-          <a:ext cx="0" cy="0"/>
-          <a:chOff x="0" y="0"/>
-          <a:chExt cx="0" cy="0"/>
-        </a:xfrm>
-      </p:grpSpPr>
-      <p:sp>
-        <p:nvSpPr>
-          <p:cNvPr id="5" name="Title_SM"/>
-          <p:cNvSpPr>
-            <a:spLocks noGrp="1" noChangeArrowheads="1"/>
-          </p:cNvSpPr>
-          <p:nvPr>
-            <p:ph type="title" hasCustomPrompt="1"/>
-          </p:nvPr>
-        </p:nvSpPr>
-        <p:spPr bwMode="auto">
-          <a:xfrm>
-            <a:off x="479425" y="476250"/>
-            <a:ext cx="10019242" cy="1081088"/>
-          </a:xfrm>
-          <a:prstGeom prst="rect">
-            <a:avLst/>
-          </a:prstGeom>
-          <a:noFill/>
-          <a:ln w="9525">
-            <a:noFill/>
-            <a:miter lim="800000"/>
-            <a:headEnd/>
-            <a:tailEnd/>
-          </a:ln>
-        </p:spPr>
-        <p:txBody>
-          <a:bodyPr vert="horz" wrap="square" lIns="72000" tIns="36000" rIns="73152" bIns="36576" numCol="1" anchor="t" anchorCtr="0" compatLnSpc="1">
-            <a:prstTxWarp prst="textNoShape">
-              <a:avLst/>
-            </a:prstTxWarp>
-            <a:noAutofit/>
-          </a:bodyPr>
-          <a:lstStyle>
-            <a:lvl1pPr>
-              <a:defRPr>
-                <a:solidFill>
-                  <a:schemeClr val="tx1"/>
-                </a:solidFill>
-              </a:defRPr>
-            </a:lvl1pPr>
-          </a:lstStyle>
-          <a:p>
-            <a:pPr lvl="0"/>
-            <a:r>
-              <a:rPr lang="en-US" dirty="0"/>
-              <a:t>Use this layout for document slides when you need space for a long heading and big content area</a:t>
-            </a:r>
-          </a:p>
-        </p:txBody>
-      </p:sp>
-      <p:sp>
-        <p:nvSpPr>
-          <p:cNvPr id="3" name="Content Placeholder 2">
-            <a:extLst>
-              <a:ext uri="{FF2B5EF4-FFF2-40B4-BE49-F238E27FC236}">
-                <a16:creationId xmlns:a16="http://schemas.microsoft.com/office/drawing/2014/main" id="{810CFEFC-6AC8-4817-A0D3-6029D48BD293}"/>
-              </a:ext>
-            </a:extLst>
-          </p:cNvPr>
-          <p:cNvSpPr>
-            <a:spLocks noGrp="1"/>
-          </p:cNvSpPr>
-          <p:nvPr>
-            <p:ph sz="quarter" idx="10" hasCustomPrompt="1"/>
-          </p:nvPr>
-        </p:nvSpPr>
-        <p:spPr>
-          <a:xfrm>
-            <a:off x="479425" y="5525984"/>
-            <a:ext cx="11233150" cy="1183573"/>
-          </a:xfrm>
-          <a:prstGeom prst="rect">
-            <a:avLst/>
-          </a:prstGeom>
-        </p:spPr>
-        <p:txBody>
-          <a:bodyPr/>
-          <a:lstStyle>
-            <a:lvl1pPr>
-              <a:defRPr sz="1200">
-                <a:solidFill>
-                  <a:schemeClr val="tx1"/>
-                </a:solidFill>
-              </a:defRPr>
-            </a:lvl1pPr>
-            <a:lvl2pPr>
-              <a:defRPr sz="1200">
-                <a:solidFill>
-                  <a:schemeClr val="tx1"/>
-                </a:solidFill>
-              </a:defRPr>
-            </a:lvl2pPr>
-            <a:lvl3pPr>
-              <a:defRPr sz="1200">
-                <a:solidFill>
-                  <a:schemeClr val="tx1"/>
-                </a:solidFill>
-              </a:defRPr>
-            </a:lvl3pPr>
-            <a:lvl4pPr>
-              <a:defRPr sz="1200">
-                <a:solidFill>
-                  <a:schemeClr val="tx1"/>
-                </a:solidFill>
-              </a:defRPr>
-            </a:lvl4pPr>
-            <a:lvl5pPr>
-              <a:defRPr/>
-            </a:lvl5pPr>
-          </a:lstStyle>
-          <a:p>
-            <a:pPr lvl="0"/>
-            <a:r>
-              <a:rPr lang="en-US"/>
-              <a:t>For heading, use Ericsson Hilda in bold. For copy and bullets, use Ericsson Hilda.</a:t>
-            </a:r>
-          </a:p>
-          <a:p>
-            <a:pPr lvl="0"/>
-            <a:r>
-              <a:rPr lang="en-US"/>
-              <a:t>First level</a:t>
-            </a:r>
-          </a:p>
-          <a:p>
-            <a:pPr lvl="1"/>
-            <a:r>
-              <a:rPr lang="en-US"/>
-              <a:t>Second level</a:t>
-            </a:r>
-          </a:p>
-          <a:p>
-            <a:pPr lvl="2"/>
-            <a:r>
-              <a:rPr lang="en-US"/>
-              <a:t>Third level</a:t>
-            </a:r>
-          </a:p>
-          <a:p>
-            <a:pPr lvl="3"/>
-            <a:r>
-              <a:rPr lang="en-US"/>
-              <a:t>Fourth level</a:t>
-            </a:r>
-          </a:p>
-        </p:txBody>
-      </p:sp>
-      <p:sp>
-        <p:nvSpPr>
-          <p:cNvPr id="8" name="txtfooterCopy" descr="{&#10; &quot;SkabelonDesign&quot;: {&#10; &quot;textualValue&quot;: &quot;&lt;key1/&gt;&quot;,&#10; &quot;bindingCollection&quot;: {&#10; &quot;key1&quot;: {&quot;SkabelonDesign&quot;:{&quot;type&quot;:&quot;Text&quot;,&quot;binding&quot;:&quot;Module.FooterText&quot;}}&#10; }&#10; }&#10;}">
-            <a:extLst>
-              <a:ext uri="{FF2B5EF4-FFF2-40B4-BE49-F238E27FC236}">
-                <a16:creationId xmlns:a16="http://schemas.microsoft.com/office/drawing/2014/main" id="{C2AD0284-E6BA-49D8-AB3F-D94DBB1D54F0}"/>
-              </a:ext>
-            </a:extLst>
-          </p:cNvPr>
-          <p:cNvSpPr txBox="1"/>
-          <p:nvPr userDrawn="1"/>
-        </p:nvSpPr>
-        <p:spPr>
-          <a:xfrm>
-            <a:off x="421638" y="6524625"/>
-            <a:ext cx="65" cy="123111"/>
-          </a:xfrm>
-          <a:prstGeom prst="rect">
-            <a:avLst/>
-          </a:prstGeom>
-          <a:noFill/>
-        </p:spPr>
-        <p:txBody>
-          <a:bodyPr vert="horz" wrap="none" lIns="0" tIns="0" rIns="0" bIns="0" rtlCol="0">
-            <a:spAutoFit/>
-          </a:bodyPr>
-          <a:lstStyle/>
-          <a:p>
-            <a:pPr marL="0" indent="0" algn="l">
-              <a:buFontTx/>
-              <a:buNone/>
-            </a:pPr>
-            <a:endParaRPr lang="en-US" sz="800" b="0" i="0" u="none">
-              <a:solidFill>
-                <a:schemeClr val="tx1"/>
-              </a:solidFill>
-              <a:latin typeface="+mn-lt"/>
-            </a:endParaRPr>
-          </a:p>
-        </p:txBody>
-      </p:sp>
-      <p:sp>
-        <p:nvSpPr>
-          <p:cNvPr id="7" name="Content Placeholder 6">
-            <a:extLst>
-              <a:ext uri="{FF2B5EF4-FFF2-40B4-BE49-F238E27FC236}">
-                <a16:creationId xmlns:a16="http://schemas.microsoft.com/office/drawing/2014/main" id="{E30A0378-E981-36E6-504F-ED11379B4335}"/>
-              </a:ext>
-            </a:extLst>
-          </p:cNvPr>
-          <p:cNvSpPr>
-            <a:spLocks noGrp="1"/>
-          </p:cNvSpPr>
-          <p:nvPr>
-            <p:ph sz="quarter" idx="12"/>
-          </p:nvPr>
-        </p:nvSpPr>
-        <p:spPr>
-          <a:xfrm>
-            <a:off x="479425" y="1706563"/>
-            <a:ext cx="11233150" cy="3661867"/>
-          </a:xfrm>
-        </p:spPr>
-        <p:txBody>
-          <a:bodyPr/>
-          <a:lstStyle/>
-          <a:p>
-            <a:pPr lvl="0"/>
-            <a:r>
-              <a:rPr lang="en-US"/>
-              <a:t>Click to edit Master text styles</a:t>
-            </a:r>
-          </a:p>
-          <a:p>
-            <a:pPr lvl="1"/>
-            <a:r>
-              <a:rPr lang="en-US"/>
-              <a:t>Second level</a:t>
-            </a:r>
-          </a:p>
-          <a:p>
-            <a:pPr lvl="2"/>
-            <a:r>
-              <a:rPr lang="en-US"/>
-              <a:t>Third level</a:t>
-            </a:r>
-          </a:p>
-          <a:p>
-            <a:pPr lvl="3"/>
-            <a:r>
-              <a:rPr lang="en-US"/>
-              <a:t>Fourth level</a:t>
-            </a:r>
-          </a:p>
-          <a:p>
-            <a:pPr lvl="4"/>
-            <a:r>
-              <a:rPr lang="en-US"/>
-              <a:t>Fifth level</a:t>
-            </a:r>
-          </a:p>
-        </p:txBody>
-      </p:sp>
-    </p:spTree>
-    <p:extLst>
-      <p:ext uri="{BB962C8B-B14F-4D97-AF65-F5344CB8AC3E}">
-        <p14:creationId xmlns:p14="http://schemas.microsoft.com/office/powerpoint/2010/main" val="2637348183"/>
-      </p:ext>
-    </p:extLst>
-  </p:cSld>
-  <p:clrMapOvr>
-    <a:masterClrMapping/>
-  </p:clrMapOvr>
-</p:sldLayout>
-</file>
-
-<file path=ppt/slideLayouts/slideLayout30.xml><?xml version="1.0" encoding="utf-8"?>
+<file path=ppt/slideLayouts/slideLayout32.xml><?xml version="1.0" encoding="utf-8"?>
 <p:sldLayout xmlns:a="http://schemas.openxmlformats.org/drawingml/2006/main" xmlns:r="http://schemas.openxmlformats.org/officeDocument/2006/relationships" xmlns:p="http://schemas.openxmlformats.org/presentationml/2006/main" showMasterSp="0" preserve="1" userDrawn="1">
   <p:cSld name="1_Black Title Page">
     <p:bg>
@@ -9545,7 +9805,7 @@
 </p:sldLayout>
 </file>
 
-<file path=ppt/slideLayouts/slideLayout31.xml><?xml version="1.0" encoding="utf-8"?>
+<file path=ppt/slideLayouts/slideLayout33.xml><?xml version="1.0" encoding="utf-8"?>
 <p:sldLayout xmlns:a="http://schemas.openxmlformats.org/drawingml/2006/main" xmlns:r="http://schemas.openxmlformats.org/officeDocument/2006/relationships" xmlns:p="http://schemas.openxmlformats.org/presentationml/2006/main" type="blank" preserve="1">
   <p:cSld name="1_Blank">
     <p:spTree>
@@ -9616,7 +9876,7 @@
 </p:sldLayout>
 </file>
 
-<file path=ppt/slideLayouts/slideLayout32.xml><?xml version="1.0" encoding="utf-8"?>
+<file path=ppt/slideLayouts/slideLayout34.xml><?xml version="1.0" encoding="utf-8"?>
 <p:sldLayout xmlns:a="http://schemas.openxmlformats.org/drawingml/2006/main" xmlns:r="http://schemas.openxmlformats.org/officeDocument/2006/relationships" xmlns:p="http://schemas.openxmlformats.org/presentationml/2006/main" showMasterSp="0" preserve="1" userDrawn="1">
   <p:cSld name="1_Black blank">
     <p:bg>
@@ -9787,7 +10047,7 @@
 </p:sldLayout>
 </file>
 
-<file path=ppt/slideLayouts/slideLayout33.xml><?xml version="1.0" encoding="utf-8"?>
+<file path=ppt/slideLayouts/slideLayout35.xml><?xml version="1.0" encoding="utf-8"?>
 <p:sldLayout xmlns:a="http://schemas.openxmlformats.org/drawingml/2006/main" xmlns:r="http://schemas.openxmlformats.org/officeDocument/2006/relationships" xmlns:p="http://schemas.openxmlformats.org/presentationml/2006/main" preserve="1" userDrawn="1">
   <p:cSld name="1_Title Only">
     <p:spTree>
@@ -9909,7 +10169,7 @@
 </p:sldLayout>
 </file>
 
-<file path=ppt/slideLayouts/slideLayout34.xml><?xml version="1.0" encoding="utf-8"?>
+<file path=ppt/slideLayouts/slideLayout36.xml><?xml version="1.0" encoding="utf-8"?>
 <p:sldLayout xmlns:a="http://schemas.openxmlformats.org/drawingml/2006/main" xmlns:r="http://schemas.openxmlformats.org/officeDocument/2006/relationships" xmlns:p="http://schemas.openxmlformats.org/presentationml/2006/main" showMasterSp="0" preserve="1" userDrawn="1">
   <p:cSld name="1_Black Title Only">
     <p:bg>
@@ -10131,7 +10391,7 @@
 </p:sldLayout>
 </file>
 
-<file path=ppt/slideLayouts/slideLayout35.xml><?xml version="1.0" encoding="utf-8"?>
+<file path=ppt/slideLayouts/slideLayout37.xml><?xml version="1.0" encoding="utf-8"?>
 <p:sldLayout xmlns:a="http://schemas.openxmlformats.org/drawingml/2006/main" xmlns:r="http://schemas.openxmlformats.org/officeDocument/2006/relationships" xmlns:p="http://schemas.openxmlformats.org/presentationml/2006/main" preserve="1" userDrawn="1">
   <p:cSld name="1_Title and 1 column">
     <p:spTree>
@@ -10350,7 +10610,7 @@
 </p:sldLayout>
 </file>
 
-<file path=ppt/slideLayouts/slideLayout36.xml><?xml version="1.0" encoding="utf-8"?>
+<file path=ppt/slideLayouts/slideLayout38.xml><?xml version="1.0" encoding="utf-8"?>
 <p:sldLayout xmlns:a="http://schemas.openxmlformats.org/drawingml/2006/main" xmlns:r="http://schemas.openxmlformats.org/officeDocument/2006/relationships" xmlns:p="http://schemas.openxmlformats.org/presentationml/2006/main" showMasterSp="0" preserve="1" userDrawn="1">
   <p:cSld name="1_Black Title and 1 column">
     <p:bg>
@@ -10669,7 +10929,7 @@
 </p:sldLayout>
 </file>
 
-<file path=ppt/slideLayouts/slideLayout37.xml><?xml version="1.0" encoding="utf-8"?>
+<file path=ppt/slideLayouts/slideLayout39.xml><?xml version="1.0" encoding="utf-8"?>
 <p:sldLayout xmlns:a="http://schemas.openxmlformats.org/drawingml/2006/main" xmlns:r="http://schemas.openxmlformats.org/officeDocument/2006/relationships" xmlns:p="http://schemas.openxmlformats.org/presentationml/2006/main" preserve="1" userDrawn="1">
   <p:cSld name="1_Title and 1 smaller column">
     <p:spTree>
@@ -10894,7 +11154,288 @@
 </p:sldLayout>
 </file>
 
-<file path=ppt/slideLayouts/slideLayout38.xml><?xml version="1.0" encoding="utf-8"?>
+<file path=ppt/slideLayouts/slideLayout4.xml><?xml version="1.0" encoding="utf-8"?>
+<p:sldLayout xmlns:a="http://schemas.openxmlformats.org/drawingml/2006/main" xmlns:r="http://schemas.openxmlformats.org/officeDocument/2006/relationships" xmlns:p="http://schemas.openxmlformats.org/presentationml/2006/main" preserve="1" userDrawn="1">
+  <p:cSld name="Title and 1 column + Comments right">
+    <p:spTree>
+      <p:nvGrpSpPr>
+        <p:cNvPr id="1" name=""/>
+        <p:cNvGrpSpPr/>
+        <p:nvPr/>
+      </p:nvGrpSpPr>
+      <p:grpSpPr>
+        <a:xfrm>
+          <a:off x="0" y="0"/>
+          <a:ext cx="0" cy="0"/>
+          <a:chOff x="0" y="0"/>
+          <a:chExt cx="0" cy="0"/>
+        </a:xfrm>
+      </p:grpSpPr>
+      <p:sp>
+        <p:nvSpPr>
+          <p:cNvPr id="5" name="Title_SM"/>
+          <p:cNvSpPr>
+            <a:spLocks noGrp="1" noChangeArrowheads="1"/>
+          </p:cNvSpPr>
+          <p:nvPr>
+            <p:ph type="title" hasCustomPrompt="1"/>
+          </p:nvPr>
+        </p:nvSpPr>
+        <p:spPr bwMode="auto">
+          <a:xfrm>
+            <a:off x="479425" y="476250"/>
+            <a:ext cx="10019242" cy="1081088"/>
+          </a:xfrm>
+          <a:prstGeom prst="rect">
+            <a:avLst/>
+          </a:prstGeom>
+          <a:noFill/>
+          <a:ln w="9525">
+            <a:noFill/>
+            <a:miter lim="800000"/>
+            <a:headEnd/>
+            <a:tailEnd/>
+          </a:ln>
+        </p:spPr>
+        <p:txBody>
+          <a:bodyPr vert="horz" wrap="square" lIns="72000" tIns="36000" rIns="73152" bIns="36576" numCol="1" anchor="t" anchorCtr="0" compatLnSpc="1">
+            <a:prstTxWarp prst="textNoShape">
+              <a:avLst/>
+            </a:prstTxWarp>
+            <a:noAutofit/>
+          </a:bodyPr>
+          <a:lstStyle>
+            <a:lvl1pPr>
+              <a:defRPr>
+                <a:solidFill>
+                  <a:schemeClr val="tx1"/>
+                </a:solidFill>
+              </a:defRPr>
+            </a:lvl1pPr>
+          </a:lstStyle>
+          <a:p>
+            <a:pPr lvl="0"/>
+            <a:r>
+              <a:rPr lang="en-US"/>
+              <a:t>Use this layout for document slides when you need space for a long heading and big content area</a:t>
+            </a:r>
+          </a:p>
+        </p:txBody>
+      </p:sp>
+      <p:sp>
+        <p:nvSpPr>
+          <p:cNvPr id="3" name="Content Placeholder 2">
+            <a:extLst>
+              <a:ext uri="{FF2B5EF4-FFF2-40B4-BE49-F238E27FC236}">
+                <a16:creationId xmlns:a16="http://schemas.microsoft.com/office/drawing/2014/main" id="{810CFEFC-6AC8-4817-A0D3-6029D48BD293}"/>
+              </a:ext>
+            </a:extLst>
+          </p:cNvPr>
+          <p:cNvSpPr>
+            <a:spLocks noGrp="1"/>
+          </p:cNvSpPr>
+          <p:nvPr>
+            <p:ph sz="quarter" idx="10" hasCustomPrompt="1"/>
+          </p:nvPr>
+        </p:nvSpPr>
+        <p:spPr>
+          <a:xfrm>
+            <a:off x="9002391" y="1709736"/>
+            <a:ext cx="2710183" cy="4999821"/>
+          </a:xfrm>
+          <a:prstGeom prst="rect">
+            <a:avLst/>
+          </a:prstGeom>
+        </p:spPr>
+        <p:txBody>
+          <a:bodyPr/>
+          <a:lstStyle>
+            <a:lvl1pPr>
+              <a:defRPr sz="1200">
+                <a:solidFill>
+                  <a:schemeClr val="tx1"/>
+                </a:solidFill>
+              </a:defRPr>
+            </a:lvl1pPr>
+            <a:lvl2pPr>
+              <a:defRPr sz="1200">
+                <a:solidFill>
+                  <a:schemeClr val="tx1"/>
+                </a:solidFill>
+              </a:defRPr>
+            </a:lvl2pPr>
+            <a:lvl3pPr>
+              <a:defRPr sz="1200">
+                <a:solidFill>
+                  <a:schemeClr val="tx1"/>
+                </a:solidFill>
+              </a:defRPr>
+            </a:lvl3pPr>
+            <a:lvl4pPr>
+              <a:defRPr sz="1200">
+                <a:solidFill>
+                  <a:schemeClr val="tx1"/>
+                </a:solidFill>
+              </a:defRPr>
+            </a:lvl4pPr>
+            <a:lvl5pPr>
+              <a:defRPr/>
+            </a:lvl5pPr>
+          </a:lstStyle>
+          <a:p>
+            <a:pPr lvl="0"/>
+            <a:r>
+              <a:rPr lang="en-US"/>
+              <a:t>For heading, use Ericsson Hilda in bold. For copy and bullets, use Ericsson Hilda.</a:t>
+            </a:r>
+          </a:p>
+          <a:p>
+            <a:pPr lvl="0"/>
+            <a:r>
+              <a:rPr lang="en-US"/>
+              <a:t>First level</a:t>
+            </a:r>
+          </a:p>
+          <a:p>
+            <a:pPr lvl="1"/>
+            <a:r>
+              <a:rPr lang="en-US"/>
+              <a:t>Second level</a:t>
+            </a:r>
+          </a:p>
+          <a:p>
+            <a:pPr lvl="2"/>
+            <a:r>
+              <a:rPr lang="en-US"/>
+              <a:t>Third level</a:t>
+            </a:r>
+          </a:p>
+          <a:p>
+            <a:pPr lvl="3"/>
+            <a:r>
+              <a:rPr lang="en-US"/>
+              <a:t>Fourth level</a:t>
+            </a:r>
+          </a:p>
+        </p:txBody>
+      </p:sp>
+      <p:sp>
+        <p:nvSpPr>
+          <p:cNvPr id="8" name="txtfooterCopy" descr="{&#10; &quot;SkabelonDesign&quot;: {&#10; &quot;textualValue&quot;: &quot;&lt;key1/&gt;&quot;,&#10; &quot;bindingCollection&quot;: {&#10; &quot;key1&quot;: {&quot;SkabelonDesign&quot;:{&quot;type&quot;:&quot;Text&quot;,&quot;binding&quot;:&quot;Module.FooterText&quot;}}&#10; }&#10; }&#10;}">
+            <a:extLst>
+              <a:ext uri="{FF2B5EF4-FFF2-40B4-BE49-F238E27FC236}">
+                <a16:creationId xmlns:a16="http://schemas.microsoft.com/office/drawing/2014/main" id="{C2AD0284-E6BA-49D8-AB3F-D94DBB1D54F0}"/>
+              </a:ext>
+            </a:extLst>
+          </p:cNvPr>
+          <p:cNvSpPr txBox="1"/>
+          <p:nvPr userDrawn="1"/>
+        </p:nvSpPr>
+        <p:spPr>
+          <a:xfrm>
+            <a:off x="421638" y="6524625"/>
+            <a:ext cx="65" cy="123111"/>
+          </a:xfrm>
+          <a:prstGeom prst="rect">
+            <a:avLst/>
+          </a:prstGeom>
+          <a:noFill/>
+        </p:spPr>
+        <p:txBody>
+          <a:bodyPr vert="horz" wrap="none" lIns="0" tIns="0" rIns="0" bIns="0" rtlCol="0">
+            <a:spAutoFit/>
+          </a:bodyPr>
+          <a:lstStyle/>
+          <a:p>
+            <a:pPr marL="0" indent="0" algn="l">
+              <a:buFontTx/>
+              <a:buNone/>
+            </a:pPr>
+            <a:endParaRPr lang="en-US" sz="800" b="0" i="0" u="none">
+              <a:solidFill>
+                <a:schemeClr val="tx1"/>
+              </a:solidFill>
+              <a:latin typeface="+mn-lt"/>
+            </a:endParaRPr>
+          </a:p>
+        </p:txBody>
+      </p:sp>
+      <p:sp>
+        <p:nvSpPr>
+          <p:cNvPr id="9" name="Content Placeholder 6">
+            <a:extLst>
+              <a:ext uri="{FF2B5EF4-FFF2-40B4-BE49-F238E27FC236}">
+                <a16:creationId xmlns:a16="http://schemas.microsoft.com/office/drawing/2014/main" id="{C9452E4A-90F8-9F51-3A7A-AF8A7C220EA1}"/>
+              </a:ext>
+            </a:extLst>
+          </p:cNvPr>
+          <p:cNvSpPr>
+            <a:spLocks noGrp="1"/>
+          </p:cNvSpPr>
+          <p:nvPr>
+            <p:ph sz="quarter" idx="12"/>
+          </p:nvPr>
+        </p:nvSpPr>
+        <p:spPr>
+          <a:xfrm>
+            <a:off x="479425" y="1706563"/>
+            <a:ext cx="8307730" cy="4999821"/>
+          </a:xfrm>
+        </p:spPr>
+        <p:txBody>
+          <a:bodyPr/>
+          <a:lstStyle/>
+          <a:p>
+            <a:pPr lvl="0"/>
+            <a:r>
+              <a:rPr lang="en-US"/>
+              <a:t>Click to edit Master text styles</a:t>
+            </a:r>
+          </a:p>
+          <a:p>
+            <a:pPr lvl="1"/>
+            <a:r>
+              <a:rPr lang="en-US"/>
+              <a:t>Second level</a:t>
+            </a:r>
+          </a:p>
+          <a:p>
+            <a:pPr lvl="2"/>
+            <a:r>
+              <a:rPr lang="en-US"/>
+              <a:t>Third level</a:t>
+            </a:r>
+          </a:p>
+          <a:p>
+            <a:pPr lvl="3"/>
+            <a:r>
+              <a:rPr lang="en-US"/>
+              <a:t>Fourth level</a:t>
+            </a:r>
+          </a:p>
+          <a:p>
+            <a:pPr lvl="4"/>
+            <a:r>
+              <a:rPr lang="en-US"/>
+              <a:t>Fifth level</a:t>
+            </a:r>
+          </a:p>
+        </p:txBody>
+      </p:sp>
+    </p:spTree>
+    <p:extLst>
+      <p:ext uri="{BB962C8B-B14F-4D97-AF65-F5344CB8AC3E}">
+        <p14:creationId xmlns:p14="http://schemas.microsoft.com/office/powerpoint/2010/main" val="224496708"/>
+      </p:ext>
+    </p:extLst>
+  </p:cSld>
+  <p:clrMapOvr>
+    <a:masterClrMapping/>
+  </p:clrMapOvr>
+</p:sldLayout>
+</file>
+
+<file path=ppt/slideLayouts/slideLayout40.xml><?xml version="1.0" encoding="utf-8"?>
 <p:sldLayout xmlns:a="http://schemas.openxmlformats.org/drawingml/2006/main" xmlns:r="http://schemas.openxmlformats.org/officeDocument/2006/relationships" xmlns:p="http://schemas.openxmlformats.org/presentationml/2006/main" showMasterSp="0" preserve="1" userDrawn="1">
   <p:cSld name="1_Black Title and 1 smaller column">
     <p:bg>
@@ -11219,7 +11760,7 @@
 </p:sldLayout>
 </file>
 
-<file path=ppt/slideLayouts/slideLayout39.xml><?xml version="1.0" encoding="utf-8"?>
+<file path=ppt/slideLayouts/slideLayout41.xml><?xml version="1.0" encoding="utf-8"?>
 <p:sldLayout xmlns:a="http://schemas.openxmlformats.org/drawingml/2006/main" xmlns:r="http://schemas.openxmlformats.org/officeDocument/2006/relationships" xmlns:p="http://schemas.openxmlformats.org/presentationml/2006/main" preserve="1" userDrawn="1">
   <p:cSld name="1_Title and 2 columns">
     <p:spTree>
@@ -11529,288 +12070,7 @@
 </p:sldLayout>
 </file>
 
-<file path=ppt/slideLayouts/slideLayout4.xml><?xml version="1.0" encoding="utf-8"?>
-<p:sldLayout xmlns:a="http://schemas.openxmlformats.org/drawingml/2006/main" xmlns:r="http://schemas.openxmlformats.org/officeDocument/2006/relationships" xmlns:p="http://schemas.openxmlformats.org/presentationml/2006/main" preserve="1" userDrawn="1">
-  <p:cSld name="Title and 1 column + Comments right">
-    <p:spTree>
-      <p:nvGrpSpPr>
-        <p:cNvPr id="1" name=""/>
-        <p:cNvGrpSpPr/>
-        <p:nvPr/>
-      </p:nvGrpSpPr>
-      <p:grpSpPr>
-        <a:xfrm>
-          <a:off x="0" y="0"/>
-          <a:ext cx="0" cy="0"/>
-          <a:chOff x="0" y="0"/>
-          <a:chExt cx="0" cy="0"/>
-        </a:xfrm>
-      </p:grpSpPr>
-      <p:sp>
-        <p:nvSpPr>
-          <p:cNvPr id="5" name="Title_SM"/>
-          <p:cNvSpPr>
-            <a:spLocks noGrp="1" noChangeArrowheads="1"/>
-          </p:cNvSpPr>
-          <p:nvPr>
-            <p:ph type="title" hasCustomPrompt="1"/>
-          </p:nvPr>
-        </p:nvSpPr>
-        <p:spPr bwMode="auto">
-          <a:xfrm>
-            <a:off x="479425" y="476250"/>
-            <a:ext cx="10019242" cy="1081088"/>
-          </a:xfrm>
-          <a:prstGeom prst="rect">
-            <a:avLst/>
-          </a:prstGeom>
-          <a:noFill/>
-          <a:ln w="9525">
-            <a:noFill/>
-            <a:miter lim="800000"/>
-            <a:headEnd/>
-            <a:tailEnd/>
-          </a:ln>
-        </p:spPr>
-        <p:txBody>
-          <a:bodyPr vert="horz" wrap="square" lIns="72000" tIns="36000" rIns="73152" bIns="36576" numCol="1" anchor="t" anchorCtr="0" compatLnSpc="1">
-            <a:prstTxWarp prst="textNoShape">
-              <a:avLst/>
-            </a:prstTxWarp>
-            <a:noAutofit/>
-          </a:bodyPr>
-          <a:lstStyle>
-            <a:lvl1pPr>
-              <a:defRPr>
-                <a:solidFill>
-                  <a:schemeClr val="tx1"/>
-                </a:solidFill>
-              </a:defRPr>
-            </a:lvl1pPr>
-          </a:lstStyle>
-          <a:p>
-            <a:pPr lvl="0"/>
-            <a:r>
-              <a:rPr lang="en-US"/>
-              <a:t>Use this layout for document slides when you need space for a long heading and big content area</a:t>
-            </a:r>
-          </a:p>
-        </p:txBody>
-      </p:sp>
-      <p:sp>
-        <p:nvSpPr>
-          <p:cNvPr id="3" name="Content Placeholder 2">
-            <a:extLst>
-              <a:ext uri="{FF2B5EF4-FFF2-40B4-BE49-F238E27FC236}">
-                <a16:creationId xmlns:a16="http://schemas.microsoft.com/office/drawing/2014/main" id="{810CFEFC-6AC8-4817-A0D3-6029D48BD293}"/>
-              </a:ext>
-            </a:extLst>
-          </p:cNvPr>
-          <p:cNvSpPr>
-            <a:spLocks noGrp="1"/>
-          </p:cNvSpPr>
-          <p:nvPr>
-            <p:ph sz="quarter" idx="10" hasCustomPrompt="1"/>
-          </p:nvPr>
-        </p:nvSpPr>
-        <p:spPr>
-          <a:xfrm>
-            <a:off x="9002391" y="1709736"/>
-            <a:ext cx="2710183" cy="4999821"/>
-          </a:xfrm>
-          <a:prstGeom prst="rect">
-            <a:avLst/>
-          </a:prstGeom>
-        </p:spPr>
-        <p:txBody>
-          <a:bodyPr/>
-          <a:lstStyle>
-            <a:lvl1pPr>
-              <a:defRPr sz="1200">
-                <a:solidFill>
-                  <a:schemeClr val="tx1"/>
-                </a:solidFill>
-              </a:defRPr>
-            </a:lvl1pPr>
-            <a:lvl2pPr>
-              <a:defRPr sz="1200">
-                <a:solidFill>
-                  <a:schemeClr val="tx1"/>
-                </a:solidFill>
-              </a:defRPr>
-            </a:lvl2pPr>
-            <a:lvl3pPr>
-              <a:defRPr sz="1200">
-                <a:solidFill>
-                  <a:schemeClr val="tx1"/>
-                </a:solidFill>
-              </a:defRPr>
-            </a:lvl3pPr>
-            <a:lvl4pPr>
-              <a:defRPr sz="1200">
-                <a:solidFill>
-                  <a:schemeClr val="tx1"/>
-                </a:solidFill>
-              </a:defRPr>
-            </a:lvl4pPr>
-            <a:lvl5pPr>
-              <a:defRPr/>
-            </a:lvl5pPr>
-          </a:lstStyle>
-          <a:p>
-            <a:pPr lvl="0"/>
-            <a:r>
-              <a:rPr lang="en-US"/>
-              <a:t>For heading, use Ericsson Hilda in bold. For copy and bullets, use Ericsson Hilda.</a:t>
-            </a:r>
-          </a:p>
-          <a:p>
-            <a:pPr lvl="0"/>
-            <a:r>
-              <a:rPr lang="en-US"/>
-              <a:t>First level</a:t>
-            </a:r>
-          </a:p>
-          <a:p>
-            <a:pPr lvl="1"/>
-            <a:r>
-              <a:rPr lang="en-US"/>
-              <a:t>Second level</a:t>
-            </a:r>
-          </a:p>
-          <a:p>
-            <a:pPr lvl="2"/>
-            <a:r>
-              <a:rPr lang="en-US"/>
-              <a:t>Third level</a:t>
-            </a:r>
-          </a:p>
-          <a:p>
-            <a:pPr lvl="3"/>
-            <a:r>
-              <a:rPr lang="en-US"/>
-              <a:t>Fourth level</a:t>
-            </a:r>
-          </a:p>
-        </p:txBody>
-      </p:sp>
-      <p:sp>
-        <p:nvSpPr>
-          <p:cNvPr id="8" name="txtfooterCopy" descr="{&#10; &quot;SkabelonDesign&quot;: {&#10; &quot;textualValue&quot;: &quot;&lt;key1/&gt;&quot;,&#10; &quot;bindingCollection&quot;: {&#10; &quot;key1&quot;: {&quot;SkabelonDesign&quot;:{&quot;type&quot;:&quot;Text&quot;,&quot;binding&quot;:&quot;Module.FooterText&quot;}}&#10; }&#10; }&#10;}">
-            <a:extLst>
-              <a:ext uri="{FF2B5EF4-FFF2-40B4-BE49-F238E27FC236}">
-                <a16:creationId xmlns:a16="http://schemas.microsoft.com/office/drawing/2014/main" id="{C2AD0284-E6BA-49D8-AB3F-D94DBB1D54F0}"/>
-              </a:ext>
-            </a:extLst>
-          </p:cNvPr>
-          <p:cNvSpPr txBox="1"/>
-          <p:nvPr userDrawn="1"/>
-        </p:nvSpPr>
-        <p:spPr>
-          <a:xfrm>
-            <a:off x="421638" y="6524625"/>
-            <a:ext cx="65" cy="123111"/>
-          </a:xfrm>
-          <a:prstGeom prst="rect">
-            <a:avLst/>
-          </a:prstGeom>
-          <a:noFill/>
-        </p:spPr>
-        <p:txBody>
-          <a:bodyPr vert="horz" wrap="none" lIns="0" tIns="0" rIns="0" bIns="0" rtlCol="0">
-            <a:spAutoFit/>
-          </a:bodyPr>
-          <a:lstStyle/>
-          <a:p>
-            <a:pPr marL="0" indent="0" algn="l">
-              <a:buFontTx/>
-              <a:buNone/>
-            </a:pPr>
-            <a:endParaRPr lang="en-US" sz="800" b="0" i="0" u="none">
-              <a:solidFill>
-                <a:schemeClr val="tx1"/>
-              </a:solidFill>
-              <a:latin typeface="+mn-lt"/>
-            </a:endParaRPr>
-          </a:p>
-        </p:txBody>
-      </p:sp>
-      <p:sp>
-        <p:nvSpPr>
-          <p:cNvPr id="9" name="Content Placeholder 6">
-            <a:extLst>
-              <a:ext uri="{FF2B5EF4-FFF2-40B4-BE49-F238E27FC236}">
-                <a16:creationId xmlns:a16="http://schemas.microsoft.com/office/drawing/2014/main" id="{C9452E4A-90F8-9F51-3A7A-AF8A7C220EA1}"/>
-              </a:ext>
-            </a:extLst>
-          </p:cNvPr>
-          <p:cNvSpPr>
-            <a:spLocks noGrp="1"/>
-          </p:cNvSpPr>
-          <p:nvPr>
-            <p:ph sz="quarter" idx="12"/>
-          </p:nvPr>
-        </p:nvSpPr>
-        <p:spPr>
-          <a:xfrm>
-            <a:off x="479425" y="1706563"/>
-            <a:ext cx="8307730" cy="4999821"/>
-          </a:xfrm>
-        </p:spPr>
-        <p:txBody>
-          <a:bodyPr/>
-          <a:lstStyle/>
-          <a:p>
-            <a:pPr lvl="0"/>
-            <a:r>
-              <a:rPr lang="en-US"/>
-              <a:t>Click to edit Master text styles</a:t>
-            </a:r>
-          </a:p>
-          <a:p>
-            <a:pPr lvl="1"/>
-            <a:r>
-              <a:rPr lang="en-US"/>
-              <a:t>Second level</a:t>
-            </a:r>
-          </a:p>
-          <a:p>
-            <a:pPr lvl="2"/>
-            <a:r>
-              <a:rPr lang="en-US"/>
-              <a:t>Third level</a:t>
-            </a:r>
-          </a:p>
-          <a:p>
-            <a:pPr lvl="3"/>
-            <a:r>
-              <a:rPr lang="en-US"/>
-              <a:t>Fourth level</a:t>
-            </a:r>
-          </a:p>
-          <a:p>
-            <a:pPr lvl="4"/>
-            <a:r>
-              <a:rPr lang="en-US"/>
-              <a:t>Fifth level</a:t>
-            </a:r>
-          </a:p>
-        </p:txBody>
-      </p:sp>
-    </p:spTree>
-    <p:extLst>
-      <p:ext uri="{BB962C8B-B14F-4D97-AF65-F5344CB8AC3E}">
-        <p14:creationId xmlns:p14="http://schemas.microsoft.com/office/powerpoint/2010/main" val="224496708"/>
-      </p:ext>
-    </p:extLst>
-  </p:cSld>
-  <p:clrMapOvr>
-    <a:masterClrMapping/>
-  </p:clrMapOvr>
-</p:sldLayout>
-</file>
-
-<file path=ppt/slideLayouts/slideLayout40.xml><?xml version="1.0" encoding="utf-8"?>
+<file path=ppt/slideLayouts/slideLayout42.xml><?xml version="1.0" encoding="utf-8"?>
 <p:sldLayout xmlns:a="http://schemas.openxmlformats.org/drawingml/2006/main" xmlns:r="http://schemas.openxmlformats.org/officeDocument/2006/relationships" xmlns:p="http://schemas.openxmlformats.org/presentationml/2006/main" showMasterSp="0" preserve="1" userDrawn="1">
   <p:cSld name="1_Black Title and 2 columns">
     <p:bg>
@@ -12220,7 +12480,7 @@
 </p:sldLayout>
 </file>
 
-<file path=ppt/slideLayouts/slideLayout41.xml><?xml version="1.0" encoding="utf-8"?>
+<file path=ppt/slideLayouts/slideLayout43.xml><?xml version="1.0" encoding="utf-8"?>
 <p:sldLayout xmlns:a="http://schemas.openxmlformats.org/drawingml/2006/main" xmlns:r="http://schemas.openxmlformats.org/officeDocument/2006/relationships" xmlns:p="http://schemas.openxmlformats.org/presentationml/2006/main" preserve="1" userDrawn="1">
   <p:cSld name="1_Title and 3 columns">
     <p:spTree>
@@ -12594,7 +12854,7 @@
 </p:sldLayout>
 </file>
 
-<file path=ppt/slideLayouts/slideLayout42.xml><?xml version="1.0" encoding="utf-8"?>
+<file path=ppt/slideLayouts/slideLayout44.xml><?xml version="1.0" encoding="utf-8"?>
 <p:sldLayout xmlns:a="http://schemas.openxmlformats.org/drawingml/2006/main" xmlns:r="http://schemas.openxmlformats.org/officeDocument/2006/relationships" xmlns:p="http://schemas.openxmlformats.org/presentationml/2006/main" preserve="1" userDrawn="1">
   <p:cSld name="1_Black Title and 3 columns">
     <p:bg>
@@ -13068,7 +13328,7 @@
 </p:sldLayout>
 </file>
 
-<file path=ppt/slideLayouts/slideLayout43.xml><?xml version="1.0" encoding="utf-8"?>
+<file path=ppt/slideLayouts/slideLayout45.xml><?xml version="1.0" encoding="utf-8"?>
 <p:sldLayout xmlns:a="http://schemas.openxmlformats.org/drawingml/2006/main" xmlns:r="http://schemas.openxmlformats.org/officeDocument/2006/relationships" xmlns:p="http://schemas.openxmlformats.org/presentationml/2006/main" preserve="1" userDrawn="1">
   <p:cSld name="1_Title and 4 columns">
     <p:spTree>
@@ -13507,7 +13767,7 @@
 </p:sldLayout>
 </file>
 
-<file path=ppt/slideLayouts/slideLayout44.xml><?xml version="1.0" encoding="utf-8"?>
+<file path=ppt/slideLayouts/slideLayout46.xml><?xml version="1.0" encoding="utf-8"?>
 <p:sldLayout xmlns:a="http://schemas.openxmlformats.org/drawingml/2006/main" xmlns:r="http://schemas.openxmlformats.org/officeDocument/2006/relationships" xmlns:p="http://schemas.openxmlformats.org/presentationml/2006/main" showMasterSp="0" preserve="1" userDrawn="1">
   <p:cSld name="1_Black Title and 4 columns">
     <p:bg>
@@ -14046,7 +14306,7 @@
 </p:sldLayout>
 </file>
 
-<file path=ppt/slideLayouts/slideLayout45.xml><?xml version="1.0" encoding="utf-8"?>
+<file path=ppt/slideLayouts/slideLayout47.xml><?xml version="1.0" encoding="utf-8"?>
 <p:sldLayout xmlns:a="http://schemas.openxmlformats.org/drawingml/2006/main" xmlns:r="http://schemas.openxmlformats.org/officeDocument/2006/relationships" xmlns:p="http://schemas.openxmlformats.org/presentationml/2006/main" preserve="1" userDrawn="1">
   <p:cSld name="1_Title and 4 Content">
     <p:spTree>
@@ -14544,7 +14804,7 @@
 </p:sldLayout>
 </file>
 
-<file path=ppt/slideLayouts/slideLayout46.xml><?xml version="1.0" encoding="utf-8"?>
+<file path=ppt/slideLayouts/slideLayout48.xml><?xml version="1.0" encoding="utf-8"?>
 <p:sldLayout xmlns:a="http://schemas.openxmlformats.org/drawingml/2006/main" xmlns:r="http://schemas.openxmlformats.org/officeDocument/2006/relationships" xmlns:p="http://schemas.openxmlformats.org/presentationml/2006/main" showMasterSp="0" preserve="1" userDrawn="1">
   <p:cSld name="1_Black Title and 4 Content">
     <p:bg>
@@ -15142,7 +15402,7 @@
 </p:sldLayout>
 </file>
 
-<file path=ppt/slideLayouts/slideLayout47.xml><?xml version="1.0" encoding="utf-8"?>
+<file path=ppt/slideLayouts/slideLayout49.xml><?xml version="1.0" encoding="utf-8"?>
 <p:sldLayout xmlns:a="http://schemas.openxmlformats.org/drawingml/2006/main" xmlns:r="http://schemas.openxmlformats.org/officeDocument/2006/relationships" xmlns:p="http://schemas.openxmlformats.org/presentationml/2006/main" preserve="1" userDrawn="1">
   <p:cSld name="1_Title and 8 Content">
     <p:spTree>
@@ -15839,7 +16099,350 @@
 </p:sldLayout>
 </file>
 
-<file path=ppt/slideLayouts/slideLayout48.xml><?xml version="1.0" encoding="utf-8"?>
+<file path=ppt/slideLayouts/slideLayout5.xml><?xml version="1.0" encoding="utf-8"?>
+<p:sldLayout xmlns:a="http://schemas.openxmlformats.org/drawingml/2006/main" xmlns:r="http://schemas.openxmlformats.org/officeDocument/2006/relationships" xmlns:p="http://schemas.openxmlformats.org/presentationml/2006/main" preserve="1" userDrawn="1">
+  <p:cSld name="Title and 2 columns + Comments">
+    <p:spTree>
+      <p:nvGrpSpPr>
+        <p:cNvPr id="1" name=""/>
+        <p:cNvGrpSpPr/>
+        <p:nvPr/>
+      </p:nvGrpSpPr>
+      <p:grpSpPr>
+        <a:xfrm>
+          <a:off x="0" y="0"/>
+          <a:ext cx="0" cy="0"/>
+          <a:chOff x="0" y="0"/>
+          <a:chExt cx="0" cy="0"/>
+        </a:xfrm>
+      </p:grpSpPr>
+      <p:sp>
+        <p:nvSpPr>
+          <p:cNvPr id="5" name="Title_SM"/>
+          <p:cNvSpPr>
+            <a:spLocks noGrp="1" noChangeArrowheads="1"/>
+          </p:cNvSpPr>
+          <p:nvPr>
+            <p:ph type="title" hasCustomPrompt="1"/>
+          </p:nvPr>
+        </p:nvSpPr>
+        <p:spPr bwMode="auto">
+          <a:xfrm>
+            <a:off x="479425" y="476250"/>
+            <a:ext cx="9985375" cy="1081088"/>
+          </a:xfrm>
+          <a:prstGeom prst="rect">
+            <a:avLst/>
+          </a:prstGeom>
+          <a:noFill/>
+          <a:ln w="9525">
+            <a:noFill/>
+            <a:miter lim="800000"/>
+            <a:headEnd/>
+            <a:tailEnd/>
+          </a:ln>
+        </p:spPr>
+        <p:txBody>
+          <a:bodyPr vert="horz" wrap="square" lIns="72000" tIns="36000" rIns="73152" bIns="36576" numCol="1" anchor="t" anchorCtr="0" compatLnSpc="1">
+            <a:prstTxWarp prst="textNoShape">
+              <a:avLst/>
+            </a:prstTxWarp>
+            <a:noAutofit/>
+          </a:bodyPr>
+          <a:lstStyle>
+            <a:lvl1pPr>
+              <a:defRPr>
+                <a:solidFill>
+                  <a:schemeClr val="tx1"/>
+                </a:solidFill>
+              </a:defRPr>
+            </a:lvl1pPr>
+          </a:lstStyle>
+          <a:p>
+            <a:pPr lvl="0"/>
+            <a:r>
+              <a:rPr lang="en-US"/>
+              <a:t>Use this layout for document slides when you need space for a long heading and big content area</a:t>
+            </a:r>
+          </a:p>
+        </p:txBody>
+      </p:sp>
+      <p:sp>
+        <p:nvSpPr>
+          <p:cNvPr id="3" name="Content Placeholder 2">
+            <a:extLst>
+              <a:ext uri="{FF2B5EF4-FFF2-40B4-BE49-F238E27FC236}">
+                <a16:creationId xmlns:a16="http://schemas.microsoft.com/office/drawing/2014/main" id="{810CFEFC-6AC8-4817-A0D3-6029D48BD293}"/>
+              </a:ext>
+            </a:extLst>
+          </p:cNvPr>
+          <p:cNvSpPr>
+            <a:spLocks noGrp="1"/>
+          </p:cNvSpPr>
+          <p:nvPr>
+            <p:ph sz="quarter" idx="10" hasCustomPrompt="1"/>
+          </p:nvPr>
+        </p:nvSpPr>
+        <p:spPr>
+          <a:xfrm>
+            <a:off x="479425" y="5525984"/>
+            <a:ext cx="11233150" cy="1183573"/>
+          </a:xfrm>
+          <a:prstGeom prst="rect">
+            <a:avLst/>
+          </a:prstGeom>
+        </p:spPr>
+        <p:txBody>
+          <a:bodyPr/>
+          <a:lstStyle>
+            <a:lvl1pPr>
+              <a:defRPr sz="1200">
+                <a:solidFill>
+                  <a:schemeClr val="tx1"/>
+                </a:solidFill>
+              </a:defRPr>
+            </a:lvl1pPr>
+            <a:lvl2pPr>
+              <a:defRPr sz="1200">
+                <a:solidFill>
+                  <a:schemeClr val="tx1"/>
+                </a:solidFill>
+              </a:defRPr>
+            </a:lvl2pPr>
+            <a:lvl3pPr>
+              <a:defRPr sz="1200">
+                <a:solidFill>
+                  <a:schemeClr val="tx1"/>
+                </a:solidFill>
+              </a:defRPr>
+            </a:lvl3pPr>
+            <a:lvl4pPr>
+              <a:defRPr sz="1200">
+                <a:solidFill>
+                  <a:schemeClr val="tx1"/>
+                </a:solidFill>
+              </a:defRPr>
+            </a:lvl4pPr>
+            <a:lvl5pPr>
+              <a:defRPr/>
+            </a:lvl5pPr>
+          </a:lstStyle>
+          <a:p>
+            <a:pPr lvl="0"/>
+            <a:r>
+              <a:rPr lang="en-US"/>
+              <a:t>For heading, use Ericsson Hilda in bold. For copy and bullets, use Ericsson Hilda.</a:t>
+            </a:r>
+          </a:p>
+          <a:p>
+            <a:pPr lvl="0"/>
+            <a:r>
+              <a:rPr lang="en-US"/>
+              <a:t>First level</a:t>
+            </a:r>
+          </a:p>
+          <a:p>
+            <a:pPr lvl="1"/>
+            <a:r>
+              <a:rPr lang="en-US"/>
+              <a:t>Second level</a:t>
+            </a:r>
+          </a:p>
+          <a:p>
+            <a:pPr lvl="2"/>
+            <a:r>
+              <a:rPr lang="en-US"/>
+              <a:t>Third level</a:t>
+            </a:r>
+          </a:p>
+          <a:p>
+            <a:pPr lvl="3"/>
+            <a:r>
+              <a:rPr lang="en-US"/>
+              <a:t>Fourth level</a:t>
+            </a:r>
+          </a:p>
+        </p:txBody>
+      </p:sp>
+      <p:sp>
+        <p:nvSpPr>
+          <p:cNvPr id="8" name="txtfooterCopy" descr="{&#10; &quot;SkabelonDesign&quot;: {&#10; &quot;textualValue&quot;: &quot;&lt;key1/&gt;&quot;,&#10; &quot;bindingCollection&quot;: {&#10; &quot;key1&quot;: {&quot;SkabelonDesign&quot;:{&quot;type&quot;:&quot;Text&quot;,&quot;binding&quot;:&quot;Module.FooterText&quot;}}&#10; }&#10; }&#10;}">
+            <a:extLst>
+              <a:ext uri="{FF2B5EF4-FFF2-40B4-BE49-F238E27FC236}">
+                <a16:creationId xmlns:a16="http://schemas.microsoft.com/office/drawing/2014/main" id="{C2AD0284-E6BA-49D8-AB3F-D94DBB1D54F0}"/>
+              </a:ext>
+            </a:extLst>
+          </p:cNvPr>
+          <p:cNvSpPr txBox="1"/>
+          <p:nvPr userDrawn="1"/>
+        </p:nvSpPr>
+        <p:spPr>
+          <a:xfrm>
+            <a:off x="421638" y="6524625"/>
+            <a:ext cx="65" cy="123111"/>
+          </a:xfrm>
+          <a:prstGeom prst="rect">
+            <a:avLst/>
+          </a:prstGeom>
+          <a:noFill/>
+        </p:spPr>
+        <p:txBody>
+          <a:bodyPr vert="horz" wrap="none" lIns="0" tIns="0" rIns="0" bIns="0" rtlCol="0">
+            <a:spAutoFit/>
+          </a:bodyPr>
+          <a:lstStyle/>
+          <a:p>
+            <a:pPr marL="0" indent="0" algn="l">
+              <a:buFontTx/>
+              <a:buNone/>
+            </a:pPr>
+            <a:endParaRPr lang="en-US" sz="800" b="0" i="0" u="none">
+              <a:solidFill>
+                <a:schemeClr val="tx1"/>
+              </a:solidFill>
+              <a:latin typeface="+mn-lt"/>
+            </a:endParaRPr>
+          </a:p>
+        </p:txBody>
+      </p:sp>
+      <p:sp>
+        <p:nvSpPr>
+          <p:cNvPr id="7" name="Content Placeholder 6">
+            <a:extLst>
+              <a:ext uri="{FF2B5EF4-FFF2-40B4-BE49-F238E27FC236}">
+                <a16:creationId xmlns:a16="http://schemas.microsoft.com/office/drawing/2014/main" id="{DB866E44-A7AE-B643-0522-816211CEDA49}"/>
+              </a:ext>
+            </a:extLst>
+          </p:cNvPr>
+          <p:cNvSpPr>
+            <a:spLocks noGrp="1"/>
+          </p:cNvSpPr>
+          <p:nvPr>
+            <p:ph sz="quarter" idx="13"/>
+          </p:nvPr>
+        </p:nvSpPr>
+        <p:spPr>
+          <a:xfrm>
+            <a:off x="479423" y="1709736"/>
+            <a:ext cx="5561158" cy="3661867"/>
+          </a:xfrm>
+        </p:spPr>
+        <p:txBody>
+          <a:bodyPr/>
+          <a:lstStyle/>
+          <a:p>
+            <a:pPr lvl="0"/>
+            <a:r>
+              <a:rPr lang="en-US"/>
+              <a:t>Click to edit Master text styles</a:t>
+            </a:r>
+          </a:p>
+          <a:p>
+            <a:pPr lvl="1"/>
+            <a:r>
+              <a:rPr lang="en-US"/>
+              <a:t>Second level</a:t>
+            </a:r>
+          </a:p>
+          <a:p>
+            <a:pPr lvl="2"/>
+            <a:r>
+              <a:rPr lang="en-US"/>
+              <a:t>Third level</a:t>
+            </a:r>
+          </a:p>
+          <a:p>
+            <a:pPr lvl="3"/>
+            <a:r>
+              <a:rPr lang="en-US"/>
+              <a:t>Fourth level</a:t>
+            </a:r>
+          </a:p>
+          <a:p>
+            <a:pPr lvl="4"/>
+            <a:r>
+              <a:rPr lang="en-US"/>
+              <a:t>Fifth level</a:t>
+            </a:r>
+          </a:p>
+        </p:txBody>
+      </p:sp>
+      <p:sp>
+        <p:nvSpPr>
+          <p:cNvPr id="9" name="Content Placeholder 6">
+            <a:extLst>
+              <a:ext uri="{FF2B5EF4-FFF2-40B4-BE49-F238E27FC236}">
+                <a16:creationId xmlns:a16="http://schemas.microsoft.com/office/drawing/2014/main" id="{1DA618F3-EEF8-8D27-8883-E59D465EC7F2}"/>
+              </a:ext>
+            </a:extLst>
+          </p:cNvPr>
+          <p:cNvSpPr>
+            <a:spLocks noGrp="1"/>
+          </p:cNvSpPr>
+          <p:nvPr>
+            <p:ph sz="quarter" idx="14"/>
+          </p:nvPr>
+        </p:nvSpPr>
+        <p:spPr>
+          <a:xfrm>
+            <a:off x="6151421" y="1709735"/>
+            <a:ext cx="5561158" cy="3661867"/>
+          </a:xfrm>
+        </p:spPr>
+        <p:txBody>
+          <a:bodyPr/>
+          <a:lstStyle/>
+          <a:p>
+            <a:pPr lvl="0"/>
+            <a:r>
+              <a:rPr lang="en-US"/>
+              <a:t>Click to edit Master text styles</a:t>
+            </a:r>
+          </a:p>
+          <a:p>
+            <a:pPr lvl="1"/>
+            <a:r>
+              <a:rPr lang="en-US"/>
+              <a:t>Second level</a:t>
+            </a:r>
+          </a:p>
+          <a:p>
+            <a:pPr lvl="2"/>
+            <a:r>
+              <a:rPr lang="en-US"/>
+              <a:t>Third level</a:t>
+            </a:r>
+          </a:p>
+          <a:p>
+            <a:pPr lvl="3"/>
+            <a:r>
+              <a:rPr lang="en-US"/>
+              <a:t>Fourth level</a:t>
+            </a:r>
+          </a:p>
+          <a:p>
+            <a:pPr lvl="4"/>
+            <a:r>
+              <a:rPr lang="en-US"/>
+              <a:t>Fifth level</a:t>
+            </a:r>
+          </a:p>
+        </p:txBody>
+      </p:sp>
+    </p:spTree>
+    <p:extLst>
+      <p:ext uri="{BB962C8B-B14F-4D97-AF65-F5344CB8AC3E}">
+        <p14:creationId xmlns:p14="http://schemas.microsoft.com/office/powerpoint/2010/main" val="2956475591"/>
+      </p:ext>
+    </p:extLst>
+  </p:cSld>
+  <p:clrMapOvr>
+    <a:masterClrMapping/>
+  </p:clrMapOvr>
+</p:sldLayout>
+</file>
+
+<file path=ppt/slideLayouts/slideLayout50.xml><?xml version="1.0" encoding="utf-8"?>
 <p:sldLayout xmlns:a="http://schemas.openxmlformats.org/drawingml/2006/main" xmlns:r="http://schemas.openxmlformats.org/officeDocument/2006/relationships" xmlns:p="http://schemas.openxmlformats.org/presentationml/2006/main" showMasterSp="0" preserve="1" userDrawn="1">
   <p:cSld name="1_Black Title and 8 Content">
     <p:bg>
@@ -16636,7 +17239,7 @@
 </p:sldLayout>
 </file>
 
-<file path=ppt/slideLayouts/slideLayout49.xml><?xml version="1.0" encoding="utf-8"?>
+<file path=ppt/slideLayouts/slideLayout51.xml><?xml version="1.0" encoding="utf-8"?>
 <p:sldLayout xmlns:a="http://schemas.openxmlformats.org/drawingml/2006/main" xmlns:r="http://schemas.openxmlformats.org/officeDocument/2006/relationships" xmlns:p="http://schemas.openxmlformats.org/presentationml/2006/main" showMasterSp="0" preserve="1" userDrawn="1">
   <p:cSld name="Black logo end slide">
     <p:spTree>
@@ -16755,350 +17358,7 @@
 </p:sldLayout>
 </file>
 
-<file path=ppt/slideLayouts/slideLayout5.xml><?xml version="1.0" encoding="utf-8"?>
-<p:sldLayout xmlns:a="http://schemas.openxmlformats.org/drawingml/2006/main" xmlns:r="http://schemas.openxmlformats.org/officeDocument/2006/relationships" xmlns:p="http://schemas.openxmlformats.org/presentationml/2006/main" preserve="1" userDrawn="1">
-  <p:cSld name="Title and 2 columns + Comments">
-    <p:spTree>
-      <p:nvGrpSpPr>
-        <p:cNvPr id="1" name=""/>
-        <p:cNvGrpSpPr/>
-        <p:nvPr/>
-      </p:nvGrpSpPr>
-      <p:grpSpPr>
-        <a:xfrm>
-          <a:off x="0" y="0"/>
-          <a:ext cx="0" cy="0"/>
-          <a:chOff x="0" y="0"/>
-          <a:chExt cx="0" cy="0"/>
-        </a:xfrm>
-      </p:grpSpPr>
-      <p:sp>
-        <p:nvSpPr>
-          <p:cNvPr id="5" name="Title_SM"/>
-          <p:cNvSpPr>
-            <a:spLocks noGrp="1" noChangeArrowheads="1"/>
-          </p:cNvSpPr>
-          <p:nvPr>
-            <p:ph type="title" hasCustomPrompt="1"/>
-          </p:nvPr>
-        </p:nvSpPr>
-        <p:spPr bwMode="auto">
-          <a:xfrm>
-            <a:off x="479425" y="476250"/>
-            <a:ext cx="9985375" cy="1081088"/>
-          </a:xfrm>
-          <a:prstGeom prst="rect">
-            <a:avLst/>
-          </a:prstGeom>
-          <a:noFill/>
-          <a:ln w="9525">
-            <a:noFill/>
-            <a:miter lim="800000"/>
-            <a:headEnd/>
-            <a:tailEnd/>
-          </a:ln>
-        </p:spPr>
-        <p:txBody>
-          <a:bodyPr vert="horz" wrap="square" lIns="72000" tIns="36000" rIns="73152" bIns="36576" numCol="1" anchor="t" anchorCtr="0" compatLnSpc="1">
-            <a:prstTxWarp prst="textNoShape">
-              <a:avLst/>
-            </a:prstTxWarp>
-            <a:noAutofit/>
-          </a:bodyPr>
-          <a:lstStyle>
-            <a:lvl1pPr>
-              <a:defRPr>
-                <a:solidFill>
-                  <a:schemeClr val="tx1"/>
-                </a:solidFill>
-              </a:defRPr>
-            </a:lvl1pPr>
-          </a:lstStyle>
-          <a:p>
-            <a:pPr lvl="0"/>
-            <a:r>
-              <a:rPr lang="en-US"/>
-              <a:t>Use this layout for document slides when you need space for a long heading and big content area</a:t>
-            </a:r>
-          </a:p>
-        </p:txBody>
-      </p:sp>
-      <p:sp>
-        <p:nvSpPr>
-          <p:cNvPr id="3" name="Content Placeholder 2">
-            <a:extLst>
-              <a:ext uri="{FF2B5EF4-FFF2-40B4-BE49-F238E27FC236}">
-                <a16:creationId xmlns:a16="http://schemas.microsoft.com/office/drawing/2014/main" id="{810CFEFC-6AC8-4817-A0D3-6029D48BD293}"/>
-              </a:ext>
-            </a:extLst>
-          </p:cNvPr>
-          <p:cNvSpPr>
-            <a:spLocks noGrp="1"/>
-          </p:cNvSpPr>
-          <p:nvPr>
-            <p:ph sz="quarter" idx="10" hasCustomPrompt="1"/>
-          </p:nvPr>
-        </p:nvSpPr>
-        <p:spPr>
-          <a:xfrm>
-            <a:off x="479425" y="5525984"/>
-            <a:ext cx="11233150" cy="1183573"/>
-          </a:xfrm>
-          <a:prstGeom prst="rect">
-            <a:avLst/>
-          </a:prstGeom>
-        </p:spPr>
-        <p:txBody>
-          <a:bodyPr/>
-          <a:lstStyle>
-            <a:lvl1pPr>
-              <a:defRPr sz="1200">
-                <a:solidFill>
-                  <a:schemeClr val="tx1"/>
-                </a:solidFill>
-              </a:defRPr>
-            </a:lvl1pPr>
-            <a:lvl2pPr>
-              <a:defRPr sz="1200">
-                <a:solidFill>
-                  <a:schemeClr val="tx1"/>
-                </a:solidFill>
-              </a:defRPr>
-            </a:lvl2pPr>
-            <a:lvl3pPr>
-              <a:defRPr sz="1200">
-                <a:solidFill>
-                  <a:schemeClr val="tx1"/>
-                </a:solidFill>
-              </a:defRPr>
-            </a:lvl3pPr>
-            <a:lvl4pPr>
-              <a:defRPr sz="1200">
-                <a:solidFill>
-                  <a:schemeClr val="tx1"/>
-                </a:solidFill>
-              </a:defRPr>
-            </a:lvl4pPr>
-            <a:lvl5pPr>
-              <a:defRPr/>
-            </a:lvl5pPr>
-          </a:lstStyle>
-          <a:p>
-            <a:pPr lvl="0"/>
-            <a:r>
-              <a:rPr lang="en-US"/>
-              <a:t>For heading, use Ericsson Hilda in bold. For copy and bullets, use Ericsson Hilda.</a:t>
-            </a:r>
-          </a:p>
-          <a:p>
-            <a:pPr lvl="0"/>
-            <a:r>
-              <a:rPr lang="en-US"/>
-              <a:t>First level</a:t>
-            </a:r>
-          </a:p>
-          <a:p>
-            <a:pPr lvl="1"/>
-            <a:r>
-              <a:rPr lang="en-US"/>
-              <a:t>Second level</a:t>
-            </a:r>
-          </a:p>
-          <a:p>
-            <a:pPr lvl="2"/>
-            <a:r>
-              <a:rPr lang="en-US"/>
-              <a:t>Third level</a:t>
-            </a:r>
-          </a:p>
-          <a:p>
-            <a:pPr lvl="3"/>
-            <a:r>
-              <a:rPr lang="en-US"/>
-              <a:t>Fourth level</a:t>
-            </a:r>
-          </a:p>
-        </p:txBody>
-      </p:sp>
-      <p:sp>
-        <p:nvSpPr>
-          <p:cNvPr id="8" name="txtfooterCopy" descr="{&#10; &quot;SkabelonDesign&quot;: {&#10; &quot;textualValue&quot;: &quot;&lt;key1/&gt;&quot;,&#10; &quot;bindingCollection&quot;: {&#10; &quot;key1&quot;: {&quot;SkabelonDesign&quot;:{&quot;type&quot;:&quot;Text&quot;,&quot;binding&quot;:&quot;Module.FooterText&quot;}}&#10; }&#10; }&#10;}">
-            <a:extLst>
-              <a:ext uri="{FF2B5EF4-FFF2-40B4-BE49-F238E27FC236}">
-                <a16:creationId xmlns:a16="http://schemas.microsoft.com/office/drawing/2014/main" id="{C2AD0284-E6BA-49D8-AB3F-D94DBB1D54F0}"/>
-              </a:ext>
-            </a:extLst>
-          </p:cNvPr>
-          <p:cNvSpPr txBox="1"/>
-          <p:nvPr userDrawn="1"/>
-        </p:nvSpPr>
-        <p:spPr>
-          <a:xfrm>
-            <a:off x="421638" y="6524625"/>
-            <a:ext cx="65" cy="123111"/>
-          </a:xfrm>
-          <a:prstGeom prst="rect">
-            <a:avLst/>
-          </a:prstGeom>
-          <a:noFill/>
-        </p:spPr>
-        <p:txBody>
-          <a:bodyPr vert="horz" wrap="none" lIns="0" tIns="0" rIns="0" bIns="0" rtlCol="0">
-            <a:spAutoFit/>
-          </a:bodyPr>
-          <a:lstStyle/>
-          <a:p>
-            <a:pPr marL="0" indent="0" algn="l">
-              <a:buFontTx/>
-              <a:buNone/>
-            </a:pPr>
-            <a:endParaRPr lang="en-US" sz="800" b="0" i="0" u="none">
-              <a:solidFill>
-                <a:schemeClr val="tx1"/>
-              </a:solidFill>
-              <a:latin typeface="+mn-lt"/>
-            </a:endParaRPr>
-          </a:p>
-        </p:txBody>
-      </p:sp>
-      <p:sp>
-        <p:nvSpPr>
-          <p:cNvPr id="7" name="Content Placeholder 6">
-            <a:extLst>
-              <a:ext uri="{FF2B5EF4-FFF2-40B4-BE49-F238E27FC236}">
-                <a16:creationId xmlns:a16="http://schemas.microsoft.com/office/drawing/2014/main" id="{DB866E44-A7AE-B643-0522-816211CEDA49}"/>
-              </a:ext>
-            </a:extLst>
-          </p:cNvPr>
-          <p:cNvSpPr>
-            <a:spLocks noGrp="1"/>
-          </p:cNvSpPr>
-          <p:nvPr>
-            <p:ph sz="quarter" idx="13"/>
-          </p:nvPr>
-        </p:nvSpPr>
-        <p:spPr>
-          <a:xfrm>
-            <a:off x="479423" y="1709736"/>
-            <a:ext cx="5561158" cy="3661867"/>
-          </a:xfrm>
-        </p:spPr>
-        <p:txBody>
-          <a:bodyPr/>
-          <a:lstStyle/>
-          <a:p>
-            <a:pPr lvl="0"/>
-            <a:r>
-              <a:rPr lang="en-US"/>
-              <a:t>Click to edit Master text styles</a:t>
-            </a:r>
-          </a:p>
-          <a:p>
-            <a:pPr lvl="1"/>
-            <a:r>
-              <a:rPr lang="en-US"/>
-              <a:t>Second level</a:t>
-            </a:r>
-          </a:p>
-          <a:p>
-            <a:pPr lvl="2"/>
-            <a:r>
-              <a:rPr lang="en-US"/>
-              <a:t>Third level</a:t>
-            </a:r>
-          </a:p>
-          <a:p>
-            <a:pPr lvl="3"/>
-            <a:r>
-              <a:rPr lang="en-US"/>
-              <a:t>Fourth level</a:t>
-            </a:r>
-          </a:p>
-          <a:p>
-            <a:pPr lvl="4"/>
-            <a:r>
-              <a:rPr lang="en-US"/>
-              <a:t>Fifth level</a:t>
-            </a:r>
-          </a:p>
-        </p:txBody>
-      </p:sp>
-      <p:sp>
-        <p:nvSpPr>
-          <p:cNvPr id="9" name="Content Placeholder 6">
-            <a:extLst>
-              <a:ext uri="{FF2B5EF4-FFF2-40B4-BE49-F238E27FC236}">
-                <a16:creationId xmlns:a16="http://schemas.microsoft.com/office/drawing/2014/main" id="{1DA618F3-EEF8-8D27-8883-E59D465EC7F2}"/>
-              </a:ext>
-            </a:extLst>
-          </p:cNvPr>
-          <p:cNvSpPr>
-            <a:spLocks noGrp="1"/>
-          </p:cNvSpPr>
-          <p:nvPr>
-            <p:ph sz="quarter" idx="14"/>
-          </p:nvPr>
-        </p:nvSpPr>
-        <p:spPr>
-          <a:xfrm>
-            <a:off x="6151421" y="1709735"/>
-            <a:ext cx="5561158" cy="3661867"/>
-          </a:xfrm>
-        </p:spPr>
-        <p:txBody>
-          <a:bodyPr/>
-          <a:lstStyle/>
-          <a:p>
-            <a:pPr lvl="0"/>
-            <a:r>
-              <a:rPr lang="en-US"/>
-              <a:t>Click to edit Master text styles</a:t>
-            </a:r>
-          </a:p>
-          <a:p>
-            <a:pPr lvl="1"/>
-            <a:r>
-              <a:rPr lang="en-US"/>
-              <a:t>Second level</a:t>
-            </a:r>
-          </a:p>
-          <a:p>
-            <a:pPr lvl="2"/>
-            <a:r>
-              <a:rPr lang="en-US"/>
-              <a:t>Third level</a:t>
-            </a:r>
-          </a:p>
-          <a:p>
-            <a:pPr lvl="3"/>
-            <a:r>
-              <a:rPr lang="en-US"/>
-              <a:t>Fourth level</a:t>
-            </a:r>
-          </a:p>
-          <a:p>
-            <a:pPr lvl="4"/>
-            <a:r>
-              <a:rPr lang="en-US"/>
-              <a:t>Fifth level</a:t>
-            </a:r>
-          </a:p>
-        </p:txBody>
-      </p:sp>
-    </p:spTree>
-    <p:extLst>
-      <p:ext uri="{BB962C8B-B14F-4D97-AF65-F5344CB8AC3E}">
-        <p14:creationId xmlns:p14="http://schemas.microsoft.com/office/powerpoint/2010/main" val="2956475591"/>
-      </p:ext>
-    </p:extLst>
-  </p:cSld>
-  <p:clrMapOvr>
-    <a:masterClrMapping/>
-  </p:clrMapOvr>
-</p:sldLayout>
-</file>
-
-<file path=ppt/slideLayouts/slideLayout50.xml><?xml version="1.0" encoding="utf-8"?>
+<file path=ppt/slideLayouts/slideLayout52.xml><?xml version="1.0" encoding="utf-8"?>
 <p:sldLayout xmlns:a="http://schemas.openxmlformats.org/drawingml/2006/main" xmlns:r="http://schemas.openxmlformats.org/officeDocument/2006/relationships" xmlns:p="http://schemas.openxmlformats.org/presentationml/2006/main" showMasterSp="0" preserve="1" userDrawn="1">
   <p:cSld name="White logo end slide">
     <p:bg>
@@ -17281,7 +17541,7 @@
 </p:sldLayout>
 </file>
 
-<file path=ppt/slideLayouts/slideLayout51.xml><?xml version="1.0" encoding="utf-8"?>
+<file path=ppt/slideLayouts/slideLayout53.xml><?xml version="1.0" encoding="utf-8"?>
 <p:sldLayout xmlns:a="http://schemas.openxmlformats.org/drawingml/2006/main" xmlns:r="http://schemas.openxmlformats.org/officeDocument/2006/relationships" xmlns:p="http://schemas.openxmlformats.org/presentationml/2006/main" showMasterSp="0" preserve="1" userDrawn="1">
   <p:cSld name="Embedded characters">
     <p:spTree>
@@ -18195,7 +18455,7 @@
 </p:sldLayout>
 </file>
 
-<file path=ppt/slideLayouts/slideLayout52.xml><?xml version="1.0" encoding="utf-8"?>
+<file path=ppt/slideLayouts/slideLayout54.xml><?xml version="1.0" encoding="utf-8"?>
 <p:sldLayout xmlns:a="http://schemas.openxmlformats.org/drawingml/2006/main" xmlns:r="http://schemas.openxmlformats.org/officeDocument/2006/relationships" xmlns:p="http://schemas.openxmlformats.org/presentationml/2006/main" type="obj">
   <p:cSld name="Title and Content">
     <p:spTree>
@@ -18396,7 +18656,7 @@
               <a:pPr>
                 <a:defRPr/>
               </a:pPr>
-              <a:t>‹#›</a:t>
+              <a:t>‹Nº›</a:t>
             </a:fld>
             <a:endParaRPr lang="en-US">
               <a:solidFill>
@@ -18420,7 +18680,7 @@
 </p:sldLayout>
 </file>
 
-<file path=ppt/slideLayouts/slideLayout53.xml><?xml version="1.0" encoding="utf-8"?>
+<file path=ppt/slideLayouts/slideLayout55.xml><?xml version="1.0" encoding="utf-8"?>
 <p:sldLayout xmlns:a="http://schemas.openxmlformats.org/drawingml/2006/main" xmlns:r="http://schemas.openxmlformats.org/officeDocument/2006/relationships" xmlns:p="http://schemas.openxmlformats.org/presentationml/2006/main" userDrawn="1">
   <p:cSld name="ea23aef9-865f-46e0-9feb-85e9b06e34f1">
     <p:spTree>
@@ -18567,7 +18827,7 @@
 </p:sldLayout>
 </file>
 
-<file path=ppt/slideLayouts/slideLayout54.xml><?xml version="1.0" encoding="utf-8"?>
+<file path=ppt/slideLayouts/slideLayout56.xml><?xml version="1.0" encoding="utf-8"?>
 <p:sldLayout xmlns:a="http://schemas.openxmlformats.org/drawingml/2006/main" xmlns:r="http://schemas.openxmlformats.org/officeDocument/2006/relationships" xmlns:p="http://schemas.openxmlformats.org/presentationml/2006/main" userDrawn="1">
   <p:cSld name="80f26b25-7c56-47e9-8e69-7c9c8de37137">
     <p:spTree>
@@ -18714,7 +18974,7 @@
 </p:sldLayout>
 </file>
 
-<file path=ppt/slideLayouts/slideLayout55.xml><?xml version="1.0" encoding="utf-8"?>
+<file path=ppt/slideLayouts/slideLayout57.xml><?xml version="1.0" encoding="utf-8"?>
 <p:sldLayout xmlns:a="http://schemas.openxmlformats.org/drawingml/2006/main" xmlns:r="http://schemas.openxmlformats.org/officeDocument/2006/relationships" xmlns:p="http://schemas.openxmlformats.org/presentationml/2006/main" preserve="1" userDrawn="1">
   <p:cSld name="Title Page">
     <p:spTree>
@@ -18973,7 +19233,7 @@
 </p:sldLayout>
 </file>
 
-<file path=ppt/slideLayouts/slideLayout56.xml><?xml version="1.0" encoding="utf-8"?>
+<file path=ppt/slideLayouts/slideLayout58.xml><?xml version="1.0" encoding="utf-8"?>
 <p:sldLayout xmlns:a="http://schemas.openxmlformats.org/drawingml/2006/main" xmlns:r="http://schemas.openxmlformats.org/officeDocument/2006/relationships" xmlns:p="http://schemas.openxmlformats.org/presentationml/2006/main" type="blank" preserve="1">
   <p:cSld name="Üres">
     <p:spTree>
@@ -19003,7 +19263,7 @@
 </p:sldLayout>
 </file>
 
-<file path=ppt/slideLayouts/slideLayout57.xml><?xml version="1.0" encoding="utf-8"?>
+<file path=ppt/slideLayouts/slideLayout59.xml><?xml version="1.0" encoding="utf-8"?>
 <p:sldLayout xmlns:a="http://schemas.openxmlformats.org/drawingml/2006/main" xmlns:r="http://schemas.openxmlformats.org/officeDocument/2006/relationships" xmlns:p="http://schemas.openxmlformats.org/presentationml/2006/main" preserve="1" userDrawn="1">
   <p:cSld name="Black blank">
     <p:bg>
@@ -19136,265 +19396,6 @@
 </p:sldLayout>
 </file>
 
-<file path=ppt/slideLayouts/slideLayout58.xml><?xml version="1.0" encoding="utf-8"?>
-<p:sldLayout xmlns:a="http://schemas.openxmlformats.org/drawingml/2006/main" xmlns:r="http://schemas.openxmlformats.org/officeDocument/2006/relationships" xmlns:p="http://schemas.openxmlformats.org/presentationml/2006/main" preserve="1" userDrawn="1">
-  <p:cSld name="Csak cím">
-    <p:spTree>
-      <p:nvGrpSpPr>
-        <p:cNvPr id="1" name=""/>
-        <p:cNvGrpSpPr/>
-        <p:nvPr/>
-      </p:nvGrpSpPr>
-      <p:grpSpPr>
-        <a:xfrm>
-          <a:off x="0" y="0"/>
-          <a:ext cx="0" cy="0"/>
-          <a:chOff x="0" y="0"/>
-          <a:chExt cx="0" cy="0"/>
-        </a:xfrm>
-      </p:grpSpPr>
-      <p:sp>
-        <p:nvSpPr>
-          <p:cNvPr id="4" name="Title_SM"/>
-          <p:cNvSpPr>
-            <a:spLocks noGrp="1" noChangeArrowheads="1"/>
-          </p:cNvSpPr>
-          <p:nvPr>
-            <p:ph type="title" hasCustomPrompt="1"/>
-          </p:nvPr>
-        </p:nvSpPr>
-        <p:spPr bwMode="auto">
-          <a:xfrm>
-            <a:off x="479424" y="476250"/>
-            <a:ext cx="8353425" cy="1081088"/>
-          </a:xfrm>
-          <a:prstGeom prst="rect">
-            <a:avLst/>
-          </a:prstGeom>
-          <a:noFill/>
-          <a:ln w="9525">
-            <a:noFill/>
-            <a:miter lim="800000"/>
-            <a:headEnd/>
-            <a:tailEnd/>
-          </a:ln>
-        </p:spPr>
-        <p:txBody>
-          <a:bodyPr vert="horz" wrap="square" lIns="72000" tIns="36000" rIns="0" bIns="0" numCol="1" anchor="t" anchorCtr="0" compatLnSpc="1">
-            <a:prstTxWarp prst="textNoShape">
-              <a:avLst/>
-            </a:prstTxWarp>
-            <a:noAutofit/>
-          </a:bodyPr>
-          <a:lstStyle>
-            <a:lvl1pPr>
-              <a:defRPr>
-                <a:solidFill>
-                  <a:schemeClr val="tx1"/>
-                </a:solidFill>
-              </a:defRPr>
-            </a:lvl1pPr>
-          </a:lstStyle>
-          <a:p>
-            <a:pPr lvl="0"/>
-            <a:r>
-              <a:rPr lang="en-US"/>
-              <a:t>Slide title, Ericsson Hilda Light 40pt, Ericsson Black, max 2-lines</a:t>
-            </a:r>
-          </a:p>
-        </p:txBody>
-      </p:sp>
-    </p:spTree>
-    <p:extLst>
-      <p:ext uri="{BB962C8B-B14F-4D97-AF65-F5344CB8AC3E}">
-        <p14:creationId xmlns:p14="http://schemas.microsoft.com/office/powerpoint/2010/main" val="938920930"/>
-      </p:ext>
-    </p:extLst>
-  </p:cSld>
-  <p:clrMapOvr>
-    <a:masterClrMapping/>
-  </p:clrMapOvr>
-</p:sldLayout>
-</file>
-
-<file path=ppt/slideLayouts/slideLayout59.xml><?xml version="1.0" encoding="utf-8"?>
-<p:sldLayout xmlns:a="http://schemas.openxmlformats.org/drawingml/2006/main" xmlns:r="http://schemas.openxmlformats.org/officeDocument/2006/relationships" xmlns:p="http://schemas.openxmlformats.org/presentationml/2006/main" preserve="1" userDrawn="1">
-  <p:cSld name="1_Title and 1 column">
-    <p:spTree>
-      <p:nvGrpSpPr>
-        <p:cNvPr id="1" name=""/>
-        <p:cNvGrpSpPr/>
-        <p:nvPr/>
-      </p:nvGrpSpPr>
-      <p:grpSpPr>
-        <a:xfrm>
-          <a:off x="0" y="0"/>
-          <a:ext cx="0" cy="0"/>
-          <a:chOff x="0" y="0"/>
-          <a:chExt cx="0" cy="0"/>
-        </a:xfrm>
-      </p:grpSpPr>
-      <p:sp>
-        <p:nvSpPr>
-          <p:cNvPr id="5" name="Title_SM"/>
-          <p:cNvSpPr>
-            <a:spLocks noGrp="1" noChangeArrowheads="1"/>
-          </p:cNvSpPr>
-          <p:nvPr>
-            <p:ph type="title" hasCustomPrompt="1"/>
-          </p:nvPr>
-        </p:nvSpPr>
-        <p:spPr bwMode="auto">
-          <a:xfrm>
-            <a:off x="479425" y="476250"/>
-            <a:ext cx="10521950" cy="1081088"/>
-          </a:xfrm>
-          <a:prstGeom prst="rect">
-            <a:avLst/>
-          </a:prstGeom>
-          <a:noFill/>
-          <a:ln w="9525">
-            <a:noFill/>
-            <a:miter lim="800000"/>
-            <a:headEnd/>
-            <a:tailEnd/>
-          </a:ln>
-        </p:spPr>
-        <p:txBody>
-          <a:bodyPr vert="horz" wrap="square" lIns="72000" tIns="36000" rIns="73152" bIns="36576" numCol="1" anchor="t" anchorCtr="0" compatLnSpc="1">
-            <a:prstTxWarp prst="textNoShape">
-              <a:avLst/>
-            </a:prstTxWarp>
-            <a:noAutofit/>
-          </a:bodyPr>
-          <a:lstStyle>
-            <a:lvl1pPr>
-              <a:defRPr>
-                <a:solidFill>
-                  <a:schemeClr val="tx1"/>
-                </a:solidFill>
-              </a:defRPr>
-            </a:lvl1pPr>
-          </a:lstStyle>
-          <a:p>
-            <a:pPr lvl="0"/>
-            <a:r>
-              <a:rPr lang="en-US"/>
-              <a:t>Use this layout for document slides when you need space for a long heading and big content area</a:t>
-            </a:r>
-          </a:p>
-        </p:txBody>
-      </p:sp>
-      <p:sp>
-        <p:nvSpPr>
-          <p:cNvPr id="3" name="Content Placeholder 2">
-            <a:extLst>
-              <a:ext uri="{FF2B5EF4-FFF2-40B4-BE49-F238E27FC236}">
-                <a16:creationId xmlns:a16="http://schemas.microsoft.com/office/drawing/2014/main" id="{810CFEFC-6AC8-4817-A0D3-6029D48BD293}"/>
-              </a:ext>
-            </a:extLst>
-          </p:cNvPr>
-          <p:cNvSpPr>
-            <a:spLocks noGrp="1"/>
-          </p:cNvSpPr>
-          <p:nvPr>
-            <p:ph sz="quarter" idx="10" hasCustomPrompt="1"/>
-          </p:nvPr>
-        </p:nvSpPr>
-        <p:spPr>
-          <a:xfrm>
-            <a:off x="479425" y="1844675"/>
-            <a:ext cx="11233150" cy="4392612"/>
-          </a:xfrm>
-          <a:prstGeom prst="rect">
-            <a:avLst/>
-          </a:prstGeom>
-        </p:spPr>
-        <p:txBody>
-          <a:bodyPr/>
-          <a:lstStyle>
-            <a:lvl1pPr>
-              <a:defRPr>
-                <a:solidFill>
-                  <a:schemeClr val="tx1"/>
-                </a:solidFill>
-              </a:defRPr>
-            </a:lvl1pPr>
-            <a:lvl2pPr>
-              <a:defRPr>
-                <a:solidFill>
-                  <a:schemeClr val="tx1"/>
-                </a:solidFill>
-              </a:defRPr>
-            </a:lvl2pPr>
-            <a:lvl3pPr>
-              <a:defRPr>
-                <a:solidFill>
-                  <a:schemeClr val="tx1"/>
-                </a:solidFill>
-              </a:defRPr>
-            </a:lvl3pPr>
-            <a:lvl4pPr>
-              <a:defRPr>
-                <a:solidFill>
-                  <a:schemeClr val="tx1"/>
-                </a:solidFill>
-              </a:defRPr>
-            </a:lvl4pPr>
-            <a:lvl5pPr>
-              <a:defRPr/>
-            </a:lvl5pPr>
-          </a:lstStyle>
-          <a:p>
-            <a:pPr lvl="0"/>
-            <a:r>
-              <a:rPr lang="en-US"/>
-              <a:t>For heading, use Ericsson Hilda in bold. For copy and bullets, use Ericsson Hilda.</a:t>
-            </a:r>
-          </a:p>
-          <a:p>
-            <a:pPr lvl="0"/>
-            <a:r>
-              <a:rPr lang="en-US"/>
-              <a:t>First level</a:t>
-            </a:r>
-          </a:p>
-          <a:p>
-            <a:pPr lvl="1"/>
-            <a:r>
-              <a:rPr lang="en-US"/>
-              <a:t>Second level</a:t>
-            </a:r>
-          </a:p>
-          <a:p>
-            <a:pPr lvl="2"/>
-            <a:r>
-              <a:rPr lang="en-US"/>
-              <a:t>Third level</a:t>
-            </a:r>
-          </a:p>
-          <a:p>
-            <a:pPr lvl="3"/>
-            <a:r>
-              <a:rPr lang="en-US"/>
-              <a:t>Fourth level</a:t>
-            </a:r>
-          </a:p>
-        </p:txBody>
-      </p:sp>
-    </p:spTree>
-    <p:extLst>
-      <p:ext uri="{BB962C8B-B14F-4D97-AF65-F5344CB8AC3E}">
-        <p14:creationId xmlns:p14="http://schemas.microsoft.com/office/powerpoint/2010/main" val="1754863238"/>
-      </p:ext>
-    </p:extLst>
-  </p:cSld>
-  <p:clrMapOvr>
-    <a:masterClrMapping/>
-  </p:clrMapOvr>
-</p:sldLayout>
-</file>
-
 <file path=ppt/slideLayouts/slideLayout6.xml><?xml version="1.0" encoding="utf-8"?>
 <p:sldLayout xmlns:a="http://schemas.openxmlformats.org/drawingml/2006/main" xmlns:r="http://schemas.openxmlformats.org/officeDocument/2006/relationships" xmlns:p="http://schemas.openxmlformats.org/presentationml/2006/main" preserve="1" userDrawn="1">
   <p:cSld name="Title and 2 columns (1 smaller) + Comments">
@@ -19740,6 +19741,265 @@
 
 <file path=ppt/slideLayouts/slideLayout60.xml><?xml version="1.0" encoding="utf-8"?>
 <p:sldLayout xmlns:a="http://schemas.openxmlformats.org/drawingml/2006/main" xmlns:r="http://schemas.openxmlformats.org/officeDocument/2006/relationships" xmlns:p="http://schemas.openxmlformats.org/presentationml/2006/main" preserve="1" userDrawn="1">
+  <p:cSld name="Csak cím">
+    <p:spTree>
+      <p:nvGrpSpPr>
+        <p:cNvPr id="1" name=""/>
+        <p:cNvGrpSpPr/>
+        <p:nvPr/>
+      </p:nvGrpSpPr>
+      <p:grpSpPr>
+        <a:xfrm>
+          <a:off x="0" y="0"/>
+          <a:ext cx="0" cy="0"/>
+          <a:chOff x="0" y="0"/>
+          <a:chExt cx="0" cy="0"/>
+        </a:xfrm>
+      </p:grpSpPr>
+      <p:sp>
+        <p:nvSpPr>
+          <p:cNvPr id="4" name="Title_SM"/>
+          <p:cNvSpPr>
+            <a:spLocks noGrp="1" noChangeArrowheads="1"/>
+          </p:cNvSpPr>
+          <p:nvPr>
+            <p:ph type="title" hasCustomPrompt="1"/>
+          </p:nvPr>
+        </p:nvSpPr>
+        <p:spPr bwMode="auto">
+          <a:xfrm>
+            <a:off x="479424" y="476250"/>
+            <a:ext cx="8353425" cy="1081088"/>
+          </a:xfrm>
+          <a:prstGeom prst="rect">
+            <a:avLst/>
+          </a:prstGeom>
+          <a:noFill/>
+          <a:ln w="9525">
+            <a:noFill/>
+            <a:miter lim="800000"/>
+            <a:headEnd/>
+            <a:tailEnd/>
+          </a:ln>
+        </p:spPr>
+        <p:txBody>
+          <a:bodyPr vert="horz" wrap="square" lIns="72000" tIns="36000" rIns="0" bIns="0" numCol="1" anchor="t" anchorCtr="0" compatLnSpc="1">
+            <a:prstTxWarp prst="textNoShape">
+              <a:avLst/>
+            </a:prstTxWarp>
+            <a:noAutofit/>
+          </a:bodyPr>
+          <a:lstStyle>
+            <a:lvl1pPr>
+              <a:defRPr>
+                <a:solidFill>
+                  <a:schemeClr val="tx1"/>
+                </a:solidFill>
+              </a:defRPr>
+            </a:lvl1pPr>
+          </a:lstStyle>
+          <a:p>
+            <a:pPr lvl="0"/>
+            <a:r>
+              <a:rPr lang="en-US"/>
+              <a:t>Slide title, Ericsson Hilda Light 40pt, Ericsson Black, max 2-lines</a:t>
+            </a:r>
+          </a:p>
+        </p:txBody>
+      </p:sp>
+    </p:spTree>
+    <p:extLst>
+      <p:ext uri="{BB962C8B-B14F-4D97-AF65-F5344CB8AC3E}">
+        <p14:creationId xmlns:p14="http://schemas.microsoft.com/office/powerpoint/2010/main" val="938920930"/>
+      </p:ext>
+    </p:extLst>
+  </p:cSld>
+  <p:clrMapOvr>
+    <a:masterClrMapping/>
+  </p:clrMapOvr>
+</p:sldLayout>
+</file>
+
+<file path=ppt/slideLayouts/slideLayout61.xml><?xml version="1.0" encoding="utf-8"?>
+<p:sldLayout xmlns:a="http://schemas.openxmlformats.org/drawingml/2006/main" xmlns:r="http://schemas.openxmlformats.org/officeDocument/2006/relationships" xmlns:p="http://schemas.openxmlformats.org/presentationml/2006/main" preserve="1" userDrawn="1">
+  <p:cSld name="1_Title and 1 column">
+    <p:spTree>
+      <p:nvGrpSpPr>
+        <p:cNvPr id="1" name=""/>
+        <p:cNvGrpSpPr/>
+        <p:nvPr/>
+      </p:nvGrpSpPr>
+      <p:grpSpPr>
+        <a:xfrm>
+          <a:off x="0" y="0"/>
+          <a:ext cx="0" cy="0"/>
+          <a:chOff x="0" y="0"/>
+          <a:chExt cx="0" cy="0"/>
+        </a:xfrm>
+      </p:grpSpPr>
+      <p:sp>
+        <p:nvSpPr>
+          <p:cNvPr id="5" name="Title_SM"/>
+          <p:cNvSpPr>
+            <a:spLocks noGrp="1" noChangeArrowheads="1"/>
+          </p:cNvSpPr>
+          <p:nvPr>
+            <p:ph type="title" hasCustomPrompt="1"/>
+          </p:nvPr>
+        </p:nvSpPr>
+        <p:spPr bwMode="auto">
+          <a:xfrm>
+            <a:off x="479425" y="476250"/>
+            <a:ext cx="10521950" cy="1081088"/>
+          </a:xfrm>
+          <a:prstGeom prst="rect">
+            <a:avLst/>
+          </a:prstGeom>
+          <a:noFill/>
+          <a:ln w="9525">
+            <a:noFill/>
+            <a:miter lim="800000"/>
+            <a:headEnd/>
+            <a:tailEnd/>
+          </a:ln>
+        </p:spPr>
+        <p:txBody>
+          <a:bodyPr vert="horz" wrap="square" lIns="72000" tIns="36000" rIns="73152" bIns="36576" numCol="1" anchor="t" anchorCtr="0" compatLnSpc="1">
+            <a:prstTxWarp prst="textNoShape">
+              <a:avLst/>
+            </a:prstTxWarp>
+            <a:noAutofit/>
+          </a:bodyPr>
+          <a:lstStyle>
+            <a:lvl1pPr>
+              <a:defRPr>
+                <a:solidFill>
+                  <a:schemeClr val="tx1"/>
+                </a:solidFill>
+              </a:defRPr>
+            </a:lvl1pPr>
+          </a:lstStyle>
+          <a:p>
+            <a:pPr lvl="0"/>
+            <a:r>
+              <a:rPr lang="en-US"/>
+              <a:t>Use this layout for document slides when you need space for a long heading and big content area</a:t>
+            </a:r>
+          </a:p>
+        </p:txBody>
+      </p:sp>
+      <p:sp>
+        <p:nvSpPr>
+          <p:cNvPr id="3" name="Content Placeholder 2">
+            <a:extLst>
+              <a:ext uri="{FF2B5EF4-FFF2-40B4-BE49-F238E27FC236}">
+                <a16:creationId xmlns:a16="http://schemas.microsoft.com/office/drawing/2014/main" id="{810CFEFC-6AC8-4817-A0D3-6029D48BD293}"/>
+              </a:ext>
+            </a:extLst>
+          </p:cNvPr>
+          <p:cNvSpPr>
+            <a:spLocks noGrp="1"/>
+          </p:cNvSpPr>
+          <p:nvPr>
+            <p:ph sz="quarter" idx="10" hasCustomPrompt="1"/>
+          </p:nvPr>
+        </p:nvSpPr>
+        <p:spPr>
+          <a:xfrm>
+            <a:off x="479425" y="1844675"/>
+            <a:ext cx="11233150" cy="4392612"/>
+          </a:xfrm>
+          <a:prstGeom prst="rect">
+            <a:avLst/>
+          </a:prstGeom>
+        </p:spPr>
+        <p:txBody>
+          <a:bodyPr/>
+          <a:lstStyle>
+            <a:lvl1pPr>
+              <a:defRPr>
+                <a:solidFill>
+                  <a:schemeClr val="tx1"/>
+                </a:solidFill>
+              </a:defRPr>
+            </a:lvl1pPr>
+            <a:lvl2pPr>
+              <a:defRPr>
+                <a:solidFill>
+                  <a:schemeClr val="tx1"/>
+                </a:solidFill>
+              </a:defRPr>
+            </a:lvl2pPr>
+            <a:lvl3pPr>
+              <a:defRPr>
+                <a:solidFill>
+                  <a:schemeClr val="tx1"/>
+                </a:solidFill>
+              </a:defRPr>
+            </a:lvl3pPr>
+            <a:lvl4pPr>
+              <a:defRPr>
+                <a:solidFill>
+                  <a:schemeClr val="tx1"/>
+                </a:solidFill>
+              </a:defRPr>
+            </a:lvl4pPr>
+            <a:lvl5pPr>
+              <a:defRPr/>
+            </a:lvl5pPr>
+          </a:lstStyle>
+          <a:p>
+            <a:pPr lvl="0"/>
+            <a:r>
+              <a:rPr lang="en-US"/>
+              <a:t>For heading, use Ericsson Hilda in bold. For copy and bullets, use Ericsson Hilda.</a:t>
+            </a:r>
+          </a:p>
+          <a:p>
+            <a:pPr lvl="0"/>
+            <a:r>
+              <a:rPr lang="en-US"/>
+              <a:t>First level</a:t>
+            </a:r>
+          </a:p>
+          <a:p>
+            <a:pPr lvl="1"/>
+            <a:r>
+              <a:rPr lang="en-US"/>
+              <a:t>Second level</a:t>
+            </a:r>
+          </a:p>
+          <a:p>
+            <a:pPr lvl="2"/>
+            <a:r>
+              <a:rPr lang="en-US"/>
+              <a:t>Third level</a:t>
+            </a:r>
+          </a:p>
+          <a:p>
+            <a:pPr lvl="3"/>
+            <a:r>
+              <a:rPr lang="en-US"/>
+              <a:t>Fourth level</a:t>
+            </a:r>
+          </a:p>
+        </p:txBody>
+      </p:sp>
+    </p:spTree>
+    <p:extLst>
+      <p:ext uri="{BB962C8B-B14F-4D97-AF65-F5344CB8AC3E}">
+        <p14:creationId xmlns:p14="http://schemas.microsoft.com/office/powerpoint/2010/main" val="1754863238"/>
+      </p:ext>
+    </p:extLst>
+  </p:cSld>
+  <p:clrMapOvr>
+    <a:masterClrMapping/>
+  </p:clrMapOvr>
+</p:sldLayout>
+</file>
+
+<file path=ppt/slideLayouts/slideLayout62.xml><?xml version="1.0" encoding="utf-8"?>
+<p:sldLayout xmlns:a="http://schemas.openxmlformats.org/drawingml/2006/main" xmlns:r="http://schemas.openxmlformats.org/officeDocument/2006/relationships" xmlns:p="http://schemas.openxmlformats.org/presentationml/2006/main" preserve="1" userDrawn="1">
   <p:cSld name="Title and 1 smaller column">
     <p:spTree>
       <p:nvGrpSpPr>
@@ -19922,7 +20182,7 @@
 </p:sldLayout>
 </file>
 
-<file path=ppt/slideLayouts/slideLayout61.xml><?xml version="1.0" encoding="utf-8"?>
+<file path=ppt/slideLayouts/slideLayout63.xml><?xml version="1.0" encoding="utf-8"?>
 <p:sldLayout xmlns:a="http://schemas.openxmlformats.org/drawingml/2006/main" xmlns:r="http://schemas.openxmlformats.org/officeDocument/2006/relationships" xmlns:p="http://schemas.openxmlformats.org/presentationml/2006/main" preserve="1" userDrawn="1">
   <p:cSld name="Title and 2 columns">
     <p:spTree>
@@ -20191,7 +20451,7 @@
 </p:sldLayout>
 </file>
 
-<file path=ppt/slideLayouts/slideLayout62.xml><?xml version="1.0" encoding="utf-8"?>
+<file path=ppt/slideLayouts/slideLayout64.xml><?xml version="1.0" encoding="utf-8"?>
 <p:sldLayout xmlns:a="http://schemas.openxmlformats.org/drawingml/2006/main" xmlns:r="http://schemas.openxmlformats.org/officeDocument/2006/relationships" xmlns:p="http://schemas.openxmlformats.org/presentationml/2006/main" preserve="1" userDrawn="1">
   <p:cSld name="Title and 3 columns">
     <p:spTree>
@@ -20524,7 +20784,7 @@
 </p:sldLayout>
 </file>
 
-<file path=ppt/slideLayouts/slideLayout63.xml><?xml version="1.0" encoding="utf-8"?>
+<file path=ppt/slideLayouts/slideLayout65.xml><?xml version="1.0" encoding="utf-8"?>
 <p:sldLayout xmlns:a="http://schemas.openxmlformats.org/drawingml/2006/main" xmlns:r="http://schemas.openxmlformats.org/officeDocument/2006/relationships" xmlns:p="http://schemas.openxmlformats.org/presentationml/2006/main" preserve="1" userDrawn="1">
   <p:cSld name="Title and 4 columns">
     <p:spTree>
@@ -20922,7 +21182,7 @@
 </p:sldLayout>
 </file>
 
-<file path=ppt/slideLayouts/slideLayout64.xml><?xml version="1.0" encoding="utf-8"?>
+<file path=ppt/slideLayouts/slideLayout66.xml><?xml version="1.0" encoding="utf-8"?>
 <p:sldLayout xmlns:a="http://schemas.openxmlformats.org/drawingml/2006/main" xmlns:r="http://schemas.openxmlformats.org/officeDocument/2006/relationships" xmlns:p="http://schemas.openxmlformats.org/presentationml/2006/main" preserve="1" userDrawn="1">
   <p:cSld name="Cím és 4 tartalomrész">
     <p:spTree>
@@ -21379,7 +21639,7 @@
 </p:sldLayout>
 </file>
 
-<file path=ppt/slideLayouts/slideLayout65.xml><?xml version="1.0" encoding="utf-8"?>
+<file path=ppt/slideLayouts/slideLayout67.xml><?xml version="1.0" encoding="utf-8"?>
 <p:sldLayout xmlns:a="http://schemas.openxmlformats.org/drawingml/2006/main" xmlns:r="http://schemas.openxmlformats.org/officeDocument/2006/relationships" xmlns:p="http://schemas.openxmlformats.org/presentationml/2006/main" preserve="1" userDrawn="1">
   <p:cSld name="Title and 8 Content">
     <p:spTree>
@@ -22035,7 +22295,7 @@
 </p:sldLayout>
 </file>
 
-<file path=ppt/slideLayouts/slideLayout66.xml><?xml version="1.0" encoding="utf-8"?>
+<file path=ppt/slideLayouts/slideLayout68.xml><?xml version="1.0" encoding="utf-8"?>
 <p:sldLayout xmlns:a="http://schemas.openxmlformats.org/drawingml/2006/main" xmlns:r="http://schemas.openxmlformats.org/officeDocument/2006/relationships" xmlns:p="http://schemas.openxmlformats.org/presentationml/2006/main" showMasterSp="0" preserve="1" userDrawn="1">
   <p:cSld name="Black logo end slide">
     <p:spTree>
@@ -22157,7 +22417,7 @@
 </p:sldLayout>
 </file>
 
-<file path=ppt/slideLayouts/slideLayout67.xml><?xml version="1.0" encoding="utf-8"?>
+<file path=ppt/slideLayouts/slideLayout69.xml><?xml version="1.0" encoding="utf-8"?>
 <p:sldLayout xmlns:a="http://schemas.openxmlformats.org/drawingml/2006/main" xmlns:r="http://schemas.openxmlformats.org/officeDocument/2006/relationships" xmlns:p="http://schemas.openxmlformats.org/presentationml/2006/main" showMasterSp="0" preserve="1" userDrawn="1">
   <p:cSld name="Embedded characters">
     <p:spTree>
@@ -23071,7 +23331,412 @@
 </p:sldLayout>
 </file>
 
-<file path=ppt/slideLayouts/slideLayout68.xml><?xml version="1.0" encoding="utf-8"?>
+<file path=ppt/slideLayouts/slideLayout7.xml><?xml version="1.0" encoding="utf-8"?>
+<p:sldLayout xmlns:a="http://schemas.openxmlformats.org/drawingml/2006/main" xmlns:r="http://schemas.openxmlformats.org/officeDocument/2006/relationships" xmlns:p="http://schemas.openxmlformats.org/presentationml/2006/main" preserve="1" userDrawn="1">
+  <p:cSld name="Title and 2 columns (2 rows on right column) + Comments">
+    <p:spTree>
+      <p:nvGrpSpPr>
+        <p:cNvPr id="1" name=""/>
+        <p:cNvGrpSpPr/>
+        <p:nvPr/>
+      </p:nvGrpSpPr>
+      <p:grpSpPr>
+        <a:xfrm>
+          <a:off x="0" y="0"/>
+          <a:ext cx="0" cy="0"/>
+          <a:chOff x="0" y="0"/>
+          <a:chExt cx="0" cy="0"/>
+        </a:xfrm>
+      </p:grpSpPr>
+      <p:sp>
+        <p:nvSpPr>
+          <p:cNvPr id="5" name="Title_SM"/>
+          <p:cNvSpPr>
+            <a:spLocks noGrp="1" noChangeArrowheads="1"/>
+          </p:cNvSpPr>
+          <p:nvPr>
+            <p:ph type="title" hasCustomPrompt="1"/>
+          </p:nvPr>
+        </p:nvSpPr>
+        <p:spPr bwMode="auto">
+          <a:xfrm>
+            <a:off x="479425" y="476250"/>
+            <a:ext cx="10006542" cy="1081088"/>
+          </a:xfrm>
+          <a:prstGeom prst="rect">
+            <a:avLst/>
+          </a:prstGeom>
+          <a:noFill/>
+          <a:ln w="9525">
+            <a:noFill/>
+            <a:miter lim="800000"/>
+            <a:headEnd/>
+            <a:tailEnd/>
+          </a:ln>
+        </p:spPr>
+        <p:txBody>
+          <a:bodyPr vert="horz" wrap="square" lIns="72000" tIns="36000" rIns="73152" bIns="36576" numCol="1" anchor="t" anchorCtr="0" compatLnSpc="1">
+            <a:prstTxWarp prst="textNoShape">
+              <a:avLst/>
+            </a:prstTxWarp>
+            <a:noAutofit/>
+          </a:bodyPr>
+          <a:lstStyle>
+            <a:lvl1pPr>
+              <a:defRPr>
+                <a:solidFill>
+                  <a:schemeClr val="tx1"/>
+                </a:solidFill>
+              </a:defRPr>
+            </a:lvl1pPr>
+          </a:lstStyle>
+          <a:p>
+            <a:pPr lvl="0"/>
+            <a:r>
+              <a:rPr lang="en-US"/>
+              <a:t>Use this layout for document slides when you need space for a long heading and big content area</a:t>
+            </a:r>
+          </a:p>
+        </p:txBody>
+      </p:sp>
+      <p:sp>
+        <p:nvSpPr>
+          <p:cNvPr id="3" name="Content Placeholder 2">
+            <a:extLst>
+              <a:ext uri="{FF2B5EF4-FFF2-40B4-BE49-F238E27FC236}">
+                <a16:creationId xmlns:a16="http://schemas.microsoft.com/office/drawing/2014/main" id="{810CFEFC-6AC8-4817-A0D3-6029D48BD293}"/>
+              </a:ext>
+            </a:extLst>
+          </p:cNvPr>
+          <p:cNvSpPr>
+            <a:spLocks noGrp="1"/>
+          </p:cNvSpPr>
+          <p:nvPr>
+            <p:ph sz="quarter" idx="10" hasCustomPrompt="1"/>
+          </p:nvPr>
+        </p:nvSpPr>
+        <p:spPr>
+          <a:xfrm>
+            <a:off x="479425" y="5525984"/>
+            <a:ext cx="11233150" cy="1183573"/>
+          </a:xfrm>
+          <a:prstGeom prst="rect">
+            <a:avLst/>
+          </a:prstGeom>
+        </p:spPr>
+        <p:txBody>
+          <a:bodyPr/>
+          <a:lstStyle>
+            <a:lvl1pPr>
+              <a:defRPr sz="1200">
+                <a:solidFill>
+                  <a:schemeClr val="tx1"/>
+                </a:solidFill>
+              </a:defRPr>
+            </a:lvl1pPr>
+            <a:lvl2pPr>
+              <a:defRPr sz="1200">
+                <a:solidFill>
+                  <a:schemeClr val="tx1"/>
+                </a:solidFill>
+              </a:defRPr>
+            </a:lvl2pPr>
+            <a:lvl3pPr>
+              <a:defRPr sz="1200">
+                <a:solidFill>
+                  <a:schemeClr val="tx1"/>
+                </a:solidFill>
+              </a:defRPr>
+            </a:lvl3pPr>
+            <a:lvl4pPr>
+              <a:defRPr sz="1200">
+                <a:solidFill>
+                  <a:schemeClr val="tx1"/>
+                </a:solidFill>
+              </a:defRPr>
+            </a:lvl4pPr>
+            <a:lvl5pPr>
+              <a:defRPr/>
+            </a:lvl5pPr>
+          </a:lstStyle>
+          <a:p>
+            <a:pPr lvl="0"/>
+            <a:r>
+              <a:rPr lang="en-US"/>
+              <a:t>For heading, use Ericsson Hilda in bold. For copy and bullets, use Ericsson Hilda.</a:t>
+            </a:r>
+          </a:p>
+          <a:p>
+            <a:pPr lvl="0"/>
+            <a:r>
+              <a:rPr lang="en-US"/>
+              <a:t>First level</a:t>
+            </a:r>
+          </a:p>
+          <a:p>
+            <a:pPr lvl="1"/>
+            <a:r>
+              <a:rPr lang="en-US"/>
+              <a:t>Second level</a:t>
+            </a:r>
+          </a:p>
+          <a:p>
+            <a:pPr lvl="2"/>
+            <a:r>
+              <a:rPr lang="en-US"/>
+              <a:t>Third level</a:t>
+            </a:r>
+          </a:p>
+          <a:p>
+            <a:pPr lvl="3"/>
+            <a:r>
+              <a:rPr lang="en-US"/>
+              <a:t>Fourth level</a:t>
+            </a:r>
+          </a:p>
+        </p:txBody>
+      </p:sp>
+      <p:sp>
+        <p:nvSpPr>
+          <p:cNvPr id="8" name="txtfooterCopy" descr="{&#10; &quot;SkabelonDesign&quot;: {&#10; &quot;textualValue&quot;: &quot;&lt;key1/&gt;&quot;,&#10; &quot;bindingCollection&quot;: {&#10; &quot;key1&quot;: {&quot;SkabelonDesign&quot;:{&quot;type&quot;:&quot;Text&quot;,&quot;binding&quot;:&quot;Module.FooterText&quot;}}&#10; }&#10; }&#10;}">
+            <a:extLst>
+              <a:ext uri="{FF2B5EF4-FFF2-40B4-BE49-F238E27FC236}">
+                <a16:creationId xmlns:a16="http://schemas.microsoft.com/office/drawing/2014/main" id="{C2AD0284-E6BA-49D8-AB3F-D94DBB1D54F0}"/>
+              </a:ext>
+            </a:extLst>
+          </p:cNvPr>
+          <p:cNvSpPr txBox="1"/>
+          <p:nvPr userDrawn="1"/>
+        </p:nvSpPr>
+        <p:spPr>
+          <a:xfrm>
+            <a:off x="421638" y="6524625"/>
+            <a:ext cx="65" cy="123111"/>
+          </a:xfrm>
+          <a:prstGeom prst="rect">
+            <a:avLst/>
+          </a:prstGeom>
+          <a:noFill/>
+        </p:spPr>
+        <p:txBody>
+          <a:bodyPr vert="horz" wrap="none" lIns="0" tIns="0" rIns="0" bIns="0" rtlCol="0">
+            <a:spAutoFit/>
+          </a:bodyPr>
+          <a:lstStyle/>
+          <a:p>
+            <a:pPr marL="0" indent="0" algn="l">
+              <a:buFontTx/>
+              <a:buNone/>
+            </a:pPr>
+            <a:endParaRPr lang="en-US" sz="800" b="0" i="0" u="none">
+              <a:solidFill>
+                <a:schemeClr val="tx1"/>
+              </a:solidFill>
+              <a:latin typeface="+mn-lt"/>
+            </a:endParaRPr>
+          </a:p>
+        </p:txBody>
+      </p:sp>
+      <p:sp>
+        <p:nvSpPr>
+          <p:cNvPr id="4" name="Content Placeholder 3">
+            <a:extLst>
+              <a:ext uri="{FF2B5EF4-FFF2-40B4-BE49-F238E27FC236}">
+                <a16:creationId xmlns:a16="http://schemas.microsoft.com/office/drawing/2014/main" id="{8B38E13B-297F-6792-206D-52DCDBECD182}"/>
+              </a:ext>
+            </a:extLst>
+          </p:cNvPr>
+          <p:cNvSpPr>
+            <a:spLocks noGrp="1"/>
+          </p:cNvSpPr>
+          <p:nvPr>
+            <p:ph sz="quarter" idx="15"/>
+          </p:nvPr>
+        </p:nvSpPr>
+        <p:spPr>
+          <a:xfrm>
+            <a:off x="479280" y="1709737"/>
+            <a:ext cx="7465311" cy="3662364"/>
+          </a:xfrm>
+        </p:spPr>
+        <p:txBody>
+          <a:bodyPr/>
+          <a:lstStyle/>
+          <a:p>
+            <a:pPr lvl="0"/>
+            <a:r>
+              <a:rPr lang="en-US"/>
+              <a:t>Click to edit Master text styles</a:t>
+            </a:r>
+          </a:p>
+          <a:p>
+            <a:pPr lvl="1"/>
+            <a:r>
+              <a:rPr lang="en-US"/>
+              <a:t>Second level</a:t>
+            </a:r>
+          </a:p>
+          <a:p>
+            <a:pPr lvl="2"/>
+            <a:r>
+              <a:rPr lang="en-US"/>
+              <a:t>Third level</a:t>
+            </a:r>
+          </a:p>
+          <a:p>
+            <a:pPr lvl="3"/>
+            <a:r>
+              <a:rPr lang="en-US"/>
+              <a:t>Fourth level</a:t>
+            </a:r>
+          </a:p>
+          <a:p>
+            <a:pPr lvl="4"/>
+            <a:r>
+              <a:rPr lang="en-US"/>
+              <a:t>Fifth level</a:t>
+            </a:r>
+          </a:p>
+        </p:txBody>
+      </p:sp>
+      <p:sp>
+        <p:nvSpPr>
+          <p:cNvPr id="6" name="Content Placeholder 3">
+            <a:extLst>
+              <a:ext uri="{FF2B5EF4-FFF2-40B4-BE49-F238E27FC236}">
+                <a16:creationId xmlns:a16="http://schemas.microsoft.com/office/drawing/2014/main" id="{D64E27AA-9562-3081-96B1-EEC89F6CC10A}"/>
+              </a:ext>
+            </a:extLst>
+          </p:cNvPr>
+          <p:cNvSpPr>
+            <a:spLocks noGrp="1"/>
+          </p:cNvSpPr>
+          <p:nvPr>
+            <p:ph sz="quarter" idx="16"/>
+          </p:nvPr>
+        </p:nvSpPr>
+        <p:spPr>
+          <a:xfrm>
+            <a:off x="8395855" y="1709737"/>
+            <a:ext cx="3316720" cy="1876611"/>
+          </a:xfrm>
+        </p:spPr>
+        <p:txBody>
+          <a:bodyPr/>
+          <a:lstStyle/>
+          <a:p>
+            <a:pPr lvl="0"/>
+            <a:r>
+              <a:rPr lang="en-US" dirty="0"/>
+              <a:t>Click to edit Master text styles</a:t>
+            </a:r>
+          </a:p>
+          <a:p>
+            <a:pPr lvl="1"/>
+            <a:r>
+              <a:rPr lang="en-US" dirty="0"/>
+              <a:t>Second level</a:t>
+            </a:r>
+          </a:p>
+          <a:p>
+            <a:pPr lvl="2"/>
+            <a:r>
+              <a:rPr lang="en-US" dirty="0"/>
+              <a:t>Third level</a:t>
+            </a:r>
+          </a:p>
+          <a:p>
+            <a:pPr lvl="3"/>
+            <a:r>
+              <a:rPr lang="en-US" dirty="0"/>
+              <a:t>Fourth level</a:t>
+            </a:r>
+          </a:p>
+          <a:p>
+            <a:pPr lvl="4"/>
+            <a:r>
+              <a:rPr lang="en-US" dirty="0"/>
+              <a:t>Fifth level</a:t>
+            </a:r>
+          </a:p>
+        </p:txBody>
+      </p:sp>
+      <p:sp>
+        <p:nvSpPr>
+          <p:cNvPr id="2" name="Content Placeholder 3">
+            <a:extLst>
+              <a:ext uri="{FF2B5EF4-FFF2-40B4-BE49-F238E27FC236}">
+                <a16:creationId xmlns:a16="http://schemas.microsoft.com/office/drawing/2014/main" id="{9DB526DC-61EF-8C82-8805-65A25684C47C}"/>
+              </a:ext>
+            </a:extLst>
+          </p:cNvPr>
+          <p:cNvSpPr>
+            <a:spLocks noGrp="1"/>
+          </p:cNvSpPr>
+          <p:nvPr>
+            <p:ph sz="quarter" idx="17"/>
+          </p:nvPr>
+        </p:nvSpPr>
+        <p:spPr>
+          <a:xfrm>
+            <a:off x="8395855" y="3649683"/>
+            <a:ext cx="3316720" cy="1722418"/>
+          </a:xfrm>
+        </p:spPr>
+        <p:txBody>
+          <a:bodyPr/>
+          <a:lstStyle/>
+          <a:p>
+            <a:pPr lvl="0"/>
+            <a:r>
+              <a:rPr lang="en-US"/>
+              <a:t>Click to edit Master text styles</a:t>
+            </a:r>
+          </a:p>
+          <a:p>
+            <a:pPr lvl="1"/>
+            <a:r>
+              <a:rPr lang="en-US"/>
+              <a:t>Second level</a:t>
+            </a:r>
+          </a:p>
+          <a:p>
+            <a:pPr lvl="2"/>
+            <a:r>
+              <a:rPr lang="en-US"/>
+              <a:t>Third level</a:t>
+            </a:r>
+          </a:p>
+          <a:p>
+            <a:pPr lvl="3"/>
+            <a:r>
+              <a:rPr lang="en-US"/>
+              <a:t>Fourth level</a:t>
+            </a:r>
+          </a:p>
+          <a:p>
+            <a:pPr lvl="4"/>
+            <a:r>
+              <a:rPr lang="en-US"/>
+              <a:t>Fifth level</a:t>
+            </a:r>
+          </a:p>
+        </p:txBody>
+      </p:sp>
+    </p:spTree>
+    <p:extLst>
+      <p:ext uri="{BB962C8B-B14F-4D97-AF65-F5344CB8AC3E}">
+        <p14:creationId xmlns:p14="http://schemas.microsoft.com/office/powerpoint/2010/main" val="2813681761"/>
+      </p:ext>
+    </p:extLst>
+  </p:cSld>
+  <p:clrMapOvr>
+    <a:masterClrMapping/>
+  </p:clrMapOvr>
+</p:sldLayout>
+</file>
+
+<file path=ppt/slideLayouts/slideLayout70.xml><?xml version="1.0" encoding="utf-8"?>
 <p:sldLayout xmlns:a="http://schemas.openxmlformats.org/drawingml/2006/main" xmlns:r="http://schemas.openxmlformats.org/officeDocument/2006/relationships" xmlns:p="http://schemas.openxmlformats.org/presentationml/2006/main" showMasterSp="0" userDrawn="1">
   <p:cSld name="Keynote Cover Page w. white text">
     <p:spTree>
@@ -23429,7 +24094,7 @@
 </p:sldLayout>
 </file>
 
-<file path=ppt/slideLayouts/slideLayout69.xml><?xml version="1.0" encoding="utf-8"?>
+<file path=ppt/slideLayouts/slideLayout71.xml><?xml version="1.0" encoding="utf-8"?>
 <p:sldLayout xmlns:a="http://schemas.openxmlformats.org/drawingml/2006/main" xmlns:r="http://schemas.openxmlformats.org/officeDocument/2006/relationships" xmlns:p="http://schemas.openxmlformats.org/presentationml/2006/main" userDrawn="1">
   <p:cSld name="Title Only">
     <p:spTree>
@@ -23506,412 +24171,7 @@
 </p:sldLayout>
 </file>
 
-<file path=ppt/slideLayouts/slideLayout7.xml><?xml version="1.0" encoding="utf-8"?>
-<p:sldLayout xmlns:a="http://schemas.openxmlformats.org/drawingml/2006/main" xmlns:r="http://schemas.openxmlformats.org/officeDocument/2006/relationships" xmlns:p="http://schemas.openxmlformats.org/presentationml/2006/main" preserve="1" userDrawn="1">
-  <p:cSld name="Title and 2 columns (2 rows on right column) + Comments">
-    <p:spTree>
-      <p:nvGrpSpPr>
-        <p:cNvPr id="1" name=""/>
-        <p:cNvGrpSpPr/>
-        <p:nvPr/>
-      </p:nvGrpSpPr>
-      <p:grpSpPr>
-        <a:xfrm>
-          <a:off x="0" y="0"/>
-          <a:ext cx="0" cy="0"/>
-          <a:chOff x="0" y="0"/>
-          <a:chExt cx="0" cy="0"/>
-        </a:xfrm>
-      </p:grpSpPr>
-      <p:sp>
-        <p:nvSpPr>
-          <p:cNvPr id="5" name="Title_SM"/>
-          <p:cNvSpPr>
-            <a:spLocks noGrp="1" noChangeArrowheads="1"/>
-          </p:cNvSpPr>
-          <p:nvPr>
-            <p:ph type="title" hasCustomPrompt="1"/>
-          </p:nvPr>
-        </p:nvSpPr>
-        <p:spPr bwMode="auto">
-          <a:xfrm>
-            <a:off x="479425" y="476250"/>
-            <a:ext cx="10006542" cy="1081088"/>
-          </a:xfrm>
-          <a:prstGeom prst="rect">
-            <a:avLst/>
-          </a:prstGeom>
-          <a:noFill/>
-          <a:ln w="9525">
-            <a:noFill/>
-            <a:miter lim="800000"/>
-            <a:headEnd/>
-            <a:tailEnd/>
-          </a:ln>
-        </p:spPr>
-        <p:txBody>
-          <a:bodyPr vert="horz" wrap="square" lIns="72000" tIns="36000" rIns="73152" bIns="36576" numCol="1" anchor="t" anchorCtr="0" compatLnSpc="1">
-            <a:prstTxWarp prst="textNoShape">
-              <a:avLst/>
-            </a:prstTxWarp>
-            <a:noAutofit/>
-          </a:bodyPr>
-          <a:lstStyle>
-            <a:lvl1pPr>
-              <a:defRPr>
-                <a:solidFill>
-                  <a:schemeClr val="tx1"/>
-                </a:solidFill>
-              </a:defRPr>
-            </a:lvl1pPr>
-          </a:lstStyle>
-          <a:p>
-            <a:pPr lvl="0"/>
-            <a:r>
-              <a:rPr lang="en-US"/>
-              <a:t>Use this layout for document slides when you need space for a long heading and big content area</a:t>
-            </a:r>
-          </a:p>
-        </p:txBody>
-      </p:sp>
-      <p:sp>
-        <p:nvSpPr>
-          <p:cNvPr id="3" name="Content Placeholder 2">
-            <a:extLst>
-              <a:ext uri="{FF2B5EF4-FFF2-40B4-BE49-F238E27FC236}">
-                <a16:creationId xmlns:a16="http://schemas.microsoft.com/office/drawing/2014/main" id="{810CFEFC-6AC8-4817-A0D3-6029D48BD293}"/>
-              </a:ext>
-            </a:extLst>
-          </p:cNvPr>
-          <p:cNvSpPr>
-            <a:spLocks noGrp="1"/>
-          </p:cNvSpPr>
-          <p:nvPr>
-            <p:ph sz="quarter" idx="10" hasCustomPrompt="1"/>
-          </p:nvPr>
-        </p:nvSpPr>
-        <p:spPr>
-          <a:xfrm>
-            <a:off x="479425" y="5525984"/>
-            <a:ext cx="11233150" cy="1183573"/>
-          </a:xfrm>
-          <a:prstGeom prst="rect">
-            <a:avLst/>
-          </a:prstGeom>
-        </p:spPr>
-        <p:txBody>
-          <a:bodyPr/>
-          <a:lstStyle>
-            <a:lvl1pPr>
-              <a:defRPr sz="1200">
-                <a:solidFill>
-                  <a:schemeClr val="tx1"/>
-                </a:solidFill>
-              </a:defRPr>
-            </a:lvl1pPr>
-            <a:lvl2pPr>
-              <a:defRPr sz="1200">
-                <a:solidFill>
-                  <a:schemeClr val="tx1"/>
-                </a:solidFill>
-              </a:defRPr>
-            </a:lvl2pPr>
-            <a:lvl3pPr>
-              <a:defRPr sz="1200">
-                <a:solidFill>
-                  <a:schemeClr val="tx1"/>
-                </a:solidFill>
-              </a:defRPr>
-            </a:lvl3pPr>
-            <a:lvl4pPr>
-              <a:defRPr sz="1200">
-                <a:solidFill>
-                  <a:schemeClr val="tx1"/>
-                </a:solidFill>
-              </a:defRPr>
-            </a:lvl4pPr>
-            <a:lvl5pPr>
-              <a:defRPr/>
-            </a:lvl5pPr>
-          </a:lstStyle>
-          <a:p>
-            <a:pPr lvl="0"/>
-            <a:r>
-              <a:rPr lang="en-US"/>
-              <a:t>For heading, use Ericsson Hilda in bold. For copy and bullets, use Ericsson Hilda.</a:t>
-            </a:r>
-          </a:p>
-          <a:p>
-            <a:pPr lvl="0"/>
-            <a:r>
-              <a:rPr lang="en-US"/>
-              <a:t>First level</a:t>
-            </a:r>
-          </a:p>
-          <a:p>
-            <a:pPr lvl="1"/>
-            <a:r>
-              <a:rPr lang="en-US"/>
-              <a:t>Second level</a:t>
-            </a:r>
-          </a:p>
-          <a:p>
-            <a:pPr lvl="2"/>
-            <a:r>
-              <a:rPr lang="en-US"/>
-              <a:t>Third level</a:t>
-            </a:r>
-          </a:p>
-          <a:p>
-            <a:pPr lvl="3"/>
-            <a:r>
-              <a:rPr lang="en-US"/>
-              <a:t>Fourth level</a:t>
-            </a:r>
-          </a:p>
-        </p:txBody>
-      </p:sp>
-      <p:sp>
-        <p:nvSpPr>
-          <p:cNvPr id="8" name="txtfooterCopy" descr="{&#10; &quot;SkabelonDesign&quot;: {&#10; &quot;textualValue&quot;: &quot;&lt;key1/&gt;&quot;,&#10; &quot;bindingCollection&quot;: {&#10; &quot;key1&quot;: {&quot;SkabelonDesign&quot;:{&quot;type&quot;:&quot;Text&quot;,&quot;binding&quot;:&quot;Module.FooterText&quot;}}&#10; }&#10; }&#10;}">
-            <a:extLst>
-              <a:ext uri="{FF2B5EF4-FFF2-40B4-BE49-F238E27FC236}">
-                <a16:creationId xmlns:a16="http://schemas.microsoft.com/office/drawing/2014/main" id="{C2AD0284-E6BA-49D8-AB3F-D94DBB1D54F0}"/>
-              </a:ext>
-            </a:extLst>
-          </p:cNvPr>
-          <p:cNvSpPr txBox="1"/>
-          <p:nvPr userDrawn="1"/>
-        </p:nvSpPr>
-        <p:spPr>
-          <a:xfrm>
-            <a:off x="421638" y="6524625"/>
-            <a:ext cx="65" cy="123111"/>
-          </a:xfrm>
-          <a:prstGeom prst="rect">
-            <a:avLst/>
-          </a:prstGeom>
-          <a:noFill/>
-        </p:spPr>
-        <p:txBody>
-          <a:bodyPr vert="horz" wrap="none" lIns="0" tIns="0" rIns="0" bIns="0" rtlCol="0">
-            <a:spAutoFit/>
-          </a:bodyPr>
-          <a:lstStyle/>
-          <a:p>
-            <a:pPr marL="0" indent="0" algn="l">
-              <a:buFontTx/>
-              <a:buNone/>
-            </a:pPr>
-            <a:endParaRPr lang="en-US" sz="800" b="0" i="0" u="none">
-              <a:solidFill>
-                <a:schemeClr val="tx1"/>
-              </a:solidFill>
-              <a:latin typeface="+mn-lt"/>
-            </a:endParaRPr>
-          </a:p>
-        </p:txBody>
-      </p:sp>
-      <p:sp>
-        <p:nvSpPr>
-          <p:cNvPr id="4" name="Content Placeholder 3">
-            <a:extLst>
-              <a:ext uri="{FF2B5EF4-FFF2-40B4-BE49-F238E27FC236}">
-                <a16:creationId xmlns:a16="http://schemas.microsoft.com/office/drawing/2014/main" id="{8B38E13B-297F-6792-206D-52DCDBECD182}"/>
-              </a:ext>
-            </a:extLst>
-          </p:cNvPr>
-          <p:cNvSpPr>
-            <a:spLocks noGrp="1"/>
-          </p:cNvSpPr>
-          <p:nvPr>
-            <p:ph sz="quarter" idx="15"/>
-          </p:nvPr>
-        </p:nvSpPr>
-        <p:spPr>
-          <a:xfrm>
-            <a:off x="479280" y="1709737"/>
-            <a:ext cx="7465311" cy="3662364"/>
-          </a:xfrm>
-        </p:spPr>
-        <p:txBody>
-          <a:bodyPr/>
-          <a:lstStyle/>
-          <a:p>
-            <a:pPr lvl="0"/>
-            <a:r>
-              <a:rPr lang="en-US"/>
-              <a:t>Click to edit Master text styles</a:t>
-            </a:r>
-          </a:p>
-          <a:p>
-            <a:pPr lvl="1"/>
-            <a:r>
-              <a:rPr lang="en-US"/>
-              <a:t>Second level</a:t>
-            </a:r>
-          </a:p>
-          <a:p>
-            <a:pPr lvl="2"/>
-            <a:r>
-              <a:rPr lang="en-US"/>
-              <a:t>Third level</a:t>
-            </a:r>
-          </a:p>
-          <a:p>
-            <a:pPr lvl="3"/>
-            <a:r>
-              <a:rPr lang="en-US"/>
-              <a:t>Fourth level</a:t>
-            </a:r>
-          </a:p>
-          <a:p>
-            <a:pPr lvl="4"/>
-            <a:r>
-              <a:rPr lang="en-US"/>
-              <a:t>Fifth level</a:t>
-            </a:r>
-          </a:p>
-        </p:txBody>
-      </p:sp>
-      <p:sp>
-        <p:nvSpPr>
-          <p:cNvPr id="6" name="Content Placeholder 3">
-            <a:extLst>
-              <a:ext uri="{FF2B5EF4-FFF2-40B4-BE49-F238E27FC236}">
-                <a16:creationId xmlns:a16="http://schemas.microsoft.com/office/drawing/2014/main" id="{D64E27AA-9562-3081-96B1-EEC89F6CC10A}"/>
-              </a:ext>
-            </a:extLst>
-          </p:cNvPr>
-          <p:cNvSpPr>
-            <a:spLocks noGrp="1"/>
-          </p:cNvSpPr>
-          <p:nvPr>
-            <p:ph sz="quarter" idx="16"/>
-          </p:nvPr>
-        </p:nvSpPr>
-        <p:spPr>
-          <a:xfrm>
-            <a:off x="8395855" y="1709737"/>
-            <a:ext cx="3316720" cy="1876611"/>
-          </a:xfrm>
-        </p:spPr>
-        <p:txBody>
-          <a:bodyPr/>
-          <a:lstStyle/>
-          <a:p>
-            <a:pPr lvl="0"/>
-            <a:r>
-              <a:rPr lang="en-US" dirty="0"/>
-              <a:t>Click to edit Master text styles</a:t>
-            </a:r>
-          </a:p>
-          <a:p>
-            <a:pPr lvl="1"/>
-            <a:r>
-              <a:rPr lang="en-US" dirty="0"/>
-              <a:t>Second level</a:t>
-            </a:r>
-          </a:p>
-          <a:p>
-            <a:pPr lvl="2"/>
-            <a:r>
-              <a:rPr lang="en-US" dirty="0"/>
-              <a:t>Third level</a:t>
-            </a:r>
-          </a:p>
-          <a:p>
-            <a:pPr lvl="3"/>
-            <a:r>
-              <a:rPr lang="en-US" dirty="0"/>
-              <a:t>Fourth level</a:t>
-            </a:r>
-          </a:p>
-          <a:p>
-            <a:pPr lvl="4"/>
-            <a:r>
-              <a:rPr lang="en-US" dirty="0"/>
-              <a:t>Fifth level</a:t>
-            </a:r>
-          </a:p>
-        </p:txBody>
-      </p:sp>
-      <p:sp>
-        <p:nvSpPr>
-          <p:cNvPr id="2" name="Content Placeholder 3">
-            <a:extLst>
-              <a:ext uri="{FF2B5EF4-FFF2-40B4-BE49-F238E27FC236}">
-                <a16:creationId xmlns:a16="http://schemas.microsoft.com/office/drawing/2014/main" id="{9DB526DC-61EF-8C82-8805-65A25684C47C}"/>
-              </a:ext>
-            </a:extLst>
-          </p:cNvPr>
-          <p:cNvSpPr>
-            <a:spLocks noGrp="1"/>
-          </p:cNvSpPr>
-          <p:nvPr>
-            <p:ph sz="quarter" idx="17"/>
-          </p:nvPr>
-        </p:nvSpPr>
-        <p:spPr>
-          <a:xfrm>
-            <a:off x="8395855" y="3649683"/>
-            <a:ext cx="3316720" cy="1722418"/>
-          </a:xfrm>
-        </p:spPr>
-        <p:txBody>
-          <a:bodyPr/>
-          <a:lstStyle/>
-          <a:p>
-            <a:pPr lvl="0"/>
-            <a:r>
-              <a:rPr lang="en-US"/>
-              <a:t>Click to edit Master text styles</a:t>
-            </a:r>
-          </a:p>
-          <a:p>
-            <a:pPr lvl="1"/>
-            <a:r>
-              <a:rPr lang="en-US"/>
-              <a:t>Second level</a:t>
-            </a:r>
-          </a:p>
-          <a:p>
-            <a:pPr lvl="2"/>
-            <a:r>
-              <a:rPr lang="en-US"/>
-              <a:t>Third level</a:t>
-            </a:r>
-          </a:p>
-          <a:p>
-            <a:pPr lvl="3"/>
-            <a:r>
-              <a:rPr lang="en-US"/>
-              <a:t>Fourth level</a:t>
-            </a:r>
-          </a:p>
-          <a:p>
-            <a:pPr lvl="4"/>
-            <a:r>
-              <a:rPr lang="en-US"/>
-              <a:t>Fifth level</a:t>
-            </a:r>
-          </a:p>
-        </p:txBody>
-      </p:sp>
-    </p:spTree>
-    <p:extLst>
-      <p:ext uri="{BB962C8B-B14F-4D97-AF65-F5344CB8AC3E}">
-        <p14:creationId xmlns:p14="http://schemas.microsoft.com/office/powerpoint/2010/main" val="2813681761"/>
-      </p:ext>
-    </p:extLst>
-  </p:cSld>
-  <p:clrMapOvr>
-    <a:masterClrMapping/>
-  </p:clrMapOvr>
-</p:sldLayout>
-</file>
-
-<file path=ppt/slideLayouts/slideLayout70.xml><?xml version="1.0" encoding="utf-8"?>
+<file path=ppt/slideLayouts/slideLayout72.xml><?xml version="1.0" encoding="utf-8"?>
 <p:sldLayout xmlns:a="http://schemas.openxmlformats.org/drawingml/2006/main" xmlns:r="http://schemas.openxmlformats.org/officeDocument/2006/relationships" xmlns:p="http://schemas.openxmlformats.org/presentationml/2006/main" type="obj">
   <p:cSld name="Title and Content">
     <p:spTree>
@@ -24036,7 +24296,7 @@
           <a:p>
             <a:fld id="{EAB07A04-4D14-4FB4-ABC3-4FF79A2401A4}" type="datetimeFigureOut">
               <a:rPr lang="en-US" smtClean="0"/>
-              <a:t>9/15/2026</a:t>
+              <a:t>9/15/26</a:t>
             </a:fld>
             <a:endParaRPr lang="en-US"/>
           </a:p>
@@ -24090,7 +24350,7 @@
           <a:p>
             <a:fld id="{14CFE183-6F7B-4689-9F59-5F64BE4E6480}" type="slidenum">
               <a:rPr lang="en-US" smtClean="0"/>
-              <a:t>‹#›</a:t>
+              <a:t>‹Nº›</a:t>
             </a:fld>
             <a:endParaRPr lang="en-US"/>
           </a:p>
@@ -24109,7 +24369,7 @@
 </p:sldLayout>
 </file>
 
-<file path=ppt/slideLayouts/slideLayout71.xml><?xml version="1.0" encoding="utf-8"?>
+<file path=ppt/slideLayouts/slideLayout73.xml><?xml version="1.0" encoding="utf-8"?>
 <p:sldLayout xmlns:a="http://schemas.openxmlformats.org/drawingml/2006/main" xmlns:r="http://schemas.openxmlformats.org/officeDocument/2006/relationships" xmlns:p="http://schemas.openxmlformats.org/presentationml/2006/main" type="title">
   <p:cSld name="Title Slide">
     <p:spTree>
@@ -24256,7 +24516,7 @@
           <a:p>
             <a:fld id="{E79BC93B-D740-4A24-9033-971140705A34}" type="datetimeFigureOut">
               <a:rPr lang="en-US" smtClean="0"/>
-              <a:t>9/15/2026</a:t>
+              <a:t>9/15/26</a:t>
             </a:fld>
             <a:endParaRPr lang="en-US"/>
           </a:p>
@@ -24310,7 +24570,7 @@
           <a:p>
             <a:fld id="{251644C3-3010-471A-8BD1-91611E72370A}" type="slidenum">
               <a:rPr lang="en-US" smtClean="0"/>
-              <a:t>‹#›</a:t>
+              <a:t>‹Nº›</a:t>
             </a:fld>
             <a:endParaRPr lang="en-US"/>
           </a:p>
@@ -25255,7 +25515,7 @@
           <p:nvPr userDrawn="1"/>
         </p:nvPicPr>
         <p:blipFill>
-          <a:blip r:embed="rId56">
+          <a:blip r:embed="rId58">
             <a:extLst>
               <a:ext uri="{28A0092B-C50C-407E-A947-70E740481C1C}">
                 <a14:useLocalDpi xmlns:a14="http://schemas.microsoft.com/office/drawing/2010/main" val="0"/>
@@ -25294,7 +25554,7 @@
           <a:blip>
             <a:extLst>
               <a:ext uri="{96DAC541-7B7A-43D3-8B79-37D633B846F1}">
-                <asvg:svgBlip xmlns:asvg="http://schemas.microsoft.com/office/drawing/2016/SVG/main" r:embed="rId57"/>
+                <asvg:svgBlip xmlns:asvg="http://schemas.microsoft.com/office/drawing/2016/SVG/main" r:embed="rId59"/>
               </a:ext>
             </a:extLst>
           </a:blip>
@@ -25333,48 +25593,50 @@
     <p:sldLayoutId id="2147483729" r:id="rId10"/>
     <p:sldLayoutId id="2147483663" r:id="rId11"/>
     <p:sldLayoutId id="2147483664" r:id="rId12"/>
-    <p:sldLayoutId id="2147483665" r:id="rId13"/>
-    <p:sldLayoutId id="2147483666" r:id="rId14"/>
-    <p:sldLayoutId id="2147483667" r:id="rId15"/>
-    <p:sldLayoutId id="2147483668" r:id="rId16"/>
-    <p:sldLayoutId id="2147483669" r:id="rId17"/>
-    <p:sldLayoutId id="2147483670" r:id="rId18"/>
-    <p:sldLayoutId id="2147483671" r:id="rId19"/>
-    <p:sldLayoutId id="2147483672" r:id="rId20"/>
-    <p:sldLayoutId id="2147483673" r:id="rId21"/>
-    <p:sldLayoutId id="2147483674" r:id="rId22"/>
-    <p:sldLayoutId id="2147483675" r:id="rId23"/>
-    <p:sldLayoutId id="2147483676" r:id="rId24"/>
-    <p:sldLayoutId id="2147483677" r:id="rId25"/>
-    <p:sldLayoutId id="2147483678" r:id="rId26"/>
-    <p:sldLayoutId id="2147483679" r:id="rId27"/>
-    <p:sldLayoutId id="2147483680" r:id="rId28"/>
-    <p:sldLayoutId id="2147483681" r:id="rId29"/>
-    <p:sldLayoutId id="2147483682" r:id="rId30"/>
-    <p:sldLayoutId id="2147483683" r:id="rId31"/>
-    <p:sldLayoutId id="2147483684" r:id="rId32"/>
-    <p:sldLayoutId id="2147483685" r:id="rId33"/>
-    <p:sldLayoutId id="2147483686" r:id="rId34"/>
-    <p:sldLayoutId id="2147483687" r:id="rId35"/>
-    <p:sldLayoutId id="2147483688" r:id="rId36"/>
-    <p:sldLayoutId id="2147483689" r:id="rId37"/>
-    <p:sldLayoutId id="2147483690" r:id="rId38"/>
-    <p:sldLayoutId id="2147483691" r:id="rId39"/>
-    <p:sldLayoutId id="2147483692" r:id="rId40"/>
-    <p:sldLayoutId id="2147483693" r:id="rId41"/>
-    <p:sldLayoutId id="2147483694" r:id="rId42"/>
-    <p:sldLayoutId id="2147483695" r:id="rId43"/>
-    <p:sldLayoutId id="2147483696" r:id="rId44"/>
-    <p:sldLayoutId id="2147483697" r:id="rId45"/>
-    <p:sldLayoutId id="2147483698" r:id="rId46"/>
-    <p:sldLayoutId id="2147483699" r:id="rId47"/>
-    <p:sldLayoutId id="2147483700" r:id="rId48"/>
-    <p:sldLayoutId id="2147483701" r:id="rId49"/>
-    <p:sldLayoutId id="2147483702" r:id="rId50"/>
-    <p:sldLayoutId id="2147483703" r:id="rId51"/>
-    <p:sldLayoutId id="2147483704" r:id="rId52"/>
-    <p:sldLayoutId id="2147483705" r:id="rId53"/>
-    <p:sldLayoutId id="2147483706" r:id="rId54"/>
+    <p:sldLayoutId id="2147483736" r:id="rId13"/>
+    <p:sldLayoutId id="2147483737" r:id="rId14"/>
+    <p:sldLayoutId id="2147483665" r:id="rId15"/>
+    <p:sldLayoutId id="2147483666" r:id="rId16"/>
+    <p:sldLayoutId id="2147483667" r:id="rId17"/>
+    <p:sldLayoutId id="2147483668" r:id="rId18"/>
+    <p:sldLayoutId id="2147483669" r:id="rId19"/>
+    <p:sldLayoutId id="2147483670" r:id="rId20"/>
+    <p:sldLayoutId id="2147483671" r:id="rId21"/>
+    <p:sldLayoutId id="2147483672" r:id="rId22"/>
+    <p:sldLayoutId id="2147483673" r:id="rId23"/>
+    <p:sldLayoutId id="2147483674" r:id="rId24"/>
+    <p:sldLayoutId id="2147483675" r:id="rId25"/>
+    <p:sldLayoutId id="2147483676" r:id="rId26"/>
+    <p:sldLayoutId id="2147483677" r:id="rId27"/>
+    <p:sldLayoutId id="2147483678" r:id="rId28"/>
+    <p:sldLayoutId id="2147483679" r:id="rId29"/>
+    <p:sldLayoutId id="2147483680" r:id="rId30"/>
+    <p:sldLayoutId id="2147483681" r:id="rId31"/>
+    <p:sldLayoutId id="2147483682" r:id="rId32"/>
+    <p:sldLayoutId id="2147483683" r:id="rId33"/>
+    <p:sldLayoutId id="2147483684" r:id="rId34"/>
+    <p:sldLayoutId id="2147483685" r:id="rId35"/>
+    <p:sldLayoutId id="2147483686" r:id="rId36"/>
+    <p:sldLayoutId id="2147483687" r:id="rId37"/>
+    <p:sldLayoutId id="2147483688" r:id="rId38"/>
+    <p:sldLayoutId id="2147483689" r:id="rId39"/>
+    <p:sldLayoutId id="2147483690" r:id="rId40"/>
+    <p:sldLayoutId id="2147483691" r:id="rId41"/>
+    <p:sldLayoutId id="2147483692" r:id="rId42"/>
+    <p:sldLayoutId id="2147483693" r:id="rId43"/>
+    <p:sldLayoutId id="2147483694" r:id="rId44"/>
+    <p:sldLayoutId id="2147483695" r:id="rId45"/>
+    <p:sldLayoutId id="2147483696" r:id="rId46"/>
+    <p:sldLayoutId id="2147483697" r:id="rId47"/>
+    <p:sldLayoutId id="2147483698" r:id="rId48"/>
+    <p:sldLayoutId id="2147483699" r:id="rId49"/>
+    <p:sldLayoutId id="2147483700" r:id="rId50"/>
+    <p:sldLayoutId id="2147483701" r:id="rId51"/>
+    <p:sldLayoutId id="2147483702" r:id="rId52"/>
+    <p:sldLayoutId id="2147483703" r:id="rId53"/>
+    <p:sldLayoutId id="2147483704" r:id="rId54"/>
+    <p:sldLayoutId id="2147483705" r:id="rId55"/>
+    <p:sldLayoutId id="2147483706" r:id="rId56"/>
   </p:sldLayoutIdLst>
   <p:hf sldNum="0" hdr="0" ftr="0" dt="0"/>
   <p:txStyles>
@@ -27798,14 +28060,10 @@
 </file>
 
 <file path=customXml/item1.xml><?xml version="1.0" encoding="utf-8"?>
-<TemplafySlideTemplateConfiguration><![CDATA[{"documentContentValidatorConfiguration":{"enableDocumentContentValidator":false,"documentContentValidatorVersion":0},"elementsMetadata":[],"slideId":"637661701761217959","enableDocumentContentUpdater":true,"version":"1.9"}]]></TemplafySlideTemplateConfiguration>
+<TemplafySlideFormConfiguration><![CDATA[{"formFields":[],"formDataEntries":[]}]]></TemplafySlideFormConfiguration>
 </file>
 
 <file path=customXml/item10.xml><?xml version="1.0" encoding="utf-8"?>
-<TemplafySlideFormConfiguration><![CDATA[{"formFields":[],"formDataEntries":[]}]]></TemplafySlideFormConfiguration>
-</file>
-
-<file path=customXml/item11.xml><?xml version="1.0" encoding="utf-8"?>
 <ct:contentTypeSchema xmlns:ct="http://schemas.microsoft.com/office/2006/metadata/contentType" xmlns:ma="http://schemas.microsoft.com/office/2006/metadata/properties/metaAttributes" ct:_="" ma:_="" ma:contentTypeName="Documento" ma:contentTypeID="0x01010093E8D57ECA48EA49A8079FF7BA4D8434" ma:contentTypeVersion="14" ma:contentTypeDescription="Crear nuevo documento." ma:contentTypeScope="" ma:versionID="63c20a81180abc05dcc77631795f2f6d">
   <xsd:schema xmlns:xsd="http://www.w3.org/2001/XMLSchema" xmlns:xs="http://www.w3.org/2001/XMLSchema" xmlns:p="http://schemas.microsoft.com/office/2006/metadata/properties" xmlns:ns2="77fde15d-2397-485e-b73a-86b486d76ed9" xmlns:ns3="bcef248d-09fe-4034-af42-7800fb0b4c07" targetNamespace="http://schemas.microsoft.com/office/2006/metadata/properties" ma:root="true" ma:fieldsID="c568fcd95f5d4d3e7cd3fb2956348a08" ns2:_="" ns3:_="">
     <xsd:import namespace="77fde15d-2397-485e-b73a-86b486d76ed9"/>
@@ -28018,7 +28276,56 @@
 </ct:contentTypeSchema>
 </file>
 
+<file path=customXml/item11.xml><?xml version="1.0" encoding="utf-8"?>
+<TemplafySlideTemplateConfiguration><![CDATA[{"documentContentValidatorConfiguration":{"enableDocumentContentValidator":false,"documentContentValidatorVersion":0},"elementsMetadata":[],"slideId":"637661701761217959","enableDocumentContentUpdater":true,"version":"1.9"}]]></TemplafySlideTemplateConfiguration>
+</file>
+
 <file path=customXml/item12.xml><?xml version="1.0" encoding="utf-8"?>
+<TemplafySlideFormConfiguration><![CDATA[{"formFields":[],"formDataEntries":[]}]]></TemplafySlideFormConfiguration>
+</file>
+
+<file path=customXml/item13.xml><?xml version="1.0" encoding="utf-8"?>
+<TemplafySlideFormConfiguration><![CDATA[{"formFields":[],"formDataEntries":[]}]]></TemplafySlideFormConfiguration>
+</file>
+
+<file path=customXml/item14.xml><?xml version="1.0" encoding="utf-8"?>
+<TemplafySlideTemplateConfiguration><![CDATA[{"documentContentValidatorConfiguration":{"enableDocumentContentValidator":false,"documentContentValidatorVersion":0},"elementsMetadata":[],"slideId":"637661701761217959","enableDocumentContentUpdater":true,"version":"1.9"}]]></TemplafySlideTemplateConfiguration>
+</file>
+
+<file path=customXml/item15.xml><?xml version="1.0" encoding="utf-8"?>
+<TemplafySlideTemplateConfiguration><![CDATA[{"documentContentValidatorConfiguration":{"enableDocumentContentValidator":false,"documentContentValidatorVersion":0},"elementsMetadata":[],"slideId":"637661701761217959","enableDocumentContentUpdater":true,"version":"1.9"}]]></TemplafySlideTemplateConfiguration>
+</file>
+
+<file path=customXml/item16.xml><?xml version="1.0" encoding="utf-8"?>
+<?mso-contentType ?>
+<FormTemplates xmlns="http://schemas.microsoft.com/sharepoint/v3/contenttype/forms">
+  <Display>DocumentLibraryForm</Display>
+  <Edit>DocumentLibraryForm</Edit>
+  <New>DocumentLibraryForm</New>
+</FormTemplates>
+</file>
+
+<file path=customXml/item17.xml><?xml version="1.0" encoding="utf-8"?>
+<TemplafySlideTemplateConfiguration><![CDATA[{"documentContentValidatorConfiguration":{"enableDocumentContentValidator":false,"documentContentValidatorVersion":0},"elementsMetadata":[],"slideId":"637661701761217959","enableDocumentContentUpdater":true,"version":"1.9"}]]></TemplafySlideTemplateConfiguration>
+</file>
+
+<file path=customXml/item18.xml><?xml version="1.0" encoding="utf-8"?>
+<TemplafySlideFormConfiguration><![CDATA[{"formFields":[],"formDataEntries":[]}]]></TemplafySlideFormConfiguration>
+</file>
+
+<file path=customXml/item19.xml><?xml version="1.0" encoding="utf-8"?>
+<TemplafySlideFormConfiguration><![CDATA[{"formFields":[],"formDataEntries":[]}]]></TemplafySlideFormConfiguration>
+</file>
+
+<file path=customXml/item2.xml><?xml version="1.0" encoding="utf-8"?>
+<TemplafySlideTemplateConfiguration><![CDATA[{"documentContentValidatorConfiguration":{"enableDocumentContentValidator":false,"documentContentValidatorVersion":0},"elementsMetadata":[],"slideId":"637661701761217959","enableDocumentContentUpdater":true,"version":"1.9"}]]></TemplafySlideTemplateConfiguration>
+</file>
+
+<file path=customXml/item3.xml><?xml version="1.0" encoding="utf-8"?>
+<TemplafySlideTemplateConfiguration><![CDATA[{"documentContentValidatorConfiguration":{"enableDocumentContentValidator":false,"documentContentValidatorVersion":0},"elementsMetadata":[],"slideId":"637661701761217959","enableDocumentContentUpdater":true,"version":"1.9"}]]></TemplafySlideTemplateConfiguration>
+</file>
+
+<file path=customXml/item4.xml><?xml version="1.0" encoding="utf-8"?>
 <p:properties xmlns:p="http://schemas.microsoft.com/office/2006/metadata/properties" xmlns:xsi="http://www.w3.org/2001/XMLSchema-instance" xmlns:pc="http://schemas.microsoft.com/office/infopath/2007/PartnerControls">
   <documentManagement>
     <TaxCatchAll xmlns="bcef248d-09fe-4034-af42-7800fb0b4c07" xsi:nil="true"/>
@@ -28030,84 +28337,33 @@
 </p:properties>
 </file>
 
-<file path=customXml/item13.xml><?xml version="1.0" encoding="utf-8"?>
+<file path=customXml/item5.xml><?xml version="1.0" encoding="utf-8"?>
 <TemplafySlideFormConfiguration><![CDATA[{"formFields":[],"formDataEntries":[]}]]></TemplafySlideFormConfiguration>
 </file>
 
-<file path=customXml/item14.xml><?xml version="1.0" encoding="utf-8"?>
+<file path=customXml/item6.xml><?xml version="1.0" encoding="utf-8"?>
+<TemplafySlideFormConfiguration><![CDATA[{"formFields":[],"formDataEntries":[]}]]></TemplafySlideFormConfiguration>
+</file>
+
+<file path=customXml/item7.xml><?xml version="1.0" encoding="utf-8"?>
+<TemplafySlideFormConfiguration><![CDATA[{"formFields":[],"formDataEntries":[]}]]></TemplafySlideFormConfiguration>
+</file>
+
+<file path=customXml/item8.xml><?xml version="1.0" encoding="utf-8"?>
 <TemplafySlideTemplateConfiguration><![CDATA[{"documentContentValidatorConfiguration":{"enableDocumentContentValidator":false,"documentContentValidatorVersion":0},"elementsMetadata":[],"slideId":"637661701761217959","enableDocumentContentUpdater":true,"version":"1.9"}]]></TemplafySlideTemplateConfiguration>
 </file>
 
-<file path=customXml/item15.xml><?xml version="1.0" encoding="utf-8"?>
-<TemplafySlideFormConfiguration><![CDATA[{"formFields":[],"formDataEntries":[]}]]></TemplafySlideFormConfiguration>
-</file>
-
-<file path=customXml/item16.xml><?xml version="1.0" encoding="utf-8"?>
-<TemplafySlideFormConfiguration><![CDATA[{"formFields":[],"formDataEntries":[]}]]></TemplafySlideFormConfiguration>
-</file>
-
-<file path=customXml/item17.xml><?xml version="1.0" encoding="utf-8"?>
-<TemplafySlideFormConfiguration><![CDATA[{"formFields":[],"formDataEntries":[]}]]></TemplafySlideFormConfiguration>
-</file>
-
-<file path=customXml/item18.xml><?xml version="1.0" encoding="utf-8"?>
-<TemplafySlideFormConfiguration><![CDATA[{"formFields":[],"formDataEntries":[]}]]></TemplafySlideFormConfiguration>
-</file>
-
-<file path=customXml/item19.xml><?xml version="1.0" encoding="utf-8"?>
+<file path=customXml/item9.xml><?xml version="1.0" encoding="utf-8"?>
 <TemplafySlideTemplateConfiguration><![CDATA[{"documentContentValidatorConfiguration":{"enableDocumentContentValidator":false,"documentContentValidatorVersion":0},"elementsMetadata":[],"slideId":"637661701761217959","enableDocumentContentUpdater":true,"version":"1.9"}]]></TemplafySlideTemplateConfiguration>
 </file>
 
-<file path=customXml/item2.xml><?xml version="1.0" encoding="utf-8"?>
-<TemplafySlideFormConfiguration><![CDATA[{"formFields":[],"formDataEntries":[]}]]></TemplafySlideFormConfiguration>
-</file>
-
-<file path=customXml/item3.xml><?xml version="1.0" encoding="utf-8"?>
-<TemplafySlideTemplateConfiguration><![CDATA[{"documentContentValidatorConfiguration":{"enableDocumentContentValidator":false,"documentContentValidatorVersion":0},"elementsMetadata":[],"slideId":"637661701761217959","enableDocumentContentUpdater":true,"version":"1.9"}]]></TemplafySlideTemplateConfiguration>
-</file>
-
-<file path=customXml/item4.xml><?xml version="1.0" encoding="utf-8"?>
-<TemplafySlideTemplateConfiguration><![CDATA[{"documentContentValidatorConfiguration":{"enableDocumentContentValidator":false,"documentContentValidatorVersion":0},"elementsMetadata":[],"slideId":"637661701761217959","enableDocumentContentUpdater":true,"version":"1.9"}]]></TemplafySlideTemplateConfiguration>
-</file>
-
-<file path=customXml/item5.xml><?xml version="1.0" encoding="utf-8"?>
-<TemplafySlideTemplateConfiguration><![CDATA[{"documentContentValidatorConfiguration":{"enableDocumentContentValidator":false,"documentContentValidatorVersion":0},"elementsMetadata":[],"slideId":"637661701761217959","enableDocumentContentUpdater":true,"version":"1.9"}]]></TemplafySlideTemplateConfiguration>
-</file>
-
-<file path=customXml/item6.xml><?xml version="1.0" encoding="utf-8"?>
-<TemplafySlideTemplateConfiguration><![CDATA[{"documentContentValidatorConfiguration":{"enableDocumentContentValidator":false,"documentContentValidatorVersion":0},"elementsMetadata":[],"slideId":"637661701761217959","enableDocumentContentUpdater":true,"version":"1.9"}]]></TemplafySlideTemplateConfiguration>
-</file>
-
-<file path=customXml/item7.xml><?xml version="1.0" encoding="utf-8"?>
-<TemplafySlideTemplateConfiguration><![CDATA[{"documentContentValidatorConfiguration":{"enableDocumentContentValidator":false,"documentContentValidatorVersion":0},"elementsMetadata":[],"slideId":"637661701761217959","enableDocumentContentUpdater":true,"version":"1.9"}]]></TemplafySlideTemplateConfiguration>
-</file>
-
-<file path=customXml/item8.xml><?xml version="1.0" encoding="utf-8"?>
-<TemplafySlideFormConfiguration><![CDATA[{"formFields":[],"formDataEntries":[]}]]></TemplafySlideFormConfiguration>
-</file>
-
-<file path=customXml/item9.xml><?xml version="1.0" encoding="utf-8"?>
-<?mso-contentType ?>
-<FormTemplates xmlns="http://schemas.microsoft.com/sharepoint/v3/contenttype/forms">
-  <Display>DocumentLibraryForm</Display>
-  <Edit>DocumentLibraryForm</Edit>
-  <New>DocumentLibraryForm</New>
-</FormTemplates>
-</file>
-
 <file path=customXml/itemProps1.xml><?xml version="1.0" encoding="utf-8"?>
-<ds:datastoreItem xmlns:ds="http://schemas.openxmlformats.org/officeDocument/2006/customXml" ds:itemID="{7FC3D2F9-C978-4F6C-9B95-BEE6303453CA}">
+<ds:datastoreItem xmlns:ds="http://schemas.openxmlformats.org/officeDocument/2006/customXml" ds:itemID="{4F6381B7-CB4D-4A8E-AE8C-AD066D7465AA}">
   <ds:schemaRefs/>
 </ds:datastoreItem>
 </file>
 
 <file path=customXml/itemProps10.xml><?xml version="1.0" encoding="utf-8"?>
-<ds:datastoreItem xmlns:ds="http://schemas.openxmlformats.org/officeDocument/2006/customXml" ds:itemID="{D81E0773-B1DF-4187-B86B-A4CC89F4FFA3}">
-  <ds:schemaRefs/>
-</ds:datastoreItem>
-</file>
-
-<file path=customXml/itemProps11.xml><?xml version="1.0" encoding="utf-8"?>
 <ds:datastoreItem xmlns:ds="http://schemas.openxmlformats.org/officeDocument/2006/customXml" ds:itemID="{7DEDA2BC-8275-4FBB-A28A-68D801E06E75}">
   <ds:schemaRefs>
     <ds:schemaRef ds:uri="http://schemas.microsoft.com/office/2006/metadata/contentType"/>
@@ -28126,7 +28382,75 @@
 </ds:datastoreItem>
 </file>
 
+<file path=customXml/itemProps11.xml><?xml version="1.0" encoding="utf-8"?>
+<ds:datastoreItem xmlns:ds="http://schemas.openxmlformats.org/officeDocument/2006/customXml" ds:itemID="{D6A0B861-D97F-43C8-B3DF-13EB4CD7C21A}">
+  <ds:schemaRefs/>
+</ds:datastoreItem>
+</file>
+
 <file path=customXml/itemProps12.xml><?xml version="1.0" encoding="utf-8"?>
+<ds:datastoreItem xmlns:ds="http://schemas.openxmlformats.org/officeDocument/2006/customXml" ds:itemID="{2A25ECD3-EA6C-4727-8DF2-5BDC9911D24C}">
+  <ds:schemaRefs/>
+</ds:datastoreItem>
+</file>
+
+<file path=customXml/itemProps13.xml><?xml version="1.0" encoding="utf-8"?>
+<ds:datastoreItem xmlns:ds="http://schemas.openxmlformats.org/officeDocument/2006/customXml" ds:itemID="{D81E0773-B1DF-4187-B86B-A4CC89F4FFA3}">
+  <ds:schemaRefs/>
+</ds:datastoreItem>
+</file>
+
+<file path=customXml/itemProps14.xml><?xml version="1.0" encoding="utf-8"?>
+<ds:datastoreItem xmlns:ds="http://schemas.openxmlformats.org/officeDocument/2006/customXml" ds:itemID="{62D5B54B-6902-4F98-B23A-0118DB9EEDF4}">
+  <ds:schemaRefs/>
+</ds:datastoreItem>
+</file>
+
+<file path=customXml/itemProps15.xml><?xml version="1.0" encoding="utf-8"?>
+<ds:datastoreItem xmlns:ds="http://schemas.openxmlformats.org/officeDocument/2006/customXml" ds:itemID="{3E86842F-01DA-4AAB-AA56-9F0B2F496397}">
+  <ds:schemaRefs/>
+</ds:datastoreItem>
+</file>
+
+<file path=customXml/itemProps16.xml><?xml version="1.0" encoding="utf-8"?>
+<ds:datastoreItem xmlns:ds="http://schemas.openxmlformats.org/officeDocument/2006/customXml" ds:itemID="{852C017A-4C71-4057-8850-0D69BC43C2C6}">
+  <ds:schemaRefs>
+    <ds:schemaRef ds:uri="http://schemas.microsoft.com/sharepoint/v3/contenttype/forms"/>
+  </ds:schemaRefs>
+</ds:datastoreItem>
+</file>
+
+<file path=customXml/itemProps17.xml><?xml version="1.0" encoding="utf-8"?>
+<ds:datastoreItem xmlns:ds="http://schemas.openxmlformats.org/officeDocument/2006/customXml" ds:itemID="{ADCE6D4E-881A-4F21-8F46-6A112A7EEBE1}">
+  <ds:schemaRefs/>
+</ds:datastoreItem>
+</file>
+
+<file path=customXml/itemProps18.xml><?xml version="1.0" encoding="utf-8"?>
+<ds:datastoreItem xmlns:ds="http://schemas.openxmlformats.org/officeDocument/2006/customXml" ds:itemID="{A87FB1B0-D223-4CF6-8EC4-E3E816F1CDBE}">
+  <ds:schemaRefs/>
+</ds:datastoreItem>
+</file>
+
+<file path=customXml/itemProps19.xml><?xml version="1.0" encoding="utf-8"?>
+<ds:datastoreItem xmlns:ds="http://schemas.openxmlformats.org/officeDocument/2006/customXml" ds:itemID="{BA1C3E13-54CF-4EC8-BFFC-847950BB2BA6}">
+  <ds:schemaRefs/>
+</ds:datastoreItem>
+</file>
+
+<file path=customXml/itemProps2.xml><?xml version="1.0" encoding="utf-8"?>
+<ds:datastoreItem xmlns:ds="http://schemas.openxmlformats.org/officeDocument/2006/customXml" ds:itemID="{2E5DC17B-7CA5-47FA-BB10-51D0544A8F91}">
+  <ds:schemaRefs/>
+</ds:datastoreItem>
+</file>
+
+<file path=customXml/itemProps3.xml><?xml version="1.0" encoding="utf-8"?>
+<ds:datastoreItem xmlns:ds="http://schemas.openxmlformats.org/officeDocument/2006/customXml" ds:itemID="{772ABA4E-1FA2-4FC1-9A8A-C2C33BEC7DBE}">
+  <ds:schemaRefs/>
+</ds:datastoreItem>
+</file>
+
+<file path=customXml/itemProps4.xml><?xml version="1.0" encoding="utf-8"?>
 <ds:datastoreItem xmlns:ds="http://schemas.openxmlformats.org/officeDocument/2006/customXml" ds:itemID="{11300D8C-1DE0-4C9A-86BB-17269E5D3C65}">
   <ds:schemaRefs>
     <ds:schemaRef ds:uri="http://www.w3.org/XML/1998/namespace"/>
@@ -28143,95 +28467,33 @@
 </ds:datastoreItem>
 </file>
 
-<file path=customXml/itemProps13.xml><?xml version="1.0" encoding="utf-8"?>
-<ds:datastoreItem xmlns:ds="http://schemas.openxmlformats.org/officeDocument/2006/customXml" ds:itemID="{BA1C3E13-54CF-4EC8-BFFC-847950BB2BA6}">
+<file path=customXml/itemProps5.xml><?xml version="1.0" encoding="utf-8"?>
+<ds:datastoreItem xmlns:ds="http://schemas.openxmlformats.org/officeDocument/2006/customXml" ds:itemID="{0B924887-3FAA-4B8E-815F-481860E4E6AF}">
   <ds:schemaRefs/>
 </ds:datastoreItem>
 </file>
 
-<file path=customXml/itemProps14.xml><?xml version="1.0" encoding="utf-8"?>
-<ds:datastoreItem xmlns:ds="http://schemas.openxmlformats.org/officeDocument/2006/customXml" ds:itemID="{ADCE6D4E-881A-4F21-8F46-6A112A7EEBE1}">
+<file path=customXml/itemProps6.xml><?xml version="1.0" encoding="utf-8"?>
+<ds:datastoreItem xmlns:ds="http://schemas.openxmlformats.org/officeDocument/2006/customXml" ds:itemID="{6AE2E849-5528-4C05-B1E8-DB80DA8BD7F1}">
   <ds:schemaRefs/>
 </ds:datastoreItem>
 </file>
 
-<file path=customXml/itemProps15.xml><?xml version="1.0" encoding="utf-8"?>
-<ds:datastoreItem xmlns:ds="http://schemas.openxmlformats.org/officeDocument/2006/customXml" ds:itemID="{2A25ECD3-EA6C-4727-8DF2-5BDC9911D24C}">
-  <ds:schemaRefs/>
-</ds:datastoreItem>
-</file>
-
-<file path=customXml/itemProps16.xml><?xml version="1.0" encoding="utf-8"?>
+<file path=customXml/itemProps7.xml><?xml version="1.0" encoding="utf-8"?>
 <ds:datastoreItem xmlns:ds="http://schemas.openxmlformats.org/officeDocument/2006/customXml" ds:itemID="{F1A1DCA2-547F-4B90-BE36-91B9AB619C93}">
   <ds:schemaRefs/>
 </ds:datastoreItem>
 </file>
 
-<file path=customXml/itemProps17.xml><?xml version="1.0" encoding="utf-8"?>
-<ds:datastoreItem xmlns:ds="http://schemas.openxmlformats.org/officeDocument/2006/customXml" ds:itemID="{0B924887-3FAA-4B8E-815F-481860E4E6AF}">
-  <ds:schemaRefs/>
-</ds:datastoreItem>
-</file>
-
-<file path=customXml/itemProps18.xml><?xml version="1.0" encoding="utf-8"?>
-<ds:datastoreItem xmlns:ds="http://schemas.openxmlformats.org/officeDocument/2006/customXml" ds:itemID="{4F6381B7-CB4D-4A8E-AE8C-AD066D7465AA}">
-  <ds:schemaRefs/>
-</ds:datastoreItem>
-</file>
-
-<file path=customXml/itemProps19.xml><?xml version="1.0" encoding="utf-8"?>
-<ds:datastoreItem xmlns:ds="http://schemas.openxmlformats.org/officeDocument/2006/customXml" ds:itemID="{62D5B54B-6902-4F98-B23A-0118DB9EEDF4}">
-  <ds:schemaRefs/>
-</ds:datastoreItem>
-</file>
-
-<file path=customXml/itemProps2.xml><?xml version="1.0" encoding="utf-8"?>
-<ds:datastoreItem xmlns:ds="http://schemas.openxmlformats.org/officeDocument/2006/customXml" ds:itemID="{6AE2E849-5528-4C05-B1E8-DB80DA8BD7F1}">
-  <ds:schemaRefs/>
-</ds:datastoreItem>
-</file>
-
-<file path=customXml/itemProps3.xml><?xml version="1.0" encoding="utf-8"?>
-<ds:datastoreItem xmlns:ds="http://schemas.openxmlformats.org/officeDocument/2006/customXml" ds:itemID="{2E5DC17B-7CA5-47FA-BB10-51D0544A8F91}">
-  <ds:schemaRefs/>
-</ds:datastoreItem>
-</file>
-
-<file path=customXml/itemProps4.xml><?xml version="1.0" encoding="utf-8"?>
-<ds:datastoreItem xmlns:ds="http://schemas.openxmlformats.org/officeDocument/2006/customXml" ds:itemID="{3E86842F-01DA-4AAB-AA56-9F0B2F496397}">
-  <ds:schemaRefs/>
-</ds:datastoreItem>
-</file>
-
-<file path=customXml/itemProps5.xml><?xml version="1.0" encoding="utf-8"?>
-<ds:datastoreItem xmlns:ds="http://schemas.openxmlformats.org/officeDocument/2006/customXml" ds:itemID="{D6A0B861-D97F-43C8-B3DF-13EB4CD7C21A}">
-  <ds:schemaRefs/>
-</ds:datastoreItem>
-</file>
-
-<file path=customXml/itemProps6.xml><?xml version="1.0" encoding="utf-8"?>
-<ds:datastoreItem xmlns:ds="http://schemas.openxmlformats.org/officeDocument/2006/customXml" ds:itemID="{F6CC31F5-13F1-4893-A918-27994DEE1E73}">
-  <ds:schemaRefs/>
-</ds:datastoreItem>
-</file>
-
-<file path=customXml/itemProps7.xml><?xml version="1.0" encoding="utf-8"?>
-<ds:datastoreItem xmlns:ds="http://schemas.openxmlformats.org/officeDocument/2006/customXml" ds:itemID="{772ABA4E-1FA2-4FC1-9A8A-C2C33BEC7DBE}">
-  <ds:schemaRefs/>
-</ds:datastoreItem>
-</file>
-
 <file path=customXml/itemProps8.xml><?xml version="1.0" encoding="utf-8"?>
-<ds:datastoreItem xmlns:ds="http://schemas.openxmlformats.org/officeDocument/2006/customXml" ds:itemID="{A87FB1B0-D223-4CF6-8EC4-E3E816F1CDBE}">
+<ds:datastoreItem xmlns:ds="http://schemas.openxmlformats.org/officeDocument/2006/customXml" ds:itemID="{7FC3D2F9-C978-4F6C-9B95-BEE6303453CA}">
   <ds:schemaRefs/>
 </ds:datastoreItem>
 </file>
 
 <file path=customXml/itemProps9.xml><?xml version="1.0" encoding="utf-8"?>
-<ds:datastoreItem xmlns:ds="http://schemas.openxmlformats.org/officeDocument/2006/customXml" ds:itemID="{852C017A-4C71-4057-8850-0D69BC43C2C6}">
-  <ds:schemaRefs>
-    <ds:schemaRef ds:uri="http://schemas.microsoft.com/sharepoint/v3/contenttype/forms"/>
-  </ds:schemaRefs>
+<ds:datastoreItem xmlns:ds="http://schemas.openxmlformats.org/officeDocument/2006/customXml" ds:itemID="{F6CC31F5-13F1-4893-A918-27994DEE1E73}">
+  <ds:schemaRefs/>
 </ds:datastoreItem>
 </file>
 

--- a/assets/ppt-templates/Template_CDR_analysis.pptx
+++ b/assets/ppt-templates/Template_CDR_analysis.pptx
@@ -521,7 +521,7 @@
         </p:nvSpPr>
         <p:spPr>
           <a:xfrm>
-            <a:off x="479425" y="1858617"/>
+            <a:off x="479425" y="2121417"/>
             <a:ext cx="9866842" cy="3146589"/>
           </a:xfrm>
         </p:spPr>
@@ -560,8 +560,8 @@
         </p:nvSpPr>
         <p:spPr>
           <a:xfrm>
-            <a:off x="479425" y="5113685"/>
-            <a:ext cx="5472114" cy="1123603"/>
+            <a:off x="479425" y="5451613"/>
+            <a:ext cx="5472114" cy="785675"/>
           </a:xfrm>
           <a:prstGeom prst="rect">
             <a:avLst/>
@@ -1569,12 +1569,33 @@
 
 <file path=ppt/slideLayouts/slideLayout13.xml><?xml version="1.0" encoding="utf-8"?>
 <p:sldLayout xmlns:a="http://schemas.openxmlformats.org/drawingml/2006/main" xmlns:r="http://schemas.openxmlformats.org/officeDocument/2006/relationships" xmlns:p="http://schemas.openxmlformats.org/presentationml/2006/main" preserve="1" userDrawn="1">
-  <p:cSld name="Transiction">
+  <p:cSld name="Transition">
     <p:bg>
       <p:bgPr>
-        <a:solidFill>
-          <a:schemeClr val="tx1"/>
-        </a:solidFill>
+        <a:gradFill>
+          <a:gsLst>
+            <a:gs pos="79000">
+              <a:srgbClr val="9579BC">
+                <a:lumMod val="79000"/>
+              </a:srgbClr>
+            </a:gs>
+            <a:gs pos="35000">
+              <a:srgbClr val="A37ACE">
+                <a:lumMod val="52000"/>
+              </a:srgbClr>
+            </a:gs>
+            <a:gs pos="0">
+              <a:srgbClr val="7030A0"/>
+            </a:gs>
+            <a:gs pos="100000">
+              <a:schemeClr val="accent3">
+                <a:lumMod val="40000"/>
+                <a:lumOff val="60000"/>
+              </a:schemeClr>
+            </a:gs>
+          </a:gsLst>
+          <a:lin ang="2700000" scaled="1"/>
+        </a:gradFill>
         <a:effectLst/>
       </p:bgPr>
     </p:bg>
@@ -1699,7 +1720,7 @@
 
 <file path=ppt/slideLayouts/slideLayout14.xml><?xml version="1.0" encoding="utf-8"?>
 <p:sldLayout xmlns:a="http://schemas.openxmlformats.org/drawingml/2006/main" xmlns:r="http://schemas.openxmlformats.org/officeDocument/2006/relationships" xmlns:p="http://schemas.openxmlformats.org/presentationml/2006/main" preserve="1" userDrawn="1">
-  <p:cSld name="Black Transiction">
+  <p:cSld name="Black Transition">
     <p:bg>
       <p:bgPr>
         <a:solidFill>
@@ -28064,6 +28085,67 @@
 </file>
 
 <file path=customXml/item10.xml><?xml version="1.0" encoding="utf-8"?>
+<TemplafySlideTemplateConfiguration><![CDATA[{"documentContentValidatorConfiguration":{"enableDocumentContentValidator":false,"documentContentValidatorVersion":0},"elementsMetadata":[],"slideId":"637661701761217959","enableDocumentContentUpdater":true,"version":"1.9"}]]></TemplafySlideTemplateConfiguration>
+</file>
+
+<file path=customXml/item11.xml><?xml version="1.0" encoding="utf-8"?>
+<TemplafySlideTemplateConfiguration><![CDATA[{"documentContentValidatorConfiguration":{"enableDocumentContentValidator":false,"documentContentValidatorVersion":0},"elementsMetadata":[],"slideId":"637661701761217959","enableDocumentContentUpdater":true,"version":"1.9"}]]></TemplafySlideTemplateConfiguration>
+</file>
+
+<file path=customXml/item12.xml><?xml version="1.0" encoding="utf-8"?>
+<TemplafySlideFormConfiguration><![CDATA[{"formFields":[],"formDataEntries":[]}]]></TemplafySlideFormConfiguration>
+</file>
+
+<file path=customXml/item13.xml><?xml version="1.0" encoding="utf-8"?>
+<TemplafySlideFormConfiguration><![CDATA[{"formFields":[],"formDataEntries":[]}]]></TemplafySlideFormConfiguration>
+</file>
+
+<file path=customXml/item14.xml><?xml version="1.0" encoding="utf-8"?>
+<TemplafySlideTemplateConfiguration><![CDATA[{"documentContentValidatorConfiguration":{"enableDocumentContentValidator":false,"documentContentValidatorVersion":0},"elementsMetadata":[],"slideId":"637661701761217959","enableDocumentContentUpdater":true,"version":"1.9"}]]></TemplafySlideTemplateConfiguration>
+</file>
+
+<file path=customXml/item15.xml><?xml version="1.0" encoding="utf-8"?>
+<TemplafySlideFormConfiguration><![CDATA[{"formFields":[],"formDataEntries":[]}]]></TemplafySlideFormConfiguration>
+</file>
+
+<file path=customXml/item16.xml><?xml version="1.0" encoding="utf-8"?>
+<TemplafySlideFormConfiguration><![CDATA[{"formFields":[],"formDataEntries":[]}]]></TemplafySlideFormConfiguration>
+</file>
+
+<file path=customXml/item17.xml><?xml version="1.0" encoding="utf-8"?>
+<TemplafySlideTemplateConfiguration><![CDATA[{"documentContentValidatorConfiguration":{"enableDocumentContentValidator":false,"documentContentValidatorVersion":0},"elementsMetadata":[],"slideId":"637661701761217959","enableDocumentContentUpdater":true,"version":"1.9"}]]></TemplafySlideTemplateConfiguration>
+</file>
+
+<file path=customXml/item18.xml><?xml version="1.0" encoding="utf-8"?>
+<TemplafySlideTemplateConfiguration><![CDATA[{"documentContentValidatorConfiguration":{"enableDocumentContentValidator":false,"documentContentValidatorVersion":0},"elementsMetadata":[],"slideId":"637661701761217959","enableDocumentContentUpdater":true,"version":"1.9"}]]></TemplafySlideTemplateConfiguration>
+</file>
+
+<file path=customXml/item19.xml><?xml version="1.0" encoding="utf-8"?>
+<?mso-contentType ?>
+<FormTemplates xmlns="http://schemas.microsoft.com/sharepoint/v3/contenttype/forms">
+  <Display>DocumentLibraryForm</Display>
+  <Edit>DocumentLibraryForm</Edit>
+  <New>DocumentLibraryForm</New>
+</FormTemplates>
+</file>
+
+<file path=customXml/item2.xml><?xml version="1.0" encoding="utf-8"?>
+<TemplafySlideFormConfiguration><![CDATA[{"formFields":[],"formDataEntries":[]}]]></TemplafySlideFormConfiguration>
+</file>
+
+<file path=customXml/item3.xml><?xml version="1.0" encoding="utf-8"?>
+<TemplafySlideTemplateConfiguration><![CDATA[{"documentContentValidatorConfiguration":{"enableDocumentContentValidator":false,"documentContentValidatorVersion":0},"elementsMetadata":[],"slideId":"637661701761217959","enableDocumentContentUpdater":true,"version":"1.9"}]]></TemplafySlideTemplateConfiguration>
+</file>
+
+<file path=customXml/item4.xml><?xml version="1.0" encoding="utf-8"?>
+<TemplafySlideFormConfiguration><![CDATA[{"formFields":[],"formDataEntries":[]}]]></TemplafySlideFormConfiguration>
+</file>
+
+<file path=customXml/item5.xml><?xml version="1.0" encoding="utf-8"?>
+<TemplafySlideTemplateConfiguration><![CDATA[{"documentContentValidatorConfiguration":{"enableDocumentContentValidator":false,"documentContentValidatorVersion":0},"elementsMetadata":[],"slideId":"637661701761217959","enableDocumentContentUpdater":true,"version":"1.9"}]]></TemplafySlideTemplateConfiguration>
+</file>
+
+<file path=customXml/item6.xml><?xml version="1.0" encoding="utf-8"?>
 <ct:contentTypeSchema xmlns:ct="http://schemas.microsoft.com/office/2006/metadata/contentType" xmlns:ma="http://schemas.microsoft.com/office/2006/metadata/properties/metaAttributes" ct:_="" ma:_="" ma:contentTypeName="Documento" ma:contentTypeID="0x01010093E8D57ECA48EA49A8079FF7BA4D8434" ma:contentTypeVersion="14" ma:contentTypeDescription="Crear nuevo documento." ma:contentTypeScope="" ma:versionID="63c20a81180abc05dcc77631795f2f6d">
   <xsd:schema xmlns:xsd="http://www.w3.org/2001/XMLSchema" xmlns:xs="http://www.w3.org/2001/XMLSchema" xmlns:p="http://schemas.microsoft.com/office/2006/metadata/properties" xmlns:ns2="77fde15d-2397-485e-b73a-86b486d76ed9" xmlns:ns3="bcef248d-09fe-4034-af42-7800fb0b4c07" targetNamespace="http://schemas.microsoft.com/office/2006/metadata/properties" ma:root="true" ma:fieldsID="c568fcd95f5d4d3e7cd3fb2956348a08" ns2:_="" ns3:_="">
     <xsd:import namespace="77fde15d-2397-485e-b73a-86b486d76ed9"/>
@@ -28276,56 +28358,11 @@
 </ct:contentTypeSchema>
 </file>
 
-<file path=customXml/item11.xml><?xml version="1.0" encoding="utf-8"?>
-<TemplafySlideTemplateConfiguration><![CDATA[{"documentContentValidatorConfiguration":{"enableDocumentContentValidator":false,"documentContentValidatorVersion":0},"elementsMetadata":[],"slideId":"637661701761217959","enableDocumentContentUpdater":true,"version":"1.9"}]]></TemplafySlideTemplateConfiguration>
-</file>
-
-<file path=customXml/item12.xml><?xml version="1.0" encoding="utf-8"?>
+<file path=customXml/item7.xml><?xml version="1.0" encoding="utf-8"?>
 <TemplafySlideFormConfiguration><![CDATA[{"formFields":[],"formDataEntries":[]}]]></TemplafySlideFormConfiguration>
 </file>
 
-<file path=customXml/item13.xml><?xml version="1.0" encoding="utf-8"?>
-<TemplafySlideFormConfiguration><![CDATA[{"formFields":[],"formDataEntries":[]}]]></TemplafySlideFormConfiguration>
-</file>
-
-<file path=customXml/item14.xml><?xml version="1.0" encoding="utf-8"?>
-<TemplafySlideTemplateConfiguration><![CDATA[{"documentContentValidatorConfiguration":{"enableDocumentContentValidator":false,"documentContentValidatorVersion":0},"elementsMetadata":[],"slideId":"637661701761217959","enableDocumentContentUpdater":true,"version":"1.9"}]]></TemplafySlideTemplateConfiguration>
-</file>
-
-<file path=customXml/item15.xml><?xml version="1.0" encoding="utf-8"?>
-<TemplafySlideTemplateConfiguration><![CDATA[{"documentContentValidatorConfiguration":{"enableDocumentContentValidator":false,"documentContentValidatorVersion":0},"elementsMetadata":[],"slideId":"637661701761217959","enableDocumentContentUpdater":true,"version":"1.9"}]]></TemplafySlideTemplateConfiguration>
-</file>
-
-<file path=customXml/item16.xml><?xml version="1.0" encoding="utf-8"?>
-<?mso-contentType ?>
-<FormTemplates xmlns="http://schemas.microsoft.com/sharepoint/v3/contenttype/forms">
-  <Display>DocumentLibraryForm</Display>
-  <Edit>DocumentLibraryForm</Edit>
-  <New>DocumentLibraryForm</New>
-</FormTemplates>
-</file>
-
-<file path=customXml/item17.xml><?xml version="1.0" encoding="utf-8"?>
-<TemplafySlideTemplateConfiguration><![CDATA[{"documentContentValidatorConfiguration":{"enableDocumentContentValidator":false,"documentContentValidatorVersion":0},"elementsMetadata":[],"slideId":"637661701761217959","enableDocumentContentUpdater":true,"version":"1.9"}]]></TemplafySlideTemplateConfiguration>
-</file>
-
-<file path=customXml/item18.xml><?xml version="1.0" encoding="utf-8"?>
-<TemplafySlideFormConfiguration><![CDATA[{"formFields":[],"formDataEntries":[]}]]></TemplafySlideFormConfiguration>
-</file>
-
-<file path=customXml/item19.xml><?xml version="1.0" encoding="utf-8"?>
-<TemplafySlideFormConfiguration><![CDATA[{"formFields":[],"formDataEntries":[]}]]></TemplafySlideFormConfiguration>
-</file>
-
-<file path=customXml/item2.xml><?xml version="1.0" encoding="utf-8"?>
-<TemplafySlideTemplateConfiguration><![CDATA[{"documentContentValidatorConfiguration":{"enableDocumentContentValidator":false,"documentContentValidatorVersion":0},"elementsMetadata":[],"slideId":"637661701761217959","enableDocumentContentUpdater":true,"version":"1.9"}]]></TemplafySlideTemplateConfiguration>
-</file>
-
-<file path=customXml/item3.xml><?xml version="1.0" encoding="utf-8"?>
-<TemplafySlideTemplateConfiguration><![CDATA[{"documentContentValidatorConfiguration":{"enableDocumentContentValidator":false,"documentContentValidatorVersion":0},"elementsMetadata":[],"slideId":"637661701761217959","enableDocumentContentUpdater":true,"version":"1.9"}]]></TemplafySlideTemplateConfiguration>
-</file>
-
-<file path=customXml/item4.xml><?xml version="1.0" encoding="utf-8"?>
+<file path=customXml/item8.xml><?xml version="1.0" encoding="utf-8"?>
 <p:properties xmlns:p="http://schemas.microsoft.com/office/2006/metadata/properties" xmlns:xsi="http://www.w3.org/2001/XMLSchema-instance" xmlns:pc="http://schemas.microsoft.com/office/infopath/2007/PartnerControls">
   <documentManagement>
     <TaxCatchAll xmlns="bcef248d-09fe-4034-af42-7800fb0b4c07" xsi:nil="true"/>
@@ -28335,22 +28372,6 @@
     <_Flow_SignoffStatus xmlns="77fde15d-2397-485e-b73a-86b486d76ed9" xsi:nil="true"/>
   </documentManagement>
 </p:properties>
-</file>
-
-<file path=customXml/item5.xml><?xml version="1.0" encoding="utf-8"?>
-<TemplafySlideFormConfiguration><![CDATA[{"formFields":[],"formDataEntries":[]}]]></TemplafySlideFormConfiguration>
-</file>
-
-<file path=customXml/item6.xml><?xml version="1.0" encoding="utf-8"?>
-<TemplafySlideFormConfiguration><![CDATA[{"formFields":[],"formDataEntries":[]}]]></TemplafySlideFormConfiguration>
-</file>
-
-<file path=customXml/item7.xml><?xml version="1.0" encoding="utf-8"?>
-<TemplafySlideFormConfiguration><![CDATA[{"formFields":[],"formDataEntries":[]}]]></TemplafySlideFormConfiguration>
-</file>
-
-<file path=customXml/item8.xml><?xml version="1.0" encoding="utf-8"?>
-<TemplafySlideTemplateConfiguration><![CDATA[{"documentContentValidatorConfiguration":{"enableDocumentContentValidator":false,"documentContentValidatorVersion":0},"elementsMetadata":[],"slideId":"637661701761217959","enableDocumentContentUpdater":true,"version":"1.9"}]]></TemplafySlideTemplateConfiguration>
 </file>
 
 <file path=customXml/item9.xml><?xml version="1.0" encoding="utf-8"?>
@@ -28364,6 +28385,92 @@
 </file>
 
 <file path=customXml/itemProps10.xml><?xml version="1.0" encoding="utf-8"?>
+<ds:datastoreItem xmlns:ds="http://schemas.openxmlformats.org/officeDocument/2006/customXml" ds:itemID="{62D5B54B-6902-4F98-B23A-0118DB9EEDF4}">
+  <ds:schemaRefs/>
+</ds:datastoreItem>
+</file>
+
+<file path=customXml/itemProps11.xml><?xml version="1.0" encoding="utf-8"?>
+<ds:datastoreItem xmlns:ds="http://schemas.openxmlformats.org/officeDocument/2006/customXml" ds:itemID="{7FC3D2F9-C978-4F6C-9B95-BEE6303453CA}">
+  <ds:schemaRefs/>
+</ds:datastoreItem>
+</file>
+
+<file path=customXml/itemProps12.xml><?xml version="1.0" encoding="utf-8"?>
+<ds:datastoreItem xmlns:ds="http://schemas.openxmlformats.org/officeDocument/2006/customXml" ds:itemID="{D81E0773-B1DF-4187-B86B-A4CC89F4FFA3}">
+  <ds:schemaRefs/>
+</ds:datastoreItem>
+</file>
+
+<file path=customXml/itemProps13.xml><?xml version="1.0" encoding="utf-8"?>
+<ds:datastoreItem xmlns:ds="http://schemas.openxmlformats.org/officeDocument/2006/customXml" ds:itemID="{A87FB1B0-D223-4CF6-8EC4-E3E816F1CDBE}">
+  <ds:schemaRefs/>
+</ds:datastoreItem>
+</file>
+
+<file path=customXml/itemProps14.xml><?xml version="1.0" encoding="utf-8"?>
+<ds:datastoreItem xmlns:ds="http://schemas.openxmlformats.org/officeDocument/2006/customXml" ds:itemID="{772ABA4E-1FA2-4FC1-9A8A-C2C33BEC7DBE}">
+  <ds:schemaRefs/>
+</ds:datastoreItem>
+</file>
+
+<file path=customXml/itemProps15.xml><?xml version="1.0" encoding="utf-8"?>
+<ds:datastoreItem xmlns:ds="http://schemas.openxmlformats.org/officeDocument/2006/customXml" ds:itemID="{F1A1DCA2-547F-4B90-BE36-91B9AB619C93}">
+  <ds:schemaRefs/>
+</ds:datastoreItem>
+</file>
+
+<file path=customXml/itemProps16.xml><?xml version="1.0" encoding="utf-8"?>
+<ds:datastoreItem xmlns:ds="http://schemas.openxmlformats.org/officeDocument/2006/customXml" ds:itemID="{2A25ECD3-EA6C-4727-8DF2-5BDC9911D24C}">
+  <ds:schemaRefs/>
+</ds:datastoreItem>
+</file>
+
+<file path=customXml/itemProps17.xml><?xml version="1.0" encoding="utf-8"?>
+<ds:datastoreItem xmlns:ds="http://schemas.openxmlformats.org/officeDocument/2006/customXml" ds:itemID="{ADCE6D4E-881A-4F21-8F46-6A112A7EEBE1}">
+  <ds:schemaRefs/>
+</ds:datastoreItem>
+</file>
+
+<file path=customXml/itemProps18.xml><?xml version="1.0" encoding="utf-8"?>
+<ds:datastoreItem xmlns:ds="http://schemas.openxmlformats.org/officeDocument/2006/customXml" ds:itemID="{2E5DC17B-7CA5-47FA-BB10-51D0544A8F91}">
+  <ds:schemaRefs/>
+</ds:datastoreItem>
+</file>
+
+<file path=customXml/itemProps19.xml><?xml version="1.0" encoding="utf-8"?>
+<ds:datastoreItem xmlns:ds="http://schemas.openxmlformats.org/officeDocument/2006/customXml" ds:itemID="{852C017A-4C71-4057-8850-0D69BC43C2C6}">
+  <ds:schemaRefs>
+    <ds:schemaRef ds:uri="http://schemas.microsoft.com/sharepoint/v3/contenttype/forms"/>
+  </ds:schemaRefs>
+</ds:datastoreItem>
+</file>
+
+<file path=customXml/itemProps2.xml><?xml version="1.0" encoding="utf-8"?>
+<ds:datastoreItem xmlns:ds="http://schemas.openxmlformats.org/officeDocument/2006/customXml" ds:itemID="{6AE2E849-5528-4C05-B1E8-DB80DA8BD7F1}">
+  <ds:schemaRefs/>
+</ds:datastoreItem>
+</file>
+
+<file path=customXml/itemProps3.xml><?xml version="1.0" encoding="utf-8"?>
+<ds:datastoreItem xmlns:ds="http://schemas.openxmlformats.org/officeDocument/2006/customXml" ds:itemID="{D6A0B861-D97F-43C8-B3DF-13EB4CD7C21A}">
+  <ds:schemaRefs/>
+</ds:datastoreItem>
+</file>
+
+<file path=customXml/itemProps4.xml><?xml version="1.0" encoding="utf-8"?>
+<ds:datastoreItem xmlns:ds="http://schemas.openxmlformats.org/officeDocument/2006/customXml" ds:itemID="{0B924887-3FAA-4B8E-815F-481860E4E6AF}">
+  <ds:schemaRefs/>
+</ds:datastoreItem>
+</file>
+
+<file path=customXml/itemProps5.xml><?xml version="1.0" encoding="utf-8"?>
+<ds:datastoreItem xmlns:ds="http://schemas.openxmlformats.org/officeDocument/2006/customXml" ds:itemID="{3E86842F-01DA-4AAB-AA56-9F0B2F496397}">
+  <ds:schemaRefs/>
+</ds:datastoreItem>
+</file>
+
+<file path=customXml/itemProps6.xml><?xml version="1.0" encoding="utf-8"?>
 <ds:datastoreItem xmlns:ds="http://schemas.openxmlformats.org/officeDocument/2006/customXml" ds:itemID="{7DEDA2BC-8275-4FBB-A28A-68D801E06E75}">
   <ds:schemaRefs>
     <ds:schemaRef ds:uri="http://schemas.microsoft.com/office/2006/metadata/contentType"/>
@@ -28382,75 +28489,13 @@
 </ds:datastoreItem>
 </file>
 
-<file path=customXml/itemProps11.xml><?xml version="1.0" encoding="utf-8"?>
-<ds:datastoreItem xmlns:ds="http://schemas.openxmlformats.org/officeDocument/2006/customXml" ds:itemID="{D6A0B861-D97F-43C8-B3DF-13EB4CD7C21A}">
-  <ds:schemaRefs/>
-</ds:datastoreItem>
-</file>
-
-<file path=customXml/itemProps12.xml><?xml version="1.0" encoding="utf-8"?>
-<ds:datastoreItem xmlns:ds="http://schemas.openxmlformats.org/officeDocument/2006/customXml" ds:itemID="{2A25ECD3-EA6C-4727-8DF2-5BDC9911D24C}">
-  <ds:schemaRefs/>
-</ds:datastoreItem>
-</file>
-
-<file path=customXml/itemProps13.xml><?xml version="1.0" encoding="utf-8"?>
-<ds:datastoreItem xmlns:ds="http://schemas.openxmlformats.org/officeDocument/2006/customXml" ds:itemID="{D81E0773-B1DF-4187-B86B-A4CC89F4FFA3}">
-  <ds:schemaRefs/>
-</ds:datastoreItem>
-</file>
-
-<file path=customXml/itemProps14.xml><?xml version="1.0" encoding="utf-8"?>
-<ds:datastoreItem xmlns:ds="http://schemas.openxmlformats.org/officeDocument/2006/customXml" ds:itemID="{62D5B54B-6902-4F98-B23A-0118DB9EEDF4}">
-  <ds:schemaRefs/>
-</ds:datastoreItem>
-</file>
-
-<file path=customXml/itemProps15.xml><?xml version="1.0" encoding="utf-8"?>
-<ds:datastoreItem xmlns:ds="http://schemas.openxmlformats.org/officeDocument/2006/customXml" ds:itemID="{3E86842F-01DA-4AAB-AA56-9F0B2F496397}">
-  <ds:schemaRefs/>
-</ds:datastoreItem>
-</file>
-
-<file path=customXml/itemProps16.xml><?xml version="1.0" encoding="utf-8"?>
-<ds:datastoreItem xmlns:ds="http://schemas.openxmlformats.org/officeDocument/2006/customXml" ds:itemID="{852C017A-4C71-4057-8850-0D69BC43C2C6}">
-  <ds:schemaRefs>
-    <ds:schemaRef ds:uri="http://schemas.microsoft.com/sharepoint/v3/contenttype/forms"/>
-  </ds:schemaRefs>
-</ds:datastoreItem>
-</file>
-
-<file path=customXml/itemProps17.xml><?xml version="1.0" encoding="utf-8"?>
-<ds:datastoreItem xmlns:ds="http://schemas.openxmlformats.org/officeDocument/2006/customXml" ds:itemID="{ADCE6D4E-881A-4F21-8F46-6A112A7EEBE1}">
-  <ds:schemaRefs/>
-</ds:datastoreItem>
-</file>
-
-<file path=customXml/itemProps18.xml><?xml version="1.0" encoding="utf-8"?>
-<ds:datastoreItem xmlns:ds="http://schemas.openxmlformats.org/officeDocument/2006/customXml" ds:itemID="{A87FB1B0-D223-4CF6-8EC4-E3E816F1CDBE}">
-  <ds:schemaRefs/>
-</ds:datastoreItem>
-</file>
-
-<file path=customXml/itemProps19.xml><?xml version="1.0" encoding="utf-8"?>
+<file path=customXml/itemProps7.xml><?xml version="1.0" encoding="utf-8"?>
 <ds:datastoreItem xmlns:ds="http://schemas.openxmlformats.org/officeDocument/2006/customXml" ds:itemID="{BA1C3E13-54CF-4EC8-BFFC-847950BB2BA6}">
   <ds:schemaRefs/>
 </ds:datastoreItem>
 </file>
 
-<file path=customXml/itemProps2.xml><?xml version="1.0" encoding="utf-8"?>
-<ds:datastoreItem xmlns:ds="http://schemas.openxmlformats.org/officeDocument/2006/customXml" ds:itemID="{2E5DC17B-7CA5-47FA-BB10-51D0544A8F91}">
-  <ds:schemaRefs/>
-</ds:datastoreItem>
-</file>
-
-<file path=customXml/itemProps3.xml><?xml version="1.0" encoding="utf-8"?>
-<ds:datastoreItem xmlns:ds="http://schemas.openxmlformats.org/officeDocument/2006/customXml" ds:itemID="{772ABA4E-1FA2-4FC1-9A8A-C2C33BEC7DBE}">
-  <ds:schemaRefs/>
-</ds:datastoreItem>
-</file>
-
-<file path=customXml/itemProps4.xml><?xml version="1.0" encoding="utf-8"?>
+<file path=customXml/itemProps8.xml><?xml version="1.0" encoding="utf-8"?>
 <ds:datastoreItem xmlns:ds="http://schemas.openxmlformats.org/officeDocument/2006/customXml" ds:itemID="{11300D8C-1DE0-4C9A-86BB-17269E5D3C65}">
   <ds:schemaRefs>
     <ds:schemaRef ds:uri="http://www.w3.org/XML/1998/namespace"/>
@@ -28467,30 +28512,6 @@
 </ds:datastoreItem>
 </file>
 
-<file path=customXml/itemProps5.xml><?xml version="1.0" encoding="utf-8"?>
-<ds:datastoreItem xmlns:ds="http://schemas.openxmlformats.org/officeDocument/2006/customXml" ds:itemID="{0B924887-3FAA-4B8E-815F-481860E4E6AF}">
-  <ds:schemaRefs/>
-</ds:datastoreItem>
-</file>
-
-<file path=customXml/itemProps6.xml><?xml version="1.0" encoding="utf-8"?>
-<ds:datastoreItem xmlns:ds="http://schemas.openxmlformats.org/officeDocument/2006/customXml" ds:itemID="{6AE2E849-5528-4C05-B1E8-DB80DA8BD7F1}">
-  <ds:schemaRefs/>
-</ds:datastoreItem>
-</file>
-
-<file path=customXml/itemProps7.xml><?xml version="1.0" encoding="utf-8"?>
-<ds:datastoreItem xmlns:ds="http://schemas.openxmlformats.org/officeDocument/2006/customXml" ds:itemID="{F1A1DCA2-547F-4B90-BE36-91B9AB619C93}">
-  <ds:schemaRefs/>
-</ds:datastoreItem>
-</file>
-
-<file path=customXml/itemProps8.xml><?xml version="1.0" encoding="utf-8"?>
-<ds:datastoreItem xmlns:ds="http://schemas.openxmlformats.org/officeDocument/2006/customXml" ds:itemID="{7FC3D2F9-C978-4F6C-9B95-BEE6303453CA}">
-  <ds:schemaRefs/>
-</ds:datastoreItem>
-</file>
-
 <file path=customXml/itemProps9.xml><?xml version="1.0" encoding="utf-8"?>
 <ds:datastoreItem xmlns:ds="http://schemas.openxmlformats.org/officeDocument/2006/customXml" ds:itemID="{F6CC31F5-13F1-4893-A918-27994DEE1E73}">
   <ds:schemaRefs/>

--- a/assets/ppt-templates/Template_CDR_analysis.pptx
+++ b/assets/ppt-templates/Template_CDR_analysis.pptx
@@ -8,6 +8,9 @@
   <p:notesMasterIdLst>
     <p:notesMasterId r:id="rId22"/>
   </p:notesMasterIdLst>
+  <p:handoutMasterIdLst>
+    <p:handoutMasterId r:id="rId23"/>
+  </p:handoutMasterIdLst>
   <p:sldSz cx="12192000" cy="6858000"/>
   <p:notesSz cx="6858000" cy="9144000"/>
   <p:defaultTextStyle>
@@ -109,8 +112,200 @@
     <p:ext uri="{EFAFB233-063F-42B5-8137-9DF3F51BA10A}">
       <p15:sldGuideLst xmlns:p15="http://schemas.microsoft.com/office/powerpoint/2012/main"/>
     </p:ext>
+    <p:ext uri="{2D200454-40CA-4A62-9FC3-DE9A4176ACB9}">
+      <p15:notesGuideLst xmlns:p15="http://schemas.microsoft.com/office/powerpoint/2012/main"/>
+    </p:ext>
   </p:extLst>
 </p:presentation>
+</file>
+
+<file path=ppt/handoutMasters/handoutMaster1.xml><?xml version="1.0" encoding="utf-8"?>
+<p:handoutMaster xmlns:a="http://schemas.openxmlformats.org/drawingml/2006/main" xmlns:r="http://schemas.openxmlformats.org/officeDocument/2006/relationships" xmlns:p="http://schemas.openxmlformats.org/presentationml/2006/main">
+  <p:cSld>
+    <p:bg>
+      <p:bgRef idx="1001">
+        <a:schemeClr val="bg1"/>
+      </p:bgRef>
+    </p:bg>
+    <p:spTree>
+      <p:nvGrpSpPr>
+        <p:cNvPr id="1" name=""/>
+        <p:cNvGrpSpPr/>
+        <p:nvPr/>
+      </p:nvGrpSpPr>
+      <p:grpSpPr>
+        <a:xfrm>
+          <a:off x="0" y="0"/>
+          <a:ext cx="0" cy="0"/>
+          <a:chOff x="0" y="0"/>
+          <a:chExt cx="0" cy="0"/>
+        </a:xfrm>
+      </p:grpSpPr>
+      <p:sp>
+        <p:nvSpPr>
+          <p:cNvPr id="2" name="Marcador de encabezado 1">
+            <a:extLst>
+              <a:ext uri="{FF2B5EF4-FFF2-40B4-BE49-F238E27FC236}">
+                <a16:creationId xmlns:a16="http://schemas.microsoft.com/office/drawing/2014/main" id="{26BD25E9-3EE4-6315-19C7-2A541A7E63D0}"/>
+              </a:ext>
+            </a:extLst>
+          </p:cNvPr>
+          <p:cNvSpPr>
+            <a:spLocks noGrp="1"/>
+          </p:cNvSpPr>
+          <p:nvPr>
+            <p:ph type="hdr" sz="quarter"/>
+          </p:nvPr>
+        </p:nvSpPr>
+        <p:spPr>
+          <a:xfrm>
+            <a:off x="0" y="0"/>
+            <a:ext cx="2971800" cy="458788"/>
+          </a:xfrm>
+          <a:prstGeom prst="rect">
+            <a:avLst/>
+          </a:prstGeom>
+        </p:spPr>
+        <p:txBody>
+          <a:bodyPr vert="horz" lIns="91440" tIns="45720" rIns="91440" bIns="45720" rtlCol="0"/>
+          <a:lstStyle>
+            <a:lvl1pPr algn="l">
+              <a:defRPr sz="1200"/>
+            </a:lvl1pPr>
+          </a:lstStyle>
+          <a:p>
+            <a:endParaRPr lang="es-ES"/>
+          </a:p>
+        </p:txBody>
+      </p:sp>
+      <p:sp>
+        <p:nvSpPr>
+          <p:cNvPr id="3" name="Marcador de fecha 2">
+            <a:extLst>
+              <a:ext uri="{FF2B5EF4-FFF2-40B4-BE49-F238E27FC236}">
+                <a16:creationId xmlns:a16="http://schemas.microsoft.com/office/drawing/2014/main" id="{813B43AF-08D0-5B95-FD9E-BDE35BF0369F}"/>
+              </a:ext>
+            </a:extLst>
+          </p:cNvPr>
+          <p:cNvSpPr>
+            <a:spLocks noGrp="1"/>
+          </p:cNvSpPr>
+          <p:nvPr>
+            <p:ph type="dt" sz="quarter" idx="1"/>
+          </p:nvPr>
+        </p:nvSpPr>
+        <p:spPr>
+          <a:xfrm>
+            <a:off x="3884613" y="0"/>
+            <a:ext cx="2971800" cy="458788"/>
+          </a:xfrm>
+          <a:prstGeom prst="rect">
+            <a:avLst/>
+          </a:prstGeom>
+        </p:spPr>
+        <p:txBody>
+          <a:bodyPr vert="horz" lIns="91440" tIns="45720" rIns="91440" bIns="45720" rtlCol="0"/>
+          <a:lstStyle>
+            <a:lvl1pPr algn="r">
+              <a:defRPr sz="1200"/>
+            </a:lvl1pPr>
+          </a:lstStyle>
+          <a:p>
+            <a:fld id="{8CE9DB08-0204-FF45-B45D-D96F9C704D75}" type="datetimeFigureOut">
+              <a:rPr lang="es-ES" smtClean="0"/>
+              <a:t>15/9/26</a:t>
+            </a:fld>
+            <a:endParaRPr lang="es-ES"/>
+          </a:p>
+        </p:txBody>
+      </p:sp>
+      <p:sp>
+        <p:nvSpPr>
+          <p:cNvPr id="4" name="Marcador de pie de página 3">
+            <a:extLst>
+              <a:ext uri="{FF2B5EF4-FFF2-40B4-BE49-F238E27FC236}">
+                <a16:creationId xmlns:a16="http://schemas.microsoft.com/office/drawing/2014/main" id="{72606970-A43E-C27B-4C53-D78E9CC31EEC}"/>
+              </a:ext>
+            </a:extLst>
+          </p:cNvPr>
+          <p:cNvSpPr>
+            <a:spLocks noGrp="1"/>
+          </p:cNvSpPr>
+          <p:nvPr>
+            <p:ph type="ftr" sz="quarter" idx="2"/>
+          </p:nvPr>
+        </p:nvSpPr>
+        <p:spPr>
+          <a:xfrm>
+            <a:off x="0" y="8685213"/>
+            <a:ext cx="2971800" cy="458787"/>
+          </a:xfrm>
+          <a:prstGeom prst="rect">
+            <a:avLst/>
+          </a:prstGeom>
+        </p:spPr>
+        <p:txBody>
+          <a:bodyPr vert="horz" lIns="91440" tIns="45720" rIns="91440" bIns="45720" rtlCol="0" anchor="b"/>
+          <a:lstStyle>
+            <a:lvl1pPr algn="l">
+              <a:defRPr sz="1200"/>
+            </a:lvl1pPr>
+          </a:lstStyle>
+          <a:p>
+            <a:endParaRPr lang="es-ES"/>
+          </a:p>
+        </p:txBody>
+      </p:sp>
+      <p:sp>
+        <p:nvSpPr>
+          <p:cNvPr id="5" name="Marcador de número de diapositiva 4">
+            <a:extLst>
+              <a:ext uri="{FF2B5EF4-FFF2-40B4-BE49-F238E27FC236}">
+                <a16:creationId xmlns:a16="http://schemas.microsoft.com/office/drawing/2014/main" id="{56EC56AC-B7E0-CB52-BD5D-82CAC487C3EC}"/>
+              </a:ext>
+            </a:extLst>
+          </p:cNvPr>
+          <p:cNvSpPr>
+            <a:spLocks noGrp="1"/>
+          </p:cNvSpPr>
+          <p:nvPr>
+            <p:ph type="sldNum" sz="quarter" idx="3"/>
+          </p:nvPr>
+        </p:nvSpPr>
+        <p:spPr>
+          <a:xfrm>
+            <a:off x="3884613" y="8685213"/>
+            <a:ext cx="2971800" cy="458787"/>
+          </a:xfrm>
+          <a:prstGeom prst="rect">
+            <a:avLst/>
+          </a:prstGeom>
+        </p:spPr>
+        <p:txBody>
+          <a:bodyPr vert="horz" lIns="91440" tIns="45720" rIns="91440" bIns="45720" rtlCol="0" anchor="b"/>
+          <a:lstStyle>
+            <a:lvl1pPr algn="r">
+              <a:defRPr sz="1200"/>
+            </a:lvl1pPr>
+          </a:lstStyle>
+          <a:p>
+            <a:fld id="{D96E457C-3B9A-AF46-B684-DFBB9E6EDCF3}" type="slidenum">
+              <a:rPr lang="es-ES" smtClean="0"/>
+              <a:t>‹Nº›</a:t>
+            </a:fld>
+            <a:endParaRPr lang="es-ES"/>
+          </a:p>
+        </p:txBody>
+      </p:sp>
+    </p:spTree>
+    <p:extLst>
+      <p:ext uri="{BB962C8B-B14F-4D97-AF65-F5344CB8AC3E}">
+        <p14:creationId xmlns:p14="http://schemas.microsoft.com/office/powerpoint/2010/main" val="3020166519"/>
+      </p:ext>
+    </p:extLst>
+  </p:cSld>
+  <p:clrMap bg1="lt1" tx1="dk1" bg2="lt2" tx2="dk2" accent1="accent1" accent2="accent2" accent3="accent3" accent4="accent4" accent5="accent5" accent6="accent6" hlink="hlink" folHlink="folHlink"/>
+</p:handoutMaster>
 </file>
 
 <file path=ppt/notesMasters/notesMaster1.xml><?xml version="1.0" encoding="utf-8"?>
@@ -521,8 +716,8 @@
         </p:nvSpPr>
         <p:spPr>
           <a:xfrm>
-            <a:off x="479425" y="2121417"/>
-            <a:ext cx="9866842" cy="3146589"/>
+            <a:off x="479424" y="2121418"/>
+            <a:ext cx="10056053" cy="2048048"/>
           </a:xfrm>
         </p:spPr>
         <p:txBody>
@@ -543,7 +738,7 @@
           <a:p>
             <a:r>
               <a:rPr lang="en-US" dirty="0"/>
-              <a:t>Title/cover page,   Ericsson Hilda Light 80pt, max 3-lines</a:t>
+              <a:t>Title/cover page,   Ericsson Hilda Light 80pt</a:t>
             </a:r>
           </a:p>
         </p:txBody>
@@ -560,8 +755,8 @@
         </p:nvSpPr>
         <p:spPr>
           <a:xfrm>
-            <a:off x="479425" y="5451613"/>
-            <a:ext cx="5472114" cy="785675"/>
+            <a:off x="479424" y="4329789"/>
+            <a:ext cx="10056052" cy="843526"/>
           </a:xfrm>
           <a:prstGeom prst="rect">
             <a:avLst/>
@@ -579,25 +774,20 @@
               </a:spcBef>
               <a:buFont typeface="Ericsson Hilda Light" charset="0"/>
               <a:buNone/>
-              <a:defRPr sz="2000" baseline="0">
-                <a:solidFill>
-                  <a:srgbClr val="FFFF00"/>
+              <a:defRPr lang="en-US" sz="2400" b="0" kern="1400" spc="-160" baseline="0" dirty="0">
+                <a:solidFill>
+                  <a:schemeClr val="accent4"/>
                 </a:solidFill>
                 <a:latin typeface="+mn-lt"/>
+                <a:ea typeface="+mj-ea"/>
+                <a:cs typeface="+mj-cs"/>
               </a:defRPr>
             </a:lvl1pPr>
           </a:lstStyle>
           <a:p>
             <a:r>
               <a:rPr lang="en-US" dirty="0"/>
-              <a:t>Description/subtitle/speaker…</a:t>
-            </a:r>
-            <a:br>
-              <a:rPr lang="en-US" dirty="0"/>
-            </a:br>
-            <a:r>
-              <a:rPr lang="en-US" dirty="0"/>
-              <a:t>Ericsson Hilda Black 20pt</a:t>
+              <a:t>Description/subtitle/speaker… Ericsson Hilda Black 24pt</a:t>
             </a:r>
           </a:p>
         </p:txBody>
@@ -794,7 +984,7 @@
         </p:nvCxnSpPr>
         <p:spPr bwMode="auto">
           <a:xfrm>
-            <a:off x="479425" y="6345767"/>
+            <a:off x="479424" y="5287250"/>
             <a:ext cx="2259542" cy="0"/>
           </a:xfrm>
           <a:prstGeom prst="line">
@@ -815,6 +1005,64 @@
           <a:effectLst/>
         </p:spPr>
       </p:cxnSp>
+      <p:sp>
+        <p:nvSpPr>
+          <p:cNvPr id="5" name="CuadroTexto 4">
+            <a:extLst>
+              <a:ext uri="{FF2B5EF4-FFF2-40B4-BE49-F238E27FC236}">
+                <a16:creationId xmlns:a16="http://schemas.microsoft.com/office/drawing/2014/main" id="{5DE968A4-40EF-C7ED-628E-BC446E1808EC}"/>
+              </a:ext>
+            </a:extLst>
+          </p:cNvPr>
+          <p:cNvSpPr txBox="1"/>
+          <p:nvPr userDrawn="1"/>
+        </p:nvSpPr>
+        <p:spPr>
+          <a:xfrm>
+            <a:off x="1749287" y="1530626"/>
+            <a:ext cx="0" cy="0"/>
+          </a:xfrm>
+          <a:prstGeom prst="rect">
+            <a:avLst/>
+          </a:prstGeom>
+        </p:spPr>
+        <p:txBody>
+          <a:bodyPr vert="horz" wrap="none" lIns="72000" tIns="36000" rIns="72000" bIns="36000" rtlCol="0" anchor="t">
+            <a:noAutofit/>
+          </a:bodyPr>
+          <a:lstStyle/>
+          <a:p>
+            <a:pPr marR="0" algn="l" defTabSz="914400" rtl="0" eaLnBrk="1" fontAlgn="base" latinLnBrk="0" hangingPunct="1">
+              <a:lnSpc>
+                <a:spcPct val="100000"/>
+              </a:lnSpc>
+              <a:spcBef>
+                <a:spcPts val="800"/>
+              </a:spcBef>
+              <a:spcAft>
+                <a:spcPct val="0"/>
+              </a:spcAft>
+              <a:buClrTx/>
+              <a:buSzTx/>
+              <a:tabLst/>
+            </a:pPr>
+            <a:endParaRPr kumimoji="0" lang="es-ES" sz="2000" b="0" i="0" u="none" strike="noStrike" kern="1000" cap="none" spc="-30" normalizeH="0" baseline="0" noProof="0" dirty="0" err="1">
+              <a:ln>
+                <a:noFill/>
+              </a:ln>
+              <a:solidFill>
+                <a:schemeClr val="tx1"/>
+              </a:solidFill>
+              <a:effectLst/>
+              <a:uLnTx/>
+              <a:uFillTx/>
+              <a:latin typeface="+mn-lt"/>
+              <a:ea typeface="+mn-ea"/>
+              <a:cs typeface="+mn-cs"/>
+            </a:endParaRPr>
+          </a:p>
+        </p:txBody>
+      </p:sp>
     </p:spTree>
     <p:extLst>
       <p:ext uri="{BB962C8B-B14F-4D97-AF65-F5344CB8AC3E}">
@@ -28080,6 +28328,321 @@
 </a:theme>
 </file>
 
+<file path=ppt/theme/theme4.xml><?xml version="1.0" encoding="utf-8"?>
+<a:theme xmlns:a="http://schemas.openxmlformats.org/drawingml/2006/main" name="Tema de Office">
+  <a:themeElements>
+    <a:clrScheme name="Office">
+      <a:dk1>
+        <a:sysClr val="windowText" lastClr="000000"/>
+      </a:dk1>
+      <a:lt1>
+        <a:sysClr val="window" lastClr="FFFFFF"/>
+      </a:lt1>
+      <a:dk2>
+        <a:srgbClr val="0E2841"/>
+      </a:dk2>
+      <a:lt2>
+        <a:srgbClr val="E8E8E8"/>
+      </a:lt2>
+      <a:accent1>
+        <a:srgbClr val="156082"/>
+      </a:accent1>
+      <a:accent2>
+        <a:srgbClr val="E97132"/>
+      </a:accent2>
+      <a:accent3>
+        <a:srgbClr val="196B24"/>
+      </a:accent3>
+      <a:accent4>
+        <a:srgbClr val="0F9ED5"/>
+      </a:accent4>
+      <a:accent5>
+        <a:srgbClr val="A02B93"/>
+      </a:accent5>
+      <a:accent6>
+        <a:srgbClr val="4EA72E"/>
+      </a:accent6>
+      <a:hlink>
+        <a:srgbClr val="467886"/>
+      </a:hlink>
+      <a:folHlink>
+        <a:srgbClr val="96607D"/>
+      </a:folHlink>
+    </a:clrScheme>
+    <a:fontScheme name="Office">
+      <a:majorFont>
+        <a:latin typeface="Aptos Display" panose="02110004020202020204"/>
+        <a:ea typeface=""/>
+        <a:cs typeface=""/>
+        <a:font script="Jpan" typeface="游ゴシック Light"/>
+        <a:font script="Hang" typeface="맑은 고딕"/>
+        <a:font script="Hans" typeface="等线 Light"/>
+        <a:font script="Hant" typeface="新細明體"/>
+        <a:font script="Arab" typeface="Times New Roman"/>
+        <a:font script="Hebr" typeface="Times New Roman"/>
+        <a:font script="Thai" typeface="Angsana New"/>
+        <a:font script="Ethi" typeface="Nyala"/>
+        <a:font script="Beng" typeface="Vrinda"/>
+        <a:font script="Gujr" typeface="Shruti"/>
+        <a:font script="Khmr" typeface="MoolBoran"/>
+        <a:font script="Knda" typeface="Tunga"/>
+        <a:font script="Guru" typeface="Raavi"/>
+        <a:font script="Cans" typeface="Euphemia"/>
+        <a:font script="Cher" typeface="Plantagenet Cherokee"/>
+        <a:font script="Yiii" typeface="Microsoft Yi Baiti"/>
+        <a:font script="Tibt" typeface="Microsoft Himalaya"/>
+        <a:font script="Thaa" typeface="MV Boli"/>
+        <a:font script="Deva" typeface="Mangal"/>
+        <a:font script="Telu" typeface="Gautami"/>
+        <a:font script="Taml" typeface="Latha"/>
+        <a:font script="Syrc" typeface="Estrangelo Edessa"/>
+        <a:font script="Orya" typeface="Kalinga"/>
+        <a:font script="Mlym" typeface="Kartika"/>
+        <a:font script="Laoo" typeface="DokChampa"/>
+        <a:font script="Sinh" typeface="Iskoola Pota"/>
+        <a:font script="Mong" typeface="Mongolian Baiti"/>
+        <a:font script="Viet" typeface="Times New Roman"/>
+        <a:font script="Uigh" typeface="Microsoft Uighur"/>
+        <a:font script="Geor" typeface="Sylfaen"/>
+        <a:font script="Armn" typeface="Arial"/>
+        <a:font script="Bugi" typeface="Leelawadee UI"/>
+        <a:font script="Bopo" typeface="Microsoft JhengHei"/>
+        <a:font script="Java" typeface="Javanese Text"/>
+        <a:font script="Lisu" typeface="Segoe UI"/>
+        <a:font script="Mymr" typeface="Myanmar Text"/>
+        <a:font script="Nkoo" typeface="Ebrima"/>
+        <a:font script="Olck" typeface="Nirmala UI"/>
+        <a:font script="Osma" typeface="Ebrima"/>
+        <a:font script="Phag" typeface="Phagspa"/>
+        <a:font script="Syrn" typeface="Estrangelo Edessa"/>
+        <a:font script="Syrj" typeface="Estrangelo Edessa"/>
+        <a:font script="Syre" typeface="Estrangelo Edessa"/>
+        <a:font script="Sora" typeface="Nirmala UI"/>
+        <a:font script="Tale" typeface="Microsoft Tai Le"/>
+        <a:font script="Talu" typeface="Microsoft New Tai Lue"/>
+        <a:font script="Tfng" typeface="Ebrima"/>
+      </a:majorFont>
+      <a:minorFont>
+        <a:latin typeface="Aptos" panose="02110004020202020204"/>
+        <a:ea typeface=""/>
+        <a:cs typeface=""/>
+        <a:font script="Jpan" typeface="游ゴシック"/>
+        <a:font script="Hang" typeface="맑은 고딕"/>
+        <a:font script="Hans" typeface="等线"/>
+        <a:font script="Hant" typeface="新細明體"/>
+        <a:font script="Arab" typeface="Arial"/>
+        <a:font script="Hebr" typeface="Arial"/>
+        <a:font script="Thai" typeface="Cordia New"/>
+        <a:font script="Ethi" typeface="Nyala"/>
+        <a:font script="Beng" typeface="Vrinda"/>
+        <a:font script="Gujr" typeface="Shruti"/>
+        <a:font script="Khmr" typeface="DaunPenh"/>
+        <a:font script="Knda" typeface="Tunga"/>
+        <a:font script="Guru" typeface="Raavi"/>
+        <a:font script="Cans" typeface="Euphemia"/>
+        <a:font script="Cher" typeface="Plantagenet Cherokee"/>
+        <a:font script="Yiii" typeface="Microsoft Yi Baiti"/>
+        <a:font script="Tibt" typeface="Microsoft Himalaya"/>
+        <a:font script="Thaa" typeface="MV Boli"/>
+        <a:font script="Deva" typeface="Mangal"/>
+        <a:font script="Telu" typeface="Gautami"/>
+        <a:font script="Taml" typeface="Latha"/>
+        <a:font script="Syrc" typeface="Estrangelo Edessa"/>
+        <a:font script="Orya" typeface="Kalinga"/>
+        <a:font script="Mlym" typeface="Kartika"/>
+        <a:font script="Laoo" typeface="DokChampa"/>
+        <a:font script="Sinh" typeface="Iskoola Pota"/>
+        <a:font script="Mong" typeface="Mongolian Baiti"/>
+        <a:font script="Viet" typeface="Arial"/>
+        <a:font script="Uigh" typeface="Microsoft Uighur"/>
+        <a:font script="Geor" typeface="Sylfaen"/>
+        <a:font script="Armn" typeface="Arial"/>
+        <a:font script="Bugi" typeface="Leelawadee UI"/>
+        <a:font script="Bopo" typeface="Microsoft JhengHei"/>
+        <a:font script="Java" typeface="Javanese Text"/>
+        <a:font script="Lisu" typeface="Segoe UI"/>
+        <a:font script="Mymr" typeface="Myanmar Text"/>
+        <a:font script="Nkoo" typeface="Ebrima"/>
+        <a:font script="Olck" typeface="Nirmala UI"/>
+        <a:font script="Osma" typeface="Ebrima"/>
+        <a:font script="Phag" typeface="Phagspa"/>
+        <a:font script="Syrn" typeface="Estrangelo Edessa"/>
+        <a:font script="Syrj" typeface="Estrangelo Edessa"/>
+        <a:font script="Syre" typeface="Estrangelo Edessa"/>
+        <a:font script="Sora" typeface="Nirmala UI"/>
+        <a:font script="Tale" typeface="Microsoft Tai Le"/>
+        <a:font script="Talu" typeface="Microsoft New Tai Lue"/>
+        <a:font script="Tfng" typeface="Ebrima"/>
+      </a:minorFont>
+    </a:fontScheme>
+    <a:fmtScheme name="Office">
+      <a:fillStyleLst>
+        <a:solidFill>
+          <a:schemeClr val="phClr"/>
+        </a:solidFill>
+        <a:gradFill rotWithShape="1">
+          <a:gsLst>
+            <a:gs pos="0">
+              <a:schemeClr val="phClr">
+                <a:lumMod val="110000"/>
+                <a:satMod val="105000"/>
+                <a:tint val="67000"/>
+              </a:schemeClr>
+            </a:gs>
+            <a:gs pos="50000">
+              <a:schemeClr val="phClr">
+                <a:lumMod val="105000"/>
+                <a:satMod val="103000"/>
+                <a:tint val="73000"/>
+              </a:schemeClr>
+            </a:gs>
+            <a:gs pos="100000">
+              <a:schemeClr val="phClr">
+                <a:lumMod val="105000"/>
+                <a:satMod val="109000"/>
+                <a:tint val="81000"/>
+              </a:schemeClr>
+            </a:gs>
+          </a:gsLst>
+          <a:lin ang="5400000" scaled="0"/>
+        </a:gradFill>
+        <a:gradFill rotWithShape="1">
+          <a:gsLst>
+            <a:gs pos="0">
+              <a:schemeClr val="phClr">
+                <a:satMod val="103000"/>
+                <a:lumMod val="102000"/>
+                <a:tint val="94000"/>
+              </a:schemeClr>
+            </a:gs>
+            <a:gs pos="50000">
+              <a:schemeClr val="phClr">
+                <a:satMod val="110000"/>
+                <a:lumMod val="100000"/>
+                <a:shade val="100000"/>
+              </a:schemeClr>
+            </a:gs>
+            <a:gs pos="100000">
+              <a:schemeClr val="phClr">
+                <a:lumMod val="99000"/>
+                <a:satMod val="120000"/>
+                <a:shade val="78000"/>
+              </a:schemeClr>
+            </a:gs>
+          </a:gsLst>
+          <a:lin ang="5400000" scaled="0"/>
+        </a:gradFill>
+      </a:fillStyleLst>
+      <a:lnStyleLst>
+        <a:ln w="12700" cap="flat" cmpd="sng" algn="ctr">
+          <a:solidFill>
+            <a:schemeClr val="phClr"/>
+          </a:solidFill>
+          <a:prstDash val="solid"/>
+          <a:miter lim="800000"/>
+        </a:ln>
+        <a:ln w="19050" cap="flat" cmpd="sng" algn="ctr">
+          <a:solidFill>
+            <a:schemeClr val="phClr"/>
+          </a:solidFill>
+          <a:prstDash val="solid"/>
+          <a:miter lim="800000"/>
+        </a:ln>
+        <a:ln w="25400" cap="flat" cmpd="sng" algn="ctr">
+          <a:solidFill>
+            <a:schemeClr val="phClr"/>
+          </a:solidFill>
+          <a:prstDash val="solid"/>
+          <a:miter lim="800000"/>
+        </a:ln>
+      </a:lnStyleLst>
+      <a:effectStyleLst>
+        <a:effectStyle>
+          <a:effectLst/>
+        </a:effectStyle>
+        <a:effectStyle>
+          <a:effectLst/>
+        </a:effectStyle>
+        <a:effectStyle>
+          <a:effectLst>
+            <a:outerShdw blurRad="57150" dist="19050" dir="5400000" algn="ctr" rotWithShape="0">
+              <a:srgbClr val="000000">
+                <a:alpha val="63000"/>
+              </a:srgbClr>
+            </a:outerShdw>
+          </a:effectLst>
+        </a:effectStyle>
+      </a:effectStyleLst>
+      <a:bgFillStyleLst>
+        <a:solidFill>
+          <a:schemeClr val="phClr"/>
+        </a:solidFill>
+        <a:solidFill>
+          <a:schemeClr val="phClr">
+            <a:tint val="95000"/>
+            <a:satMod val="170000"/>
+          </a:schemeClr>
+        </a:solidFill>
+        <a:gradFill rotWithShape="1">
+          <a:gsLst>
+            <a:gs pos="0">
+              <a:schemeClr val="phClr">
+                <a:tint val="93000"/>
+                <a:satMod val="150000"/>
+                <a:shade val="98000"/>
+                <a:lumMod val="102000"/>
+              </a:schemeClr>
+            </a:gs>
+            <a:gs pos="50000">
+              <a:schemeClr val="phClr">
+                <a:tint val="98000"/>
+                <a:satMod val="130000"/>
+                <a:shade val="90000"/>
+                <a:lumMod val="103000"/>
+              </a:schemeClr>
+            </a:gs>
+            <a:gs pos="100000">
+              <a:schemeClr val="phClr">
+                <a:shade val="63000"/>
+                <a:satMod val="120000"/>
+              </a:schemeClr>
+            </a:gs>
+          </a:gsLst>
+          <a:lin ang="5400000" scaled="0"/>
+        </a:gradFill>
+      </a:bgFillStyleLst>
+    </a:fmtScheme>
+  </a:themeElements>
+  <a:objectDefaults>
+    <a:lnDef>
+      <a:spPr/>
+      <a:bodyPr/>
+      <a:lstStyle/>
+      <a:style>
+        <a:lnRef idx="2">
+          <a:schemeClr val="accent1"/>
+        </a:lnRef>
+        <a:fillRef idx="0">
+          <a:schemeClr val="accent1"/>
+        </a:fillRef>
+        <a:effectRef idx="1">
+          <a:schemeClr val="accent1"/>
+        </a:effectRef>
+        <a:fontRef idx="minor">
+          <a:schemeClr val="tx1"/>
+        </a:fontRef>
+      </a:style>
+    </a:lnDef>
+  </a:objectDefaults>
+  <a:extraClrSchemeLst/>
+  <a:extLst>
+    <a:ext uri="{05A4C25C-085E-4340-85A3-A5531E510DB2}">
+      <thm15:themeFamily xmlns:thm15="http://schemas.microsoft.com/office/thememl/2012/main" name="Office Theme" id="{2E142A2C-CD16-42D6-873A-C26D2A0506FA}" vid="{1BDDFF52-6CD6-40A5-AB3C-68EB2F1E4D0A}"/>
+    </a:ext>
+  </a:extLst>
+</a:theme>
+</file>
+
 <file path=customXml/item1.xml><?xml version="1.0" encoding="utf-8"?>
 <TemplafySlideFormConfiguration><![CDATA[{"formFields":[],"formDataEntries":[]}]]></TemplafySlideFormConfiguration>
 </file>
@@ -28097,55 +28660,6 @@
 </file>
 
 <file path=customXml/item13.xml><?xml version="1.0" encoding="utf-8"?>
-<TemplafySlideFormConfiguration><![CDATA[{"formFields":[],"formDataEntries":[]}]]></TemplafySlideFormConfiguration>
-</file>
-
-<file path=customXml/item14.xml><?xml version="1.0" encoding="utf-8"?>
-<TemplafySlideTemplateConfiguration><![CDATA[{"documentContentValidatorConfiguration":{"enableDocumentContentValidator":false,"documentContentValidatorVersion":0},"elementsMetadata":[],"slideId":"637661701761217959","enableDocumentContentUpdater":true,"version":"1.9"}]]></TemplafySlideTemplateConfiguration>
-</file>
-
-<file path=customXml/item15.xml><?xml version="1.0" encoding="utf-8"?>
-<TemplafySlideFormConfiguration><![CDATA[{"formFields":[],"formDataEntries":[]}]]></TemplafySlideFormConfiguration>
-</file>
-
-<file path=customXml/item16.xml><?xml version="1.0" encoding="utf-8"?>
-<TemplafySlideFormConfiguration><![CDATA[{"formFields":[],"formDataEntries":[]}]]></TemplafySlideFormConfiguration>
-</file>
-
-<file path=customXml/item17.xml><?xml version="1.0" encoding="utf-8"?>
-<TemplafySlideTemplateConfiguration><![CDATA[{"documentContentValidatorConfiguration":{"enableDocumentContentValidator":false,"documentContentValidatorVersion":0},"elementsMetadata":[],"slideId":"637661701761217959","enableDocumentContentUpdater":true,"version":"1.9"}]]></TemplafySlideTemplateConfiguration>
-</file>
-
-<file path=customXml/item18.xml><?xml version="1.0" encoding="utf-8"?>
-<TemplafySlideTemplateConfiguration><![CDATA[{"documentContentValidatorConfiguration":{"enableDocumentContentValidator":false,"documentContentValidatorVersion":0},"elementsMetadata":[],"slideId":"637661701761217959","enableDocumentContentUpdater":true,"version":"1.9"}]]></TemplafySlideTemplateConfiguration>
-</file>
-
-<file path=customXml/item19.xml><?xml version="1.0" encoding="utf-8"?>
-<?mso-contentType ?>
-<FormTemplates xmlns="http://schemas.microsoft.com/sharepoint/v3/contenttype/forms">
-  <Display>DocumentLibraryForm</Display>
-  <Edit>DocumentLibraryForm</Edit>
-  <New>DocumentLibraryForm</New>
-</FormTemplates>
-</file>
-
-<file path=customXml/item2.xml><?xml version="1.0" encoding="utf-8"?>
-<TemplafySlideFormConfiguration><![CDATA[{"formFields":[],"formDataEntries":[]}]]></TemplafySlideFormConfiguration>
-</file>
-
-<file path=customXml/item3.xml><?xml version="1.0" encoding="utf-8"?>
-<TemplafySlideTemplateConfiguration><![CDATA[{"documentContentValidatorConfiguration":{"enableDocumentContentValidator":false,"documentContentValidatorVersion":0},"elementsMetadata":[],"slideId":"637661701761217959","enableDocumentContentUpdater":true,"version":"1.9"}]]></TemplafySlideTemplateConfiguration>
-</file>
-
-<file path=customXml/item4.xml><?xml version="1.0" encoding="utf-8"?>
-<TemplafySlideFormConfiguration><![CDATA[{"formFields":[],"formDataEntries":[]}]]></TemplafySlideFormConfiguration>
-</file>
-
-<file path=customXml/item5.xml><?xml version="1.0" encoding="utf-8"?>
-<TemplafySlideTemplateConfiguration><![CDATA[{"documentContentValidatorConfiguration":{"enableDocumentContentValidator":false,"documentContentValidatorVersion":0},"elementsMetadata":[],"slideId":"637661701761217959","enableDocumentContentUpdater":true,"version":"1.9"}]]></TemplafySlideTemplateConfiguration>
-</file>
-
-<file path=customXml/item6.xml><?xml version="1.0" encoding="utf-8"?>
 <ct:contentTypeSchema xmlns:ct="http://schemas.microsoft.com/office/2006/metadata/contentType" xmlns:ma="http://schemas.microsoft.com/office/2006/metadata/properties/metaAttributes" ct:_="" ma:_="" ma:contentTypeName="Documento" ma:contentTypeID="0x01010093E8D57ECA48EA49A8079FF7BA4D8434" ma:contentTypeVersion="14" ma:contentTypeDescription="Crear nuevo documento." ma:contentTypeScope="" ma:versionID="63c20a81180abc05dcc77631795f2f6d">
   <xsd:schema xmlns:xsd="http://www.w3.org/2001/XMLSchema" xmlns:xs="http://www.w3.org/2001/XMLSchema" xmlns:p="http://schemas.microsoft.com/office/2006/metadata/properties" xmlns:ns2="77fde15d-2397-485e-b73a-86b486d76ed9" xmlns:ns3="bcef248d-09fe-4034-af42-7800fb0b4c07" targetNamespace="http://schemas.microsoft.com/office/2006/metadata/properties" ma:root="true" ma:fieldsID="c568fcd95f5d4d3e7cd3fb2956348a08" ns2:_="" ns3:_="">
     <xsd:import namespace="77fde15d-2397-485e-b73a-86b486d76ed9"/>
@@ -28358,11 +28872,7 @@
 </ct:contentTypeSchema>
 </file>
 
-<file path=customXml/item7.xml><?xml version="1.0" encoding="utf-8"?>
-<TemplafySlideFormConfiguration><![CDATA[{"formFields":[],"formDataEntries":[]}]]></TemplafySlideFormConfiguration>
-</file>
-
-<file path=customXml/item8.xml><?xml version="1.0" encoding="utf-8"?>
+<file path=customXml/item14.xml><?xml version="1.0" encoding="utf-8"?>
 <p:properties xmlns:p="http://schemas.microsoft.com/office/2006/metadata/properties" xmlns:xsi="http://www.w3.org/2001/XMLSchema-instance" xmlns:pc="http://schemas.microsoft.com/office/infopath/2007/PartnerControls">
   <documentManagement>
     <TaxCatchAll xmlns="bcef248d-09fe-4034-af42-7800fb0b4c07" xsi:nil="true"/>
@@ -28372,6 +28882,59 @@
     <_Flow_SignoffStatus xmlns="77fde15d-2397-485e-b73a-86b486d76ed9" xsi:nil="true"/>
   </documentManagement>
 </p:properties>
+</file>
+
+<file path=customXml/item15.xml><?xml version="1.0" encoding="utf-8"?>
+<TemplafySlideFormConfiguration><![CDATA[{"formFields":[],"formDataEntries":[]}]]></TemplafySlideFormConfiguration>
+</file>
+
+<file path=customXml/item16.xml><?xml version="1.0" encoding="utf-8"?>
+<TemplafySlideTemplateConfiguration><![CDATA[{"documentContentValidatorConfiguration":{"enableDocumentContentValidator":false,"documentContentValidatorVersion":0},"elementsMetadata":[],"slideId":"637661701761217959","enableDocumentContentUpdater":true,"version":"1.9"}]]></TemplafySlideTemplateConfiguration>
+</file>
+
+<file path=customXml/item17.xml><?xml version="1.0" encoding="utf-8"?>
+<TemplafySlideTemplateConfiguration><![CDATA[{"documentContentValidatorConfiguration":{"enableDocumentContentValidator":false,"documentContentValidatorVersion":0},"elementsMetadata":[],"slideId":"637661701761217959","enableDocumentContentUpdater":true,"version":"1.9"}]]></TemplafySlideTemplateConfiguration>
+</file>
+
+<file path=customXml/item18.xml><?xml version="1.0" encoding="utf-8"?>
+<TemplafySlideTemplateConfiguration><![CDATA[{"documentContentValidatorConfiguration":{"enableDocumentContentValidator":false,"documentContentValidatorVersion":0},"elementsMetadata":[],"slideId":"637661701761217959","enableDocumentContentUpdater":true,"version":"1.9"}]]></TemplafySlideTemplateConfiguration>
+</file>
+
+<file path=customXml/item19.xml><?xml version="1.0" encoding="utf-8"?>
+<TemplafySlideFormConfiguration><![CDATA[{"formFields":[],"formDataEntries":[]}]]></TemplafySlideFormConfiguration>
+</file>
+
+<file path=customXml/item2.xml><?xml version="1.0" encoding="utf-8"?>
+<TemplafySlideTemplateConfiguration><![CDATA[{"documentContentValidatorConfiguration":{"enableDocumentContentValidator":false,"documentContentValidatorVersion":0},"elementsMetadata":[],"slideId":"637661701761217959","enableDocumentContentUpdater":true,"version":"1.9"}]]></TemplafySlideTemplateConfiguration>
+</file>
+
+<file path=customXml/item3.xml><?xml version="1.0" encoding="utf-8"?>
+<TemplafySlideFormConfiguration><![CDATA[{"formFields":[],"formDataEntries":[]}]]></TemplafySlideFormConfiguration>
+</file>
+
+<file path=customXml/item4.xml><?xml version="1.0" encoding="utf-8"?>
+<TemplafySlideFormConfiguration><![CDATA[{"formFields":[],"formDataEntries":[]}]]></TemplafySlideFormConfiguration>
+</file>
+
+<file path=customXml/item5.xml><?xml version="1.0" encoding="utf-8"?>
+<?mso-contentType ?>
+<FormTemplates xmlns="http://schemas.microsoft.com/sharepoint/v3/contenttype/forms">
+  <Display>DocumentLibraryForm</Display>
+  <Edit>DocumentLibraryForm</Edit>
+  <New>DocumentLibraryForm</New>
+</FormTemplates>
+</file>
+
+<file path=customXml/item6.xml><?xml version="1.0" encoding="utf-8"?>
+<TemplafySlideTemplateConfiguration><![CDATA[{"documentContentValidatorConfiguration":{"enableDocumentContentValidator":false,"documentContentValidatorVersion":0},"elementsMetadata":[],"slideId":"637661701761217959","enableDocumentContentUpdater":true,"version":"1.9"}]]></TemplafySlideTemplateConfiguration>
+</file>
+
+<file path=customXml/item7.xml><?xml version="1.0" encoding="utf-8"?>
+<TemplafySlideFormConfiguration><![CDATA[{"formFields":[],"formDataEntries":[]}]]></TemplafySlideFormConfiguration>
+</file>
+
+<file path=customXml/item8.xml><?xml version="1.0" encoding="utf-8"?>
+<TemplafySlideFormConfiguration><![CDATA[{"formFields":[],"formDataEntries":[]}]]></TemplafySlideFormConfiguration>
 </file>
 
 <file path=customXml/item9.xml><?xml version="1.0" encoding="utf-8"?>
@@ -28385,92 +28948,24 @@
 </file>
 
 <file path=customXml/itemProps10.xml><?xml version="1.0" encoding="utf-8"?>
-<ds:datastoreItem xmlns:ds="http://schemas.openxmlformats.org/officeDocument/2006/customXml" ds:itemID="{62D5B54B-6902-4F98-B23A-0118DB9EEDF4}">
+<ds:datastoreItem xmlns:ds="http://schemas.openxmlformats.org/officeDocument/2006/customXml" ds:itemID="{7FC3D2F9-C978-4F6C-9B95-BEE6303453CA}">
   <ds:schemaRefs/>
 </ds:datastoreItem>
 </file>
 
 <file path=customXml/itemProps11.xml><?xml version="1.0" encoding="utf-8"?>
-<ds:datastoreItem xmlns:ds="http://schemas.openxmlformats.org/officeDocument/2006/customXml" ds:itemID="{7FC3D2F9-C978-4F6C-9B95-BEE6303453CA}">
+<ds:datastoreItem xmlns:ds="http://schemas.openxmlformats.org/officeDocument/2006/customXml" ds:itemID="{3E86842F-01DA-4AAB-AA56-9F0B2F496397}">
   <ds:schemaRefs/>
 </ds:datastoreItem>
 </file>
 
 <file path=customXml/itemProps12.xml><?xml version="1.0" encoding="utf-8"?>
-<ds:datastoreItem xmlns:ds="http://schemas.openxmlformats.org/officeDocument/2006/customXml" ds:itemID="{D81E0773-B1DF-4187-B86B-A4CC89F4FFA3}">
+<ds:datastoreItem xmlns:ds="http://schemas.openxmlformats.org/officeDocument/2006/customXml" ds:itemID="{6AE2E849-5528-4C05-B1E8-DB80DA8BD7F1}">
   <ds:schemaRefs/>
 </ds:datastoreItem>
 </file>
 
 <file path=customXml/itemProps13.xml><?xml version="1.0" encoding="utf-8"?>
-<ds:datastoreItem xmlns:ds="http://schemas.openxmlformats.org/officeDocument/2006/customXml" ds:itemID="{A87FB1B0-D223-4CF6-8EC4-E3E816F1CDBE}">
-  <ds:schemaRefs/>
-</ds:datastoreItem>
-</file>
-
-<file path=customXml/itemProps14.xml><?xml version="1.0" encoding="utf-8"?>
-<ds:datastoreItem xmlns:ds="http://schemas.openxmlformats.org/officeDocument/2006/customXml" ds:itemID="{772ABA4E-1FA2-4FC1-9A8A-C2C33BEC7DBE}">
-  <ds:schemaRefs/>
-</ds:datastoreItem>
-</file>
-
-<file path=customXml/itemProps15.xml><?xml version="1.0" encoding="utf-8"?>
-<ds:datastoreItem xmlns:ds="http://schemas.openxmlformats.org/officeDocument/2006/customXml" ds:itemID="{F1A1DCA2-547F-4B90-BE36-91B9AB619C93}">
-  <ds:schemaRefs/>
-</ds:datastoreItem>
-</file>
-
-<file path=customXml/itemProps16.xml><?xml version="1.0" encoding="utf-8"?>
-<ds:datastoreItem xmlns:ds="http://schemas.openxmlformats.org/officeDocument/2006/customXml" ds:itemID="{2A25ECD3-EA6C-4727-8DF2-5BDC9911D24C}">
-  <ds:schemaRefs/>
-</ds:datastoreItem>
-</file>
-
-<file path=customXml/itemProps17.xml><?xml version="1.0" encoding="utf-8"?>
-<ds:datastoreItem xmlns:ds="http://schemas.openxmlformats.org/officeDocument/2006/customXml" ds:itemID="{ADCE6D4E-881A-4F21-8F46-6A112A7EEBE1}">
-  <ds:schemaRefs/>
-</ds:datastoreItem>
-</file>
-
-<file path=customXml/itemProps18.xml><?xml version="1.0" encoding="utf-8"?>
-<ds:datastoreItem xmlns:ds="http://schemas.openxmlformats.org/officeDocument/2006/customXml" ds:itemID="{2E5DC17B-7CA5-47FA-BB10-51D0544A8F91}">
-  <ds:schemaRefs/>
-</ds:datastoreItem>
-</file>
-
-<file path=customXml/itemProps19.xml><?xml version="1.0" encoding="utf-8"?>
-<ds:datastoreItem xmlns:ds="http://schemas.openxmlformats.org/officeDocument/2006/customXml" ds:itemID="{852C017A-4C71-4057-8850-0D69BC43C2C6}">
-  <ds:schemaRefs>
-    <ds:schemaRef ds:uri="http://schemas.microsoft.com/sharepoint/v3/contenttype/forms"/>
-  </ds:schemaRefs>
-</ds:datastoreItem>
-</file>
-
-<file path=customXml/itemProps2.xml><?xml version="1.0" encoding="utf-8"?>
-<ds:datastoreItem xmlns:ds="http://schemas.openxmlformats.org/officeDocument/2006/customXml" ds:itemID="{6AE2E849-5528-4C05-B1E8-DB80DA8BD7F1}">
-  <ds:schemaRefs/>
-</ds:datastoreItem>
-</file>
-
-<file path=customXml/itemProps3.xml><?xml version="1.0" encoding="utf-8"?>
-<ds:datastoreItem xmlns:ds="http://schemas.openxmlformats.org/officeDocument/2006/customXml" ds:itemID="{D6A0B861-D97F-43C8-B3DF-13EB4CD7C21A}">
-  <ds:schemaRefs/>
-</ds:datastoreItem>
-</file>
-
-<file path=customXml/itemProps4.xml><?xml version="1.0" encoding="utf-8"?>
-<ds:datastoreItem xmlns:ds="http://schemas.openxmlformats.org/officeDocument/2006/customXml" ds:itemID="{0B924887-3FAA-4B8E-815F-481860E4E6AF}">
-  <ds:schemaRefs/>
-</ds:datastoreItem>
-</file>
-
-<file path=customXml/itemProps5.xml><?xml version="1.0" encoding="utf-8"?>
-<ds:datastoreItem xmlns:ds="http://schemas.openxmlformats.org/officeDocument/2006/customXml" ds:itemID="{3E86842F-01DA-4AAB-AA56-9F0B2F496397}">
-  <ds:schemaRefs/>
-</ds:datastoreItem>
-</file>
-
-<file path=customXml/itemProps6.xml><?xml version="1.0" encoding="utf-8"?>
 <ds:datastoreItem xmlns:ds="http://schemas.openxmlformats.org/officeDocument/2006/customXml" ds:itemID="{7DEDA2BC-8275-4FBB-A28A-68D801E06E75}">
   <ds:schemaRefs>
     <ds:schemaRef ds:uri="http://schemas.microsoft.com/office/2006/metadata/contentType"/>
@@ -28489,13 +28984,7 @@
 </ds:datastoreItem>
 </file>
 
-<file path=customXml/itemProps7.xml><?xml version="1.0" encoding="utf-8"?>
-<ds:datastoreItem xmlns:ds="http://schemas.openxmlformats.org/officeDocument/2006/customXml" ds:itemID="{BA1C3E13-54CF-4EC8-BFFC-847950BB2BA6}">
-  <ds:schemaRefs/>
-</ds:datastoreItem>
-</file>
-
-<file path=customXml/itemProps8.xml><?xml version="1.0" encoding="utf-8"?>
+<file path=customXml/itemProps14.xml><?xml version="1.0" encoding="utf-8"?>
 <ds:datastoreItem xmlns:ds="http://schemas.openxmlformats.org/officeDocument/2006/customXml" ds:itemID="{11300D8C-1DE0-4C9A-86BB-17269E5D3C65}">
   <ds:schemaRefs>
     <ds:schemaRef ds:uri="http://www.w3.org/XML/1998/namespace"/>
@@ -28512,6 +29001,80 @@
 </ds:datastoreItem>
 </file>
 
+<file path=customXml/itemProps15.xml><?xml version="1.0" encoding="utf-8"?>
+<ds:datastoreItem xmlns:ds="http://schemas.openxmlformats.org/officeDocument/2006/customXml" ds:itemID="{2A25ECD3-EA6C-4727-8DF2-5BDC9911D24C}">
+  <ds:schemaRefs/>
+</ds:datastoreItem>
+</file>
+
+<file path=customXml/itemProps16.xml><?xml version="1.0" encoding="utf-8"?>
+<ds:datastoreItem xmlns:ds="http://schemas.openxmlformats.org/officeDocument/2006/customXml" ds:itemID="{2E5DC17B-7CA5-47FA-BB10-51D0544A8F91}">
+  <ds:schemaRefs/>
+</ds:datastoreItem>
+</file>
+
+<file path=customXml/itemProps17.xml><?xml version="1.0" encoding="utf-8"?>
+<ds:datastoreItem xmlns:ds="http://schemas.openxmlformats.org/officeDocument/2006/customXml" ds:itemID="{ADCE6D4E-881A-4F21-8F46-6A112A7EEBE1}">
+  <ds:schemaRefs/>
+</ds:datastoreItem>
+</file>
+
+<file path=customXml/itemProps18.xml><?xml version="1.0" encoding="utf-8"?>
+<ds:datastoreItem xmlns:ds="http://schemas.openxmlformats.org/officeDocument/2006/customXml" ds:itemID="{62D5B54B-6902-4F98-B23A-0118DB9EEDF4}">
+  <ds:schemaRefs/>
+</ds:datastoreItem>
+</file>
+
+<file path=customXml/itemProps19.xml><?xml version="1.0" encoding="utf-8"?>
+<ds:datastoreItem xmlns:ds="http://schemas.openxmlformats.org/officeDocument/2006/customXml" ds:itemID="{A87FB1B0-D223-4CF6-8EC4-E3E816F1CDBE}">
+  <ds:schemaRefs/>
+</ds:datastoreItem>
+</file>
+
+<file path=customXml/itemProps2.xml><?xml version="1.0" encoding="utf-8"?>
+<ds:datastoreItem xmlns:ds="http://schemas.openxmlformats.org/officeDocument/2006/customXml" ds:itemID="{772ABA4E-1FA2-4FC1-9A8A-C2C33BEC7DBE}">
+  <ds:schemaRefs/>
+</ds:datastoreItem>
+</file>
+
+<file path=customXml/itemProps3.xml><?xml version="1.0" encoding="utf-8"?>
+<ds:datastoreItem xmlns:ds="http://schemas.openxmlformats.org/officeDocument/2006/customXml" ds:itemID="{0B924887-3FAA-4B8E-815F-481860E4E6AF}">
+  <ds:schemaRefs/>
+</ds:datastoreItem>
+</file>
+
+<file path=customXml/itemProps4.xml><?xml version="1.0" encoding="utf-8"?>
+<ds:datastoreItem xmlns:ds="http://schemas.openxmlformats.org/officeDocument/2006/customXml" ds:itemID="{BA1C3E13-54CF-4EC8-BFFC-847950BB2BA6}">
+  <ds:schemaRefs/>
+</ds:datastoreItem>
+</file>
+
+<file path=customXml/itemProps5.xml><?xml version="1.0" encoding="utf-8"?>
+<ds:datastoreItem xmlns:ds="http://schemas.openxmlformats.org/officeDocument/2006/customXml" ds:itemID="{852C017A-4C71-4057-8850-0D69BC43C2C6}">
+  <ds:schemaRefs>
+    <ds:schemaRef ds:uri="http://schemas.microsoft.com/sharepoint/v3/contenttype/forms"/>
+  </ds:schemaRefs>
+</ds:datastoreItem>
+</file>
+
+<file path=customXml/itemProps6.xml><?xml version="1.0" encoding="utf-8"?>
+<ds:datastoreItem xmlns:ds="http://schemas.openxmlformats.org/officeDocument/2006/customXml" ds:itemID="{D6A0B861-D97F-43C8-B3DF-13EB4CD7C21A}">
+  <ds:schemaRefs/>
+</ds:datastoreItem>
+</file>
+
+<file path=customXml/itemProps7.xml><?xml version="1.0" encoding="utf-8"?>
+<ds:datastoreItem xmlns:ds="http://schemas.openxmlformats.org/officeDocument/2006/customXml" ds:itemID="{D81E0773-B1DF-4187-B86B-A4CC89F4FFA3}">
+  <ds:schemaRefs/>
+</ds:datastoreItem>
+</file>
+
+<file path=customXml/itemProps8.xml><?xml version="1.0" encoding="utf-8"?>
+<ds:datastoreItem xmlns:ds="http://schemas.openxmlformats.org/officeDocument/2006/customXml" ds:itemID="{F1A1DCA2-547F-4B90-BE36-91B9AB619C93}">
+  <ds:schemaRefs/>
+</ds:datastoreItem>
+</file>
+
 <file path=customXml/itemProps9.xml><?xml version="1.0" encoding="utf-8"?>
 <ds:datastoreItem xmlns:ds="http://schemas.openxmlformats.org/officeDocument/2006/customXml" ds:itemID="{F6CC31F5-13F1-4893-A918-27994DEE1E73}">
   <ds:schemaRefs/>

--- a/assets/ppt-templates/Template_CDR_analysis.pptx
+++ b/assets/ppt-templates/Template_CDR_analysis.pptx
@@ -213,7 +213,7 @@
           <a:p>
             <a:fld id="{8CE9DB08-0204-FF45-B45D-D96F9C704D75}" type="datetimeFigureOut">
               <a:rPr lang="es-ES" smtClean="0"/>
-              <a:t>15/9/26</a:t>
+              <a:t>27/9/26</a:t>
             </a:fld>
             <a:endParaRPr lang="es-ES"/>
           </a:p>
@@ -390,7 +390,7 @@
           <a:p>
             <a:fld id="{56B6DF60-6159-4558-8D07-00E18A77A544}" type="datetimeFigureOut">
               <a:rPr lang="en-US" smtClean="0"/>
-              <a:t>9/15/26</a:t>
+              <a:t>9/27/26</a:t>
             </a:fld>
             <a:endParaRPr lang="en-US"/>
           </a:p>
@@ -717,7 +717,7 @@
         <p:spPr>
           <a:xfrm>
             <a:off x="479424" y="2121418"/>
-            <a:ext cx="10056053" cy="2048048"/>
+            <a:ext cx="9766799" cy="2048048"/>
           </a:xfrm>
         </p:spPr>
         <p:txBody>
@@ -756,7 +756,7 @@
         <p:spPr>
           <a:xfrm>
             <a:off x="479424" y="4329789"/>
-            <a:ext cx="10056052" cy="843526"/>
+            <a:ext cx="9766799" cy="843526"/>
           </a:xfrm>
           <a:prstGeom prst="rect">
             <a:avLst/>
@@ -24565,7 +24565,7 @@
           <a:p>
             <a:fld id="{EAB07A04-4D14-4FB4-ABC3-4FF79A2401A4}" type="datetimeFigureOut">
               <a:rPr lang="en-US" smtClean="0"/>
-              <a:t>9/15/26</a:t>
+              <a:t>9/27/26</a:t>
             </a:fld>
             <a:endParaRPr lang="en-US"/>
           </a:p>
@@ -24785,7 +24785,7 @@
           <a:p>
             <a:fld id="{E79BC93B-D740-4A24-9033-971140705A34}" type="datetimeFigureOut">
               <a:rPr lang="en-US" smtClean="0"/>
-              <a:t>9/15/26</a:t>
+              <a:t>9/27/26</a:t>
             </a:fld>
             <a:endParaRPr lang="en-US"/>
           </a:p>
@@ -28648,18 +28648,22 @@
 </file>
 
 <file path=customXml/item10.xml><?xml version="1.0" encoding="utf-8"?>
-<TemplafySlideTemplateConfiguration><![CDATA[{"documentContentValidatorConfiguration":{"enableDocumentContentValidator":false,"documentContentValidatorVersion":0},"elementsMetadata":[],"slideId":"637661701761217959","enableDocumentContentUpdater":true,"version":"1.9"}]]></TemplafySlideTemplateConfiguration>
+<p:properties xmlns:p="http://schemas.microsoft.com/office/2006/metadata/properties" xmlns:xsi="http://www.w3.org/2001/XMLSchema-instance" xmlns:pc="http://schemas.microsoft.com/office/infopath/2007/PartnerControls">
+  <documentManagement>
+    <TaxCatchAll xmlns="bcef248d-09fe-4034-af42-7800fb0b4c07" xsi:nil="true"/>
+    <lcf76f155ced4ddcb4097134ff3c332f xmlns="77fde15d-2397-485e-b73a-86b486d76ed9">
+      <Terms xmlns="http://schemas.microsoft.com/office/infopath/2007/PartnerControls"/>
+    </lcf76f155ced4ddcb4097134ff3c332f>
+    <_Flow_SignoffStatus xmlns="77fde15d-2397-485e-b73a-86b486d76ed9" xsi:nil="true"/>
+  </documentManagement>
+</p:properties>
 </file>
 
 <file path=customXml/item11.xml><?xml version="1.0" encoding="utf-8"?>
-<TemplafySlideTemplateConfiguration><![CDATA[{"documentContentValidatorConfiguration":{"enableDocumentContentValidator":false,"documentContentValidatorVersion":0},"elementsMetadata":[],"slideId":"637661701761217959","enableDocumentContentUpdater":true,"version":"1.9"}]]></TemplafySlideTemplateConfiguration>
+<TemplafySlideFormConfiguration><![CDATA[{"formFields":[],"formDataEntries":[]}]]></TemplafySlideFormConfiguration>
 </file>
 
 <file path=customXml/item12.xml><?xml version="1.0" encoding="utf-8"?>
-<TemplafySlideFormConfiguration><![CDATA[{"formFields":[],"formDataEntries":[]}]]></TemplafySlideFormConfiguration>
-</file>
-
-<file path=customXml/item13.xml><?xml version="1.0" encoding="utf-8"?>
 <ct:contentTypeSchema xmlns:ct="http://schemas.microsoft.com/office/2006/metadata/contentType" xmlns:ma="http://schemas.microsoft.com/office/2006/metadata/properties/metaAttributes" ct:_="" ma:_="" ma:contentTypeName="Documento" ma:contentTypeID="0x01010093E8D57ECA48EA49A8079FF7BA4D8434" ma:contentTypeVersion="14" ma:contentTypeDescription="Crear nuevo documento." ma:contentTypeScope="" ma:versionID="63c20a81180abc05dcc77631795f2f6d">
   <xsd:schema xmlns:xsd="http://www.w3.org/2001/XMLSchema" xmlns:xs="http://www.w3.org/2001/XMLSchema" xmlns:p="http://schemas.microsoft.com/office/2006/metadata/properties" xmlns:ns2="77fde15d-2397-485e-b73a-86b486d76ed9" xmlns:ns3="bcef248d-09fe-4034-af42-7800fb0b4c07" targetNamespace="http://schemas.microsoft.com/office/2006/metadata/properties" ma:root="true" ma:fieldsID="c568fcd95f5d4d3e7cd3fb2956348a08" ns2:_="" ns3:_="">
     <xsd:import namespace="77fde15d-2397-485e-b73a-86b486d76ed9"/>
@@ -28872,16 +28876,12 @@
 </ct:contentTypeSchema>
 </file>
 
+<file path=customXml/item13.xml><?xml version="1.0" encoding="utf-8"?>
+<TemplafySlideTemplateConfiguration><![CDATA[{"documentContentValidatorConfiguration":{"enableDocumentContentValidator":false,"documentContentValidatorVersion":0},"elementsMetadata":[],"slideId":"637661701761217959","enableDocumentContentUpdater":true,"version":"1.9"}]]></TemplafySlideTemplateConfiguration>
+</file>
+
 <file path=customXml/item14.xml><?xml version="1.0" encoding="utf-8"?>
-<p:properties xmlns:p="http://schemas.microsoft.com/office/2006/metadata/properties" xmlns:xsi="http://www.w3.org/2001/XMLSchema-instance" xmlns:pc="http://schemas.microsoft.com/office/infopath/2007/PartnerControls">
-  <documentManagement>
-    <TaxCatchAll xmlns="bcef248d-09fe-4034-af42-7800fb0b4c07" xsi:nil="true"/>
-    <lcf76f155ced4ddcb4097134ff3c332f xmlns="77fde15d-2397-485e-b73a-86b486d76ed9">
-      <Terms xmlns="http://schemas.microsoft.com/office/infopath/2007/PartnerControls"/>
-    </lcf76f155ced4ddcb4097134ff3c332f>
-    <_Flow_SignoffStatus xmlns="77fde15d-2397-485e-b73a-86b486d76ed9" xsi:nil="true"/>
-  </documentManagement>
-</p:properties>
+<TemplafySlideFormConfiguration><![CDATA[{"formFields":[],"formDataEntries":[]}]]></TemplafySlideFormConfiguration>
 </file>
 
 <file path=customXml/item15.xml><?xml version="1.0" encoding="utf-8"?>
@@ -28889,7 +28889,7 @@
 </file>
 
 <file path=customXml/item16.xml><?xml version="1.0" encoding="utf-8"?>
-<TemplafySlideTemplateConfiguration><![CDATA[{"documentContentValidatorConfiguration":{"enableDocumentContentValidator":false,"documentContentValidatorVersion":0},"elementsMetadata":[],"slideId":"637661701761217959","enableDocumentContentUpdater":true,"version":"1.9"}]]></TemplafySlideTemplateConfiguration>
+<TemplafySlideFormConfiguration><![CDATA[{"formFields":[],"formDataEntries":[]}]]></TemplafySlideFormConfiguration>
 </file>
 
 <file path=customXml/item17.xml><?xml version="1.0" encoding="utf-8"?>
@@ -28901,7 +28901,7 @@
 </file>
 
 <file path=customXml/item19.xml><?xml version="1.0" encoding="utf-8"?>
-<TemplafySlideFormConfiguration><![CDATA[{"formFields":[],"formDataEntries":[]}]]></TemplafySlideFormConfiguration>
+<TemplafySlideTemplateConfiguration><![CDATA[{"documentContentValidatorConfiguration":{"enableDocumentContentValidator":false,"documentContentValidatorVersion":0},"elementsMetadata":[],"slideId":"637661701761217959","enableDocumentContentUpdater":true,"version":"1.9"}]]></TemplafySlideTemplateConfiguration>
 </file>
 
 <file path=customXml/item2.xml><?xml version="1.0" encoding="utf-8"?>
@@ -28909,20 +28909,20 @@
 </file>
 
 <file path=customXml/item3.xml><?xml version="1.0" encoding="utf-8"?>
-<TemplafySlideFormConfiguration><![CDATA[{"formFields":[],"formDataEntries":[]}]]></TemplafySlideFormConfiguration>
+<TemplafySlideTemplateConfiguration><![CDATA[{"documentContentValidatorConfiguration":{"enableDocumentContentValidator":false,"documentContentValidatorVersion":0},"elementsMetadata":[],"slideId":"637661701761217959","enableDocumentContentUpdater":true,"version":"1.9"}]]></TemplafySlideTemplateConfiguration>
 </file>
 
 <file path=customXml/item4.xml><?xml version="1.0" encoding="utf-8"?>
-<TemplafySlideFormConfiguration><![CDATA[{"formFields":[],"formDataEntries":[]}]]></TemplafySlideFormConfiguration>
-</file>
-
-<file path=customXml/item5.xml><?xml version="1.0" encoding="utf-8"?>
 <?mso-contentType ?>
 <FormTemplates xmlns="http://schemas.microsoft.com/sharepoint/v3/contenttype/forms">
   <Display>DocumentLibraryForm</Display>
   <Edit>DocumentLibraryForm</Edit>
   <New>DocumentLibraryForm</New>
 </FormTemplates>
+</file>
+
+<file path=customXml/item5.xml><?xml version="1.0" encoding="utf-8"?>
+<TemplafySlideFormConfiguration><![CDATA[{"formFields":[],"formDataEntries":[]}]]></TemplafySlideFormConfiguration>
 </file>
 
 <file path=customXml/item6.xml><?xml version="1.0" encoding="utf-8"?>
@@ -28948,24 +28948,29 @@
 </file>
 
 <file path=customXml/itemProps10.xml><?xml version="1.0" encoding="utf-8"?>
-<ds:datastoreItem xmlns:ds="http://schemas.openxmlformats.org/officeDocument/2006/customXml" ds:itemID="{7FC3D2F9-C978-4F6C-9B95-BEE6303453CA}">
-  <ds:schemaRefs/>
+<ds:datastoreItem xmlns:ds="http://schemas.openxmlformats.org/officeDocument/2006/customXml" ds:itemID="{11300D8C-1DE0-4C9A-86BB-17269E5D3C65}">
+  <ds:schemaRefs>
+    <ds:schemaRef ds:uri="http://www.w3.org/XML/1998/namespace"/>
+    <ds:schemaRef ds:uri="http://purl.org/dc/elements/1.1/"/>
+    <ds:schemaRef ds:uri="http://schemas.microsoft.com/office/2006/documentManagement/types"/>
+    <ds:schemaRef ds:uri="http://schemas.microsoft.com/office/infopath/2007/PartnerControls"/>
+    <ds:schemaRef ds:uri="http://purl.org/dc/dcmitype/"/>
+    <ds:schemaRef ds:uri="http://purl.org/dc/terms/"/>
+    <ds:schemaRef ds:uri="bcef248d-09fe-4034-af42-7800fb0b4c07"/>
+    <ds:schemaRef ds:uri="http://schemas.openxmlformats.org/package/2006/metadata/core-properties"/>
+    <ds:schemaRef ds:uri="77fde15d-2397-485e-b73a-86b486d76ed9"/>
+    <ds:schemaRef ds:uri="http://schemas.microsoft.com/office/2006/metadata/properties"/>
+  </ds:schemaRefs>
 </ds:datastoreItem>
 </file>
 
 <file path=customXml/itemProps11.xml><?xml version="1.0" encoding="utf-8"?>
-<ds:datastoreItem xmlns:ds="http://schemas.openxmlformats.org/officeDocument/2006/customXml" ds:itemID="{3E86842F-01DA-4AAB-AA56-9F0B2F496397}">
+<ds:datastoreItem xmlns:ds="http://schemas.openxmlformats.org/officeDocument/2006/customXml" ds:itemID="{F1A1DCA2-547F-4B90-BE36-91B9AB619C93}">
   <ds:schemaRefs/>
 </ds:datastoreItem>
 </file>
 
 <file path=customXml/itemProps12.xml><?xml version="1.0" encoding="utf-8"?>
-<ds:datastoreItem xmlns:ds="http://schemas.openxmlformats.org/officeDocument/2006/customXml" ds:itemID="{6AE2E849-5528-4C05-B1E8-DB80DA8BD7F1}">
-  <ds:schemaRefs/>
-</ds:datastoreItem>
-</file>
-
-<file path=customXml/itemProps13.xml><?xml version="1.0" encoding="utf-8"?>
 <ds:datastoreItem xmlns:ds="http://schemas.openxmlformats.org/officeDocument/2006/customXml" ds:itemID="{7DEDA2BC-8275-4FBB-A28A-68D801E06E75}">
   <ds:schemaRefs>
     <ds:schemaRef ds:uri="http://schemas.microsoft.com/office/2006/metadata/contentType"/>
@@ -28984,31 +28989,26 @@
 </ds:datastoreItem>
 </file>
 
+<file path=customXml/itemProps13.xml><?xml version="1.0" encoding="utf-8"?>
+<ds:datastoreItem xmlns:ds="http://schemas.openxmlformats.org/officeDocument/2006/customXml" ds:itemID="{62D5B54B-6902-4F98-B23A-0118DB9EEDF4}">
+  <ds:schemaRefs/>
+</ds:datastoreItem>
+</file>
+
 <file path=customXml/itemProps14.xml><?xml version="1.0" encoding="utf-8"?>
-<ds:datastoreItem xmlns:ds="http://schemas.openxmlformats.org/officeDocument/2006/customXml" ds:itemID="{11300D8C-1DE0-4C9A-86BB-17269E5D3C65}">
-  <ds:schemaRefs>
-    <ds:schemaRef ds:uri="http://www.w3.org/XML/1998/namespace"/>
-    <ds:schemaRef ds:uri="http://purl.org/dc/elements/1.1/"/>
-    <ds:schemaRef ds:uri="http://schemas.microsoft.com/office/2006/documentManagement/types"/>
-    <ds:schemaRef ds:uri="http://schemas.microsoft.com/office/infopath/2007/PartnerControls"/>
-    <ds:schemaRef ds:uri="http://purl.org/dc/dcmitype/"/>
-    <ds:schemaRef ds:uri="http://purl.org/dc/terms/"/>
-    <ds:schemaRef ds:uri="bcef248d-09fe-4034-af42-7800fb0b4c07"/>
-    <ds:schemaRef ds:uri="http://schemas.openxmlformats.org/package/2006/metadata/core-properties"/>
-    <ds:schemaRef ds:uri="77fde15d-2397-485e-b73a-86b486d76ed9"/>
-    <ds:schemaRef ds:uri="http://schemas.microsoft.com/office/2006/metadata/properties"/>
-  </ds:schemaRefs>
+<ds:datastoreItem xmlns:ds="http://schemas.openxmlformats.org/officeDocument/2006/customXml" ds:itemID="{0B924887-3FAA-4B8E-815F-481860E4E6AF}">
+  <ds:schemaRefs/>
 </ds:datastoreItem>
 </file>
 
 <file path=customXml/itemProps15.xml><?xml version="1.0" encoding="utf-8"?>
-<ds:datastoreItem xmlns:ds="http://schemas.openxmlformats.org/officeDocument/2006/customXml" ds:itemID="{2A25ECD3-EA6C-4727-8DF2-5BDC9911D24C}">
+<ds:datastoreItem xmlns:ds="http://schemas.openxmlformats.org/officeDocument/2006/customXml" ds:itemID="{D81E0773-B1DF-4187-B86B-A4CC89F4FFA3}">
   <ds:schemaRefs/>
 </ds:datastoreItem>
 </file>
 
 <file path=customXml/itemProps16.xml><?xml version="1.0" encoding="utf-8"?>
-<ds:datastoreItem xmlns:ds="http://schemas.openxmlformats.org/officeDocument/2006/customXml" ds:itemID="{2E5DC17B-7CA5-47FA-BB10-51D0544A8F91}">
+<ds:datastoreItem xmlns:ds="http://schemas.openxmlformats.org/officeDocument/2006/customXml" ds:itemID="{6AE2E849-5528-4C05-B1E8-DB80DA8BD7F1}">
   <ds:schemaRefs/>
 </ds:datastoreItem>
 </file>
@@ -29020,36 +29020,30 @@
 </file>
 
 <file path=customXml/itemProps18.xml><?xml version="1.0" encoding="utf-8"?>
-<ds:datastoreItem xmlns:ds="http://schemas.openxmlformats.org/officeDocument/2006/customXml" ds:itemID="{62D5B54B-6902-4F98-B23A-0118DB9EEDF4}">
+<ds:datastoreItem xmlns:ds="http://schemas.openxmlformats.org/officeDocument/2006/customXml" ds:itemID="{772ABA4E-1FA2-4FC1-9A8A-C2C33BEC7DBE}">
   <ds:schemaRefs/>
 </ds:datastoreItem>
 </file>
 
 <file path=customXml/itemProps19.xml><?xml version="1.0" encoding="utf-8"?>
-<ds:datastoreItem xmlns:ds="http://schemas.openxmlformats.org/officeDocument/2006/customXml" ds:itemID="{A87FB1B0-D223-4CF6-8EC4-E3E816F1CDBE}">
+<ds:datastoreItem xmlns:ds="http://schemas.openxmlformats.org/officeDocument/2006/customXml" ds:itemID="{2E5DC17B-7CA5-47FA-BB10-51D0544A8F91}">
   <ds:schemaRefs/>
 </ds:datastoreItem>
 </file>
 
 <file path=customXml/itemProps2.xml><?xml version="1.0" encoding="utf-8"?>
-<ds:datastoreItem xmlns:ds="http://schemas.openxmlformats.org/officeDocument/2006/customXml" ds:itemID="{772ABA4E-1FA2-4FC1-9A8A-C2C33BEC7DBE}">
+<ds:datastoreItem xmlns:ds="http://schemas.openxmlformats.org/officeDocument/2006/customXml" ds:itemID="{D6A0B861-D97F-43C8-B3DF-13EB4CD7C21A}">
   <ds:schemaRefs/>
 </ds:datastoreItem>
 </file>
 
 <file path=customXml/itemProps3.xml><?xml version="1.0" encoding="utf-8"?>
-<ds:datastoreItem xmlns:ds="http://schemas.openxmlformats.org/officeDocument/2006/customXml" ds:itemID="{0B924887-3FAA-4B8E-815F-481860E4E6AF}">
+<ds:datastoreItem xmlns:ds="http://schemas.openxmlformats.org/officeDocument/2006/customXml" ds:itemID="{3E86842F-01DA-4AAB-AA56-9F0B2F496397}">
   <ds:schemaRefs/>
 </ds:datastoreItem>
 </file>
 
 <file path=customXml/itemProps4.xml><?xml version="1.0" encoding="utf-8"?>
-<ds:datastoreItem xmlns:ds="http://schemas.openxmlformats.org/officeDocument/2006/customXml" ds:itemID="{BA1C3E13-54CF-4EC8-BFFC-847950BB2BA6}">
-  <ds:schemaRefs/>
-</ds:datastoreItem>
-</file>
-
-<file path=customXml/itemProps5.xml><?xml version="1.0" encoding="utf-8"?>
 <ds:datastoreItem xmlns:ds="http://schemas.openxmlformats.org/officeDocument/2006/customXml" ds:itemID="{852C017A-4C71-4057-8850-0D69BC43C2C6}">
   <ds:schemaRefs>
     <ds:schemaRef ds:uri="http://schemas.microsoft.com/sharepoint/v3/contenttype/forms"/>
@@ -29057,20 +29051,26 @@
 </ds:datastoreItem>
 </file>
 
+<file path=customXml/itemProps5.xml><?xml version="1.0" encoding="utf-8"?>
+<ds:datastoreItem xmlns:ds="http://schemas.openxmlformats.org/officeDocument/2006/customXml" ds:itemID="{2A25ECD3-EA6C-4727-8DF2-5BDC9911D24C}">
+  <ds:schemaRefs/>
+</ds:datastoreItem>
+</file>
+
 <file path=customXml/itemProps6.xml><?xml version="1.0" encoding="utf-8"?>
-<ds:datastoreItem xmlns:ds="http://schemas.openxmlformats.org/officeDocument/2006/customXml" ds:itemID="{D6A0B861-D97F-43C8-B3DF-13EB4CD7C21A}">
+<ds:datastoreItem xmlns:ds="http://schemas.openxmlformats.org/officeDocument/2006/customXml" ds:itemID="{7FC3D2F9-C978-4F6C-9B95-BEE6303453CA}">
   <ds:schemaRefs/>
 </ds:datastoreItem>
 </file>
 
 <file path=customXml/itemProps7.xml><?xml version="1.0" encoding="utf-8"?>
-<ds:datastoreItem xmlns:ds="http://schemas.openxmlformats.org/officeDocument/2006/customXml" ds:itemID="{D81E0773-B1DF-4187-B86B-A4CC89F4FFA3}">
+<ds:datastoreItem xmlns:ds="http://schemas.openxmlformats.org/officeDocument/2006/customXml" ds:itemID="{A87FB1B0-D223-4CF6-8EC4-E3E816F1CDBE}">
   <ds:schemaRefs/>
 </ds:datastoreItem>
 </file>
 
 <file path=customXml/itemProps8.xml><?xml version="1.0" encoding="utf-8"?>
-<ds:datastoreItem xmlns:ds="http://schemas.openxmlformats.org/officeDocument/2006/customXml" ds:itemID="{F1A1DCA2-547F-4B90-BE36-91B9AB619C93}">
+<ds:datastoreItem xmlns:ds="http://schemas.openxmlformats.org/officeDocument/2006/customXml" ds:itemID="{BA1C3E13-54CF-4EC8-BFFC-847950BB2BA6}">
   <ds:schemaRefs/>
 </ds:datastoreItem>
 </file>

--- a/assets/ppt-templates/Template_CDR_analysis.pptx
+++ b/assets/ppt-templates/Template_CDR_analysis.pptx
@@ -213,7 +213,7 @@
           <a:p>
             <a:fld id="{8CE9DB08-0204-FF45-B45D-D96F9C704D75}" type="datetimeFigureOut">
               <a:rPr lang="es-ES" smtClean="0"/>
-              <a:t>27/9/26</a:t>
+              <a:t>28/9/26</a:t>
             </a:fld>
             <a:endParaRPr lang="es-ES"/>
           </a:p>
@@ -390,7 +390,7 @@
           <a:p>
             <a:fld id="{56B6DF60-6159-4558-8D07-00E18A77A544}" type="datetimeFigureOut">
               <a:rPr lang="en-US" smtClean="0"/>
-              <a:t>9/27/26</a:t>
+              <a:t>9/28/26</a:t>
             </a:fld>
             <a:endParaRPr lang="en-US"/>
           </a:p>
@@ -984,7 +984,7 @@
         </p:nvCxnSpPr>
         <p:spPr bwMode="auto">
           <a:xfrm>
-            <a:off x="479424" y="5287250"/>
+            <a:off x="548622" y="5277365"/>
             <a:ext cx="2259542" cy="0"/>
           </a:xfrm>
           <a:prstGeom prst="line">
@@ -24565,7 +24565,7 @@
           <a:p>
             <a:fld id="{EAB07A04-4D14-4FB4-ABC3-4FF79A2401A4}" type="datetimeFigureOut">
               <a:rPr lang="en-US" smtClean="0"/>
-              <a:t>9/27/26</a:t>
+              <a:t>9/28/26</a:t>
             </a:fld>
             <a:endParaRPr lang="en-US"/>
           </a:p>
@@ -24785,7 +24785,7 @@
           <a:p>
             <a:fld id="{E79BC93B-D740-4A24-9033-971140705A34}" type="datetimeFigureOut">
               <a:rPr lang="en-US" smtClean="0"/>
-              <a:t>9/27/26</a:t>
+              <a:t>9/28/26</a:t>
             </a:fld>
             <a:endParaRPr lang="en-US"/>
           </a:p>
@@ -28644,26 +28644,47 @@
 </file>
 
 <file path=customXml/item1.xml><?xml version="1.0" encoding="utf-8"?>
+<TemplafySlideTemplateConfiguration><![CDATA[{"documentContentValidatorConfiguration":{"enableDocumentContentValidator":false,"documentContentValidatorVersion":0},"elementsMetadata":[],"slideId":"637661701761217959","enableDocumentContentUpdater":true,"version":"1.9"}]]></TemplafySlideTemplateConfiguration>
+</file>
+
+<file path=customXml/item10.xml><?xml version="1.0" encoding="utf-8"?>
+<?mso-contentType ?>
+<FormTemplates xmlns="http://schemas.microsoft.com/sharepoint/v3/contenttype/forms">
+  <Display>DocumentLibraryForm</Display>
+  <Edit>DocumentLibraryForm</Edit>
+  <New>DocumentLibraryForm</New>
+</FormTemplates>
+</file>
+
+<file path=customXml/item11.xml><?xml version="1.0" encoding="utf-8"?>
+<TemplafySlideTemplateConfiguration><![CDATA[{"documentContentValidatorConfiguration":{"enableDocumentContentValidator":false,"documentContentValidatorVersion":0},"elementsMetadata":[],"slideId":"637661701761217959","enableDocumentContentUpdater":true,"version":"1.9"}]]></TemplafySlideTemplateConfiguration>
+</file>
+
+<file path=customXml/item12.xml><?xml version="1.0" encoding="utf-8"?>
 <TemplafySlideFormConfiguration><![CDATA[{"formFields":[],"formDataEntries":[]}]]></TemplafySlideFormConfiguration>
 </file>
 
-<file path=customXml/item10.xml><?xml version="1.0" encoding="utf-8"?>
-<p:properties xmlns:p="http://schemas.microsoft.com/office/2006/metadata/properties" xmlns:xsi="http://www.w3.org/2001/XMLSchema-instance" xmlns:pc="http://schemas.microsoft.com/office/infopath/2007/PartnerControls">
-  <documentManagement>
-    <TaxCatchAll xmlns="bcef248d-09fe-4034-af42-7800fb0b4c07" xsi:nil="true"/>
-    <lcf76f155ced4ddcb4097134ff3c332f xmlns="77fde15d-2397-485e-b73a-86b486d76ed9">
-      <Terms xmlns="http://schemas.microsoft.com/office/infopath/2007/PartnerControls"/>
-    </lcf76f155ced4ddcb4097134ff3c332f>
-    <_Flow_SignoffStatus xmlns="77fde15d-2397-485e-b73a-86b486d76ed9" xsi:nil="true"/>
-  </documentManagement>
-</p:properties>
-</file>
-
-<file path=customXml/item11.xml><?xml version="1.0" encoding="utf-8"?>
+<file path=customXml/item13.xml><?xml version="1.0" encoding="utf-8"?>
 <TemplafySlideFormConfiguration><![CDATA[{"formFields":[],"formDataEntries":[]}]]></TemplafySlideFormConfiguration>
 </file>
 
-<file path=customXml/item12.xml><?xml version="1.0" encoding="utf-8"?>
+<file path=customXml/item14.xml><?xml version="1.0" encoding="utf-8"?>
+<TemplafySlideTemplateConfiguration><![CDATA[{"documentContentValidatorConfiguration":{"enableDocumentContentValidator":false,"documentContentValidatorVersion":0},"elementsMetadata":[],"slideId":"637661701761217959","enableDocumentContentUpdater":true,"version":"1.9"}]]></TemplafySlideTemplateConfiguration>
+</file>
+
+<file path=customXml/item15.xml><?xml version="1.0" encoding="utf-8"?>
+<TemplafySlideTemplateConfiguration><![CDATA[{"documentContentValidatorConfiguration":{"enableDocumentContentValidator":false,"documentContentValidatorVersion":0},"elementsMetadata":[],"slideId":"637661701761217959","enableDocumentContentUpdater":true,"version":"1.9"}]]></TemplafySlideTemplateConfiguration>
+</file>
+
+<file path=customXml/item16.xml><?xml version="1.0" encoding="utf-8"?>
+<TemplafySlideTemplateConfiguration><![CDATA[{"documentContentValidatorConfiguration":{"enableDocumentContentValidator":false,"documentContentValidatorVersion":0},"elementsMetadata":[],"slideId":"637661701761217959","enableDocumentContentUpdater":true,"version":"1.9"}]]></TemplafySlideTemplateConfiguration>
+</file>
+
+<file path=customXml/item17.xml><?xml version="1.0" encoding="utf-8"?>
+<TemplafySlideFormConfiguration><![CDATA[{"formFields":[],"formDataEntries":[]}]]></TemplafySlideFormConfiguration>
+</file>
+
+<file path=customXml/item18.xml><?xml version="1.0" encoding="utf-8"?>
 <ct:contentTypeSchema xmlns:ct="http://schemas.microsoft.com/office/2006/metadata/contentType" xmlns:ma="http://schemas.microsoft.com/office/2006/metadata/properties/metaAttributes" ct:_="" ma:_="" ma:contentTypeName="Documento" ma:contentTypeID="0x01010093E8D57ECA48EA49A8079FF7BA4D8434" ma:contentTypeVersion="14" ma:contentTypeDescription="Crear nuevo documento." ma:contentTypeScope="" ma:versionID="63c20a81180abc05dcc77631795f2f6d">
   <xsd:schema xmlns:xsd="http://www.w3.org/2001/XMLSchema" xmlns:xs="http://www.w3.org/2001/XMLSchema" xmlns:p="http://schemas.microsoft.com/office/2006/metadata/properties" xmlns:ns2="77fde15d-2397-485e-b73a-86b486d76ed9" xmlns:ns3="bcef248d-09fe-4034-af42-7800fb0b4c07" targetNamespace="http://schemas.microsoft.com/office/2006/metadata/properties" ma:root="true" ma:fieldsID="c568fcd95f5d4d3e7cd3fb2956348a08" ns2:_="" ns3:_="">
     <xsd:import namespace="77fde15d-2397-485e-b73a-86b486d76ed9"/>
@@ -28876,49 +28897,20 @@
 </ct:contentTypeSchema>
 </file>
 
-<file path=customXml/item13.xml><?xml version="1.0" encoding="utf-8"?>
-<TemplafySlideTemplateConfiguration><![CDATA[{"documentContentValidatorConfiguration":{"enableDocumentContentValidator":false,"documentContentValidatorVersion":0},"elementsMetadata":[],"slideId":"637661701761217959","enableDocumentContentUpdater":true,"version":"1.9"}]]></TemplafySlideTemplateConfiguration>
-</file>
-
-<file path=customXml/item14.xml><?xml version="1.0" encoding="utf-8"?>
-<TemplafySlideFormConfiguration><![CDATA[{"formFields":[],"formDataEntries":[]}]]></TemplafySlideFormConfiguration>
-</file>
-
-<file path=customXml/item15.xml><?xml version="1.0" encoding="utf-8"?>
-<TemplafySlideFormConfiguration><![CDATA[{"formFields":[],"formDataEntries":[]}]]></TemplafySlideFormConfiguration>
-</file>
-
-<file path=customXml/item16.xml><?xml version="1.0" encoding="utf-8"?>
-<TemplafySlideFormConfiguration><![CDATA[{"formFields":[],"formDataEntries":[]}]]></TemplafySlideFormConfiguration>
-</file>
-
-<file path=customXml/item17.xml><?xml version="1.0" encoding="utf-8"?>
-<TemplafySlideTemplateConfiguration><![CDATA[{"documentContentValidatorConfiguration":{"enableDocumentContentValidator":false,"documentContentValidatorVersion":0},"elementsMetadata":[],"slideId":"637661701761217959","enableDocumentContentUpdater":true,"version":"1.9"}]]></TemplafySlideTemplateConfiguration>
-</file>
-
-<file path=customXml/item18.xml><?xml version="1.0" encoding="utf-8"?>
-<TemplafySlideTemplateConfiguration><![CDATA[{"documentContentValidatorConfiguration":{"enableDocumentContentValidator":false,"documentContentValidatorVersion":0},"elementsMetadata":[],"slideId":"637661701761217959","enableDocumentContentUpdater":true,"version":"1.9"}]]></TemplafySlideTemplateConfiguration>
-</file>
-
 <file path=customXml/item19.xml><?xml version="1.0" encoding="utf-8"?>
 <TemplafySlideTemplateConfiguration><![CDATA[{"documentContentValidatorConfiguration":{"enableDocumentContentValidator":false,"documentContentValidatorVersion":0},"elementsMetadata":[],"slideId":"637661701761217959","enableDocumentContentUpdater":true,"version":"1.9"}]]></TemplafySlideTemplateConfiguration>
 </file>
 
 <file path=customXml/item2.xml><?xml version="1.0" encoding="utf-8"?>
-<TemplafySlideTemplateConfiguration><![CDATA[{"documentContentValidatorConfiguration":{"enableDocumentContentValidator":false,"documentContentValidatorVersion":0},"elementsMetadata":[],"slideId":"637661701761217959","enableDocumentContentUpdater":true,"version":"1.9"}]]></TemplafySlideTemplateConfiguration>
+<TemplafySlideFormConfiguration><![CDATA[{"formFields":[],"formDataEntries":[]}]]></TemplafySlideFormConfiguration>
 </file>
 
 <file path=customXml/item3.xml><?xml version="1.0" encoding="utf-8"?>
-<TemplafySlideTemplateConfiguration><![CDATA[{"documentContentValidatorConfiguration":{"enableDocumentContentValidator":false,"documentContentValidatorVersion":0},"elementsMetadata":[],"slideId":"637661701761217959","enableDocumentContentUpdater":true,"version":"1.9"}]]></TemplafySlideTemplateConfiguration>
+<TemplafySlideFormConfiguration><![CDATA[{"formFields":[],"formDataEntries":[]}]]></TemplafySlideFormConfiguration>
 </file>
 
 <file path=customXml/item4.xml><?xml version="1.0" encoding="utf-8"?>
-<?mso-contentType ?>
-<FormTemplates xmlns="http://schemas.microsoft.com/sharepoint/v3/contenttype/forms">
-  <Display>DocumentLibraryForm</Display>
-  <Edit>DocumentLibraryForm</Edit>
-  <New>DocumentLibraryForm</New>
-</FormTemplates>
+<TemplafySlideTemplateConfiguration><![CDATA[{"documentContentValidatorConfiguration":{"enableDocumentContentValidator":false,"documentContentValidatorVersion":0},"elementsMetadata":[],"slideId":"637661701761217959","enableDocumentContentUpdater":true,"version":"1.9"}]]></TemplafySlideTemplateConfiguration>
 </file>
 
 <file path=customXml/item5.xml><?xml version="1.0" encoding="utf-8"?>
@@ -28926,7 +28918,7 @@
 </file>
 
 <file path=customXml/item6.xml><?xml version="1.0" encoding="utf-8"?>
-<TemplafySlideTemplateConfiguration><![CDATA[{"documentContentValidatorConfiguration":{"enableDocumentContentValidator":false,"documentContentValidatorVersion":0},"elementsMetadata":[],"slideId":"637661701761217959","enableDocumentContentUpdater":true,"version":"1.9"}]]></TemplafySlideTemplateConfiguration>
+<TemplafySlideFormConfiguration><![CDATA[{"formFields":[],"formDataEntries":[]}]]></TemplafySlideFormConfiguration>
 </file>
 
 <file path=customXml/item7.xml><?xml version="1.0" encoding="utf-8"?>
@@ -28934,7 +28926,15 @@
 </file>
 
 <file path=customXml/item8.xml><?xml version="1.0" encoding="utf-8"?>
-<TemplafySlideFormConfiguration><![CDATA[{"formFields":[],"formDataEntries":[]}]]></TemplafySlideFormConfiguration>
+<p:properties xmlns:p="http://schemas.microsoft.com/office/2006/metadata/properties" xmlns:xsi="http://www.w3.org/2001/XMLSchema-instance" xmlns:pc="http://schemas.microsoft.com/office/infopath/2007/PartnerControls">
+  <documentManagement>
+    <TaxCatchAll xmlns="bcef248d-09fe-4034-af42-7800fb0b4c07" xsi:nil="true"/>
+    <lcf76f155ced4ddcb4097134ff3c332f xmlns="77fde15d-2397-485e-b73a-86b486d76ed9">
+      <Terms xmlns="http://schemas.microsoft.com/office/infopath/2007/PartnerControls"/>
+    </lcf76f155ced4ddcb4097134ff3c332f>
+    <_Flow_SignoffStatus xmlns="77fde15d-2397-485e-b73a-86b486d76ed9" xsi:nil="true"/>
+  </documentManagement>
+</p:properties>
 </file>
 
 <file path=customXml/item9.xml><?xml version="1.0" encoding="utf-8"?>
@@ -28942,35 +28942,62 @@
 </file>
 
 <file path=customXml/itemProps1.xml><?xml version="1.0" encoding="utf-8"?>
-<ds:datastoreItem xmlns:ds="http://schemas.openxmlformats.org/officeDocument/2006/customXml" ds:itemID="{4F6381B7-CB4D-4A8E-AE8C-AD066D7465AA}">
+<ds:datastoreItem xmlns:ds="http://schemas.openxmlformats.org/officeDocument/2006/customXml" ds:itemID="{D6A0B861-D97F-43C8-B3DF-13EB4CD7C21A}">
   <ds:schemaRefs/>
 </ds:datastoreItem>
 </file>
 
 <file path=customXml/itemProps10.xml><?xml version="1.0" encoding="utf-8"?>
-<ds:datastoreItem xmlns:ds="http://schemas.openxmlformats.org/officeDocument/2006/customXml" ds:itemID="{11300D8C-1DE0-4C9A-86BB-17269E5D3C65}">
+<ds:datastoreItem xmlns:ds="http://schemas.openxmlformats.org/officeDocument/2006/customXml" ds:itemID="{852C017A-4C71-4057-8850-0D69BC43C2C6}">
   <ds:schemaRefs>
-    <ds:schemaRef ds:uri="http://www.w3.org/XML/1998/namespace"/>
-    <ds:schemaRef ds:uri="http://purl.org/dc/elements/1.1/"/>
-    <ds:schemaRef ds:uri="http://schemas.microsoft.com/office/2006/documentManagement/types"/>
-    <ds:schemaRef ds:uri="http://schemas.microsoft.com/office/infopath/2007/PartnerControls"/>
-    <ds:schemaRef ds:uri="http://purl.org/dc/dcmitype/"/>
-    <ds:schemaRef ds:uri="http://purl.org/dc/terms/"/>
-    <ds:schemaRef ds:uri="bcef248d-09fe-4034-af42-7800fb0b4c07"/>
-    <ds:schemaRef ds:uri="http://schemas.openxmlformats.org/package/2006/metadata/core-properties"/>
-    <ds:schemaRef ds:uri="77fde15d-2397-485e-b73a-86b486d76ed9"/>
-    <ds:schemaRef ds:uri="http://schemas.microsoft.com/office/2006/metadata/properties"/>
+    <ds:schemaRef ds:uri="http://schemas.microsoft.com/sharepoint/v3/contenttype/forms"/>
   </ds:schemaRefs>
 </ds:datastoreItem>
 </file>
 
 <file path=customXml/itemProps11.xml><?xml version="1.0" encoding="utf-8"?>
-<ds:datastoreItem xmlns:ds="http://schemas.openxmlformats.org/officeDocument/2006/customXml" ds:itemID="{F1A1DCA2-547F-4B90-BE36-91B9AB619C93}">
+<ds:datastoreItem xmlns:ds="http://schemas.openxmlformats.org/officeDocument/2006/customXml" ds:itemID="{F6CC31F5-13F1-4893-A918-27994DEE1E73}">
   <ds:schemaRefs/>
 </ds:datastoreItem>
 </file>
 
 <file path=customXml/itemProps12.xml><?xml version="1.0" encoding="utf-8"?>
+<ds:datastoreItem xmlns:ds="http://schemas.openxmlformats.org/officeDocument/2006/customXml" ds:itemID="{0B924887-3FAA-4B8E-815F-481860E4E6AF}">
+  <ds:schemaRefs/>
+</ds:datastoreItem>
+</file>
+
+<file path=customXml/itemProps13.xml><?xml version="1.0" encoding="utf-8"?>
+<ds:datastoreItem xmlns:ds="http://schemas.openxmlformats.org/officeDocument/2006/customXml" ds:itemID="{BA1C3E13-54CF-4EC8-BFFC-847950BB2BA6}">
+  <ds:schemaRefs/>
+</ds:datastoreItem>
+</file>
+
+<file path=customXml/itemProps14.xml><?xml version="1.0" encoding="utf-8"?>
+<ds:datastoreItem xmlns:ds="http://schemas.openxmlformats.org/officeDocument/2006/customXml" ds:itemID="{62D5B54B-6902-4F98-B23A-0118DB9EEDF4}">
+  <ds:schemaRefs/>
+</ds:datastoreItem>
+</file>
+
+<file path=customXml/itemProps15.xml><?xml version="1.0" encoding="utf-8"?>
+<ds:datastoreItem xmlns:ds="http://schemas.openxmlformats.org/officeDocument/2006/customXml" ds:itemID="{772ABA4E-1FA2-4FC1-9A8A-C2C33BEC7DBE}">
+  <ds:schemaRefs/>
+</ds:datastoreItem>
+</file>
+
+<file path=customXml/itemProps16.xml><?xml version="1.0" encoding="utf-8"?>
+<ds:datastoreItem xmlns:ds="http://schemas.openxmlformats.org/officeDocument/2006/customXml" ds:itemID="{3E86842F-01DA-4AAB-AA56-9F0B2F496397}">
+  <ds:schemaRefs/>
+</ds:datastoreItem>
+</file>
+
+<file path=customXml/itemProps17.xml><?xml version="1.0" encoding="utf-8"?>
+<ds:datastoreItem xmlns:ds="http://schemas.openxmlformats.org/officeDocument/2006/customXml" ds:itemID="{A87FB1B0-D223-4CF6-8EC4-E3E816F1CDBE}">
+  <ds:schemaRefs/>
+</ds:datastoreItem>
+</file>
+
+<file path=customXml/itemProps18.xml><?xml version="1.0" encoding="utf-8"?>
 <ds:datastoreItem xmlns:ds="http://schemas.openxmlformats.org/officeDocument/2006/customXml" ds:itemID="{7DEDA2BC-8275-4FBB-A28A-68D801E06E75}">
   <ds:schemaRefs>
     <ds:schemaRef ds:uri="http://schemas.microsoft.com/office/2006/metadata/contentType"/>
@@ -28989,94 +29016,67 @@
 </ds:datastoreItem>
 </file>
 
-<file path=customXml/itemProps13.xml><?xml version="1.0" encoding="utf-8"?>
-<ds:datastoreItem xmlns:ds="http://schemas.openxmlformats.org/officeDocument/2006/customXml" ds:itemID="{62D5B54B-6902-4F98-B23A-0118DB9EEDF4}">
+<file path=customXml/itemProps19.xml><?xml version="1.0" encoding="utf-8"?>
+<ds:datastoreItem xmlns:ds="http://schemas.openxmlformats.org/officeDocument/2006/customXml" ds:itemID="{ADCE6D4E-881A-4F21-8F46-6A112A7EEBE1}">
   <ds:schemaRefs/>
 </ds:datastoreItem>
 </file>
 
-<file path=customXml/itemProps14.xml><?xml version="1.0" encoding="utf-8"?>
-<ds:datastoreItem xmlns:ds="http://schemas.openxmlformats.org/officeDocument/2006/customXml" ds:itemID="{0B924887-3FAA-4B8E-815F-481860E4E6AF}">
+<file path=customXml/itemProps2.xml><?xml version="1.0" encoding="utf-8"?>
+<ds:datastoreItem xmlns:ds="http://schemas.openxmlformats.org/officeDocument/2006/customXml" ds:itemID="{6AE2E849-5528-4C05-B1E8-DB80DA8BD7F1}">
   <ds:schemaRefs/>
 </ds:datastoreItem>
 </file>
 
-<file path=customXml/itemProps15.xml><?xml version="1.0" encoding="utf-8"?>
+<file path=customXml/itemProps3.xml><?xml version="1.0" encoding="utf-8"?>
+<ds:datastoreItem xmlns:ds="http://schemas.openxmlformats.org/officeDocument/2006/customXml" ds:itemID="{4F6381B7-CB4D-4A8E-AE8C-AD066D7465AA}">
+  <ds:schemaRefs/>
+</ds:datastoreItem>
+</file>
+
+<file path=customXml/itemProps4.xml><?xml version="1.0" encoding="utf-8"?>
+<ds:datastoreItem xmlns:ds="http://schemas.openxmlformats.org/officeDocument/2006/customXml" ds:itemID="{7FC3D2F9-C978-4F6C-9B95-BEE6303453CA}">
+  <ds:schemaRefs/>
+</ds:datastoreItem>
+</file>
+
+<file path=customXml/itemProps5.xml><?xml version="1.0" encoding="utf-8"?>
+<ds:datastoreItem xmlns:ds="http://schemas.openxmlformats.org/officeDocument/2006/customXml" ds:itemID="{F1A1DCA2-547F-4B90-BE36-91B9AB619C93}">
+  <ds:schemaRefs/>
+</ds:datastoreItem>
+</file>
+
+<file path=customXml/itemProps6.xml><?xml version="1.0" encoding="utf-8"?>
+<ds:datastoreItem xmlns:ds="http://schemas.openxmlformats.org/officeDocument/2006/customXml" ds:itemID="{2A25ECD3-EA6C-4727-8DF2-5BDC9911D24C}">
+  <ds:schemaRefs/>
+</ds:datastoreItem>
+</file>
+
+<file path=customXml/itemProps7.xml><?xml version="1.0" encoding="utf-8"?>
 <ds:datastoreItem xmlns:ds="http://schemas.openxmlformats.org/officeDocument/2006/customXml" ds:itemID="{D81E0773-B1DF-4187-B86B-A4CC89F4FFA3}">
   <ds:schemaRefs/>
 </ds:datastoreItem>
 </file>
 
-<file path=customXml/itemProps16.xml><?xml version="1.0" encoding="utf-8"?>
-<ds:datastoreItem xmlns:ds="http://schemas.openxmlformats.org/officeDocument/2006/customXml" ds:itemID="{6AE2E849-5528-4C05-B1E8-DB80DA8BD7F1}">
-  <ds:schemaRefs/>
-</ds:datastoreItem>
-</file>
-
-<file path=customXml/itemProps17.xml><?xml version="1.0" encoding="utf-8"?>
-<ds:datastoreItem xmlns:ds="http://schemas.openxmlformats.org/officeDocument/2006/customXml" ds:itemID="{ADCE6D4E-881A-4F21-8F46-6A112A7EEBE1}">
-  <ds:schemaRefs/>
-</ds:datastoreItem>
-</file>
-
-<file path=customXml/itemProps18.xml><?xml version="1.0" encoding="utf-8"?>
-<ds:datastoreItem xmlns:ds="http://schemas.openxmlformats.org/officeDocument/2006/customXml" ds:itemID="{772ABA4E-1FA2-4FC1-9A8A-C2C33BEC7DBE}">
-  <ds:schemaRefs/>
-</ds:datastoreItem>
-</file>
-
-<file path=customXml/itemProps19.xml><?xml version="1.0" encoding="utf-8"?>
-<ds:datastoreItem xmlns:ds="http://schemas.openxmlformats.org/officeDocument/2006/customXml" ds:itemID="{2E5DC17B-7CA5-47FA-BB10-51D0544A8F91}">
-  <ds:schemaRefs/>
-</ds:datastoreItem>
-</file>
-
-<file path=customXml/itemProps2.xml><?xml version="1.0" encoding="utf-8"?>
-<ds:datastoreItem xmlns:ds="http://schemas.openxmlformats.org/officeDocument/2006/customXml" ds:itemID="{D6A0B861-D97F-43C8-B3DF-13EB4CD7C21A}">
-  <ds:schemaRefs/>
-</ds:datastoreItem>
-</file>
-
-<file path=customXml/itemProps3.xml><?xml version="1.0" encoding="utf-8"?>
-<ds:datastoreItem xmlns:ds="http://schemas.openxmlformats.org/officeDocument/2006/customXml" ds:itemID="{3E86842F-01DA-4AAB-AA56-9F0B2F496397}">
-  <ds:schemaRefs/>
-</ds:datastoreItem>
-</file>
-
-<file path=customXml/itemProps4.xml><?xml version="1.0" encoding="utf-8"?>
-<ds:datastoreItem xmlns:ds="http://schemas.openxmlformats.org/officeDocument/2006/customXml" ds:itemID="{852C017A-4C71-4057-8850-0D69BC43C2C6}">
+<file path=customXml/itemProps8.xml><?xml version="1.0" encoding="utf-8"?>
+<ds:datastoreItem xmlns:ds="http://schemas.openxmlformats.org/officeDocument/2006/customXml" ds:itemID="{11300D8C-1DE0-4C9A-86BB-17269E5D3C65}">
   <ds:schemaRefs>
-    <ds:schemaRef ds:uri="http://schemas.microsoft.com/sharepoint/v3/contenttype/forms"/>
+    <ds:schemaRef ds:uri="http://www.w3.org/XML/1998/namespace"/>
+    <ds:schemaRef ds:uri="http://purl.org/dc/elements/1.1/"/>
+    <ds:schemaRef ds:uri="http://schemas.microsoft.com/office/2006/documentManagement/types"/>
+    <ds:schemaRef ds:uri="http://schemas.microsoft.com/office/infopath/2007/PartnerControls"/>
+    <ds:schemaRef ds:uri="http://purl.org/dc/dcmitype/"/>
+    <ds:schemaRef ds:uri="http://purl.org/dc/terms/"/>
+    <ds:schemaRef ds:uri="bcef248d-09fe-4034-af42-7800fb0b4c07"/>
+    <ds:schemaRef ds:uri="http://schemas.openxmlformats.org/package/2006/metadata/core-properties"/>
+    <ds:schemaRef ds:uri="77fde15d-2397-485e-b73a-86b486d76ed9"/>
+    <ds:schemaRef ds:uri="http://schemas.microsoft.com/office/2006/metadata/properties"/>
   </ds:schemaRefs>
 </ds:datastoreItem>
 </file>
 
-<file path=customXml/itemProps5.xml><?xml version="1.0" encoding="utf-8"?>
-<ds:datastoreItem xmlns:ds="http://schemas.openxmlformats.org/officeDocument/2006/customXml" ds:itemID="{2A25ECD3-EA6C-4727-8DF2-5BDC9911D24C}">
-  <ds:schemaRefs/>
-</ds:datastoreItem>
-</file>
-
-<file path=customXml/itemProps6.xml><?xml version="1.0" encoding="utf-8"?>
-<ds:datastoreItem xmlns:ds="http://schemas.openxmlformats.org/officeDocument/2006/customXml" ds:itemID="{7FC3D2F9-C978-4F6C-9B95-BEE6303453CA}">
-  <ds:schemaRefs/>
-</ds:datastoreItem>
-</file>
-
-<file path=customXml/itemProps7.xml><?xml version="1.0" encoding="utf-8"?>
-<ds:datastoreItem xmlns:ds="http://schemas.openxmlformats.org/officeDocument/2006/customXml" ds:itemID="{A87FB1B0-D223-4CF6-8EC4-E3E816F1CDBE}">
-  <ds:schemaRefs/>
-</ds:datastoreItem>
-</file>
-
-<file path=customXml/itemProps8.xml><?xml version="1.0" encoding="utf-8"?>
-<ds:datastoreItem xmlns:ds="http://schemas.openxmlformats.org/officeDocument/2006/customXml" ds:itemID="{BA1C3E13-54CF-4EC8-BFFC-847950BB2BA6}">
-  <ds:schemaRefs/>
-</ds:datastoreItem>
-</file>
-
 <file path=customXml/itemProps9.xml><?xml version="1.0" encoding="utf-8"?>
-<ds:datastoreItem xmlns:ds="http://schemas.openxmlformats.org/officeDocument/2006/customXml" ds:itemID="{F6CC31F5-13F1-4893-A918-27994DEE1E73}">
+<ds:datastoreItem xmlns:ds="http://schemas.openxmlformats.org/officeDocument/2006/customXml" ds:itemID="{2E5DC17B-7CA5-47FA-BB10-51D0544A8F91}">
   <ds:schemaRefs/>
 </ds:datastoreItem>
 </file>
